--- a/ai-model-comparison/AI-Model-Comparison-Sep-2026.pptx
+++ b/ai-model-comparison/AI-Model-Comparison-Sep-2026.pptx
@@ -1909,7 +1909,35 @@
                 <a:ea typeface="Arial" pitchFamily="34" charset="-122"/>
                 <a:cs typeface="Arial" pitchFamily="34" charset="-120"/>
               </a:rPr>
-              <a:t>Terminal-Bench 4.0: 66.4% vs. 57.9%</a:t>
+              <a:t>Terminal-Bench 4.0: </a:t>
+            </a:r>
+            <a:pPr indent="0" marL="0">
+              <a:buNone/>
+            </a:pPr>
+            <a:r>
+              <a:rPr lang="en-US" sz="850" b="1" dirty="0">
+                <a:solidFill>
+                  <a:srgbClr val="041E42"/>
+                </a:solidFill>
+                <a:latin typeface="Arial" pitchFamily="34" charset="0"/>
+                <a:ea typeface="Arial" pitchFamily="34" charset="-122"/>
+                <a:cs typeface="Arial" pitchFamily="34" charset="-120"/>
+              </a:rPr>
+              <a:t>66.4%</a:t>
+            </a:r>
+            <a:pPr indent="0" marL="0">
+              <a:buNone/>
+            </a:pPr>
+            <a:r>
+              <a:rPr lang="en-US" sz="850" dirty="0">
+                <a:solidFill>
+                  <a:srgbClr val="1F2A37"/>
+                </a:solidFill>
+                <a:latin typeface="Arial" pitchFamily="34" charset="0"/>
+                <a:ea typeface="Arial" pitchFamily="34" charset="-122"/>
+                <a:cs typeface="Arial" pitchFamily="34" charset="-120"/>
+              </a:rPr>
+              <a:t> vs. 57.9%</a:t>
             </a:r>
             <a:pPr indent="0" marL="0">
               <a:buNone/>
@@ -1937,7 +1965,7 @@
                 <a:ea typeface="Arial" pitchFamily="34" charset="-122"/>
                 <a:cs typeface="Arial" pitchFamily="34" charset="-120"/>
               </a:rPr>
-              <a:t>; customer case: 680K-line migration in &lt;1 day</a:t>
+              <a:t>; customer case: 680K lines migrated in &lt;1 day</a:t>
             </a:r>
             <a:endParaRPr lang="en-US" sz="850" dirty="0"/>
           </a:p>
@@ -2211,7 +2239,63 @@
                 <a:ea typeface="Arial" pitchFamily="34" charset="-122"/>
                 <a:cs typeface="Arial" pitchFamily="34" charset="-120"/>
               </a:rPr>
-              <a:t>GDPval-AA v2.1: 1,846 vs. 1,542 Elo; Humanity's Last Exam: 67.7% vs. 57.2%</a:t>
+              <a:t>GDPval-AA v2.1: </a:t>
+            </a:r>
+            <a:pPr indent="0" marL="0">
+              <a:buNone/>
+            </a:pPr>
+            <a:r>
+              <a:rPr lang="en-US" sz="850" b="1" dirty="0">
+                <a:solidFill>
+                  <a:srgbClr val="041E42"/>
+                </a:solidFill>
+                <a:latin typeface="Arial" pitchFamily="34" charset="0"/>
+                <a:ea typeface="Arial" pitchFamily="34" charset="-122"/>
+                <a:cs typeface="Arial" pitchFamily="34" charset="-120"/>
+              </a:rPr>
+              <a:t>1,846</a:t>
+            </a:r>
+            <a:pPr indent="0" marL="0">
+              <a:buNone/>
+            </a:pPr>
+            <a:r>
+              <a:rPr lang="en-US" sz="850" dirty="0">
+                <a:solidFill>
+                  <a:srgbClr val="1F2A37"/>
+                </a:solidFill>
+                <a:latin typeface="Arial" pitchFamily="34" charset="0"/>
+                <a:ea typeface="Arial" pitchFamily="34" charset="-122"/>
+                <a:cs typeface="Arial" pitchFamily="34" charset="-120"/>
+              </a:rPr>
+              <a:t> vs. 1,542 Elo; Humanity's Last Exam: </a:t>
+            </a:r>
+            <a:pPr indent="0" marL="0">
+              <a:buNone/>
+            </a:pPr>
+            <a:r>
+              <a:rPr lang="en-US" sz="850" b="1" dirty="0">
+                <a:solidFill>
+                  <a:srgbClr val="041E42"/>
+                </a:solidFill>
+                <a:latin typeface="Arial" pitchFamily="34" charset="0"/>
+                <a:ea typeface="Arial" pitchFamily="34" charset="-122"/>
+                <a:cs typeface="Arial" pitchFamily="34" charset="-120"/>
+              </a:rPr>
+              <a:t>67.7%</a:t>
+            </a:r>
+            <a:pPr indent="0" marL="0">
+              <a:buNone/>
+            </a:pPr>
+            <a:r>
+              <a:rPr lang="en-US" sz="850" dirty="0">
+                <a:solidFill>
+                  <a:srgbClr val="1F2A37"/>
+                </a:solidFill>
+                <a:latin typeface="Arial" pitchFamily="34" charset="0"/>
+                <a:ea typeface="Arial" pitchFamily="34" charset="-122"/>
+                <a:cs typeface="Arial" pitchFamily="34" charset="-120"/>
+              </a:rPr>
+              <a:t> vs. 57.2%</a:t>
             </a:r>
             <a:pPr indent="0" marL="0">
               <a:buNone/>
@@ -2524,7 +2608,21 @@
                 <a:ea typeface="Arial" pitchFamily="34" charset="-122"/>
                 <a:cs typeface="Arial" pitchFamily="34" charset="-120"/>
               </a:rPr>
-              <a:t>; AutomationBench: 40.0% vs. 41.4%</a:t>
+              <a:t>; AutomationBench: 40.0% vs. </a:t>
+            </a:r>
+            <a:pPr indent="0" marL="0">
+              <a:buNone/>
+            </a:pPr>
+            <a:r>
+              <a:rPr lang="en-US" sz="850" b="1" dirty="0">
+                <a:solidFill>
+                  <a:srgbClr val="041E42"/>
+                </a:solidFill>
+                <a:latin typeface="Arial" pitchFamily="34" charset="0"/>
+                <a:ea typeface="Arial" pitchFamily="34" charset="-122"/>
+                <a:cs typeface="Arial" pitchFamily="34" charset="-120"/>
+              </a:rPr>
+              <a:t>41.4%</a:t>
             </a:r>
             <a:pPr indent="0" marL="0">
               <a:buNone/>
@@ -3086,7 +3184,21 @@
                 <a:ea typeface="Arial" pitchFamily="34" charset="-122"/>
                 <a:cs typeface="Arial" pitchFamily="34" charset="-120"/>
               </a:rPr>
-              <a:t>Terminal-Bench-Science: 58.7% vs. 64.6%</a:t>
+              <a:t>Terminal-Bench-Science: 58.7% vs. </a:t>
+            </a:r>
+            <a:pPr indent="0" marL="0">
+              <a:buNone/>
+            </a:pPr>
+            <a:r>
+              <a:rPr lang="en-US" sz="850" b="1" dirty="0">
+                <a:solidFill>
+                  <a:srgbClr val="041E42"/>
+                </a:solidFill>
+                <a:latin typeface="Arial" pitchFamily="34" charset="0"/>
+                <a:ea typeface="Arial" pitchFamily="34" charset="-122"/>
+                <a:cs typeface="Arial" pitchFamily="34" charset="-120"/>
+              </a:rPr>
+              <a:t>64.6%</a:t>
             </a:r>
             <a:pPr indent="0" marL="0">
               <a:buNone/>
@@ -3114,7 +3226,21 @@
                 <a:ea typeface="Arial" pitchFamily="34" charset="-122"/>
                 <a:cs typeface="Arial" pitchFamily="34" charset="-120"/>
               </a:rPr>
-              <a:t>; FrontierMath Tier 4: Astra 97.6%</a:t>
+              <a:t>; FrontierMath Tier 4: Astra </a:t>
+            </a:r>
+            <a:pPr indent="0" marL="0">
+              <a:buNone/>
+            </a:pPr>
+            <a:r>
+              <a:rPr lang="en-US" sz="850" b="1" dirty="0">
+                <a:solidFill>
+                  <a:srgbClr val="041E42"/>
+                </a:solidFill>
+                <a:latin typeface="Arial" pitchFamily="34" charset="0"/>
+                <a:ea typeface="Arial" pitchFamily="34" charset="-122"/>
+                <a:cs typeface="Arial" pitchFamily="34" charset="-120"/>
+              </a:rPr>
+              <a:t>97.6%</a:t>
             </a:r>
             <a:endParaRPr lang="en-US" sz="850" dirty="0"/>
           </a:p>
@@ -3388,7 +3514,35 @@
                 <a:ea typeface="Arial" pitchFamily="34" charset="-122"/>
                 <a:cs typeface="Arial" pitchFamily="34" charset="-120"/>
               </a:rPr>
-              <a:t>List price, $/1M tokens in/out: K3 $3/$15; Opus 5.5 $4/$20; Astra $10/$50</a:t>
+              <a:t>List price, $/1M tokens in/out: K3 </a:t>
+            </a:r>
+            <a:pPr indent="0" marL="0">
+              <a:buNone/>
+            </a:pPr>
+            <a:r>
+              <a:rPr lang="en-US" sz="850" b="1" dirty="0">
+                <a:solidFill>
+                  <a:srgbClr val="041E42"/>
+                </a:solidFill>
+                <a:latin typeface="Arial" pitchFamily="34" charset="0"/>
+                <a:ea typeface="Arial" pitchFamily="34" charset="-122"/>
+                <a:cs typeface="Arial" pitchFamily="34" charset="-120"/>
+              </a:rPr>
+              <a:t>$3/$15</a:t>
+            </a:r>
+            <a:pPr indent="0" marL="0">
+              <a:buNone/>
+            </a:pPr>
+            <a:r>
+              <a:rPr lang="en-US" sz="850" dirty="0">
+                <a:solidFill>
+                  <a:srgbClr val="1F2A37"/>
+                </a:solidFill>
+                <a:latin typeface="Arial" pitchFamily="34" charset="0"/>
+                <a:ea typeface="Arial" pitchFamily="34" charset="-122"/>
+                <a:cs typeface="Arial" pitchFamily="34" charset="-120"/>
+              </a:rPr>
+              <a:t>; Opus 5.5 $4/$20; Astra $10/$50</a:t>
             </a:r>
             <a:endParaRPr lang="en-US" sz="850" dirty="0"/>
           </a:p>
@@ -3648,7 +3802,7 @@
                 <a:ea typeface="Arial" pitchFamily="34" charset="-122"/>
                 <a:cs typeface="Arial" pitchFamily="34" charset="-120"/>
               </a:rPr>
-              <a:t>(4)</a:t>
+              <a:t>(3)</a:t>
             </a:r>
             <a:pPr indent="0" marL="0">
               <a:buNone/>
@@ -3762,7 +3916,7 @@
         <p:spPr>
           <a:xfrm>
             <a:off x="9326880" y="1627632"/>
-            <a:ext cx="817778" cy="182880"/>
+            <a:ext cx="817778" cy="347472"/>
           </a:xfrm>
           <a:prstGeom prst="rect">
             <a:avLst/>
@@ -3778,7 +3932,7 @@
               <a:buNone/>
             </a:pPr>
             <a:r>
-              <a:rPr lang="en-US" sz="900" b="1" dirty="0">
+              <a:rPr lang="en-US" sz="950" b="1" dirty="0">
                 <a:solidFill>
                   <a:srgbClr val="041E42"/>
                 </a:solidFill>
@@ -3788,7 +3942,24 @@
               </a:rPr>
               <a:t>Opus 5.5</a:t>
             </a:r>
-            <a:endParaRPr lang="en-US" sz="900" dirty="0"/>
+            <a:endParaRPr lang="en-US" sz="950" dirty="0"/>
+          </a:p>
+          <a:p>
+            <a:pPr algn="ctr" indent="0" marL="0">
+              <a:buNone/>
+            </a:pPr>
+            <a:r>
+              <a:rPr lang="en-US" sz="800" dirty="0">
+                <a:solidFill>
+                  <a:srgbClr val="5F6B7A"/>
+                </a:solidFill>
+                <a:latin typeface="Arial" pitchFamily="34" charset="0"/>
+                <a:ea typeface="Arial" pitchFamily="34" charset="-122"/>
+                <a:cs typeface="Arial" pitchFamily="34" charset="-120"/>
+              </a:rPr>
+              <a:t>22 Sep 2026</a:t>
+            </a:r>
+            <a:endParaRPr lang="en-US" sz="950" dirty="0"/>
           </a:p>
         </p:txBody>
       </p:sp>
@@ -3801,7 +3972,7 @@
         <p:spPr>
           <a:xfrm>
             <a:off x="10144658" y="1627632"/>
-            <a:ext cx="817778" cy="182880"/>
+            <a:ext cx="817778" cy="347472"/>
           </a:xfrm>
           <a:prstGeom prst="rect">
             <a:avLst/>
@@ -3817,7 +3988,7 @@
               <a:buNone/>
             </a:pPr>
             <a:r>
-              <a:rPr lang="en-US" sz="900" b="1" dirty="0">
+              <a:rPr lang="en-US" sz="950" b="1" dirty="0">
                 <a:solidFill>
                   <a:srgbClr val="041E42"/>
                 </a:solidFill>
@@ -3827,7 +3998,24 @@
               </a:rPr>
               <a:t>GPT-6 Astra</a:t>
             </a:r>
-            <a:endParaRPr lang="en-US" sz="900" dirty="0"/>
+            <a:endParaRPr lang="en-US" sz="950" dirty="0"/>
+          </a:p>
+          <a:p>
+            <a:pPr algn="ctr" indent="0" marL="0">
+              <a:buNone/>
+            </a:pPr>
+            <a:r>
+              <a:rPr lang="en-US" sz="800" dirty="0">
+                <a:solidFill>
+                  <a:srgbClr val="5F6B7A"/>
+                </a:solidFill>
+                <a:latin typeface="Arial" pitchFamily="34" charset="0"/>
+                <a:ea typeface="Arial" pitchFamily="34" charset="-122"/>
+                <a:cs typeface="Arial" pitchFamily="34" charset="-120"/>
+              </a:rPr>
+              <a:t>3 Sep 2026</a:t>
+            </a:r>
+            <a:endParaRPr lang="en-US" sz="950" dirty="0"/>
           </a:p>
         </p:txBody>
       </p:sp>
@@ -3840,7 +4028,7 @@
         <p:spPr>
           <a:xfrm>
             <a:off x="10962437" y="1627632"/>
-            <a:ext cx="817778" cy="182880"/>
+            <a:ext cx="817778" cy="347472"/>
           </a:xfrm>
           <a:prstGeom prst="rect">
             <a:avLst/>
@@ -3856,7 +4044,7 @@
               <a:buNone/>
             </a:pPr>
             <a:r>
-              <a:rPr lang="en-US" sz="900" b="1" dirty="0">
+              <a:rPr lang="en-US" sz="950" b="1" dirty="0">
                 <a:solidFill>
                   <a:srgbClr val="041E42"/>
                 </a:solidFill>
@@ -3866,19 +4054,92 @@
               </a:rPr>
               <a:t>Kimi K3</a:t>
             </a:r>
-            <a:endParaRPr lang="en-US" sz="900" dirty="0"/>
-          </a:p>
-        </p:txBody>
-      </p:sp>
-      <p:sp>
-        <p:nvSpPr>
-          <p:cNvPr id="90" name="Shape 88"/>
-          <p:cNvSpPr/>
-          <p:nvPr/>
-        </p:nvSpPr>
-        <p:spPr>
-          <a:xfrm>
-            <a:off x="8229600" y="1865376"/>
+            <a:endParaRPr lang="en-US" sz="950" dirty="0"/>
+          </a:p>
+          <a:p>
+            <a:pPr algn="ctr" indent="0" marL="0">
+              <a:buNone/>
+            </a:pPr>
+            <a:r>
+              <a:rPr lang="en-US" sz="800" dirty="0">
+                <a:solidFill>
+                  <a:srgbClr val="5F6B7A"/>
+                </a:solidFill>
+                <a:latin typeface="Arial" pitchFamily="34" charset="0"/>
+                <a:ea typeface="Arial" pitchFamily="34" charset="-122"/>
+                <a:cs typeface="Arial" pitchFamily="34" charset="-120"/>
+              </a:rPr>
+              <a:t>16 Jul 2026</a:t>
+            </a:r>
+            <a:endParaRPr lang="en-US" sz="950" dirty="0"/>
+          </a:p>
+        </p:txBody>
+      </p:sp>
+      <p:sp>
+        <p:nvSpPr>
+          <p:cNvPr id="90" name="Text 88"/>
+          <p:cNvSpPr txBox="1"/>
+          <p:nvPr/>
+        </p:nvSpPr>
+        <p:spPr>
+          <a:xfrm>
+            <a:off x="8229600" y="1627632"/>
+            <a:ext cx="1097280" cy="347472"/>
+          </a:xfrm>
+          <a:prstGeom prst="rect">
+            <a:avLst/>
+          </a:prstGeom>
+          <a:noFill/>
+          <a:ln/>
+        </p:spPr>
+        <p:txBody>
+          <a:bodyPr wrap="square" lIns="0" tIns="0" rIns="0" bIns="0" rtlCol="0" anchor="t"/>
+          <a:lstStyle/>
+          <a:p>
+            <a:pPr indent="0" marL="0">
+              <a:buNone/>
+            </a:pPr>
+            <a:r>
+              <a:rPr lang="en-US" sz="950" dirty="0">
+                <a:solidFill>
+                  <a:srgbClr val="5F6B7A"/>
+                </a:solidFill>
+                <a:latin typeface="Arial" pitchFamily="34" charset="0"/>
+                <a:ea typeface="Arial" pitchFamily="34" charset="-122"/>
+                <a:cs typeface="Arial" pitchFamily="34" charset="-120"/>
+              </a:rPr>
+              <a:t> </a:t>
+            </a:r>
+            <a:endParaRPr lang="en-US" sz="950" dirty="0"/>
+          </a:p>
+          <a:p>
+            <a:pPr indent="0" marL="0">
+              <a:buNone/>
+            </a:pPr>
+            <a:r>
+              <a:rPr lang="en-US" sz="800" dirty="0">
+                <a:solidFill>
+                  <a:srgbClr val="5F6B7A"/>
+                </a:solidFill>
+                <a:latin typeface="Arial" pitchFamily="34" charset="0"/>
+                <a:ea typeface="Arial" pitchFamily="34" charset="-122"/>
+                <a:cs typeface="Arial" pitchFamily="34" charset="-120"/>
+              </a:rPr>
+              <a:t>Released</a:t>
+            </a:r>
+            <a:endParaRPr lang="en-US" sz="950" dirty="0"/>
+          </a:p>
+        </p:txBody>
+      </p:sp>
+      <p:sp>
+        <p:nvSpPr>
+          <p:cNvPr id="91" name="Shape 89"/>
+          <p:cNvSpPr/>
+          <p:nvPr/>
+        </p:nvSpPr>
+        <p:spPr>
+          <a:xfrm>
+            <a:off x="8229600" y="2011680"/>
             <a:ext cx="3550615" cy="0"/>
           </a:xfrm>
           <a:prstGeom prst="line">
@@ -3895,14 +4156,14 @@
       </p:sp>
       <p:sp>
         <p:nvSpPr>
-          <p:cNvPr id="91" name="Text 89"/>
-          <p:cNvSpPr txBox="1"/>
-          <p:nvPr/>
-        </p:nvSpPr>
-        <p:spPr>
-          <a:xfrm>
-            <a:off x="8229600" y="1865376"/>
-            <a:ext cx="1097280" cy="269748"/>
+          <p:cNvPr id="92" name="Text 90"/>
+          <p:cNvSpPr txBox="1"/>
+          <p:nvPr/>
+        </p:nvSpPr>
+        <p:spPr>
+          <a:xfrm>
+            <a:off x="8229600" y="2011680"/>
+            <a:ext cx="1097280" cy="274320"/>
           </a:xfrm>
           <a:prstGeom prst="rect">
             <a:avLst/>
@@ -3926,7 +4187,7 @@
                 <a:ea typeface="Arial" pitchFamily="34" charset="-122"/>
                 <a:cs typeface="Arial" pitchFamily="34" charset="-120"/>
               </a:rPr>
-              <a:t>Released</a:t>
+              <a:t>Access</a:t>
             </a:r>
             <a:endParaRPr lang="en-US" sz="850" dirty="0"/>
           </a:p>
@@ -3934,14 +4195,14 @@
       </p:sp>
       <p:sp>
         <p:nvSpPr>
-          <p:cNvPr id="92" name="Text 90"/>
-          <p:cNvSpPr txBox="1"/>
-          <p:nvPr/>
-        </p:nvSpPr>
-        <p:spPr>
-          <a:xfrm>
-            <a:off x="9345168" y="1865376"/>
-            <a:ext cx="781202" cy="269748"/>
+          <p:cNvPr id="93" name="Text 91"/>
+          <p:cNvSpPr txBox="1"/>
+          <p:nvPr/>
+        </p:nvSpPr>
+        <p:spPr>
+          <a:xfrm>
+            <a:off x="9345168" y="2011680"/>
+            <a:ext cx="781202" cy="274320"/>
           </a:xfrm>
           <a:prstGeom prst="rect">
             <a:avLst/>
@@ -3965,7 +4226,7 @@
                 <a:ea typeface="Arial" pitchFamily="34" charset="-122"/>
                 <a:cs typeface="Arial" pitchFamily="34" charset="-120"/>
               </a:rPr>
-              <a:t>22 Sep 2026</a:t>
+              <a:t>API</a:t>
             </a:r>
             <a:endParaRPr lang="en-US" sz="850" dirty="0"/>
           </a:p>
@@ -3973,14 +4234,14 @@
       </p:sp>
       <p:sp>
         <p:nvSpPr>
-          <p:cNvPr id="93" name="Text 91"/>
-          <p:cNvSpPr txBox="1"/>
-          <p:nvPr/>
-        </p:nvSpPr>
-        <p:spPr>
-          <a:xfrm>
-            <a:off x="10162946" y="1865376"/>
-            <a:ext cx="781202" cy="269748"/>
+          <p:cNvPr id="94" name="Text 92"/>
+          <p:cNvSpPr txBox="1"/>
+          <p:nvPr/>
+        </p:nvSpPr>
+        <p:spPr>
+          <a:xfrm>
+            <a:off x="10162946" y="2011680"/>
+            <a:ext cx="781202" cy="274320"/>
           </a:xfrm>
           <a:prstGeom prst="rect">
             <a:avLst/>
@@ -4004,7 +4265,7 @@
                 <a:ea typeface="Arial" pitchFamily="34" charset="-122"/>
                 <a:cs typeface="Arial" pitchFamily="34" charset="-120"/>
               </a:rPr>
-              <a:t>3 Sep 2026</a:t>
+              <a:t>API (staged)</a:t>
             </a:r>
             <a:endParaRPr lang="en-US" sz="850" dirty="0"/>
           </a:p>
@@ -4012,14 +4273,14 @@
       </p:sp>
       <p:sp>
         <p:nvSpPr>
-          <p:cNvPr id="94" name="Text 92"/>
-          <p:cNvSpPr txBox="1"/>
-          <p:nvPr/>
-        </p:nvSpPr>
-        <p:spPr>
-          <a:xfrm>
-            <a:off x="10980725" y="1865376"/>
-            <a:ext cx="781202" cy="269748"/>
+          <p:cNvPr id="95" name="Text 93"/>
+          <p:cNvSpPr txBox="1"/>
+          <p:nvPr/>
+        </p:nvSpPr>
+        <p:spPr>
+          <a:xfrm>
+            <a:off x="10980725" y="2011680"/>
+            <a:ext cx="781202" cy="274320"/>
           </a:xfrm>
           <a:prstGeom prst="rect">
             <a:avLst/>
@@ -4043,7 +4304,21 @@
                 <a:ea typeface="Arial" pitchFamily="34" charset="-122"/>
                 <a:cs typeface="Arial" pitchFamily="34" charset="-120"/>
               </a:rPr>
-              <a:t>16 Jul 2026</a:t>
+              <a:t>Open weights</a:t>
+            </a:r>
+            <a:pPr algn="ctr" indent="0" marL="0">
+              <a:buNone/>
+            </a:pPr>
+            <a:r>
+              <a:rPr lang="en-US" sz="850" baseline="30000" dirty="0">
+                <a:solidFill>
+                  <a:srgbClr val="1F2A37"/>
+                </a:solidFill>
+                <a:latin typeface="Arial" pitchFamily="34" charset="0"/>
+                <a:ea typeface="Arial" pitchFamily="34" charset="-122"/>
+                <a:cs typeface="Arial" pitchFamily="34" charset="-120"/>
+              </a:rPr>
+              <a:t>(3)</a:t>
             </a:r>
             <a:endParaRPr lang="en-US" sz="850" dirty="0"/>
           </a:p>
@@ -4051,13 +4326,13 @@
       </p:sp>
       <p:sp>
         <p:nvSpPr>
-          <p:cNvPr id="95" name="Shape 93"/>
-          <p:cNvSpPr/>
-          <p:nvPr/>
-        </p:nvSpPr>
-        <p:spPr>
-          <a:xfrm>
-            <a:off x="8229600" y="2135124"/>
+          <p:cNvPr id="96" name="Shape 94"/>
+          <p:cNvSpPr/>
+          <p:nvPr/>
+        </p:nvSpPr>
+        <p:spPr>
+          <a:xfrm>
+            <a:off x="8229600" y="2286000"/>
             <a:ext cx="3550615" cy="0"/>
           </a:xfrm>
           <a:prstGeom prst="line">
@@ -4074,14 +4349,39 @@
       </p:sp>
       <p:sp>
         <p:nvSpPr>
-          <p:cNvPr id="96" name="Text 94"/>
-          <p:cNvSpPr txBox="1"/>
-          <p:nvPr/>
-        </p:nvSpPr>
-        <p:spPr>
-          <a:xfrm>
-            <a:off x="8229600" y="2135124"/>
-            <a:ext cx="1097280" cy="269748"/>
+          <p:cNvPr id="97" name="Shape 95"/>
+          <p:cNvSpPr/>
+          <p:nvPr/>
+        </p:nvSpPr>
+        <p:spPr>
+          <a:xfrm>
+            <a:off x="11053877" y="2322576"/>
+            <a:ext cx="634898" cy="201168"/>
+          </a:xfrm>
+          <a:prstGeom prst="rect">
+            <a:avLst/>
+          </a:prstGeom>
+          <a:solidFill>
+            <a:srgbClr val="EAF0F7"/>
+          </a:solidFill>
+          <a:ln w="12700">
+            <a:solidFill>
+              <a:srgbClr val="EAF0F7"/>
+            </a:solidFill>
+            <a:prstDash val="solid"/>
+          </a:ln>
+        </p:spPr>
+      </p:sp>
+      <p:sp>
+        <p:nvSpPr>
+          <p:cNvPr id="98" name="Text 96"/>
+          <p:cNvSpPr txBox="1"/>
+          <p:nvPr/>
+        </p:nvSpPr>
+        <p:spPr>
+          <a:xfrm>
+            <a:off x="8229600" y="2286000"/>
+            <a:ext cx="1097280" cy="274320"/>
           </a:xfrm>
           <a:prstGeom prst="rect">
             <a:avLst/>
@@ -4105,7 +4405,7 @@
                 <a:ea typeface="Arial" pitchFamily="34" charset="-122"/>
                 <a:cs typeface="Arial" pitchFamily="34" charset="-120"/>
               </a:rPr>
-              <a:t>Access</a:t>
+              <a:t>Input ($ / 1M tokens)</a:t>
             </a:r>
             <a:endParaRPr lang="en-US" sz="850" dirty="0"/>
           </a:p>
@@ -4113,14 +4413,14 @@
       </p:sp>
       <p:sp>
         <p:nvSpPr>
-          <p:cNvPr id="97" name="Text 95"/>
-          <p:cNvSpPr txBox="1"/>
-          <p:nvPr/>
-        </p:nvSpPr>
-        <p:spPr>
-          <a:xfrm>
-            <a:off x="9345168" y="2135124"/>
-            <a:ext cx="781202" cy="269748"/>
+          <p:cNvPr id="99" name="Text 97"/>
+          <p:cNvSpPr txBox="1"/>
+          <p:nvPr/>
+        </p:nvSpPr>
+        <p:spPr>
+          <a:xfrm>
+            <a:off x="9345168" y="2286000"/>
+            <a:ext cx="781202" cy="274320"/>
           </a:xfrm>
           <a:prstGeom prst="rect">
             <a:avLst/>
@@ -4144,7 +4444,7 @@
                 <a:ea typeface="Arial" pitchFamily="34" charset="-122"/>
                 <a:cs typeface="Arial" pitchFamily="34" charset="-120"/>
               </a:rPr>
-              <a:t>API</a:t>
+              <a:t>$4.00</a:t>
             </a:r>
             <a:endParaRPr lang="en-US" sz="850" dirty="0"/>
           </a:p>
@@ -4152,14 +4452,14 @@
       </p:sp>
       <p:sp>
         <p:nvSpPr>
-          <p:cNvPr id="98" name="Text 96"/>
-          <p:cNvSpPr txBox="1"/>
-          <p:nvPr/>
-        </p:nvSpPr>
-        <p:spPr>
-          <a:xfrm>
-            <a:off x="10162946" y="2135124"/>
-            <a:ext cx="781202" cy="269748"/>
+          <p:cNvPr id="100" name="Text 98"/>
+          <p:cNvSpPr txBox="1"/>
+          <p:nvPr/>
+        </p:nvSpPr>
+        <p:spPr>
+          <a:xfrm>
+            <a:off x="10162946" y="2286000"/>
+            <a:ext cx="781202" cy="274320"/>
           </a:xfrm>
           <a:prstGeom prst="rect">
             <a:avLst/>
@@ -4183,7 +4483,7 @@
                 <a:ea typeface="Arial" pitchFamily="34" charset="-122"/>
                 <a:cs typeface="Arial" pitchFamily="34" charset="-120"/>
               </a:rPr>
-              <a:t>API (staged)</a:t>
+              <a:t>$10.00</a:t>
             </a:r>
             <a:endParaRPr lang="en-US" sz="850" dirty="0"/>
           </a:p>
@@ -4191,14 +4491,14 @@
       </p:sp>
       <p:sp>
         <p:nvSpPr>
-          <p:cNvPr id="99" name="Text 97"/>
-          <p:cNvSpPr txBox="1"/>
-          <p:nvPr/>
-        </p:nvSpPr>
-        <p:spPr>
-          <a:xfrm>
-            <a:off x="10980725" y="2135124"/>
-            <a:ext cx="781202" cy="269748"/>
+          <p:cNvPr id="101" name="Text 99"/>
+          <p:cNvSpPr txBox="1"/>
+          <p:nvPr/>
+        </p:nvSpPr>
+        <p:spPr>
+          <a:xfrm>
+            <a:off x="10980725" y="2286000"/>
+            <a:ext cx="781202" cy="274320"/>
           </a:xfrm>
           <a:prstGeom prst="rect">
             <a:avLst/>
@@ -4214,28 +4514,971 @@
               <a:buNone/>
             </a:pPr>
             <a:r>
+              <a:rPr lang="en-US" sz="850" b="1" dirty="0">
+                <a:solidFill>
+                  <a:srgbClr val="041E42"/>
+                </a:solidFill>
+                <a:latin typeface="Arial" pitchFamily="34" charset="0"/>
+                <a:ea typeface="Arial" pitchFamily="34" charset="-122"/>
+                <a:cs typeface="Arial" pitchFamily="34" charset="-120"/>
+              </a:rPr>
+              <a:t>$3.00</a:t>
+            </a:r>
+            <a:endParaRPr lang="en-US" sz="850" dirty="0"/>
+          </a:p>
+        </p:txBody>
+      </p:sp>
+      <p:sp>
+        <p:nvSpPr>
+          <p:cNvPr id="102" name="Shape 100"/>
+          <p:cNvSpPr/>
+          <p:nvPr/>
+        </p:nvSpPr>
+        <p:spPr>
+          <a:xfrm>
+            <a:off x="8229600" y="2560320"/>
+            <a:ext cx="3550615" cy="0"/>
+          </a:xfrm>
+          <a:prstGeom prst="line">
+            <a:avLst/>
+          </a:prstGeom>
+          <a:noFill/>
+          <a:ln w="6350">
+            <a:solidFill>
+              <a:srgbClr val="E3E7EC"/>
+            </a:solidFill>
+            <a:prstDash val="solid"/>
+          </a:ln>
+        </p:spPr>
+      </p:sp>
+      <p:sp>
+        <p:nvSpPr>
+          <p:cNvPr id="103" name="Shape 101"/>
+          <p:cNvSpPr/>
+          <p:nvPr/>
+        </p:nvSpPr>
+        <p:spPr>
+          <a:xfrm>
+            <a:off x="11053877" y="2596896"/>
+            <a:ext cx="634898" cy="201168"/>
+          </a:xfrm>
+          <a:prstGeom prst="rect">
+            <a:avLst/>
+          </a:prstGeom>
+          <a:solidFill>
+            <a:srgbClr val="EAF0F7"/>
+          </a:solidFill>
+          <a:ln w="12700">
+            <a:solidFill>
+              <a:srgbClr val="EAF0F7"/>
+            </a:solidFill>
+            <a:prstDash val="solid"/>
+          </a:ln>
+        </p:spPr>
+      </p:sp>
+      <p:sp>
+        <p:nvSpPr>
+          <p:cNvPr id="104" name="Text 102"/>
+          <p:cNvSpPr txBox="1"/>
+          <p:nvPr/>
+        </p:nvSpPr>
+        <p:spPr>
+          <a:xfrm>
+            <a:off x="8229600" y="2560320"/>
+            <a:ext cx="1097280" cy="274320"/>
+          </a:xfrm>
+          <a:prstGeom prst="rect">
+            <a:avLst/>
+          </a:prstGeom>
+          <a:noFill/>
+          <a:ln/>
+        </p:spPr>
+        <p:txBody>
+          <a:bodyPr wrap="square" lIns="0" tIns="0" rIns="0" bIns="0" rtlCol="0" anchor="ctr"/>
+          <a:lstStyle/>
+          <a:p>
+            <a:pPr indent="0" marL="0">
+              <a:buNone/>
+            </a:pPr>
+            <a:r>
               <a:rPr lang="en-US" sz="850" dirty="0">
                 <a:solidFill>
+                  <a:srgbClr val="5F6B7A"/>
+                </a:solidFill>
+                <a:latin typeface="Arial" pitchFamily="34" charset="0"/>
+                <a:ea typeface="Arial" pitchFamily="34" charset="-122"/>
+                <a:cs typeface="Arial" pitchFamily="34" charset="-120"/>
+              </a:rPr>
+              <a:t>Output ($ / 1M tokens)</a:t>
+            </a:r>
+            <a:endParaRPr lang="en-US" sz="850" dirty="0"/>
+          </a:p>
+        </p:txBody>
+      </p:sp>
+      <p:sp>
+        <p:nvSpPr>
+          <p:cNvPr id="105" name="Text 103"/>
+          <p:cNvSpPr txBox="1"/>
+          <p:nvPr/>
+        </p:nvSpPr>
+        <p:spPr>
+          <a:xfrm>
+            <a:off x="9345168" y="2560320"/>
+            <a:ext cx="781202" cy="274320"/>
+          </a:xfrm>
+          <a:prstGeom prst="rect">
+            <a:avLst/>
+          </a:prstGeom>
+          <a:noFill/>
+          <a:ln/>
+        </p:spPr>
+        <p:txBody>
+          <a:bodyPr wrap="square" lIns="0" tIns="0" rIns="0" bIns="0" rtlCol="0" anchor="ctr"/>
+          <a:lstStyle/>
+          <a:p>
+            <a:pPr algn="ctr" indent="0" marL="0">
+              <a:buNone/>
+            </a:pPr>
+            <a:r>
+              <a:rPr lang="en-US" sz="850" dirty="0">
+                <a:solidFill>
                   <a:srgbClr val="1F2A37"/>
                 </a:solidFill>
                 <a:latin typeface="Arial" pitchFamily="34" charset="0"/>
                 <a:ea typeface="Arial" pitchFamily="34" charset="-122"/>
                 <a:cs typeface="Arial" pitchFamily="34" charset="-120"/>
               </a:rPr>
-              <a:t>Open weights</a:t>
-            </a:r>
+              <a:t>$20.00</a:t>
+            </a:r>
+            <a:endParaRPr lang="en-US" sz="850" dirty="0"/>
+          </a:p>
+        </p:txBody>
+      </p:sp>
+      <p:sp>
+        <p:nvSpPr>
+          <p:cNvPr id="106" name="Text 104"/>
+          <p:cNvSpPr txBox="1"/>
+          <p:nvPr/>
+        </p:nvSpPr>
+        <p:spPr>
+          <a:xfrm>
+            <a:off x="10162946" y="2560320"/>
+            <a:ext cx="781202" cy="274320"/>
+          </a:xfrm>
+          <a:prstGeom prst="rect">
+            <a:avLst/>
+          </a:prstGeom>
+          <a:noFill/>
+          <a:ln/>
+        </p:spPr>
+        <p:txBody>
+          <a:bodyPr wrap="square" lIns="0" tIns="0" rIns="0" bIns="0" rtlCol="0" anchor="ctr"/>
+          <a:lstStyle/>
+          <a:p>
             <a:pPr algn="ctr" indent="0" marL="0">
               <a:buNone/>
             </a:pPr>
             <a:r>
+              <a:rPr lang="en-US" sz="850" dirty="0">
+                <a:solidFill>
+                  <a:srgbClr val="1F2A37"/>
+                </a:solidFill>
+                <a:latin typeface="Arial" pitchFamily="34" charset="0"/>
+                <a:ea typeface="Arial" pitchFamily="34" charset="-122"/>
+                <a:cs typeface="Arial" pitchFamily="34" charset="-120"/>
+              </a:rPr>
+              <a:t>$50.00</a:t>
+            </a:r>
+            <a:endParaRPr lang="en-US" sz="850" dirty="0"/>
+          </a:p>
+        </p:txBody>
+      </p:sp>
+      <p:sp>
+        <p:nvSpPr>
+          <p:cNvPr id="107" name="Text 105"/>
+          <p:cNvSpPr txBox="1"/>
+          <p:nvPr/>
+        </p:nvSpPr>
+        <p:spPr>
+          <a:xfrm>
+            <a:off x="10980725" y="2560320"/>
+            <a:ext cx="781202" cy="274320"/>
+          </a:xfrm>
+          <a:prstGeom prst="rect">
+            <a:avLst/>
+          </a:prstGeom>
+          <a:noFill/>
+          <a:ln/>
+        </p:spPr>
+        <p:txBody>
+          <a:bodyPr wrap="square" lIns="0" tIns="0" rIns="0" bIns="0" rtlCol="0" anchor="ctr"/>
+          <a:lstStyle/>
+          <a:p>
+            <a:pPr algn="ctr" indent="0" marL="0">
+              <a:buNone/>
+            </a:pPr>
+            <a:r>
+              <a:rPr lang="en-US" sz="850" b="1" dirty="0">
+                <a:solidFill>
+                  <a:srgbClr val="041E42"/>
+                </a:solidFill>
+                <a:latin typeface="Arial" pitchFamily="34" charset="0"/>
+                <a:ea typeface="Arial" pitchFamily="34" charset="-122"/>
+                <a:cs typeface="Arial" pitchFamily="34" charset="-120"/>
+              </a:rPr>
+              <a:t>$15.00</a:t>
+            </a:r>
+            <a:endParaRPr lang="en-US" sz="850" dirty="0"/>
+          </a:p>
+        </p:txBody>
+      </p:sp>
+      <p:sp>
+        <p:nvSpPr>
+          <p:cNvPr id="108" name="Shape 106"/>
+          <p:cNvSpPr/>
+          <p:nvPr/>
+        </p:nvSpPr>
+        <p:spPr>
+          <a:xfrm>
+            <a:off x="8229600" y="2834640"/>
+            <a:ext cx="3550615" cy="0"/>
+          </a:xfrm>
+          <a:prstGeom prst="line">
+            <a:avLst/>
+          </a:prstGeom>
+          <a:noFill/>
+          <a:ln w="6350">
+            <a:solidFill>
+              <a:srgbClr val="E3E7EC"/>
+            </a:solidFill>
+            <a:prstDash val="solid"/>
+          </a:ln>
+        </p:spPr>
+      </p:sp>
+      <p:sp>
+        <p:nvSpPr>
+          <p:cNvPr id="109" name="Shape 107"/>
+          <p:cNvSpPr/>
+          <p:nvPr/>
+        </p:nvSpPr>
+        <p:spPr>
+          <a:xfrm>
+            <a:off x="9418320" y="2871216"/>
+            <a:ext cx="634898" cy="201168"/>
+          </a:xfrm>
+          <a:prstGeom prst="rect">
+            <a:avLst/>
+          </a:prstGeom>
+          <a:solidFill>
+            <a:srgbClr val="EAF0F7"/>
+          </a:solidFill>
+          <a:ln w="12700">
+            <a:solidFill>
+              <a:srgbClr val="EAF0F7"/>
+            </a:solidFill>
+            <a:prstDash val="solid"/>
+          </a:ln>
+        </p:spPr>
+      </p:sp>
+      <p:sp>
+        <p:nvSpPr>
+          <p:cNvPr id="110" name="Text 108"/>
+          <p:cNvSpPr txBox="1"/>
+          <p:nvPr/>
+        </p:nvSpPr>
+        <p:spPr>
+          <a:xfrm>
+            <a:off x="8229600" y="2834640"/>
+            <a:ext cx="1097280" cy="274320"/>
+          </a:xfrm>
+          <a:prstGeom prst="rect">
+            <a:avLst/>
+          </a:prstGeom>
+          <a:noFill/>
+          <a:ln/>
+        </p:spPr>
+        <p:txBody>
+          <a:bodyPr wrap="square" lIns="0" tIns="0" rIns="0" bIns="0" rtlCol="0" anchor="ctr"/>
+          <a:lstStyle/>
+          <a:p>
+            <a:pPr indent="0" marL="0">
+              <a:buNone/>
+            </a:pPr>
+            <a:r>
+              <a:rPr lang="en-US" sz="850" dirty="0">
+                <a:solidFill>
+                  <a:srgbClr val="5F6B7A"/>
+                </a:solidFill>
+                <a:latin typeface="Arial" pitchFamily="34" charset="0"/>
+                <a:ea typeface="Arial" pitchFamily="34" charset="-122"/>
+                <a:cs typeface="Arial" pitchFamily="34" charset="-120"/>
+              </a:rPr>
+              <a:t>Cached input ($ / 1M)</a:t>
+            </a:r>
+            <a:endParaRPr lang="en-US" sz="850" dirty="0"/>
+          </a:p>
+        </p:txBody>
+      </p:sp>
+      <p:sp>
+        <p:nvSpPr>
+          <p:cNvPr id="111" name="Text 109"/>
+          <p:cNvSpPr txBox="1"/>
+          <p:nvPr/>
+        </p:nvSpPr>
+        <p:spPr>
+          <a:xfrm>
+            <a:off x="9345168" y="2834640"/>
+            <a:ext cx="781202" cy="274320"/>
+          </a:xfrm>
+          <a:prstGeom prst="rect">
+            <a:avLst/>
+          </a:prstGeom>
+          <a:noFill/>
+          <a:ln/>
+        </p:spPr>
+        <p:txBody>
+          <a:bodyPr wrap="square" lIns="0" tIns="0" rIns="0" bIns="0" rtlCol="0" anchor="ctr"/>
+          <a:lstStyle/>
+          <a:p>
+            <a:pPr algn="ctr" indent="0" marL="0">
+              <a:buNone/>
+            </a:pPr>
+            <a:r>
+              <a:rPr lang="en-US" sz="850" b="1" dirty="0">
+                <a:solidFill>
+                  <a:srgbClr val="041E42"/>
+                </a:solidFill>
+                <a:latin typeface="Arial" pitchFamily="34" charset="0"/>
+                <a:ea typeface="Arial" pitchFamily="34" charset="-122"/>
+                <a:cs typeface="Arial" pitchFamily="34" charset="-120"/>
+              </a:rPr>
+              <a:t>$0.20</a:t>
+            </a:r>
+            <a:endParaRPr lang="en-US" sz="850" dirty="0"/>
+          </a:p>
+        </p:txBody>
+      </p:sp>
+      <p:sp>
+        <p:nvSpPr>
+          <p:cNvPr id="112" name="Text 110"/>
+          <p:cNvSpPr txBox="1"/>
+          <p:nvPr/>
+        </p:nvSpPr>
+        <p:spPr>
+          <a:xfrm>
+            <a:off x="10162946" y="2834640"/>
+            <a:ext cx="781202" cy="274320"/>
+          </a:xfrm>
+          <a:prstGeom prst="rect">
+            <a:avLst/>
+          </a:prstGeom>
+          <a:noFill/>
+          <a:ln/>
+        </p:spPr>
+        <p:txBody>
+          <a:bodyPr wrap="square" lIns="0" tIns="0" rIns="0" bIns="0" rtlCol="0" anchor="ctr"/>
+          <a:lstStyle/>
+          <a:p>
+            <a:pPr algn="ctr" indent="0" marL="0">
+              <a:buNone/>
+            </a:pPr>
+            <a:r>
+              <a:rPr lang="en-US" sz="850" dirty="0">
+                <a:solidFill>
+                  <a:srgbClr val="1F2A37"/>
+                </a:solidFill>
+                <a:latin typeface="Arial" pitchFamily="34" charset="0"/>
+                <a:ea typeface="Arial" pitchFamily="34" charset="-122"/>
+                <a:cs typeface="Arial" pitchFamily="34" charset="-120"/>
+              </a:rPr>
+              <a:t>$1.00</a:t>
+            </a:r>
+            <a:endParaRPr lang="en-US" sz="850" dirty="0"/>
+          </a:p>
+        </p:txBody>
+      </p:sp>
+      <p:sp>
+        <p:nvSpPr>
+          <p:cNvPr id="113" name="Text 111"/>
+          <p:cNvSpPr txBox="1"/>
+          <p:nvPr/>
+        </p:nvSpPr>
+        <p:spPr>
+          <a:xfrm>
+            <a:off x="10980725" y="2834640"/>
+            <a:ext cx="781202" cy="274320"/>
+          </a:xfrm>
+          <a:prstGeom prst="rect">
+            <a:avLst/>
+          </a:prstGeom>
+          <a:noFill/>
+          <a:ln/>
+        </p:spPr>
+        <p:txBody>
+          <a:bodyPr wrap="square" lIns="0" tIns="0" rIns="0" bIns="0" rtlCol="0" anchor="ctr"/>
+          <a:lstStyle/>
+          <a:p>
+            <a:pPr algn="ctr" indent="0" marL="0">
+              <a:buNone/>
+            </a:pPr>
+            <a:r>
+              <a:rPr lang="en-US" sz="850" dirty="0">
+                <a:solidFill>
+                  <a:srgbClr val="1F2A37"/>
+                </a:solidFill>
+                <a:latin typeface="Arial" pitchFamily="34" charset="0"/>
+                <a:ea typeface="Arial" pitchFamily="34" charset="-122"/>
+                <a:cs typeface="Arial" pitchFamily="34" charset="-120"/>
+              </a:rPr>
+              <a:t>$0.30</a:t>
+            </a:r>
+            <a:endParaRPr lang="en-US" sz="850" dirty="0"/>
+          </a:p>
+        </p:txBody>
+      </p:sp>
+      <p:sp>
+        <p:nvSpPr>
+          <p:cNvPr id="114" name="Shape 112"/>
+          <p:cNvSpPr/>
+          <p:nvPr/>
+        </p:nvSpPr>
+        <p:spPr>
+          <a:xfrm>
+            <a:off x="8229600" y="3108960"/>
+            <a:ext cx="3550615" cy="0"/>
+          </a:xfrm>
+          <a:prstGeom prst="line">
+            <a:avLst/>
+          </a:prstGeom>
+          <a:noFill/>
+          <a:ln w="6350">
+            <a:solidFill>
+              <a:srgbClr val="E3E7EC"/>
+            </a:solidFill>
+            <a:prstDash val="solid"/>
+          </a:ln>
+        </p:spPr>
+      </p:sp>
+      <p:sp>
+        <p:nvSpPr>
+          <p:cNvPr id="115" name="Shape 113"/>
+          <p:cNvSpPr/>
+          <p:nvPr/>
+        </p:nvSpPr>
+        <p:spPr>
+          <a:xfrm>
+            <a:off x="10236098" y="3145536"/>
+            <a:ext cx="634898" cy="201168"/>
+          </a:xfrm>
+          <a:prstGeom prst="rect">
+            <a:avLst/>
+          </a:prstGeom>
+          <a:solidFill>
+            <a:srgbClr val="EAF0F7"/>
+          </a:solidFill>
+          <a:ln w="12700">
+            <a:solidFill>
+              <a:srgbClr val="EAF0F7"/>
+            </a:solidFill>
+            <a:prstDash val="solid"/>
+          </a:ln>
+        </p:spPr>
+      </p:sp>
+      <p:sp>
+        <p:nvSpPr>
+          <p:cNvPr id="116" name="Text 114"/>
+          <p:cNvSpPr txBox="1"/>
+          <p:nvPr/>
+        </p:nvSpPr>
+        <p:spPr>
+          <a:xfrm>
+            <a:off x="8229600" y="3108960"/>
+            <a:ext cx="1097280" cy="274320"/>
+          </a:xfrm>
+          <a:prstGeom prst="rect">
+            <a:avLst/>
+          </a:prstGeom>
+          <a:noFill/>
+          <a:ln/>
+        </p:spPr>
+        <p:txBody>
+          <a:bodyPr wrap="square" lIns="0" tIns="0" rIns="0" bIns="0" rtlCol="0" anchor="ctr"/>
+          <a:lstStyle/>
+          <a:p>
+            <a:pPr indent="0" marL="0">
+              <a:buNone/>
+            </a:pPr>
+            <a:r>
+              <a:rPr lang="en-US" sz="850" dirty="0">
+                <a:solidFill>
+                  <a:srgbClr val="5F6B7A"/>
+                </a:solidFill>
+                <a:latin typeface="Arial" pitchFamily="34" charset="0"/>
+                <a:ea typeface="Arial" pitchFamily="34" charset="-122"/>
+                <a:cs typeface="Arial" pitchFamily="34" charset="-120"/>
+              </a:rPr>
+              <a:t>Context (tokens)</a:t>
+            </a:r>
+            <a:endParaRPr lang="en-US" sz="850" dirty="0"/>
+          </a:p>
+        </p:txBody>
+      </p:sp>
+      <p:sp>
+        <p:nvSpPr>
+          <p:cNvPr id="117" name="Text 115"/>
+          <p:cNvSpPr txBox="1"/>
+          <p:nvPr/>
+        </p:nvSpPr>
+        <p:spPr>
+          <a:xfrm>
+            <a:off x="9345168" y="3108960"/>
+            <a:ext cx="781202" cy="274320"/>
+          </a:xfrm>
+          <a:prstGeom prst="rect">
+            <a:avLst/>
+          </a:prstGeom>
+          <a:noFill/>
+          <a:ln/>
+        </p:spPr>
+        <p:txBody>
+          <a:bodyPr wrap="square" lIns="0" tIns="0" rIns="0" bIns="0" rtlCol="0" anchor="ctr"/>
+          <a:lstStyle/>
+          <a:p>
+            <a:pPr algn="ctr" indent="0" marL="0">
+              <a:buNone/>
+            </a:pPr>
+            <a:r>
+              <a:rPr lang="en-US" sz="850" dirty="0">
+                <a:solidFill>
+                  <a:srgbClr val="1F2A37"/>
+                </a:solidFill>
+                <a:latin typeface="Arial" pitchFamily="34" charset="0"/>
+                <a:ea typeface="Arial" pitchFamily="34" charset="-122"/>
+                <a:cs typeface="Arial" pitchFamily="34" charset="-120"/>
+              </a:rPr>
+              <a:t>1.0M</a:t>
+            </a:r>
+            <a:endParaRPr lang="en-US" sz="850" dirty="0"/>
+          </a:p>
+        </p:txBody>
+      </p:sp>
+      <p:sp>
+        <p:nvSpPr>
+          <p:cNvPr id="118" name="Text 116"/>
+          <p:cNvSpPr txBox="1"/>
+          <p:nvPr/>
+        </p:nvSpPr>
+        <p:spPr>
+          <a:xfrm>
+            <a:off x="10162946" y="3108960"/>
+            <a:ext cx="781202" cy="274320"/>
+          </a:xfrm>
+          <a:prstGeom prst="rect">
+            <a:avLst/>
+          </a:prstGeom>
+          <a:noFill/>
+          <a:ln/>
+        </p:spPr>
+        <p:txBody>
+          <a:bodyPr wrap="square" lIns="0" tIns="0" rIns="0" bIns="0" rtlCol="0" anchor="ctr"/>
+          <a:lstStyle/>
+          <a:p>
+            <a:pPr algn="ctr" indent="0" marL="0">
+              <a:buNone/>
+            </a:pPr>
+            <a:r>
+              <a:rPr lang="en-US" sz="850" b="1" dirty="0">
+                <a:solidFill>
+                  <a:srgbClr val="041E42"/>
+                </a:solidFill>
+                <a:latin typeface="Arial" pitchFamily="34" charset="0"/>
+                <a:ea typeface="Arial" pitchFamily="34" charset="-122"/>
+                <a:cs typeface="Arial" pitchFamily="34" charset="-120"/>
+              </a:rPr>
+              <a:t>1.05M</a:t>
+            </a:r>
+            <a:endParaRPr lang="en-US" sz="850" dirty="0"/>
+          </a:p>
+        </p:txBody>
+      </p:sp>
+      <p:sp>
+        <p:nvSpPr>
+          <p:cNvPr id="119" name="Text 117"/>
+          <p:cNvSpPr txBox="1"/>
+          <p:nvPr/>
+        </p:nvSpPr>
+        <p:spPr>
+          <a:xfrm>
+            <a:off x="10980725" y="3108960"/>
+            <a:ext cx="781202" cy="274320"/>
+          </a:xfrm>
+          <a:prstGeom prst="rect">
+            <a:avLst/>
+          </a:prstGeom>
+          <a:noFill/>
+          <a:ln/>
+        </p:spPr>
+        <p:txBody>
+          <a:bodyPr wrap="square" lIns="0" tIns="0" rIns="0" bIns="0" rtlCol="0" anchor="ctr"/>
+          <a:lstStyle/>
+          <a:p>
+            <a:pPr algn="ctr" indent="0" marL="0">
+              <a:buNone/>
+            </a:pPr>
+            <a:r>
+              <a:rPr lang="en-US" sz="850" dirty="0">
+                <a:solidFill>
+                  <a:srgbClr val="1F2A37"/>
+                </a:solidFill>
+                <a:latin typeface="Arial" pitchFamily="34" charset="0"/>
+                <a:ea typeface="Arial" pitchFamily="34" charset="-122"/>
+                <a:cs typeface="Arial" pitchFamily="34" charset="-120"/>
+              </a:rPr>
+              <a:t>1.0M</a:t>
+            </a:r>
+            <a:endParaRPr lang="en-US" sz="850" dirty="0"/>
+          </a:p>
+        </p:txBody>
+      </p:sp>
+      <p:sp>
+        <p:nvSpPr>
+          <p:cNvPr id="120" name="Shape 118"/>
+          <p:cNvSpPr/>
+          <p:nvPr/>
+        </p:nvSpPr>
+        <p:spPr>
+          <a:xfrm>
+            <a:off x="8229600" y="3383280"/>
+            <a:ext cx="3550615" cy="0"/>
+          </a:xfrm>
+          <a:prstGeom prst="line">
+            <a:avLst/>
+          </a:prstGeom>
+          <a:noFill/>
+          <a:ln w="6350">
+            <a:solidFill>
+              <a:srgbClr val="E3E7EC"/>
+            </a:solidFill>
+            <a:prstDash val="solid"/>
+          </a:ln>
+        </p:spPr>
+      </p:sp>
+      <p:sp>
+        <p:nvSpPr>
+          <p:cNvPr id="121" name="Text 119"/>
+          <p:cNvSpPr txBox="1"/>
+          <p:nvPr/>
+        </p:nvSpPr>
+        <p:spPr>
+          <a:xfrm>
+            <a:off x="8229600" y="3383280"/>
+            <a:ext cx="1097280" cy="548640"/>
+          </a:xfrm>
+          <a:prstGeom prst="rect">
+            <a:avLst/>
+          </a:prstGeom>
+          <a:noFill/>
+          <a:ln/>
+        </p:spPr>
+        <p:txBody>
+          <a:bodyPr wrap="square" lIns="0" tIns="0" rIns="0" bIns="0" rtlCol="0" anchor="ctr"/>
+          <a:lstStyle/>
+          <a:p>
+            <a:pPr indent="0" marL="0">
+              <a:buNone/>
+            </a:pPr>
+            <a:r>
+              <a:rPr lang="en-US" sz="850" dirty="0">
+                <a:solidFill>
+                  <a:srgbClr val="5F6B7A"/>
+                </a:solidFill>
+                <a:latin typeface="Arial" pitchFamily="34" charset="0"/>
+                <a:ea typeface="Arial" pitchFamily="34" charset="-122"/>
+                <a:cs typeface="Arial" pitchFamily="34" charset="-120"/>
+              </a:rPr>
+              <a:t>Parameters</a:t>
+            </a:r>
+            <a:pPr indent="0" marL="0">
+              <a:buNone/>
+            </a:pPr>
+            <a:r>
               <a:rPr lang="en-US" sz="850" baseline="30000" dirty="0">
                 <a:solidFill>
+                  <a:srgbClr val="5F6B7A"/>
+                </a:solidFill>
+                <a:latin typeface="Arial" pitchFamily="34" charset="0"/>
+                <a:ea typeface="Arial" pitchFamily="34" charset="-122"/>
+                <a:cs typeface="Arial" pitchFamily="34" charset="-120"/>
+              </a:rPr>
+              <a:t>(5)</a:t>
+            </a:r>
+            <a:endParaRPr lang="en-US" sz="850" dirty="0"/>
+          </a:p>
+        </p:txBody>
+      </p:sp>
+      <p:sp>
+        <p:nvSpPr>
+          <p:cNvPr id="122" name="Text 120"/>
+          <p:cNvSpPr txBox="1"/>
+          <p:nvPr/>
+        </p:nvSpPr>
+        <p:spPr>
+          <a:xfrm>
+            <a:off x="9345168" y="3383280"/>
+            <a:ext cx="781202" cy="548640"/>
+          </a:xfrm>
+          <a:prstGeom prst="rect">
+            <a:avLst/>
+          </a:prstGeom>
+          <a:noFill/>
+          <a:ln/>
+        </p:spPr>
+        <p:txBody>
+          <a:bodyPr wrap="square" lIns="0" tIns="0" rIns="0" bIns="0" rtlCol="0" anchor="ctr"/>
+          <a:lstStyle/>
+          <a:p>
+            <a:pPr algn="ctr" indent="0" marL="0">
+              <a:buNone/>
+            </a:pPr>
+            <a:r>
+              <a:rPr lang="en-US" sz="850" dirty="0">
+                <a:solidFill>
                   <a:srgbClr val="1F2A37"/>
                 </a:solidFill>
                 <a:latin typeface="Arial" pitchFamily="34" charset="0"/>
                 <a:ea typeface="Arial" pitchFamily="34" charset="-122"/>
                 <a:cs typeface="Arial" pitchFamily="34" charset="-120"/>
               </a:rPr>
+              <a:t>Undisclosed</a:t>
+            </a:r>
+            <a:endParaRPr lang="en-US" sz="850" dirty="0"/>
+          </a:p>
+          <a:p>
+            <a:pPr algn="ctr" indent="0" marL="0">
+              <a:buNone/>
+            </a:pPr>
+            <a:r>
+              <a:rPr lang="en-US" sz="750" dirty="0">
+                <a:solidFill>
+                  <a:srgbClr val="5F6B7A"/>
+                </a:solidFill>
+                <a:latin typeface="Arial" pitchFamily="34" charset="0"/>
+                <a:ea typeface="Arial" pitchFamily="34" charset="-122"/>
+                <a:cs typeface="Arial" pitchFamily="34" charset="-120"/>
+              </a:rPr>
+              <a:t>No estimate</a:t>
+            </a:r>
+            <a:endParaRPr lang="en-US" sz="850" dirty="0"/>
+          </a:p>
+        </p:txBody>
+      </p:sp>
+      <p:sp>
+        <p:nvSpPr>
+          <p:cNvPr id="123" name="Text 121"/>
+          <p:cNvSpPr txBox="1"/>
+          <p:nvPr/>
+        </p:nvSpPr>
+        <p:spPr>
+          <a:xfrm>
+            <a:off x="10162946" y="3383280"/>
+            <a:ext cx="781202" cy="548640"/>
+          </a:xfrm>
+          <a:prstGeom prst="rect">
+            <a:avLst/>
+          </a:prstGeom>
+          <a:noFill/>
+          <a:ln/>
+        </p:spPr>
+        <p:txBody>
+          <a:bodyPr wrap="square" lIns="0" tIns="0" rIns="0" bIns="0" rtlCol="0" anchor="ctr"/>
+          <a:lstStyle/>
+          <a:p>
+            <a:pPr algn="ctr" indent="0" marL="0">
+              <a:buNone/>
+            </a:pPr>
+            <a:r>
+              <a:rPr lang="en-US" sz="850" dirty="0">
+                <a:solidFill>
+                  <a:srgbClr val="1F2A37"/>
+                </a:solidFill>
+                <a:latin typeface="Arial" pitchFamily="34" charset="0"/>
+                <a:ea typeface="Arial" pitchFamily="34" charset="-122"/>
+                <a:cs typeface="Arial" pitchFamily="34" charset="-120"/>
+              </a:rPr>
+              <a:t>Undisclosed</a:t>
+            </a:r>
+            <a:endParaRPr lang="en-US" sz="850" dirty="0"/>
+          </a:p>
+          <a:p>
+            <a:pPr algn="ctr" indent="0" marL="0">
+              <a:buNone/>
+            </a:pPr>
+            <a:r>
+              <a:rPr lang="en-US" sz="750" dirty="0">
+                <a:solidFill>
+                  <a:srgbClr val="5F6B7A"/>
+                </a:solidFill>
+                <a:latin typeface="Arial" pitchFamily="34" charset="0"/>
+                <a:ea typeface="Arial" pitchFamily="34" charset="-122"/>
+                <a:cs typeface="Arial" pitchFamily="34" charset="-120"/>
+              </a:rPr>
+              <a:t>Est. c.5–10T</a:t>
+            </a:r>
+            <a:endParaRPr lang="en-US" sz="850" dirty="0"/>
+          </a:p>
+        </p:txBody>
+      </p:sp>
+      <p:sp>
+        <p:nvSpPr>
+          <p:cNvPr id="124" name="Text 122"/>
+          <p:cNvSpPr txBox="1"/>
+          <p:nvPr/>
+        </p:nvSpPr>
+        <p:spPr>
+          <a:xfrm>
+            <a:off x="10980725" y="3383280"/>
+            <a:ext cx="781202" cy="548640"/>
+          </a:xfrm>
+          <a:prstGeom prst="rect">
+            <a:avLst/>
+          </a:prstGeom>
+          <a:noFill/>
+          <a:ln/>
+        </p:spPr>
+        <p:txBody>
+          <a:bodyPr wrap="square" lIns="0" tIns="0" rIns="0" bIns="0" rtlCol="0" anchor="ctr"/>
+          <a:lstStyle/>
+          <a:p>
+            <a:pPr algn="ctr" indent="0" marL="0">
+              <a:buNone/>
+            </a:pPr>
+            <a:r>
+              <a:rPr lang="en-US" sz="850" dirty="0">
+                <a:solidFill>
+                  <a:srgbClr val="1F2A37"/>
+                </a:solidFill>
+                <a:latin typeface="Arial" pitchFamily="34" charset="0"/>
+                <a:ea typeface="Arial" pitchFamily="34" charset="-122"/>
+                <a:cs typeface="Arial" pitchFamily="34" charset="-120"/>
+              </a:rPr>
+              <a:t>2.8T MoE</a:t>
+            </a:r>
+            <a:endParaRPr lang="en-US" sz="850" dirty="0"/>
+          </a:p>
+          <a:p>
+            <a:pPr algn="ctr" indent="0" marL="0">
+              <a:buNone/>
+            </a:pPr>
+            <a:r>
+              <a:rPr lang="en-US" sz="750" dirty="0">
+                <a:solidFill>
+                  <a:srgbClr val="5F6B7A"/>
+                </a:solidFill>
+                <a:latin typeface="Arial" pitchFamily="34" charset="0"/>
+                <a:ea typeface="Arial" pitchFamily="34" charset="-122"/>
+                <a:cs typeface="Arial" pitchFamily="34" charset="-120"/>
+              </a:rPr>
+              <a:t>104B active</a:t>
+            </a:r>
+            <a:endParaRPr lang="en-US" sz="850" dirty="0"/>
+          </a:p>
+        </p:txBody>
+      </p:sp>
+      <p:sp>
+        <p:nvSpPr>
+          <p:cNvPr id="125" name="Shape 123"/>
+          <p:cNvSpPr/>
+          <p:nvPr/>
+        </p:nvSpPr>
+        <p:spPr>
+          <a:xfrm>
+            <a:off x="8229600" y="3931920"/>
+            <a:ext cx="3550615" cy="0"/>
+          </a:xfrm>
+          <a:prstGeom prst="line">
+            <a:avLst/>
+          </a:prstGeom>
+          <a:noFill/>
+          <a:ln w="6350">
+            <a:solidFill>
+              <a:srgbClr val="E3E7EC"/>
+            </a:solidFill>
+            <a:prstDash val="solid"/>
+          </a:ln>
+        </p:spPr>
+      </p:sp>
+      <p:sp>
+        <p:nvSpPr>
+          <p:cNvPr id="126" name="Shape 124"/>
+          <p:cNvSpPr/>
+          <p:nvPr/>
+        </p:nvSpPr>
+        <p:spPr>
+          <a:xfrm>
+            <a:off x="9418320" y="3968496"/>
+            <a:ext cx="634898" cy="201168"/>
+          </a:xfrm>
+          <a:prstGeom prst="rect">
+            <a:avLst/>
+          </a:prstGeom>
+          <a:solidFill>
+            <a:srgbClr val="EAF0F7"/>
+          </a:solidFill>
+          <a:ln w="12700">
+            <a:solidFill>
+              <a:srgbClr val="EAF0F7"/>
+            </a:solidFill>
+            <a:prstDash val="solid"/>
+          </a:ln>
+        </p:spPr>
+      </p:sp>
+      <p:sp>
+        <p:nvSpPr>
+          <p:cNvPr id="127" name="Text 125"/>
+          <p:cNvSpPr txBox="1"/>
+          <p:nvPr/>
+        </p:nvSpPr>
+        <p:spPr>
+          <a:xfrm>
+            <a:off x="8229600" y="3931920"/>
+            <a:ext cx="1097280" cy="274320"/>
+          </a:xfrm>
+          <a:prstGeom prst="rect">
+            <a:avLst/>
+          </a:prstGeom>
+          <a:noFill/>
+          <a:ln/>
+        </p:spPr>
+        <p:txBody>
+          <a:bodyPr wrap="square" lIns="0" tIns="0" rIns="0" bIns="0" rtlCol="0" anchor="ctr"/>
+          <a:lstStyle/>
+          <a:p>
+            <a:pPr indent="0" marL="0">
+              <a:buNone/>
+            </a:pPr>
+            <a:r>
+              <a:rPr lang="en-US" sz="850" dirty="0">
+                <a:solidFill>
+                  <a:srgbClr val="5F6B7A"/>
+                </a:solidFill>
+                <a:latin typeface="Arial" pitchFamily="34" charset="0"/>
+                <a:ea typeface="Arial" pitchFamily="34" charset="-122"/>
+                <a:cs typeface="Arial" pitchFamily="34" charset="-120"/>
+              </a:rPr>
+              <a:t>AA Intelligence Index</a:t>
+            </a:r>
+            <a:pPr indent="0" marL="0">
+              <a:buNone/>
+            </a:pPr>
+            <a:r>
+              <a:rPr lang="en-US" sz="850" baseline="30000" dirty="0">
+                <a:solidFill>
+                  <a:srgbClr val="5F6B7A"/>
+                </a:solidFill>
+                <a:latin typeface="Arial" pitchFamily="34" charset="0"/>
+                <a:ea typeface="Arial" pitchFamily="34" charset="-122"/>
+                <a:cs typeface="Arial" pitchFamily="34" charset="-120"/>
+              </a:rPr>
               <a:t>(4)</a:t>
             </a:r>
             <a:endParaRPr lang="en-US" sz="850" dirty="0"/>
@@ -4244,37 +5487,218 @@
       </p:sp>
       <p:sp>
         <p:nvSpPr>
-          <p:cNvPr id="100" name="Shape 98"/>
-          <p:cNvSpPr/>
-          <p:nvPr/>
-        </p:nvSpPr>
-        <p:spPr>
-          <a:xfrm>
-            <a:off x="8229600" y="2404872"/>
+          <p:cNvPr id="128" name="Text 126"/>
+          <p:cNvSpPr txBox="1"/>
+          <p:nvPr/>
+        </p:nvSpPr>
+        <p:spPr>
+          <a:xfrm>
+            <a:off x="9345168" y="3931920"/>
+            <a:ext cx="781202" cy="274320"/>
+          </a:xfrm>
+          <a:prstGeom prst="rect">
+            <a:avLst/>
+          </a:prstGeom>
+          <a:noFill/>
+          <a:ln/>
+        </p:spPr>
+        <p:txBody>
+          <a:bodyPr wrap="square" lIns="0" tIns="0" rIns="0" bIns="0" rtlCol="0" anchor="ctr"/>
+          <a:lstStyle/>
+          <a:p>
+            <a:pPr algn="ctr" indent="0" marL="0">
+              <a:buNone/>
+            </a:pPr>
+            <a:r>
+              <a:rPr lang="en-US" sz="850" b="1" dirty="0">
+                <a:solidFill>
+                  <a:srgbClr val="041E42"/>
+                </a:solidFill>
+                <a:latin typeface="Arial" pitchFamily="34" charset="0"/>
+                <a:ea typeface="Arial" pitchFamily="34" charset="-122"/>
+                <a:cs typeface="Arial" pitchFamily="34" charset="-120"/>
+              </a:rPr>
+              <a:t>58</a:t>
+            </a:r>
+            <a:endParaRPr lang="en-US" sz="850" dirty="0"/>
+          </a:p>
+        </p:txBody>
+      </p:sp>
+      <p:sp>
+        <p:nvSpPr>
+          <p:cNvPr id="129" name="Text 127"/>
+          <p:cNvSpPr txBox="1"/>
+          <p:nvPr/>
+        </p:nvSpPr>
+        <p:spPr>
+          <a:xfrm>
+            <a:off x="10162946" y="3931920"/>
+            <a:ext cx="781202" cy="274320"/>
+          </a:xfrm>
+          <a:prstGeom prst="rect">
+            <a:avLst/>
+          </a:prstGeom>
+          <a:noFill/>
+          <a:ln/>
+        </p:spPr>
+        <p:txBody>
+          <a:bodyPr wrap="square" lIns="0" tIns="0" rIns="0" bIns="0" rtlCol="0" anchor="ctr"/>
+          <a:lstStyle/>
+          <a:p>
+            <a:pPr algn="ctr" indent="0" marL="0">
+              <a:buNone/>
+            </a:pPr>
+            <a:r>
+              <a:rPr lang="en-US" sz="850" dirty="0">
+                <a:solidFill>
+                  <a:srgbClr val="1F2A37"/>
+                </a:solidFill>
+                <a:latin typeface="Arial" pitchFamily="34" charset="0"/>
+                <a:ea typeface="Arial" pitchFamily="34" charset="-122"/>
+                <a:cs typeface="Arial" pitchFamily="34" charset="-120"/>
+              </a:rPr>
+              <a:t>53</a:t>
+            </a:r>
+            <a:endParaRPr lang="en-US" sz="850" dirty="0"/>
+          </a:p>
+        </p:txBody>
+      </p:sp>
+      <p:sp>
+        <p:nvSpPr>
+          <p:cNvPr id="130" name="Text 128"/>
+          <p:cNvSpPr txBox="1"/>
+          <p:nvPr/>
+        </p:nvSpPr>
+        <p:spPr>
+          <a:xfrm>
+            <a:off x="10980725" y="3931920"/>
+            <a:ext cx="781202" cy="274320"/>
+          </a:xfrm>
+          <a:prstGeom prst="rect">
+            <a:avLst/>
+          </a:prstGeom>
+          <a:noFill/>
+          <a:ln/>
+        </p:spPr>
+        <p:txBody>
+          <a:bodyPr wrap="square" lIns="0" tIns="0" rIns="0" bIns="0" rtlCol="0" anchor="ctr"/>
+          <a:lstStyle/>
+          <a:p>
+            <a:pPr algn="ctr" indent="0" marL="0">
+              <a:buNone/>
+            </a:pPr>
+            <a:r>
+              <a:rPr lang="en-US" sz="850" dirty="0">
+                <a:solidFill>
+                  <a:srgbClr val="1F2A37"/>
+                </a:solidFill>
+                <a:latin typeface="Arial" pitchFamily="34" charset="0"/>
+                <a:ea typeface="Arial" pitchFamily="34" charset="-122"/>
+                <a:cs typeface="Arial" pitchFamily="34" charset="-120"/>
+              </a:rPr>
+              <a:t>44</a:t>
+            </a:r>
+            <a:endParaRPr lang="en-US" sz="850" dirty="0"/>
+          </a:p>
+        </p:txBody>
+      </p:sp>
+      <p:sp>
+        <p:nvSpPr>
+          <p:cNvPr id="131" name="Shape 129"/>
+          <p:cNvSpPr/>
+          <p:nvPr/>
+        </p:nvSpPr>
+        <p:spPr>
+          <a:xfrm>
+            <a:off x="8229600" y="4206240"/>
             <a:ext cx="3550615" cy="0"/>
           </a:xfrm>
           <a:prstGeom prst="line">
             <a:avLst/>
           </a:prstGeom>
           <a:noFill/>
-          <a:ln w="6350">
-            <a:solidFill>
-              <a:srgbClr val="E3E7EC"/>
-            </a:solidFill>
-            <a:prstDash val="solid"/>
-          </a:ln>
-        </p:spPr>
-      </p:sp>
-      <p:sp>
-        <p:nvSpPr>
-          <p:cNvPr id="101" name="Text 99"/>
-          <p:cNvSpPr txBox="1"/>
-          <p:nvPr/>
-        </p:nvSpPr>
-        <p:spPr>
-          <a:xfrm>
-            <a:off x="8229600" y="2404872"/>
-            <a:ext cx="1097280" cy="269748"/>
+          <a:ln w="9525">
+            <a:solidFill>
+              <a:srgbClr val="041E42"/>
+            </a:solidFill>
+            <a:prstDash val="solid"/>
+          </a:ln>
+        </p:spPr>
+      </p:sp>
+      <p:sp>
+        <p:nvSpPr>
+          <p:cNvPr id="132" name="Text 130"/>
+          <p:cNvSpPr txBox="1"/>
+          <p:nvPr/>
+        </p:nvSpPr>
+        <p:spPr>
+          <a:xfrm>
+            <a:off x="8229600" y="4425696"/>
+            <a:ext cx="3550615" cy="201168"/>
+          </a:xfrm>
+          <a:prstGeom prst="rect">
+            <a:avLst/>
+          </a:prstGeom>
+          <a:noFill/>
+          <a:ln/>
+        </p:spPr>
+        <p:txBody>
+          <a:bodyPr wrap="square" lIns="0" tIns="0" rIns="0" bIns="0" rtlCol="0" anchor="t"/>
+          <a:lstStyle/>
+          <a:p>
+            <a:pPr indent="0" marL="0">
+              <a:buNone/>
+            </a:pPr>
+            <a:r>
+              <a:rPr lang="en-US" sz="1100" b="1" dirty="0">
+                <a:solidFill>
+                  <a:srgbClr val="041E42"/>
+                </a:solidFill>
+                <a:latin typeface="Arial" pitchFamily="34" charset="0"/>
+                <a:ea typeface="Arial" pitchFamily="34" charset="-122"/>
+                <a:cs typeface="Arial" pitchFamily="34" charset="-120"/>
+              </a:rPr>
+              <a:t>Recommended use</a:t>
+            </a:r>
+            <a:endParaRPr lang="en-US" sz="1100" dirty="0"/>
+          </a:p>
+        </p:txBody>
+      </p:sp>
+      <p:sp>
+        <p:nvSpPr>
+          <p:cNvPr id="133" name="Shape 131"/>
+          <p:cNvSpPr/>
+          <p:nvPr/>
+        </p:nvSpPr>
+        <p:spPr>
+          <a:xfrm>
+            <a:off x="8229600" y="4736592"/>
+            <a:ext cx="3550615" cy="1115568"/>
+          </a:xfrm>
+          <a:prstGeom prst="rect">
+            <a:avLst/>
+          </a:prstGeom>
+          <a:solidFill>
+            <a:srgbClr val="EAF0F7"/>
+          </a:solidFill>
+          <a:ln w="12700">
+            <a:solidFill>
+              <a:srgbClr val="EAF0F7"/>
+            </a:solidFill>
+            <a:prstDash val="solid"/>
+          </a:ln>
+        </p:spPr>
+      </p:sp>
+      <p:sp>
+        <p:nvSpPr>
+          <p:cNvPr id="134" name="Text 132"/>
+          <p:cNvSpPr txBox="1"/>
+          <p:nvPr/>
+        </p:nvSpPr>
+        <p:spPr>
+          <a:xfrm>
+            <a:off x="8357616" y="4864608"/>
+            <a:ext cx="658368" cy="286512"/>
           </a:xfrm>
           <a:prstGeom prst="rect">
             <a:avLst/>
@@ -4290,186 +5714,258 @@
               <a:buNone/>
             </a:pPr>
             <a:r>
+              <a:rPr lang="en-US" sz="850" b="1" dirty="0">
+                <a:solidFill>
+                  <a:srgbClr val="041E42"/>
+                </a:solidFill>
+                <a:latin typeface="Arial" pitchFamily="34" charset="0"/>
+                <a:ea typeface="Arial" pitchFamily="34" charset="-122"/>
+                <a:cs typeface="Arial" pitchFamily="34" charset="-120"/>
+              </a:rPr>
+              <a:t>Opus 5.5</a:t>
+            </a:r>
+            <a:endParaRPr lang="en-US" sz="850" dirty="0"/>
+          </a:p>
+        </p:txBody>
+      </p:sp>
+      <p:sp>
+        <p:nvSpPr>
+          <p:cNvPr id="135" name="Text 133"/>
+          <p:cNvSpPr txBox="1"/>
+          <p:nvPr/>
+        </p:nvSpPr>
+        <p:spPr>
+          <a:xfrm>
+            <a:off x="9015984" y="4864608"/>
+            <a:ext cx="2636215" cy="286512"/>
+          </a:xfrm>
+          <a:prstGeom prst="rect">
+            <a:avLst/>
+          </a:prstGeom>
+          <a:noFill/>
+          <a:ln/>
+        </p:spPr>
+        <p:txBody>
+          <a:bodyPr wrap="square" lIns="0" tIns="0" rIns="0" bIns="0" rtlCol="0" anchor="ctr"/>
+          <a:lstStyle/>
+          <a:p>
+            <a:pPr indent="0" marL="0">
+              <a:buNone/>
+            </a:pPr>
+            <a:r>
               <a:rPr lang="en-US" sz="850" dirty="0">
                 <a:solidFill>
+                  <a:srgbClr val="1F2A37"/>
+                </a:solidFill>
+                <a:latin typeface="Arial" pitchFamily="34" charset="0"/>
+                <a:ea typeface="Arial" pitchFamily="34" charset="-122"/>
+                <a:cs typeface="Arial" pitchFamily="34" charset="-120"/>
+              </a:rPr>
+              <a:t>Default for coding, agents and analyst work. List price c.60% below Astra.</a:t>
+            </a:r>
+            <a:endParaRPr lang="en-US" sz="850" dirty="0"/>
+          </a:p>
+        </p:txBody>
+      </p:sp>
+      <p:sp>
+        <p:nvSpPr>
+          <p:cNvPr id="136" name="Text 134"/>
+          <p:cNvSpPr txBox="1"/>
+          <p:nvPr/>
+        </p:nvSpPr>
+        <p:spPr>
+          <a:xfrm>
+            <a:off x="8357616" y="5151120"/>
+            <a:ext cx="658368" cy="286512"/>
+          </a:xfrm>
+          <a:prstGeom prst="rect">
+            <a:avLst/>
+          </a:prstGeom>
+          <a:noFill/>
+          <a:ln/>
+        </p:spPr>
+        <p:txBody>
+          <a:bodyPr wrap="square" lIns="0" tIns="0" rIns="0" bIns="0" rtlCol="0" anchor="ctr"/>
+          <a:lstStyle/>
+          <a:p>
+            <a:pPr indent="0" marL="0">
+              <a:buNone/>
+            </a:pPr>
+            <a:r>
+              <a:rPr lang="en-US" sz="850" b="1" dirty="0">
+                <a:solidFill>
+                  <a:srgbClr val="041E42"/>
+                </a:solidFill>
+                <a:latin typeface="Arial" pitchFamily="34" charset="0"/>
+                <a:ea typeface="Arial" pitchFamily="34" charset="-122"/>
+                <a:cs typeface="Arial" pitchFamily="34" charset="-120"/>
+              </a:rPr>
+              <a:t>Astra</a:t>
+            </a:r>
+            <a:endParaRPr lang="en-US" sz="850" dirty="0"/>
+          </a:p>
+        </p:txBody>
+      </p:sp>
+      <p:sp>
+        <p:nvSpPr>
+          <p:cNvPr id="137" name="Text 135"/>
+          <p:cNvSpPr txBox="1"/>
+          <p:nvPr/>
+        </p:nvSpPr>
+        <p:spPr>
+          <a:xfrm>
+            <a:off x="9015984" y="5151120"/>
+            <a:ext cx="2636215" cy="286512"/>
+          </a:xfrm>
+          <a:prstGeom prst="rect">
+            <a:avLst/>
+          </a:prstGeom>
+          <a:noFill/>
+          <a:ln/>
+        </p:spPr>
+        <p:txBody>
+          <a:bodyPr wrap="square" lIns="0" tIns="0" rIns="0" bIns="0" rtlCol="0" anchor="ctr"/>
+          <a:lstStyle/>
+          <a:p>
+            <a:pPr indent="0" marL="0">
+              <a:buNone/>
+            </a:pPr>
+            <a:r>
+              <a:rPr lang="en-US" sz="850" dirty="0">
+                <a:solidFill>
+                  <a:srgbClr val="1F2A37"/>
+                </a:solidFill>
+                <a:latin typeface="Arial" pitchFamily="34" charset="0"/>
+                <a:ea typeface="Arial" pitchFamily="34" charset="-122"/>
+                <a:cs typeface="Arial" pitchFamily="34" charset="-120"/>
+              </a:rPr>
+              <a:t>Computer use, 3D tools and frontier math. Staged access; OpenAI rates its cyber capability "Critical".</a:t>
+            </a:r>
+            <a:endParaRPr lang="en-US" sz="850" dirty="0"/>
+          </a:p>
+        </p:txBody>
+      </p:sp>
+      <p:sp>
+        <p:nvSpPr>
+          <p:cNvPr id="138" name="Text 136"/>
+          <p:cNvSpPr txBox="1"/>
+          <p:nvPr/>
+        </p:nvSpPr>
+        <p:spPr>
+          <a:xfrm>
+            <a:off x="8357616" y="5437632"/>
+            <a:ext cx="658368" cy="286512"/>
+          </a:xfrm>
+          <a:prstGeom prst="rect">
+            <a:avLst/>
+          </a:prstGeom>
+          <a:noFill/>
+          <a:ln/>
+        </p:spPr>
+        <p:txBody>
+          <a:bodyPr wrap="square" lIns="0" tIns="0" rIns="0" bIns="0" rtlCol="0" anchor="ctr"/>
+          <a:lstStyle/>
+          <a:p>
+            <a:pPr indent="0" marL="0">
+              <a:buNone/>
+            </a:pPr>
+            <a:r>
+              <a:rPr lang="en-US" sz="850" b="1" dirty="0">
+                <a:solidFill>
+                  <a:srgbClr val="041E42"/>
+                </a:solidFill>
+                <a:latin typeface="Arial" pitchFamily="34" charset="0"/>
+                <a:ea typeface="Arial" pitchFamily="34" charset="-122"/>
+                <a:cs typeface="Arial" pitchFamily="34" charset="-120"/>
+              </a:rPr>
+              <a:t>K3</a:t>
+            </a:r>
+            <a:endParaRPr lang="en-US" sz="850" dirty="0"/>
+          </a:p>
+        </p:txBody>
+      </p:sp>
+      <p:sp>
+        <p:nvSpPr>
+          <p:cNvPr id="139" name="Text 137"/>
+          <p:cNvSpPr txBox="1"/>
+          <p:nvPr/>
+        </p:nvSpPr>
+        <p:spPr>
+          <a:xfrm>
+            <a:off x="9015984" y="5437632"/>
+            <a:ext cx="2636215" cy="286512"/>
+          </a:xfrm>
+          <a:prstGeom prst="rect">
+            <a:avLst/>
+          </a:prstGeom>
+          <a:noFill/>
+          <a:ln/>
+        </p:spPr>
+        <p:txBody>
+          <a:bodyPr wrap="square" lIns="0" tIns="0" rIns="0" bIns="0" rtlCol="0" anchor="ctr"/>
+          <a:lstStyle/>
+          <a:p>
+            <a:pPr indent="0" marL="0">
+              <a:buNone/>
+            </a:pPr>
+            <a:r>
+              <a:rPr lang="en-US" sz="850" dirty="0">
+                <a:solidFill>
+                  <a:srgbClr val="1F2A37"/>
+                </a:solidFill>
+                <a:latin typeface="Arial" pitchFamily="34" charset="0"/>
+                <a:ea typeface="Arial" pitchFamily="34" charset="-122"/>
+                <a:cs typeface="Arial" pitchFamily="34" charset="-120"/>
+              </a:rPr>
+              <a:t>Self-hosted and high-volume work. Avoid Moonshot's own API for regulated data.</a:t>
+            </a:r>
+            <a:endParaRPr lang="en-US" sz="850" dirty="0"/>
+          </a:p>
+        </p:txBody>
+      </p:sp>
+      <p:sp>
+        <p:nvSpPr>
+          <p:cNvPr id="140" name="Text 138"/>
+          <p:cNvSpPr txBox="1"/>
+          <p:nvPr/>
+        </p:nvSpPr>
+        <p:spPr>
+          <a:xfrm>
+            <a:off x="411480" y="5961888"/>
+            <a:ext cx="11002975" cy="658368"/>
+          </a:xfrm>
+          <a:prstGeom prst="rect">
+            <a:avLst/>
+          </a:prstGeom>
+          <a:noFill/>
+          <a:ln/>
+        </p:spPr>
+        <p:txBody>
+          <a:bodyPr wrap="square" lIns="0" tIns="0" rIns="0" bIns="0" rtlCol="0" anchor="t"/>
+          <a:lstStyle/>
+          <a:p>
+            <a:pPr indent="0" marL="0">
+              <a:buNone/>
+            </a:pPr>
+            <a:r>
+              <a:rPr lang="en-US" sz="700" dirty="0">
+                <a:solidFill>
                   <a:srgbClr val="5F6B7A"/>
                 </a:solidFill>
                 <a:latin typeface="Arial" pitchFamily="34" charset="0"/>
                 <a:ea typeface="Arial" pitchFamily="34" charset="-122"/>
                 <a:cs typeface="Arial" pitchFamily="34" charset="-120"/>
               </a:rPr>
-              <a:t>Input ($ / 1M tokens)</a:t>
-            </a:r>
-            <a:endParaRPr lang="en-US" sz="850" dirty="0"/>
-          </a:p>
-        </p:txBody>
-      </p:sp>
-      <p:sp>
-        <p:nvSpPr>
-          <p:cNvPr id="102" name="Text 100"/>
-          <p:cNvSpPr txBox="1"/>
-          <p:nvPr/>
-        </p:nvSpPr>
-        <p:spPr>
-          <a:xfrm>
-            <a:off x="9345168" y="2404872"/>
-            <a:ext cx="781202" cy="269748"/>
-          </a:xfrm>
-          <a:prstGeom prst="rect">
-            <a:avLst/>
-          </a:prstGeom>
-          <a:noFill/>
-          <a:ln/>
-        </p:spPr>
-        <p:txBody>
-          <a:bodyPr wrap="square" lIns="0" tIns="0" rIns="0" bIns="0" rtlCol="0" anchor="ctr"/>
-          <a:lstStyle/>
-          <a:p>
-            <a:pPr algn="ctr" indent="0" marL="0">
-              <a:buNone/>
-            </a:pPr>
-            <a:r>
-              <a:rPr lang="en-US" sz="850" dirty="0">
-                <a:solidFill>
-                  <a:srgbClr val="1F2A37"/>
-                </a:solidFill>
-                <a:latin typeface="Arial" pitchFamily="34" charset="0"/>
-                <a:ea typeface="Arial" pitchFamily="34" charset="-122"/>
-                <a:cs typeface="Arial" pitchFamily="34" charset="-120"/>
-              </a:rPr>
-              <a:t>$4.00</a:t>
-            </a:r>
-            <a:endParaRPr lang="en-US" sz="850" dirty="0"/>
-          </a:p>
-        </p:txBody>
-      </p:sp>
-      <p:sp>
-        <p:nvSpPr>
-          <p:cNvPr id="103" name="Text 101"/>
-          <p:cNvSpPr txBox="1"/>
-          <p:nvPr/>
-        </p:nvSpPr>
-        <p:spPr>
-          <a:xfrm>
-            <a:off x="10162946" y="2404872"/>
-            <a:ext cx="781202" cy="269748"/>
-          </a:xfrm>
-          <a:prstGeom prst="rect">
-            <a:avLst/>
-          </a:prstGeom>
-          <a:noFill/>
-          <a:ln/>
-        </p:spPr>
-        <p:txBody>
-          <a:bodyPr wrap="square" lIns="0" tIns="0" rIns="0" bIns="0" rtlCol="0" anchor="ctr"/>
-          <a:lstStyle/>
-          <a:p>
-            <a:pPr algn="ctr" indent="0" marL="0">
-              <a:buNone/>
-            </a:pPr>
-            <a:r>
-              <a:rPr lang="en-US" sz="850" dirty="0">
-                <a:solidFill>
-                  <a:srgbClr val="1F2A37"/>
-                </a:solidFill>
-                <a:latin typeface="Arial" pitchFamily="34" charset="0"/>
-                <a:ea typeface="Arial" pitchFamily="34" charset="-122"/>
-                <a:cs typeface="Arial" pitchFamily="34" charset="-120"/>
-              </a:rPr>
-              <a:t>$10.00</a:t>
-            </a:r>
-            <a:endParaRPr lang="en-US" sz="850" dirty="0"/>
-          </a:p>
-        </p:txBody>
-      </p:sp>
-      <p:sp>
-        <p:nvSpPr>
-          <p:cNvPr id="104" name="Text 102"/>
-          <p:cNvSpPr txBox="1"/>
-          <p:nvPr/>
-        </p:nvSpPr>
-        <p:spPr>
-          <a:xfrm>
-            <a:off x="10980725" y="2404872"/>
-            <a:ext cx="781202" cy="269748"/>
-          </a:xfrm>
-          <a:prstGeom prst="rect">
-            <a:avLst/>
-          </a:prstGeom>
-          <a:noFill/>
-          <a:ln/>
-        </p:spPr>
-        <p:txBody>
-          <a:bodyPr wrap="square" lIns="0" tIns="0" rIns="0" bIns="0" rtlCol="0" anchor="ctr"/>
-          <a:lstStyle/>
-          <a:p>
-            <a:pPr algn="ctr" indent="0" marL="0">
-              <a:buNone/>
-            </a:pPr>
-            <a:r>
-              <a:rPr lang="en-US" sz="850" dirty="0">
-                <a:solidFill>
-                  <a:srgbClr val="1F2A37"/>
-                </a:solidFill>
-                <a:latin typeface="Arial" pitchFamily="34" charset="0"/>
-                <a:ea typeface="Arial" pitchFamily="34" charset="-122"/>
-                <a:cs typeface="Arial" pitchFamily="34" charset="-120"/>
-              </a:rPr>
-              <a:t>$3.00</a:t>
-            </a:r>
-            <a:endParaRPr lang="en-US" sz="850" dirty="0"/>
-          </a:p>
-        </p:txBody>
-      </p:sp>
-      <p:sp>
-        <p:nvSpPr>
-          <p:cNvPr id="105" name="Shape 103"/>
-          <p:cNvSpPr/>
-          <p:nvPr/>
-        </p:nvSpPr>
-        <p:spPr>
-          <a:xfrm>
-            <a:off x="8229600" y="2674620"/>
-            <a:ext cx="3550615" cy="0"/>
-          </a:xfrm>
-          <a:prstGeom prst="line">
-            <a:avLst/>
-          </a:prstGeom>
-          <a:noFill/>
-          <a:ln w="6350">
-            <a:solidFill>
-              <a:srgbClr val="E3E7EC"/>
-            </a:solidFill>
-            <a:prstDash val="solid"/>
-          </a:ln>
-        </p:spPr>
-      </p:sp>
-      <p:sp>
-        <p:nvSpPr>
-          <p:cNvPr id="106" name="Text 104"/>
-          <p:cNvSpPr txBox="1"/>
-          <p:nvPr/>
-        </p:nvSpPr>
-        <p:spPr>
-          <a:xfrm>
-            <a:off x="8229600" y="2674620"/>
-            <a:ext cx="1097280" cy="269748"/>
-          </a:xfrm>
-          <a:prstGeom prst="rect">
-            <a:avLst/>
-          </a:prstGeom>
-          <a:noFill/>
-          <a:ln/>
-        </p:spPr>
-        <p:txBody>
-          <a:bodyPr wrap="square" lIns="0" tIns="0" rIns="0" bIns="0" rtlCol="0" anchor="ctr"/>
-          <a:lstStyle/>
-          <a:p>
-            <a:pPr indent="0" marL="0">
-              <a:buNone/>
-            </a:pPr>
-            <a:r>
-              <a:rPr lang="en-US" sz="850" dirty="0">
+              <a:t>Note: Ratings are analyst judgment based on the data shown; scores reported by different vendors are not always like-for-like. Shading marks the leader in each row. Prices are list API rates.</a:t>
+            </a:r>
+            <a:endParaRPr lang="en-US" sz="700" dirty="0"/>
+          </a:p>
+          <a:p>
+            <a:pPr indent="0" marL="0">
+              <a:buNone/>
+            </a:pPr>
+            <a:r>
+              <a:rPr lang="en-US" sz="700" baseline="30000" dirty="0">
                 <a:solidFill>
                   <a:srgbClr val="5F6B7A"/>
                 </a:solidFill>
@@ -4477,178 +5973,13 @@
                 <a:ea typeface="Arial" pitchFamily="34" charset="-122"/>
                 <a:cs typeface="Arial" pitchFamily="34" charset="-120"/>
               </a:rPr>
-              <a:t>Output ($ / 1M tokens)</a:t>
-            </a:r>
-            <a:endParaRPr lang="en-US" sz="850" dirty="0"/>
-          </a:p>
-        </p:txBody>
-      </p:sp>
-      <p:sp>
-        <p:nvSpPr>
-          <p:cNvPr id="107" name="Text 105"/>
-          <p:cNvSpPr txBox="1"/>
-          <p:nvPr/>
-        </p:nvSpPr>
-        <p:spPr>
-          <a:xfrm>
-            <a:off x="9345168" y="2674620"/>
-            <a:ext cx="781202" cy="269748"/>
-          </a:xfrm>
-          <a:prstGeom prst="rect">
-            <a:avLst/>
-          </a:prstGeom>
-          <a:noFill/>
-          <a:ln/>
-        </p:spPr>
-        <p:txBody>
-          <a:bodyPr wrap="square" lIns="0" tIns="0" rIns="0" bIns="0" rtlCol="0" anchor="ctr"/>
-          <a:lstStyle/>
-          <a:p>
-            <a:pPr algn="ctr" indent="0" marL="0">
-              <a:buNone/>
-            </a:pPr>
-            <a:r>
-              <a:rPr lang="en-US" sz="850" dirty="0">
-                <a:solidFill>
-                  <a:srgbClr val="1F2A37"/>
-                </a:solidFill>
-                <a:latin typeface="Arial" pitchFamily="34" charset="0"/>
-                <a:ea typeface="Arial" pitchFamily="34" charset="-122"/>
-                <a:cs typeface="Arial" pitchFamily="34" charset="-120"/>
-              </a:rPr>
-              <a:t>$20.00</a:t>
-            </a:r>
-            <a:endParaRPr lang="en-US" sz="850" dirty="0"/>
-          </a:p>
-        </p:txBody>
-      </p:sp>
-      <p:sp>
-        <p:nvSpPr>
-          <p:cNvPr id="108" name="Text 106"/>
-          <p:cNvSpPr txBox="1"/>
-          <p:nvPr/>
-        </p:nvSpPr>
-        <p:spPr>
-          <a:xfrm>
-            <a:off x="10162946" y="2674620"/>
-            <a:ext cx="781202" cy="269748"/>
-          </a:xfrm>
-          <a:prstGeom prst="rect">
-            <a:avLst/>
-          </a:prstGeom>
-          <a:noFill/>
-          <a:ln/>
-        </p:spPr>
-        <p:txBody>
-          <a:bodyPr wrap="square" lIns="0" tIns="0" rIns="0" bIns="0" rtlCol="0" anchor="ctr"/>
-          <a:lstStyle/>
-          <a:p>
-            <a:pPr algn="ctr" indent="0" marL="0">
-              <a:buNone/>
-            </a:pPr>
-            <a:r>
-              <a:rPr lang="en-US" sz="850" dirty="0">
-                <a:solidFill>
-                  <a:srgbClr val="1F2A37"/>
-                </a:solidFill>
-                <a:latin typeface="Arial" pitchFamily="34" charset="0"/>
-                <a:ea typeface="Arial" pitchFamily="34" charset="-122"/>
-                <a:cs typeface="Arial" pitchFamily="34" charset="-120"/>
-              </a:rPr>
-              <a:t>$50.00</a:t>
-            </a:r>
-            <a:endParaRPr lang="en-US" sz="850" dirty="0"/>
-          </a:p>
-        </p:txBody>
-      </p:sp>
-      <p:sp>
-        <p:nvSpPr>
-          <p:cNvPr id="109" name="Text 107"/>
-          <p:cNvSpPr txBox="1"/>
-          <p:nvPr/>
-        </p:nvSpPr>
-        <p:spPr>
-          <a:xfrm>
-            <a:off x="10980725" y="2674620"/>
-            <a:ext cx="781202" cy="269748"/>
-          </a:xfrm>
-          <a:prstGeom prst="rect">
-            <a:avLst/>
-          </a:prstGeom>
-          <a:noFill/>
-          <a:ln/>
-        </p:spPr>
-        <p:txBody>
-          <a:bodyPr wrap="square" lIns="0" tIns="0" rIns="0" bIns="0" rtlCol="0" anchor="ctr"/>
-          <a:lstStyle/>
-          <a:p>
-            <a:pPr algn="ctr" indent="0" marL="0">
-              <a:buNone/>
-            </a:pPr>
-            <a:r>
-              <a:rPr lang="en-US" sz="850" dirty="0">
-                <a:solidFill>
-                  <a:srgbClr val="1F2A37"/>
-                </a:solidFill>
-                <a:latin typeface="Arial" pitchFamily="34" charset="0"/>
-                <a:ea typeface="Arial" pitchFamily="34" charset="-122"/>
-                <a:cs typeface="Arial" pitchFamily="34" charset="-120"/>
-              </a:rPr>
-              <a:t>$15.00</a:t>
-            </a:r>
-            <a:endParaRPr lang="en-US" sz="850" dirty="0"/>
-          </a:p>
-        </p:txBody>
-      </p:sp>
-      <p:sp>
-        <p:nvSpPr>
-          <p:cNvPr id="110" name="Shape 108"/>
-          <p:cNvSpPr/>
-          <p:nvPr/>
-        </p:nvSpPr>
-        <p:spPr>
-          <a:xfrm>
-            <a:off x="8229600" y="2944368"/>
-            <a:ext cx="3550615" cy="0"/>
-          </a:xfrm>
-          <a:prstGeom prst="line">
-            <a:avLst/>
-          </a:prstGeom>
-          <a:noFill/>
-          <a:ln w="6350">
-            <a:solidFill>
-              <a:srgbClr val="E3E7EC"/>
-            </a:solidFill>
-            <a:prstDash val="solid"/>
-          </a:ln>
-        </p:spPr>
-      </p:sp>
-      <p:sp>
-        <p:nvSpPr>
-          <p:cNvPr id="111" name="Text 109"/>
-          <p:cNvSpPr txBox="1"/>
-          <p:nvPr/>
-        </p:nvSpPr>
-        <p:spPr>
-          <a:xfrm>
-            <a:off x="8229600" y="2944368"/>
-            <a:ext cx="1097280" cy="269748"/>
-          </a:xfrm>
-          <a:prstGeom prst="rect">
-            <a:avLst/>
-          </a:prstGeom>
-          <a:noFill/>
-          <a:ln/>
-        </p:spPr>
-        <p:txBody>
-          <a:bodyPr wrap="square" lIns="0" tIns="0" rIns="0" bIns="0" rtlCol="0" anchor="ctr"/>
-          <a:lstStyle/>
-          <a:p>
-            <a:pPr indent="0" marL="0">
-              <a:buNone/>
-            </a:pPr>
-            <a:r>
-              <a:rPr lang="en-US" sz="850" dirty="0">
+              <a:t>(1)</a:t>
+            </a:r>
+            <a:pPr indent="0" marL="0">
+              <a:buNone/>
+            </a:pPr>
+            <a:r>
+              <a:rPr lang="en-US" sz="700" dirty="0">
                 <a:solidFill>
                   <a:srgbClr val="5F6B7A"/>
                 </a:solidFill>
@@ -4656,178 +5987,13 @@
                 <a:ea typeface="Arial" pitchFamily="34" charset="-122"/>
                 <a:cs typeface="Arial" pitchFamily="34" charset="-120"/>
               </a:rPr>
-              <a:t>Cached input ($ / 1M)</a:t>
-            </a:r>
-            <a:endParaRPr lang="en-US" sz="850" dirty="0"/>
-          </a:p>
-        </p:txBody>
-      </p:sp>
-      <p:sp>
-        <p:nvSpPr>
-          <p:cNvPr id="112" name="Text 110"/>
-          <p:cNvSpPr txBox="1"/>
-          <p:nvPr/>
-        </p:nvSpPr>
-        <p:spPr>
-          <a:xfrm>
-            <a:off x="9345168" y="2944368"/>
-            <a:ext cx="781202" cy="269748"/>
-          </a:xfrm>
-          <a:prstGeom prst="rect">
-            <a:avLst/>
-          </a:prstGeom>
-          <a:noFill/>
-          <a:ln/>
-        </p:spPr>
-        <p:txBody>
-          <a:bodyPr wrap="square" lIns="0" tIns="0" rIns="0" bIns="0" rtlCol="0" anchor="ctr"/>
-          <a:lstStyle/>
-          <a:p>
-            <a:pPr algn="ctr" indent="0" marL="0">
-              <a:buNone/>
-            </a:pPr>
-            <a:r>
-              <a:rPr lang="en-US" sz="850" dirty="0">
-                <a:solidFill>
-                  <a:srgbClr val="1F2A37"/>
-                </a:solidFill>
-                <a:latin typeface="Arial" pitchFamily="34" charset="0"/>
-                <a:ea typeface="Arial" pitchFamily="34" charset="-122"/>
-                <a:cs typeface="Arial" pitchFamily="34" charset="-120"/>
-              </a:rPr>
-              <a:t>$0.20</a:t>
-            </a:r>
-            <a:endParaRPr lang="en-US" sz="850" dirty="0"/>
-          </a:p>
-        </p:txBody>
-      </p:sp>
-      <p:sp>
-        <p:nvSpPr>
-          <p:cNvPr id="113" name="Text 111"/>
-          <p:cNvSpPr txBox="1"/>
-          <p:nvPr/>
-        </p:nvSpPr>
-        <p:spPr>
-          <a:xfrm>
-            <a:off x="10162946" y="2944368"/>
-            <a:ext cx="781202" cy="269748"/>
-          </a:xfrm>
-          <a:prstGeom prst="rect">
-            <a:avLst/>
-          </a:prstGeom>
-          <a:noFill/>
-          <a:ln/>
-        </p:spPr>
-        <p:txBody>
-          <a:bodyPr wrap="square" lIns="0" tIns="0" rIns="0" bIns="0" rtlCol="0" anchor="ctr"/>
-          <a:lstStyle/>
-          <a:p>
-            <a:pPr algn="ctr" indent="0" marL="0">
-              <a:buNone/>
-            </a:pPr>
-            <a:r>
-              <a:rPr lang="en-US" sz="850" dirty="0">
-                <a:solidFill>
-                  <a:srgbClr val="1F2A37"/>
-                </a:solidFill>
-                <a:latin typeface="Arial" pitchFamily="34" charset="0"/>
-                <a:ea typeface="Arial" pitchFamily="34" charset="-122"/>
-                <a:cs typeface="Arial" pitchFamily="34" charset="-120"/>
-              </a:rPr>
-              <a:t>$1.00</a:t>
-            </a:r>
-            <a:endParaRPr lang="en-US" sz="850" dirty="0"/>
-          </a:p>
-        </p:txBody>
-      </p:sp>
-      <p:sp>
-        <p:nvSpPr>
-          <p:cNvPr id="114" name="Text 112"/>
-          <p:cNvSpPr txBox="1"/>
-          <p:nvPr/>
-        </p:nvSpPr>
-        <p:spPr>
-          <a:xfrm>
-            <a:off x="10980725" y="2944368"/>
-            <a:ext cx="781202" cy="269748"/>
-          </a:xfrm>
-          <a:prstGeom prst="rect">
-            <a:avLst/>
-          </a:prstGeom>
-          <a:noFill/>
-          <a:ln/>
-        </p:spPr>
-        <p:txBody>
-          <a:bodyPr wrap="square" lIns="0" tIns="0" rIns="0" bIns="0" rtlCol="0" anchor="ctr"/>
-          <a:lstStyle/>
-          <a:p>
-            <a:pPr algn="ctr" indent="0" marL="0">
-              <a:buNone/>
-            </a:pPr>
-            <a:r>
-              <a:rPr lang="en-US" sz="850" dirty="0">
-                <a:solidFill>
-                  <a:srgbClr val="1F2A37"/>
-                </a:solidFill>
-                <a:latin typeface="Arial" pitchFamily="34" charset="0"/>
-                <a:ea typeface="Arial" pitchFamily="34" charset="-122"/>
-                <a:cs typeface="Arial" pitchFamily="34" charset="-120"/>
-              </a:rPr>
-              <a:t>$0.30</a:t>
-            </a:r>
-            <a:endParaRPr lang="en-US" sz="850" dirty="0"/>
-          </a:p>
-        </p:txBody>
-      </p:sp>
-      <p:sp>
-        <p:nvSpPr>
-          <p:cNvPr id="115" name="Shape 113"/>
-          <p:cNvSpPr/>
-          <p:nvPr/>
-        </p:nvSpPr>
-        <p:spPr>
-          <a:xfrm>
-            <a:off x="8229600" y="3214116"/>
-            <a:ext cx="3550615" cy="0"/>
-          </a:xfrm>
-          <a:prstGeom prst="line">
-            <a:avLst/>
-          </a:prstGeom>
-          <a:noFill/>
-          <a:ln w="6350">
-            <a:solidFill>
-              <a:srgbClr val="E3E7EC"/>
-            </a:solidFill>
-            <a:prstDash val="solid"/>
-          </a:ln>
-        </p:spPr>
-      </p:sp>
-      <p:sp>
-        <p:nvSpPr>
-          <p:cNvPr id="116" name="Text 114"/>
-          <p:cNvSpPr txBox="1"/>
-          <p:nvPr/>
-        </p:nvSpPr>
-        <p:spPr>
-          <a:xfrm>
-            <a:off x="8229600" y="3214116"/>
-            <a:ext cx="1097280" cy="269748"/>
-          </a:xfrm>
-          <a:prstGeom prst="rect">
-            <a:avLst/>
-          </a:prstGeom>
-          <a:noFill/>
-          <a:ln/>
-        </p:spPr>
-        <p:txBody>
-          <a:bodyPr wrap="square" lIns="0" tIns="0" rIns="0" bIns="0" rtlCol="0" anchor="ctr"/>
-          <a:lstStyle/>
-          <a:p>
-            <a:pPr indent="0" marL="0">
-              <a:buNone/>
-            </a:pPr>
-            <a:r>
-              <a:rPr lang="en-US" sz="850" dirty="0">
+              <a:t> Opus 5.5 vs. Astra figures as reported by Anthropic (22 Sep 2026); not independently replicated.  </a:t>
+            </a:r>
+            <a:pPr indent="0" marL="0">
+              <a:buNone/>
+            </a:pPr>
+            <a:r>
+              <a:rPr lang="en-US" sz="700" baseline="30000" dirty="0">
                 <a:solidFill>
                   <a:srgbClr val="5F6B7A"/>
                 </a:solidFill>
@@ -4835,178 +6001,13 @@
                 <a:ea typeface="Arial" pitchFamily="34" charset="-122"/>
                 <a:cs typeface="Arial" pitchFamily="34" charset="-120"/>
               </a:rPr>
-              <a:t>Context (tokens)</a:t>
-            </a:r>
-            <a:endParaRPr lang="en-US" sz="850" dirty="0"/>
-          </a:p>
-        </p:txBody>
-      </p:sp>
-      <p:sp>
-        <p:nvSpPr>
-          <p:cNvPr id="117" name="Text 115"/>
-          <p:cNvSpPr txBox="1"/>
-          <p:nvPr/>
-        </p:nvSpPr>
-        <p:spPr>
-          <a:xfrm>
-            <a:off x="9345168" y="3214116"/>
-            <a:ext cx="781202" cy="269748"/>
-          </a:xfrm>
-          <a:prstGeom prst="rect">
-            <a:avLst/>
-          </a:prstGeom>
-          <a:noFill/>
-          <a:ln/>
-        </p:spPr>
-        <p:txBody>
-          <a:bodyPr wrap="square" lIns="0" tIns="0" rIns="0" bIns="0" rtlCol="0" anchor="ctr"/>
-          <a:lstStyle/>
-          <a:p>
-            <a:pPr algn="ctr" indent="0" marL="0">
-              <a:buNone/>
-            </a:pPr>
-            <a:r>
-              <a:rPr lang="en-US" sz="850" dirty="0">
-                <a:solidFill>
-                  <a:srgbClr val="1F2A37"/>
-                </a:solidFill>
-                <a:latin typeface="Arial" pitchFamily="34" charset="0"/>
-                <a:ea typeface="Arial" pitchFamily="34" charset="-122"/>
-                <a:cs typeface="Arial" pitchFamily="34" charset="-120"/>
-              </a:rPr>
-              <a:t>1.0M</a:t>
-            </a:r>
-            <a:endParaRPr lang="en-US" sz="850" dirty="0"/>
-          </a:p>
-        </p:txBody>
-      </p:sp>
-      <p:sp>
-        <p:nvSpPr>
-          <p:cNvPr id="118" name="Text 116"/>
-          <p:cNvSpPr txBox="1"/>
-          <p:nvPr/>
-        </p:nvSpPr>
-        <p:spPr>
-          <a:xfrm>
-            <a:off x="10162946" y="3214116"/>
-            <a:ext cx="781202" cy="269748"/>
-          </a:xfrm>
-          <a:prstGeom prst="rect">
-            <a:avLst/>
-          </a:prstGeom>
-          <a:noFill/>
-          <a:ln/>
-        </p:spPr>
-        <p:txBody>
-          <a:bodyPr wrap="square" lIns="0" tIns="0" rIns="0" bIns="0" rtlCol="0" anchor="ctr"/>
-          <a:lstStyle/>
-          <a:p>
-            <a:pPr algn="ctr" indent="0" marL="0">
-              <a:buNone/>
-            </a:pPr>
-            <a:r>
-              <a:rPr lang="en-US" sz="850" dirty="0">
-                <a:solidFill>
-                  <a:srgbClr val="1F2A37"/>
-                </a:solidFill>
-                <a:latin typeface="Arial" pitchFamily="34" charset="0"/>
-                <a:ea typeface="Arial" pitchFamily="34" charset="-122"/>
-                <a:cs typeface="Arial" pitchFamily="34" charset="-120"/>
-              </a:rPr>
-              <a:t>1.05M</a:t>
-            </a:r>
-            <a:endParaRPr lang="en-US" sz="850" dirty="0"/>
-          </a:p>
-        </p:txBody>
-      </p:sp>
-      <p:sp>
-        <p:nvSpPr>
-          <p:cNvPr id="119" name="Text 117"/>
-          <p:cNvSpPr txBox="1"/>
-          <p:nvPr/>
-        </p:nvSpPr>
-        <p:spPr>
-          <a:xfrm>
-            <a:off x="10980725" y="3214116"/>
-            <a:ext cx="781202" cy="269748"/>
-          </a:xfrm>
-          <a:prstGeom prst="rect">
-            <a:avLst/>
-          </a:prstGeom>
-          <a:noFill/>
-          <a:ln/>
-        </p:spPr>
-        <p:txBody>
-          <a:bodyPr wrap="square" lIns="0" tIns="0" rIns="0" bIns="0" rtlCol="0" anchor="ctr"/>
-          <a:lstStyle/>
-          <a:p>
-            <a:pPr algn="ctr" indent="0" marL="0">
-              <a:buNone/>
-            </a:pPr>
-            <a:r>
-              <a:rPr lang="en-US" sz="850" dirty="0">
-                <a:solidFill>
-                  <a:srgbClr val="1F2A37"/>
-                </a:solidFill>
-                <a:latin typeface="Arial" pitchFamily="34" charset="0"/>
-                <a:ea typeface="Arial" pitchFamily="34" charset="-122"/>
-                <a:cs typeface="Arial" pitchFamily="34" charset="-120"/>
-              </a:rPr>
-              <a:t>1.0M</a:t>
-            </a:r>
-            <a:endParaRPr lang="en-US" sz="850" dirty="0"/>
-          </a:p>
-        </p:txBody>
-      </p:sp>
-      <p:sp>
-        <p:nvSpPr>
-          <p:cNvPr id="120" name="Shape 118"/>
-          <p:cNvSpPr/>
-          <p:nvPr/>
-        </p:nvSpPr>
-        <p:spPr>
-          <a:xfrm>
-            <a:off x="8229600" y="3483864"/>
-            <a:ext cx="3550615" cy="0"/>
-          </a:xfrm>
-          <a:prstGeom prst="line">
-            <a:avLst/>
-          </a:prstGeom>
-          <a:noFill/>
-          <a:ln w="6350">
-            <a:solidFill>
-              <a:srgbClr val="E3E7EC"/>
-            </a:solidFill>
-            <a:prstDash val="solid"/>
-          </a:ln>
-        </p:spPr>
-      </p:sp>
-      <p:sp>
-        <p:nvSpPr>
-          <p:cNvPr id="121" name="Text 119"/>
-          <p:cNvSpPr txBox="1"/>
-          <p:nvPr/>
-        </p:nvSpPr>
-        <p:spPr>
-          <a:xfrm>
-            <a:off x="8229600" y="3483864"/>
-            <a:ext cx="1097280" cy="269748"/>
-          </a:xfrm>
-          <a:prstGeom prst="rect">
-            <a:avLst/>
-          </a:prstGeom>
-          <a:noFill/>
-          <a:ln/>
-        </p:spPr>
-        <p:txBody>
-          <a:bodyPr wrap="square" lIns="0" tIns="0" rIns="0" bIns="0" rtlCol="0" anchor="ctr"/>
-          <a:lstStyle/>
-          <a:p>
-            <a:pPr indent="0" marL="0">
-              <a:buNone/>
-            </a:pPr>
-            <a:r>
-              <a:rPr lang="en-US" sz="850" dirty="0">
+              <a:t>(2)</a:t>
+            </a:r>
+            <a:pPr indent="0" marL="0">
+              <a:buNone/>
+            </a:pPr>
+            <a:r>
+              <a:rPr lang="en-US" sz="700" dirty="0">
                 <a:solidFill>
                   <a:srgbClr val="5F6B7A"/>
                 </a:solidFill>
@@ -5014,178 +6015,19 @@
                 <a:ea typeface="Arial" pitchFamily="34" charset="-122"/>
                 <a:cs typeface="Arial" pitchFamily="34" charset="-120"/>
               </a:rPr>
-              <a:t>Parameters</a:t>
-            </a:r>
-            <a:endParaRPr lang="en-US" sz="850" dirty="0"/>
-          </a:p>
-        </p:txBody>
-      </p:sp>
-      <p:sp>
-        <p:nvSpPr>
-          <p:cNvPr id="122" name="Text 120"/>
-          <p:cNvSpPr txBox="1"/>
-          <p:nvPr/>
-        </p:nvSpPr>
-        <p:spPr>
-          <a:xfrm>
-            <a:off x="9345168" y="3483864"/>
-            <a:ext cx="781202" cy="269748"/>
-          </a:xfrm>
-          <a:prstGeom prst="rect">
-            <a:avLst/>
-          </a:prstGeom>
-          <a:noFill/>
-          <a:ln/>
-        </p:spPr>
-        <p:txBody>
-          <a:bodyPr wrap="square" lIns="0" tIns="0" rIns="0" bIns="0" rtlCol="0" anchor="ctr"/>
-          <a:lstStyle/>
-          <a:p>
-            <a:pPr algn="ctr" indent="0" marL="0">
-              <a:buNone/>
-            </a:pPr>
-            <a:r>
-              <a:rPr lang="en-US" sz="850" dirty="0">
-                <a:solidFill>
-                  <a:srgbClr val="1F2A37"/>
-                </a:solidFill>
-                <a:latin typeface="Arial" pitchFamily="34" charset="0"/>
-                <a:ea typeface="Arial" pitchFamily="34" charset="-122"/>
-                <a:cs typeface="Arial" pitchFamily="34" charset="-120"/>
-              </a:rPr>
-              <a:t>n/a</a:t>
-            </a:r>
-            <a:endParaRPr lang="en-US" sz="850" dirty="0"/>
-          </a:p>
-        </p:txBody>
-      </p:sp>
-      <p:sp>
-        <p:nvSpPr>
-          <p:cNvPr id="123" name="Text 121"/>
-          <p:cNvSpPr txBox="1"/>
-          <p:nvPr/>
-        </p:nvSpPr>
-        <p:spPr>
-          <a:xfrm>
-            <a:off x="10162946" y="3483864"/>
-            <a:ext cx="781202" cy="269748"/>
-          </a:xfrm>
-          <a:prstGeom prst="rect">
-            <a:avLst/>
-          </a:prstGeom>
-          <a:noFill/>
-          <a:ln/>
-        </p:spPr>
-        <p:txBody>
-          <a:bodyPr wrap="square" lIns="0" tIns="0" rIns="0" bIns="0" rtlCol="0" anchor="ctr"/>
-          <a:lstStyle/>
-          <a:p>
-            <a:pPr algn="ctr" indent="0" marL="0">
-              <a:buNone/>
-            </a:pPr>
-            <a:r>
-              <a:rPr lang="en-US" sz="850" dirty="0">
-                <a:solidFill>
-                  <a:srgbClr val="1F2A37"/>
-                </a:solidFill>
-                <a:latin typeface="Arial" pitchFamily="34" charset="0"/>
-                <a:ea typeface="Arial" pitchFamily="34" charset="-122"/>
-                <a:cs typeface="Arial" pitchFamily="34" charset="-120"/>
-              </a:rPr>
-              <a:t>n/a</a:t>
-            </a:r>
-            <a:endParaRPr lang="en-US" sz="850" dirty="0"/>
-          </a:p>
-        </p:txBody>
-      </p:sp>
-      <p:sp>
-        <p:nvSpPr>
-          <p:cNvPr id="124" name="Text 122"/>
-          <p:cNvSpPr txBox="1"/>
-          <p:nvPr/>
-        </p:nvSpPr>
-        <p:spPr>
-          <a:xfrm>
-            <a:off x="10980725" y="3483864"/>
-            <a:ext cx="781202" cy="269748"/>
-          </a:xfrm>
-          <a:prstGeom prst="rect">
-            <a:avLst/>
-          </a:prstGeom>
-          <a:noFill/>
-          <a:ln/>
-        </p:spPr>
-        <p:txBody>
-          <a:bodyPr wrap="square" lIns="0" tIns="0" rIns="0" bIns="0" rtlCol="0" anchor="ctr"/>
-          <a:lstStyle/>
-          <a:p>
-            <a:pPr algn="ctr" indent="0" marL="0">
-              <a:buNone/>
-            </a:pPr>
-            <a:r>
-              <a:rPr lang="en-US" sz="850" dirty="0">
-                <a:solidFill>
-                  <a:srgbClr val="1F2A37"/>
-                </a:solidFill>
-                <a:latin typeface="Arial" pitchFamily="34" charset="0"/>
-                <a:ea typeface="Arial" pitchFamily="34" charset="-122"/>
-                <a:cs typeface="Arial" pitchFamily="34" charset="-120"/>
-              </a:rPr>
-              <a:t>2.8T MoE</a:t>
-            </a:r>
-            <a:endParaRPr lang="en-US" sz="850" dirty="0"/>
-          </a:p>
-        </p:txBody>
-      </p:sp>
-      <p:sp>
-        <p:nvSpPr>
-          <p:cNvPr id="125" name="Shape 123"/>
-          <p:cNvSpPr/>
-          <p:nvPr/>
-        </p:nvSpPr>
-        <p:spPr>
-          <a:xfrm>
-            <a:off x="8229600" y="3753612"/>
-            <a:ext cx="3550615" cy="0"/>
-          </a:xfrm>
-          <a:prstGeom prst="line">
-            <a:avLst/>
-          </a:prstGeom>
-          <a:noFill/>
-          <a:ln w="6350">
-            <a:solidFill>
-              <a:srgbClr val="E3E7EC"/>
-            </a:solidFill>
-            <a:prstDash val="solid"/>
-          </a:ln>
-        </p:spPr>
-      </p:sp>
-      <p:sp>
-        <p:nvSpPr>
-          <p:cNvPr id="126" name="Text 124"/>
-          <p:cNvSpPr txBox="1"/>
-          <p:nvPr/>
-        </p:nvSpPr>
-        <p:spPr>
-          <a:xfrm>
-            <a:off x="8229600" y="3753612"/>
-            <a:ext cx="1097280" cy="269748"/>
-          </a:xfrm>
-          <a:prstGeom prst="rect">
-            <a:avLst/>
-          </a:prstGeom>
-          <a:noFill/>
-          <a:ln/>
-        </p:spPr>
-        <p:txBody>
-          <a:bodyPr wrap="square" lIns="0" tIns="0" rIns="0" bIns="0" rtlCol="0" anchor="ctr"/>
-          <a:lstStyle/>
-          <a:p>
-            <a:pPr indent="0" marL="0">
-              <a:buNone/>
-            </a:pPr>
-            <a:r>
-              <a:rPr lang="en-US" sz="850" dirty="0">
+              <a:t> Anthropic and OpenAI report OSWorld 2.0 under different test settings.</a:t>
+            </a:r>
+            <a:pPr indent="0" marL="0">
+              <a:buNone/>
+            </a:pPr>
+            <a:endParaRPr lang="en-US" sz="700" dirty="0"/>
+          </a:p>
+          <a:p>
+            <a:pPr indent="0" marL="0">
+              <a:buNone/>
+            </a:pPr>
+            <a:r>
+              <a:rPr lang="en-US" sz="700" baseline="30000" dirty="0">
                 <a:solidFill>
                   <a:srgbClr val="5F6B7A"/>
                 </a:solidFill>
@@ -5193,13 +6035,13 @@
                 <a:ea typeface="Arial" pitchFamily="34" charset="-122"/>
                 <a:cs typeface="Arial" pitchFamily="34" charset="-120"/>
               </a:rPr>
-              <a:t>AA Intelligence Index</a:t>
-            </a:r>
-            <a:pPr indent="0" marL="0">
-              <a:buNone/>
-            </a:pPr>
-            <a:r>
-              <a:rPr lang="en-US" sz="850" baseline="30000" dirty="0">
+              <a:t>(3)</a:t>
+            </a:r>
+            <a:pPr indent="0" marL="0">
+              <a:buNone/>
+            </a:pPr>
+            <a:r>
+              <a:rPr lang="en-US" sz="700" dirty="0">
                 <a:solidFill>
                   <a:srgbClr val="5F6B7A"/>
                 </a:solidFill>
@@ -5207,475 +6049,29 @@
                 <a:ea typeface="Arial" pitchFamily="34" charset="-122"/>
                 <a:cs typeface="Arial" pitchFamily="34" charset="-120"/>
               </a:rPr>
-              <a:t>(3)</a:t>
-            </a:r>
-            <a:endParaRPr lang="en-US" sz="850" dirty="0"/>
-          </a:p>
-        </p:txBody>
-      </p:sp>
-      <p:sp>
-        <p:nvSpPr>
-          <p:cNvPr id="127" name="Text 125"/>
-          <p:cNvSpPr txBox="1"/>
-          <p:nvPr/>
-        </p:nvSpPr>
-        <p:spPr>
-          <a:xfrm>
-            <a:off x="9345168" y="3753612"/>
-            <a:ext cx="781202" cy="269748"/>
-          </a:xfrm>
-          <a:prstGeom prst="rect">
-            <a:avLst/>
-          </a:prstGeom>
-          <a:noFill/>
-          <a:ln/>
-        </p:spPr>
-        <p:txBody>
-          <a:bodyPr wrap="square" lIns="0" tIns="0" rIns="0" bIns="0" rtlCol="0" anchor="ctr"/>
-          <a:lstStyle/>
-          <a:p>
-            <a:pPr algn="ctr" indent="0" marL="0">
-              <a:buNone/>
-            </a:pPr>
-            <a:r>
-              <a:rPr lang="en-US" sz="850" b="1" dirty="0">
-                <a:solidFill>
-                  <a:srgbClr val="1F2A37"/>
-                </a:solidFill>
-                <a:latin typeface="Arial" pitchFamily="34" charset="0"/>
-                <a:ea typeface="Arial" pitchFamily="34" charset="-122"/>
-                <a:cs typeface="Arial" pitchFamily="34" charset="-120"/>
-              </a:rPr>
-              <a:t>58</a:t>
-            </a:r>
-            <a:endParaRPr lang="en-US" sz="850" dirty="0"/>
-          </a:p>
-        </p:txBody>
-      </p:sp>
-      <p:sp>
-        <p:nvSpPr>
-          <p:cNvPr id="128" name="Text 126"/>
-          <p:cNvSpPr txBox="1"/>
-          <p:nvPr/>
-        </p:nvSpPr>
-        <p:spPr>
-          <a:xfrm>
-            <a:off x="10162946" y="3753612"/>
-            <a:ext cx="781202" cy="269748"/>
-          </a:xfrm>
-          <a:prstGeom prst="rect">
-            <a:avLst/>
-          </a:prstGeom>
-          <a:noFill/>
-          <a:ln/>
-        </p:spPr>
-        <p:txBody>
-          <a:bodyPr wrap="square" lIns="0" tIns="0" rIns="0" bIns="0" rtlCol="0" anchor="ctr"/>
-          <a:lstStyle/>
-          <a:p>
-            <a:pPr algn="ctr" indent="0" marL="0">
-              <a:buNone/>
-            </a:pPr>
-            <a:r>
-              <a:rPr lang="en-US" sz="850" b="1" dirty="0">
-                <a:solidFill>
-                  <a:srgbClr val="1F2A37"/>
-                </a:solidFill>
-                <a:latin typeface="Arial" pitchFamily="34" charset="0"/>
-                <a:ea typeface="Arial" pitchFamily="34" charset="-122"/>
-                <a:cs typeface="Arial" pitchFamily="34" charset="-120"/>
-              </a:rPr>
-              <a:t>53</a:t>
-            </a:r>
-            <a:endParaRPr lang="en-US" sz="850" dirty="0"/>
-          </a:p>
-        </p:txBody>
-      </p:sp>
-      <p:sp>
-        <p:nvSpPr>
-          <p:cNvPr id="129" name="Text 127"/>
-          <p:cNvSpPr txBox="1"/>
-          <p:nvPr/>
-        </p:nvSpPr>
-        <p:spPr>
-          <a:xfrm>
-            <a:off x="10980725" y="3753612"/>
-            <a:ext cx="781202" cy="269748"/>
-          </a:xfrm>
-          <a:prstGeom prst="rect">
-            <a:avLst/>
-          </a:prstGeom>
-          <a:noFill/>
-          <a:ln/>
-        </p:spPr>
-        <p:txBody>
-          <a:bodyPr wrap="square" lIns="0" tIns="0" rIns="0" bIns="0" rtlCol="0" anchor="ctr"/>
-          <a:lstStyle/>
-          <a:p>
-            <a:pPr algn="ctr" indent="0" marL="0">
-              <a:buNone/>
-            </a:pPr>
-            <a:r>
-              <a:rPr lang="en-US" sz="850" b="1" dirty="0">
-                <a:solidFill>
-                  <a:srgbClr val="1F2A37"/>
-                </a:solidFill>
-                <a:latin typeface="Arial" pitchFamily="34" charset="0"/>
-                <a:ea typeface="Arial" pitchFamily="34" charset="-122"/>
-                <a:cs typeface="Arial" pitchFamily="34" charset="-120"/>
-              </a:rPr>
-              <a:t>44</a:t>
-            </a:r>
-            <a:endParaRPr lang="en-US" sz="850" dirty="0"/>
-          </a:p>
-        </p:txBody>
-      </p:sp>
-      <p:sp>
-        <p:nvSpPr>
-          <p:cNvPr id="130" name="Shape 128"/>
-          <p:cNvSpPr/>
-          <p:nvPr/>
-        </p:nvSpPr>
-        <p:spPr>
-          <a:xfrm>
-            <a:off x="8229600" y="4023360"/>
-            <a:ext cx="3550615" cy="0"/>
-          </a:xfrm>
-          <a:prstGeom prst="line">
-            <a:avLst/>
-          </a:prstGeom>
-          <a:noFill/>
-          <a:ln w="9525">
-            <a:solidFill>
-              <a:srgbClr val="041E42"/>
-            </a:solidFill>
-            <a:prstDash val="solid"/>
-          </a:ln>
-        </p:spPr>
-      </p:sp>
-      <p:sp>
-        <p:nvSpPr>
-          <p:cNvPr id="131" name="Text 129"/>
-          <p:cNvSpPr txBox="1"/>
-          <p:nvPr/>
-        </p:nvSpPr>
-        <p:spPr>
-          <a:xfrm>
-            <a:off x="8229600" y="4261104"/>
-            <a:ext cx="3550615" cy="201168"/>
-          </a:xfrm>
-          <a:prstGeom prst="rect">
-            <a:avLst/>
-          </a:prstGeom>
-          <a:noFill/>
-          <a:ln/>
-        </p:spPr>
-        <p:txBody>
-          <a:bodyPr wrap="square" lIns="0" tIns="0" rIns="0" bIns="0" rtlCol="0" anchor="t"/>
-          <a:lstStyle/>
-          <a:p>
-            <a:pPr indent="0" marL="0">
-              <a:buNone/>
-            </a:pPr>
-            <a:r>
-              <a:rPr lang="en-US" sz="1100" b="1" dirty="0">
-                <a:solidFill>
-                  <a:srgbClr val="041E42"/>
-                </a:solidFill>
-                <a:latin typeface="Arial" pitchFamily="34" charset="0"/>
-                <a:ea typeface="Arial" pitchFamily="34" charset="-122"/>
-                <a:cs typeface="Arial" pitchFamily="34" charset="-120"/>
-              </a:rPr>
-              <a:t>Recommended use</a:t>
-            </a:r>
-            <a:endParaRPr lang="en-US" sz="1100" dirty="0"/>
-          </a:p>
-        </p:txBody>
-      </p:sp>
-      <p:sp>
-        <p:nvSpPr>
-          <p:cNvPr id="132" name="Shape 130"/>
-          <p:cNvSpPr/>
-          <p:nvPr/>
-        </p:nvSpPr>
-        <p:spPr>
-          <a:xfrm>
-            <a:off x="8229600" y="4572000"/>
-            <a:ext cx="3550615" cy="1280160"/>
-          </a:xfrm>
-          <a:prstGeom prst="rect">
-            <a:avLst/>
-          </a:prstGeom>
-          <a:solidFill>
-            <a:srgbClr val="EAF0F7"/>
-          </a:solidFill>
-          <a:ln w="12700">
-            <a:solidFill>
-              <a:srgbClr val="EAF0F7"/>
-            </a:solidFill>
-            <a:prstDash val="solid"/>
-          </a:ln>
-        </p:spPr>
-      </p:sp>
-      <p:sp>
-        <p:nvSpPr>
-          <p:cNvPr id="133" name="Text 131"/>
-          <p:cNvSpPr txBox="1"/>
-          <p:nvPr/>
-        </p:nvSpPr>
-        <p:spPr>
-          <a:xfrm>
-            <a:off x="8366760" y="4709160"/>
-            <a:ext cx="658368" cy="335280"/>
-          </a:xfrm>
-          <a:prstGeom prst="rect">
-            <a:avLst/>
-          </a:prstGeom>
-          <a:noFill/>
-          <a:ln/>
-        </p:spPr>
-        <p:txBody>
-          <a:bodyPr wrap="square" lIns="0" tIns="0" rIns="0" bIns="0" rtlCol="0" anchor="ctr"/>
-          <a:lstStyle/>
-          <a:p>
-            <a:pPr indent="0" marL="0">
-              <a:buNone/>
-            </a:pPr>
-            <a:r>
-              <a:rPr lang="en-US" sz="850" b="1" dirty="0">
-                <a:solidFill>
-                  <a:srgbClr val="041E42"/>
-                </a:solidFill>
-                <a:latin typeface="Arial" pitchFamily="34" charset="0"/>
-                <a:ea typeface="Arial" pitchFamily="34" charset="-122"/>
-                <a:cs typeface="Arial" pitchFamily="34" charset="-120"/>
-              </a:rPr>
-              <a:t>Opus 5.5</a:t>
-            </a:r>
-            <a:endParaRPr lang="en-US" sz="850" dirty="0"/>
-          </a:p>
-        </p:txBody>
-      </p:sp>
-      <p:sp>
-        <p:nvSpPr>
-          <p:cNvPr id="134" name="Text 132"/>
-          <p:cNvSpPr txBox="1"/>
-          <p:nvPr/>
-        </p:nvSpPr>
-        <p:spPr>
-          <a:xfrm>
-            <a:off x="9025128" y="4709160"/>
-            <a:ext cx="2617927" cy="335280"/>
-          </a:xfrm>
-          <a:prstGeom prst="rect">
-            <a:avLst/>
-          </a:prstGeom>
-          <a:noFill/>
-          <a:ln/>
-        </p:spPr>
-        <p:txBody>
-          <a:bodyPr wrap="square" lIns="0" tIns="0" rIns="0" bIns="0" rtlCol="0" anchor="ctr"/>
-          <a:lstStyle/>
-          <a:p>
-            <a:pPr indent="0" marL="0">
-              <a:buNone/>
-            </a:pPr>
-            <a:r>
-              <a:rPr lang="en-US" sz="850" dirty="0">
-                <a:solidFill>
-                  <a:srgbClr val="1F2A37"/>
-                </a:solidFill>
-                <a:latin typeface="Arial" pitchFamily="34" charset="0"/>
-                <a:ea typeface="Arial" pitchFamily="34" charset="-122"/>
-                <a:cs typeface="Arial" pitchFamily="34" charset="-120"/>
-              </a:rPr>
-              <a:t>Default for coding, agents and analyst work. List price c.60% below Astra.</a:t>
-            </a:r>
-            <a:endParaRPr lang="en-US" sz="850" dirty="0"/>
-          </a:p>
-        </p:txBody>
-      </p:sp>
-      <p:sp>
-        <p:nvSpPr>
-          <p:cNvPr id="135" name="Text 133"/>
-          <p:cNvSpPr txBox="1"/>
-          <p:nvPr/>
-        </p:nvSpPr>
-        <p:spPr>
-          <a:xfrm>
-            <a:off x="8366760" y="5044440"/>
-            <a:ext cx="658368" cy="335280"/>
-          </a:xfrm>
-          <a:prstGeom prst="rect">
-            <a:avLst/>
-          </a:prstGeom>
-          <a:noFill/>
-          <a:ln/>
-        </p:spPr>
-        <p:txBody>
-          <a:bodyPr wrap="square" lIns="0" tIns="0" rIns="0" bIns="0" rtlCol="0" anchor="ctr"/>
-          <a:lstStyle/>
-          <a:p>
-            <a:pPr indent="0" marL="0">
-              <a:buNone/>
-            </a:pPr>
-            <a:r>
-              <a:rPr lang="en-US" sz="850" b="1" dirty="0">
-                <a:solidFill>
-                  <a:srgbClr val="041E42"/>
-                </a:solidFill>
-                <a:latin typeface="Arial" pitchFamily="34" charset="0"/>
-                <a:ea typeface="Arial" pitchFamily="34" charset="-122"/>
-                <a:cs typeface="Arial" pitchFamily="34" charset="-120"/>
-              </a:rPr>
-              <a:t>Astra</a:t>
-            </a:r>
-            <a:endParaRPr lang="en-US" sz="850" dirty="0"/>
-          </a:p>
-        </p:txBody>
-      </p:sp>
-      <p:sp>
-        <p:nvSpPr>
-          <p:cNvPr id="136" name="Text 134"/>
-          <p:cNvSpPr txBox="1"/>
-          <p:nvPr/>
-        </p:nvSpPr>
-        <p:spPr>
-          <a:xfrm>
-            <a:off x="9025128" y="5044440"/>
-            <a:ext cx="2617927" cy="335280"/>
-          </a:xfrm>
-          <a:prstGeom prst="rect">
-            <a:avLst/>
-          </a:prstGeom>
-          <a:noFill/>
-          <a:ln/>
-        </p:spPr>
-        <p:txBody>
-          <a:bodyPr wrap="square" lIns="0" tIns="0" rIns="0" bIns="0" rtlCol="0" anchor="ctr"/>
-          <a:lstStyle/>
-          <a:p>
-            <a:pPr indent="0" marL="0">
-              <a:buNone/>
-            </a:pPr>
-            <a:r>
-              <a:rPr lang="en-US" sz="850" dirty="0">
-                <a:solidFill>
-                  <a:srgbClr val="1F2A37"/>
-                </a:solidFill>
-                <a:latin typeface="Arial" pitchFamily="34" charset="0"/>
-                <a:ea typeface="Arial" pitchFamily="34" charset="-122"/>
-                <a:cs typeface="Arial" pitchFamily="34" charset="-120"/>
-              </a:rPr>
-              <a:t>Computer use, 3D tools and frontier math. Staged access; OpenAI rates its cyber capability "Critical".</a:t>
-            </a:r>
-            <a:endParaRPr lang="en-US" sz="850" dirty="0"/>
-          </a:p>
-        </p:txBody>
-      </p:sp>
-      <p:sp>
-        <p:nvSpPr>
-          <p:cNvPr id="137" name="Text 135"/>
-          <p:cNvSpPr txBox="1"/>
-          <p:nvPr/>
-        </p:nvSpPr>
-        <p:spPr>
-          <a:xfrm>
-            <a:off x="8366760" y="5379720"/>
-            <a:ext cx="658368" cy="335280"/>
-          </a:xfrm>
-          <a:prstGeom prst="rect">
-            <a:avLst/>
-          </a:prstGeom>
-          <a:noFill/>
-          <a:ln/>
-        </p:spPr>
-        <p:txBody>
-          <a:bodyPr wrap="square" lIns="0" tIns="0" rIns="0" bIns="0" rtlCol="0" anchor="ctr"/>
-          <a:lstStyle/>
-          <a:p>
-            <a:pPr indent="0" marL="0">
-              <a:buNone/>
-            </a:pPr>
-            <a:r>
-              <a:rPr lang="en-US" sz="850" b="1" dirty="0">
-                <a:solidFill>
-                  <a:srgbClr val="041E42"/>
-                </a:solidFill>
-                <a:latin typeface="Arial" pitchFamily="34" charset="0"/>
-                <a:ea typeface="Arial" pitchFamily="34" charset="-122"/>
-                <a:cs typeface="Arial" pitchFamily="34" charset="-120"/>
-              </a:rPr>
-              <a:t>K3</a:t>
-            </a:r>
-            <a:endParaRPr lang="en-US" sz="850" dirty="0"/>
-          </a:p>
-        </p:txBody>
-      </p:sp>
-      <p:sp>
-        <p:nvSpPr>
-          <p:cNvPr id="138" name="Text 136"/>
-          <p:cNvSpPr txBox="1"/>
-          <p:nvPr/>
-        </p:nvSpPr>
-        <p:spPr>
-          <a:xfrm>
-            <a:off x="9025128" y="5379720"/>
-            <a:ext cx="2617927" cy="335280"/>
-          </a:xfrm>
-          <a:prstGeom prst="rect">
-            <a:avLst/>
-          </a:prstGeom>
-          <a:noFill/>
-          <a:ln/>
-        </p:spPr>
-        <p:txBody>
-          <a:bodyPr wrap="square" lIns="0" tIns="0" rIns="0" bIns="0" rtlCol="0" anchor="ctr"/>
-          <a:lstStyle/>
-          <a:p>
-            <a:pPr indent="0" marL="0">
-              <a:buNone/>
-            </a:pPr>
-            <a:r>
-              <a:rPr lang="en-US" sz="850" dirty="0">
-                <a:solidFill>
-                  <a:srgbClr val="1F2A37"/>
-                </a:solidFill>
-                <a:latin typeface="Arial" pitchFamily="34" charset="0"/>
-                <a:ea typeface="Arial" pitchFamily="34" charset="-122"/>
-                <a:cs typeface="Arial" pitchFamily="34" charset="-120"/>
-              </a:rPr>
-              <a:t>Self-hosted and high-volume work. Avoid Moonshot's own API for regulated data.</a:t>
-            </a:r>
-            <a:endParaRPr lang="en-US" sz="850" dirty="0"/>
-          </a:p>
-        </p:txBody>
-      </p:sp>
-      <p:sp>
-        <p:nvSpPr>
-          <p:cNvPr id="139" name="Text 137"/>
-          <p:cNvSpPr txBox="1"/>
-          <p:nvPr/>
-        </p:nvSpPr>
-        <p:spPr>
-          <a:xfrm>
-            <a:off x="411480" y="5980176"/>
-            <a:ext cx="11002975" cy="566928"/>
-          </a:xfrm>
-          <a:prstGeom prst="rect">
-            <a:avLst/>
-          </a:prstGeom>
-          <a:noFill/>
-          <a:ln/>
-        </p:spPr>
-        <p:txBody>
-          <a:bodyPr wrap="square" lIns="0" tIns="0" rIns="0" bIns="0" rtlCol="0" anchor="t"/>
-          <a:lstStyle/>
-          <a:p>
-            <a:pPr indent="0" marL="0">
-              <a:lnSpc>
-                <a:spcPct val="100000"/>
-              </a:lnSpc>
+              <a:t> Weights released 27 Jul 2026 under the Kimi K3 License (modified open license; model-as-a-service businesses above $20M annual revenue need a separate agreement).</a:t>
+            </a:r>
+            <a:pPr indent="0" marL="0">
+              <a:buNone/>
+            </a:pPr>
+            <a:endParaRPr lang="en-US" sz="700" dirty="0"/>
+          </a:p>
+          <a:p>
+            <a:pPr indent="0" marL="0">
+              <a:buNone/>
+            </a:pPr>
+            <a:r>
+              <a:rPr lang="en-US" sz="700" baseline="30000" dirty="0">
+                <a:solidFill>
+                  <a:srgbClr val="5F6B7A"/>
+                </a:solidFill>
+                <a:latin typeface="Arial" pitchFamily="34" charset="0"/>
+                <a:ea typeface="Arial" pitchFamily="34" charset="-122"/>
+                <a:cs typeface="Arial" pitchFamily="34" charset="-120"/>
+              </a:rPr>
+              <a:t>(4)</a:t>
+            </a:r>
+            <a:pPr indent="0" marL="0">
               <a:buNone/>
             </a:pPr>
             <a:r>
@@ -5687,15 +6083,15 @@
                 <a:ea typeface="Arial" pitchFamily="34" charset="-122"/>
                 <a:cs typeface="Arial" pitchFamily="34" charset="-120"/>
               </a:rPr>
-              <a:t>Note: Ratings are analyst judgment based on the data shown; scores reported by different vendors are not always like-for-like. Prices are list API rates.</a:t>
-            </a:r>
+              <a:t> Artificial Analysis Intelligence Index v4.3 (Sep 2026). No like-for-like K3 scores are published for most tasks above, so K3 ratings rely mainly on this index.</a:t>
+            </a:r>
+            <a:pPr indent="0" marL="0">
+              <a:buNone/>
+            </a:pPr>
             <a:endParaRPr lang="en-US" sz="700" dirty="0"/>
           </a:p>
           <a:p>
             <a:pPr indent="0" marL="0">
-              <a:lnSpc>
-                <a:spcPct val="100000"/>
-              </a:lnSpc>
               <a:buNone/>
             </a:pPr>
             <a:r>
@@ -5707,12 +6103,9 @@
                 <a:ea typeface="Arial" pitchFamily="34" charset="-122"/>
                 <a:cs typeface="Arial" pitchFamily="34" charset="-120"/>
               </a:rPr>
-              <a:t>(1)</a:t>
-            </a:r>
-            <a:pPr indent="0" marL="0">
-              <a:lnSpc>
-                <a:spcPct val="100000"/>
-              </a:lnSpc>
+              <a:t>(5)</a:t>
+            </a:r>
+            <a:pPr indent="0" marL="0">
               <a:buNone/>
             </a:pPr>
             <a:r>
@@ -5724,16 +6117,19 @@
                 <a:ea typeface="Arial" pitchFamily="34" charset="-122"/>
                 <a:cs typeface="Arial" pitchFamily="34" charset="-120"/>
               </a:rPr>
-              <a:t> Opus 5.5 vs. Astra figures as reported by Anthropic (22 Sep 2026); not independently replicated.  </a:t>
-            </a:r>
-            <a:pPr indent="0" marL="0">
-              <a:lnSpc>
-                <a:spcPct val="100000"/>
-              </a:lnSpc>
-              <a:buNone/>
-            </a:pPr>
-            <a:r>
-              <a:rPr lang="en-US" sz="700" baseline="30000" dirty="0">
+              <a:t> Anthropic and OpenAI do not disclose model size. Third-party estimates for Astra range from c.5T to 10T total parameters and are unverified.</a:t>
+            </a:r>
+            <a:pPr indent="0" marL="0">
+              <a:buNone/>
+            </a:pPr>
+            <a:endParaRPr lang="en-US" sz="700" dirty="0"/>
+          </a:p>
+          <a:p>
+            <a:pPr indent="0" marL="0">
+              <a:buNone/>
+            </a:pPr>
+            <a:r>
+              <a:rPr lang="en-US" sz="700" dirty="0">
                 <a:solidFill>
                   <a:srgbClr val="5F6B7A"/>
                 </a:solidFill>
@@ -5741,151 +6137,22 @@
                 <a:ea typeface="Arial" pitchFamily="34" charset="-122"/>
                 <a:cs typeface="Arial" pitchFamily="34" charset="-120"/>
               </a:rPr>
-              <a:t>(2)</a:t>
-            </a:r>
-            <a:pPr indent="0" marL="0">
-              <a:lnSpc>
-                <a:spcPct val="100000"/>
-              </a:lnSpc>
-              <a:buNone/>
-            </a:pPr>
-            <a:r>
-              <a:rPr lang="en-US" sz="700" dirty="0">
-                <a:solidFill>
-                  <a:srgbClr val="5F6B7A"/>
-                </a:solidFill>
-                <a:latin typeface="Arial" pitchFamily="34" charset="0"/>
-                <a:ea typeface="Arial" pitchFamily="34" charset="-122"/>
-                <a:cs typeface="Arial" pitchFamily="34" charset="-120"/>
-              </a:rPr>
-              <a:t> Anthropic and OpenAI report OSWorld 2.0 under different test settings.</a:t>
-            </a:r>
-            <a:pPr indent="0" marL="0">
-              <a:lnSpc>
-                <a:spcPct val="100000"/>
-              </a:lnSpc>
-              <a:buNone/>
-            </a:pPr>
+              <a:t>Source: Anthropic, "Introducing Claude Opus 5.5" (22 Sep 2026); OpenAI, "GPT-6 Astra" (3 Sep 2026); Moonshot AI, "Kimi K3 Tech Blog" (16 Jul 2026); Artificial Analysis; Databricks; Fireworks AI.</a:t>
+            </a:r>
             <a:endParaRPr lang="en-US" sz="700" dirty="0"/>
           </a:p>
-          <a:p>
-            <a:pPr indent="0" marL="0">
-              <a:lnSpc>
-                <a:spcPct val="100000"/>
-              </a:lnSpc>
-              <a:buNone/>
-            </a:pPr>
-            <a:r>
-              <a:rPr lang="en-US" sz="700" baseline="30000" dirty="0">
-                <a:solidFill>
-                  <a:srgbClr val="5F6B7A"/>
-                </a:solidFill>
-                <a:latin typeface="Arial" pitchFamily="34" charset="0"/>
-                <a:ea typeface="Arial" pitchFamily="34" charset="-122"/>
-                <a:cs typeface="Arial" pitchFamily="34" charset="-120"/>
-              </a:rPr>
-              <a:t>(3)</a:t>
-            </a:r>
-            <a:pPr indent="0" marL="0">
-              <a:lnSpc>
-                <a:spcPct val="100000"/>
-              </a:lnSpc>
-              <a:buNone/>
-            </a:pPr>
-            <a:r>
-              <a:rPr lang="en-US" sz="700" dirty="0">
-                <a:solidFill>
-                  <a:srgbClr val="5F6B7A"/>
-                </a:solidFill>
-                <a:latin typeface="Arial" pitchFamily="34" charset="0"/>
-                <a:ea typeface="Arial" pitchFamily="34" charset="-122"/>
-                <a:cs typeface="Arial" pitchFamily="34" charset="-120"/>
-              </a:rPr>
-              <a:t> Artificial Analysis Intelligence Index v4.3 (Sep 2026). No like-for-like K3 scores are published for most tasks above, so K3 ratings rely mainly on this index.</a:t>
-            </a:r>
-            <a:pPr indent="0" marL="0">
-              <a:lnSpc>
-                <a:spcPct val="100000"/>
-              </a:lnSpc>
-              <a:buNone/>
-            </a:pPr>
-            <a:endParaRPr lang="en-US" sz="700" dirty="0"/>
-          </a:p>
-          <a:p>
-            <a:pPr indent="0" marL="0">
-              <a:lnSpc>
-                <a:spcPct val="100000"/>
-              </a:lnSpc>
-              <a:buNone/>
-            </a:pPr>
-            <a:r>
-              <a:rPr lang="en-US" sz="700" baseline="30000" dirty="0">
-                <a:solidFill>
-                  <a:srgbClr val="5F6B7A"/>
-                </a:solidFill>
-                <a:latin typeface="Arial" pitchFamily="34" charset="0"/>
-                <a:ea typeface="Arial" pitchFamily="34" charset="-122"/>
-                <a:cs typeface="Arial" pitchFamily="34" charset="-120"/>
-              </a:rPr>
-              <a:t>(4)</a:t>
-            </a:r>
-            <a:pPr indent="0" marL="0">
-              <a:lnSpc>
-                <a:spcPct val="100000"/>
-              </a:lnSpc>
-              <a:buNone/>
-            </a:pPr>
-            <a:r>
-              <a:rPr lang="en-US" sz="700" dirty="0">
-                <a:solidFill>
-                  <a:srgbClr val="5F6B7A"/>
-                </a:solidFill>
-                <a:latin typeface="Arial" pitchFamily="34" charset="0"/>
-                <a:ea typeface="Arial" pitchFamily="34" charset="-122"/>
-                <a:cs typeface="Arial" pitchFamily="34" charset="-120"/>
-              </a:rPr>
-              <a:t> 104B active parameters. Weights released 27 Jul 2026 under the Kimi K3 License (modified open license; model-as-a-service businesses above $20M annual revenue need a separate agreement).</a:t>
-            </a:r>
-            <a:pPr indent="0" marL="0">
-              <a:lnSpc>
-                <a:spcPct val="100000"/>
-              </a:lnSpc>
-              <a:buNone/>
-            </a:pPr>
-            <a:endParaRPr lang="en-US" sz="700" dirty="0"/>
-          </a:p>
-          <a:p>
-            <a:pPr indent="0" marL="0">
-              <a:lnSpc>
-                <a:spcPct val="100000"/>
-              </a:lnSpc>
-              <a:buNone/>
-            </a:pPr>
-            <a:r>
-              <a:rPr lang="en-US" sz="700" dirty="0">
-                <a:solidFill>
-                  <a:srgbClr val="5F6B7A"/>
-                </a:solidFill>
-                <a:latin typeface="Arial" pitchFamily="34" charset="0"/>
-                <a:ea typeface="Arial" pitchFamily="34" charset="-122"/>
-                <a:cs typeface="Arial" pitchFamily="34" charset="-120"/>
-              </a:rPr>
-              <a:t>Source: Anthropic, "Introducing Claude Opus 5.5" (22 Sep 2026); OpenAI, "GPT-6 Astra" (3 Sep 2026); Moonshot AI, "Kimi K3 Tech Blog" (16 Jul 2026); Artificial Analysis; Databricks; Fireworks AI.</a:t>
-            </a:r>
-            <a:endParaRPr lang="en-US" sz="700" dirty="0"/>
-          </a:p>
-        </p:txBody>
-      </p:sp>
-      <p:sp>
-        <p:nvSpPr>
-          <p:cNvPr id="140" name="Text 138"/>
-          <p:cNvSpPr txBox="1"/>
-          <p:nvPr/>
-        </p:nvSpPr>
-        <p:spPr>
-          <a:xfrm>
-            <a:off x="11505895" y="6473952"/>
-            <a:ext cx="274320" cy="146304"/>
+        </p:txBody>
+      </p:sp>
+      <p:sp>
+        <p:nvSpPr>
+          <p:cNvPr id="141" name="Text 139"/>
+          <p:cNvSpPr txBox="1"/>
+          <p:nvPr/>
+        </p:nvSpPr>
+        <p:spPr>
+          <a:xfrm>
+            <a:off x="11505895" y="6492240"/>
+            <a:ext cx="274320" cy="128016"/>
           </a:xfrm>
           <a:prstGeom prst="rect">
             <a:avLst/>

--- a/ai-model-comparison/AI-Model-Comparison-Sep-2026.pptx
+++ b/ai-model-comparison/AI-Model-Comparison-Sep-2026.pptx
@@ -877,7 +877,7 @@
       </p:grpSpPr>
       <p:sp>
         <p:nvSpPr>
-          <p:cNvPr id="2" name="Text 0"/>
+          <p:cNvPr id="2" name="TextBox 1"/>
           <p:cNvSpPr txBox="1"/>
           <p:nvPr/>
         </p:nvSpPr>
@@ -916,7 +916,7 @@
       </p:sp>
       <p:sp>
         <p:nvSpPr>
-          <p:cNvPr id="3" name="Text 1"/>
+          <p:cNvPr id="3" name="TextBox 2"/>
           <p:cNvSpPr txBox="1"/>
           <p:nvPr/>
         </p:nvSpPr>
@@ -955,7 +955,7 @@
       </p:sp>
       <p:sp>
         <p:nvSpPr>
-          <p:cNvPr id="4" name="Shape 2"/>
+          <p:cNvPr id="4" name="Straight Connector 3"/>
           <p:cNvSpPr/>
           <p:nvPr/>
         </p:nvSpPr>
@@ -978,7 +978,7 @@
       </p:sp>
       <p:sp>
         <p:nvSpPr>
-          <p:cNvPr id="5" name="Text 3"/>
+          <p:cNvPr id="5" name="TextBox 4"/>
           <p:cNvSpPr txBox="1"/>
           <p:nvPr/>
         </p:nvSpPr>
@@ -1017,7 +1017,7 @@
       </p:sp>
       <p:sp>
         <p:nvSpPr>
-          <p:cNvPr id="6" name="Shape 4"/>
+          <p:cNvPr id="6" name="Oval 5"/>
           <p:cNvSpPr/>
           <p:nvPr/>
         </p:nvSpPr>
@@ -1042,7 +1042,7 @@
       </p:sp>
       <p:sp>
         <p:nvSpPr>
-          <p:cNvPr id="7" name="Text 5"/>
+          <p:cNvPr id="7" name="TextBox 6"/>
           <p:cNvSpPr txBox="1"/>
           <p:nvPr/>
         </p:nvSpPr>
@@ -1081,7 +1081,7 @@
       </p:sp>
       <p:sp>
         <p:nvSpPr>
-          <p:cNvPr id="8" name="Shape 6"/>
+          <p:cNvPr id="8" name="Oval 7"/>
           <p:cNvSpPr/>
           <p:nvPr/>
         </p:nvSpPr>
@@ -1106,7 +1106,7 @@
       </p:sp>
       <p:sp>
         <p:nvSpPr>
-          <p:cNvPr id="9" name="Shape 7"/>
+          <p:cNvPr id="9" name="Partial Circle 8"/>
           <p:cNvSpPr/>
           <p:nvPr/>
         </p:nvSpPr>
@@ -1134,7 +1134,7 @@
       </p:sp>
       <p:sp>
         <p:nvSpPr>
-          <p:cNvPr id="10" name="Text 8"/>
+          <p:cNvPr id="10" name="TextBox 9"/>
           <p:cNvSpPr txBox="1"/>
           <p:nvPr/>
         </p:nvSpPr>
@@ -1173,7 +1173,7 @@
       </p:sp>
       <p:sp>
         <p:nvSpPr>
-          <p:cNvPr id="11" name="Shape 9"/>
+          <p:cNvPr id="11" name="Oval 10"/>
           <p:cNvSpPr/>
           <p:nvPr/>
         </p:nvSpPr>
@@ -1198,7 +1198,7 @@
       </p:sp>
       <p:sp>
         <p:nvSpPr>
-          <p:cNvPr id="12" name="Shape 10"/>
+          <p:cNvPr id="12" name="Partial Circle 11"/>
           <p:cNvSpPr/>
           <p:nvPr/>
         </p:nvSpPr>
@@ -1226,7 +1226,7 @@
       </p:sp>
       <p:sp>
         <p:nvSpPr>
-          <p:cNvPr id="13" name="Text 11"/>
+          <p:cNvPr id="13" name="TextBox 12"/>
           <p:cNvSpPr txBox="1"/>
           <p:nvPr/>
         </p:nvSpPr>
@@ -1265,7 +1265,7 @@
       </p:sp>
       <p:sp>
         <p:nvSpPr>
-          <p:cNvPr id="14" name="Shape 12"/>
+          <p:cNvPr id="14" name="Oval 13"/>
           <p:cNvSpPr/>
           <p:nvPr/>
         </p:nvSpPr>
@@ -1290,7 +1290,7 @@
       </p:sp>
       <p:sp>
         <p:nvSpPr>
-          <p:cNvPr id="15" name="Shape 13"/>
+          <p:cNvPr id="15" name="Partial Circle 14"/>
           <p:cNvSpPr/>
           <p:nvPr/>
         </p:nvSpPr>
@@ -1318,7 +1318,7 @@
       </p:sp>
       <p:sp>
         <p:nvSpPr>
-          <p:cNvPr id="16" name="Text 14"/>
+          <p:cNvPr id="16" name="TextBox 15"/>
           <p:cNvSpPr txBox="1"/>
           <p:nvPr/>
         </p:nvSpPr>
@@ -1357,7 +1357,7 @@
       </p:sp>
       <p:sp>
         <p:nvSpPr>
-          <p:cNvPr id="17" name="Shape 15"/>
+          <p:cNvPr id="17" name="Straight Connector 16"/>
           <p:cNvSpPr/>
           <p:nvPr/>
         </p:nvSpPr>
@@ -1380,7 +1380,7 @@
       </p:sp>
       <p:sp>
         <p:nvSpPr>
-          <p:cNvPr id="18" name="Text 16"/>
+          <p:cNvPr id="18" name="TextBox 17"/>
           <p:cNvSpPr txBox="1"/>
           <p:nvPr/>
         </p:nvSpPr>
@@ -1436,7 +1436,7 @@
       </p:sp>
       <p:sp>
         <p:nvSpPr>
-          <p:cNvPr id="19" name="Text 17"/>
+          <p:cNvPr id="19" name="TextBox 18"/>
           <p:cNvSpPr txBox="1"/>
           <p:nvPr/>
         </p:nvSpPr>
@@ -1492,7 +1492,7 @@
       </p:sp>
       <p:sp>
         <p:nvSpPr>
-          <p:cNvPr id="20" name="Text 18"/>
+          <p:cNvPr id="20" name="TextBox 19"/>
           <p:cNvSpPr txBox="1"/>
           <p:nvPr/>
         </p:nvSpPr>
@@ -1548,7 +1548,7 @@
       </p:sp>
       <p:sp>
         <p:nvSpPr>
-          <p:cNvPr id="21" name="Text 19"/>
+          <p:cNvPr id="21" name="TextBox 20"/>
           <p:cNvSpPr txBox="1"/>
           <p:nvPr/>
         </p:nvSpPr>
@@ -1604,7 +1604,7 @@
       </p:sp>
       <p:sp>
         <p:nvSpPr>
-          <p:cNvPr id="22" name="Text 20"/>
+          <p:cNvPr id="22" name="TextBox 21"/>
           <p:cNvSpPr txBox="1"/>
           <p:nvPr/>
         </p:nvSpPr>
@@ -1660,7 +1660,7 @@
       </p:sp>
       <p:sp>
         <p:nvSpPr>
-          <p:cNvPr id="23" name="Shape 21"/>
+          <p:cNvPr id="23" name="Straight Connector 22"/>
           <p:cNvSpPr/>
           <p:nvPr/>
         </p:nvSpPr>
@@ -1683,7 +1683,7 @@
       </p:sp>
       <p:sp>
         <p:nvSpPr>
-          <p:cNvPr id="24" name="Shape 22"/>
+          <p:cNvPr id="24" name="Rectangle 23"/>
           <p:cNvSpPr/>
           <p:nvPr/>
         </p:nvSpPr>
@@ -1708,7 +1708,7 @@
       </p:sp>
       <p:sp>
         <p:nvSpPr>
-          <p:cNvPr id="25" name="Text 23"/>
+          <p:cNvPr id="25" name="TextBox 24"/>
           <p:cNvSpPr txBox="1"/>
           <p:nvPr/>
         </p:nvSpPr>
@@ -1764,7 +1764,7 @@
       </p:sp>
       <p:sp>
         <p:nvSpPr>
-          <p:cNvPr id="26" name="Shape 24"/>
+          <p:cNvPr id="26" name="Oval 25"/>
           <p:cNvSpPr/>
           <p:nvPr/>
         </p:nvSpPr>
@@ -1789,7 +1789,7 @@
       </p:sp>
       <p:sp>
         <p:nvSpPr>
-          <p:cNvPr id="27" name="Shape 25"/>
+          <p:cNvPr id="27" name="Oval 26"/>
           <p:cNvSpPr/>
           <p:nvPr/>
         </p:nvSpPr>
@@ -1814,7 +1814,7 @@
       </p:sp>
       <p:sp>
         <p:nvSpPr>
-          <p:cNvPr id="28" name="Shape 26"/>
+          <p:cNvPr id="28" name="Partial Circle 27"/>
           <p:cNvSpPr/>
           <p:nvPr/>
         </p:nvSpPr>
@@ -1842,7 +1842,7 @@
       </p:sp>
       <p:sp>
         <p:nvSpPr>
-          <p:cNvPr id="29" name="Shape 27"/>
+          <p:cNvPr id="29" name="Oval 28"/>
           <p:cNvSpPr/>
           <p:nvPr/>
         </p:nvSpPr>
@@ -1867,7 +1867,7 @@
       </p:sp>
       <p:sp>
         <p:nvSpPr>
-          <p:cNvPr id="30" name="Shape 28"/>
+          <p:cNvPr id="30" name="Partial Circle 29"/>
           <p:cNvSpPr/>
           <p:nvPr/>
         </p:nvSpPr>
@@ -1895,7 +1895,7 @@
       </p:sp>
       <p:sp>
         <p:nvSpPr>
-          <p:cNvPr id="31" name="Text 29"/>
+          <p:cNvPr id="31" name="TextBox 30"/>
           <p:cNvSpPr txBox="1"/>
           <p:nvPr/>
         </p:nvSpPr>
@@ -1990,7 +1990,7 @@
       </p:sp>
       <p:sp>
         <p:nvSpPr>
-          <p:cNvPr id="32" name="Shape 30"/>
+          <p:cNvPr id="32" name="Straight Connector 31"/>
           <p:cNvSpPr/>
           <p:nvPr/>
         </p:nvSpPr>
@@ -2013,7 +2013,7 @@
       </p:sp>
       <p:sp>
         <p:nvSpPr>
-          <p:cNvPr id="33" name="Shape 31"/>
+          <p:cNvPr id="33" name="Rectangle 32"/>
           <p:cNvSpPr/>
           <p:nvPr/>
         </p:nvSpPr>
@@ -2038,7 +2038,7 @@
       </p:sp>
       <p:sp>
         <p:nvSpPr>
-          <p:cNvPr id="34" name="Text 32"/>
+          <p:cNvPr id="34" name="TextBox 33"/>
           <p:cNvSpPr txBox="1"/>
           <p:nvPr/>
         </p:nvSpPr>
@@ -2094,7 +2094,7 @@
       </p:sp>
       <p:sp>
         <p:nvSpPr>
-          <p:cNvPr id="35" name="Shape 33"/>
+          <p:cNvPr id="35" name="Oval 34"/>
           <p:cNvSpPr/>
           <p:nvPr/>
         </p:nvSpPr>
@@ -2119,7 +2119,7 @@
       </p:sp>
       <p:sp>
         <p:nvSpPr>
-          <p:cNvPr id="36" name="Shape 34"/>
+          <p:cNvPr id="36" name="Oval 35"/>
           <p:cNvSpPr/>
           <p:nvPr/>
         </p:nvSpPr>
@@ -2144,7 +2144,7 @@
       </p:sp>
       <p:sp>
         <p:nvSpPr>
-          <p:cNvPr id="37" name="Shape 35"/>
+          <p:cNvPr id="37" name="Partial Circle 36"/>
           <p:cNvSpPr/>
           <p:nvPr/>
         </p:nvSpPr>
@@ -2172,7 +2172,7 @@
       </p:sp>
       <p:sp>
         <p:nvSpPr>
-          <p:cNvPr id="38" name="Shape 36"/>
+          <p:cNvPr id="38" name="Oval 37"/>
           <p:cNvSpPr/>
           <p:nvPr/>
         </p:nvSpPr>
@@ -2197,7 +2197,7 @@
       </p:sp>
       <p:sp>
         <p:nvSpPr>
-          <p:cNvPr id="39" name="Shape 37"/>
+          <p:cNvPr id="39" name="Partial Circle 38"/>
           <p:cNvSpPr/>
           <p:nvPr/>
         </p:nvSpPr>
@@ -2225,7 +2225,7 @@
       </p:sp>
       <p:sp>
         <p:nvSpPr>
-          <p:cNvPr id="40" name="Text 38"/>
+          <p:cNvPr id="40" name="TextBox 39"/>
           <p:cNvSpPr txBox="1"/>
           <p:nvPr/>
         </p:nvSpPr>
@@ -2334,7 +2334,7 @@
       </p:sp>
       <p:sp>
         <p:nvSpPr>
-          <p:cNvPr id="41" name="Shape 39"/>
+          <p:cNvPr id="41" name="Straight Connector 40"/>
           <p:cNvSpPr/>
           <p:nvPr/>
         </p:nvSpPr>
@@ -2357,7 +2357,7 @@
       </p:sp>
       <p:sp>
         <p:nvSpPr>
-          <p:cNvPr id="42" name="Shape 40"/>
+          <p:cNvPr id="42" name="Rectangle 41"/>
           <p:cNvSpPr/>
           <p:nvPr/>
         </p:nvSpPr>
@@ -2382,7 +2382,7 @@
       </p:sp>
       <p:sp>
         <p:nvSpPr>
-          <p:cNvPr id="43" name="Shape 41"/>
+          <p:cNvPr id="43" name="Rectangle 42"/>
           <p:cNvSpPr/>
           <p:nvPr/>
         </p:nvSpPr>
@@ -2407,7 +2407,7 @@
       </p:sp>
       <p:sp>
         <p:nvSpPr>
-          <p:cNvPr id="44" name="Text 42"/>
+          <p:cNvPr id="44" name="TextBox 43"/>
           <p:cNvSpPr txBox="1"/>
           <p:nvPr/>
         </p:nvSpPr>
@@ -2463,7 +2463,7 @@
       </p:sp>
       <p:sp>
         <p:nvSpPr>
-          <p:cNvPr id="45" name="Shape 43"/>
+          <p:cNvPr id="45" name="Oval 44"/>
           <p:cNvSpPr/>
           <p:nvPr/>
         </p:nvSpPr>
@@ -2488,7 +2488,7 @@
       </p:sp>
       <p:sp>
         <p:nvSpPr>
-          <p:cNvPr id="46" name="Shape 44"/>
+          <p:cNvPr id="46" name="Oval 45"/>
           <p:cNvSpPr/>
           <p:nvPr/>
         </p:nvSpPr>
@@ -2513,7 +2513,7 @@
       </p:sp>
       <p:sp>
         <p:nvSpPr>
-          <p:cNvPr id="47" name="Shape 45"/>
+          <p:cNvPr id="47" name="Oval 46"/>
           <p:cNvSpPr/>
           <p:nvPr/>
         </p:nvSpPr>
@@ -2538,7 +2538,7 @@
       </p:sp>
       <p:sp>
         <p:nvSpPr>
-          <p:cNvPr id="48" name="Shape 46"/>
+          <p:cNvPr id="48" name="Partial Circle 47"/>
           <p:cNvSpPr/>
           <p:nvPr/>
         </p:nvSpPr>
@@ -2566,7 +2566,7 @@
       </p:sp>
       <p:sp>
         <p:nvSpPr>
-          <p:cNvPr id="49" name="Text 47"/>
+          <p:cNvPr id="49" name="TextBox 48"/>
           <p:cNvSpPr txBox="1"/>
           <p:nvPr/>
         </p:nvSpPr>
@@ -2661,7 +2661,7 @@
       </p:sp>
       <p:sp>
         <p:nvSpPr>
-          <p:cNvPr id="50" name="Shape 48"/>
+          <p:cNvPr id="50" name="Straight Connector 49"/>
           <p:cNvSpPr/>
           <p:nvPr/>
         </p:nvSpPr>
@@ -2684,7 +2684,7 @@
       </p:sp>
       <p:sp>
         <p:nvSpPr>
-          <p:cNvPr id="51" name="Shape 49"/>
+          <p:cNvPr id="51" name="Rectangle 50"/>
           <p:cNvSpPr/>
           <p:nvPr/>
         </p:nvSpPr>
@@ -2709,7 +2709,7 @@
       </p:sp>
       <p:sp>
         <p:nvSpPr>
-          <p:cNvPr id="52" name="Text 50"/>
+          <p:cNvPr id="52" name="TextBox 51"/>
           <p:cNvSpPr txBox="1"/>
           <p:nvPr/>
         </p:nvSpPr>
@@ -2765,7 +2765,7 @@
       </p:sp>
       <p:sp>
         <p:nvSpPr>
-          <p:cNvPr id="53" name="Shape 51"/>
+          <p:cNvPr id="53" name="Oval 52"/>
           <p:cNvSpPr/>
           <p:nvPr/>
         </p:nvSpPr>
@@ -2790,7 +2790,7 @@
       </p:sp>
       <p:sp>
         <p:nvSpPr>
-          <p:cNvPr id="54" name="Shape 52"/>
+          <p:cNvPr id="54" name="Partial Circle 53"/>
           <p:cNvSpPr/>
           <p:nvPr/>
         </p:nvSpPr>
@@ -2818,7 +2818,7 @@
       </p:sp>
       <p:sp>
         <p:nvSpPr>
-          <p:cNvPr id="55" name="Shape 53"/>
+          <p:cNvPr id="55" name="Oval 54"/>
           <p:cNvSpPr/>
           <p:nvPr/>
         </p:nvSpPr>
@@ -2843,7 +2843,7 @@
       </p:sp>
       <p:sp>
         <p:nvSpPr>
-          <p:cNvPr id="56" name="Shape 54"/>
+          <p:cNvPr id="56" name="Oval 55"/>
           <p:cNvSpPr/>
           <p:nvPr/>
         </p:nvSpPr>
@@ -2868,7 +2868,7 @@
       </p:sp>
       <p:sp>
         <p:nvSpPr>
-          <p:cNvPr id="57" name="Shape 55"/>
+          <p:cNvPr id="57" name="Partial Circle 56"/>
           <p:cNvSpPr/>
           <p:nvPr/>
         </p:nvSpPr>
@@ -2896,7 +2896,7 @@
       </p:sp>
       <p:sp>
         <p:nvSpPr>
-          <p:cNvPr id="58" name="Text 56"/>
+          <p:cNvPr id="58" name="TextBox 57"/>
           <p:cNvSpPr txBox="1"/>
           <p:nvPr/>
         </p:nvSpPr>
@@ -2935,7 +2935,7 @@
       </p:sp>
       <p:sp>
         <p:nvSpPr>
-          <p:cNvPr id="59" name="Shape 57"/>
+          <p:cNvPr id="59" name="Straight Connector 58"/>
           <p:cNvSpPr/>
           <p:nvPr/>
         </p:nvSpPr>
@@ -2958,7 +2958,7 @@
       </p:sp>
       <p:sp>
         <p:nvSpPr>
-          <p:cNvPr id="60" name="Shape 58"/>
+          <p:cNvPr id="60" name="Rectangle 59"/>
           <p:cNvSpPr/>
           <p:nvPr/>
         </p:nvSpPr>
@@ -2983,7 +2983,7 @@
       </p:sp>
       <p:sp>
         <p:nvSpPr>
-          <p:cNvPr id="61" name="Text 59"/>
+          <p:cNvPr id="61" name="TextBox 60"/>
           <p:cNvSpPr txBox="1"/>
           <p:nvPr/>
         </p:nvSpPr>
@@ -3039,7 +3039,7 @@
       </p:sp>
       <p:sp>
         <p:nvSpPr>
-          <p:cNvPr id="62" name="Shape 60"/>
+          <p:cNvPr id="62" name="Oval 61"/>
           <p:cNvSpPr/>
           <p:nvPr/>
         </p:nvSpPr>
@@ -3064,7 +3064,7 @@
       </p:sp>
       <p:sp>
         <p:nvSpPr>
-          <p:cNvPr id="63" name="Shape 61"/>
+          <p:cNvPr id="63" name="Partial Circle 62"/>
           <p:cNvSpPr/>
           <p:nvPr/>
         </p:nvSpPr>
@@ -3092,7 +3092,7 @@
       </p:sp>
       <p:sp>
         <p:nvSpPr>
-          <p:cNvPr id="64" name="Shape 62"/>
+          <p:cNvPr id="64" name="Oval 63"/>
           <p:cNvSpPr/>
           <p:nvPr/>
         </p:nvSpPr>
@@ -3117,7 +3117,7 @@
       </p:sp>
       <p:sp>
         <p:nvSpPr>
-          <p:cNvPr id="65" name="Shape 63"/>
+          <p:cNvPr id="65" name="Oval 64"/>
           <p:cNvSpPr/>
           <p:nvPr/>
         </p:nvSpPr>
@@ -3142,7 +3142,7 @@
       </p:sp>
       <p:sp>
         <p:nvSpPr>
-          <p:cNvPr id="66" name="Shape 64"/>
+          <p:cNvPr id="66" name="Partial Circle 65"/>
           <p:cNvSpPr/>
           <p:nvPr/>
         </p:nvSpPr>
@@ -3170,7 +3170,7 @@
       </p:sp>
       <p:sp>
         <p:nvSpPr>
-          <p:cNvPr id="67" name="Text 65"/>
+          <p:cNvPr id="67" name="TextBox 66"/>
           <p:cNvSpPr txBox="1"/>
           <p:nvPr/>
         </p:nvSpPr>
@@ -3265,7 +3265,7 @@
       </p:sp>
       <p:sp>
         <p:nvSpPr>
-          <p:cNvPr id="68" name="Shape 66"/>
+          <p:cNvPr id="68" name="Straight Connector 67"/>
           <p:cNvSpPr/>
           <p:nvPr/>
         </p:nvSpPr>
@@ -3288,7 +3288,7 @@
       </p:sp>
       <p:sp>
         <p:nvSpPr>
-          <p:cNvPr id="69" name="Shape 67"/>
+          <p:cNvPr id="69" name="Rectangle 68"/>
           <p:cNvSpPr/>
           <p:nvPr/>
         </p:nvSpPr>
@@ -3313,7 +3313,7 @@
       </p:sp>
       <p:sp>
         <p:nvSpPr>
-          <p:cNvPr id="70" name="Text 68"/>
+          <p:cNvPr id="70" name="TextBox 69"/>
           <p:cNvSpPr txBox="1"/>
           <p:nvPr/>
         </p:nvSpPr>
@@ -3369,7 +3369,7 @@
       </p:sp>
       <p:sp>
         <p:nvSpPr>
-          <p:cNvPr id="71" name="Shape 69"/>
+          <p:cNvPr id="71" name="Oval 70"/>
           <p:cNvSpPr/>
           <p:nvPr/>
         </p:nvSpPr>
@@ -3394,7 +3394,7 @@
       </p:sp>
       <p:sp>
         <p:nvSpPr>
-          <p:cNvPr id="72" name="Shape 70"/>
+          <p:cNvPr id="72" name="Partial Circle 71"/>
           <p:cNvSpPr/>
           <p:nvPr/>
         </p:nvSpPr>
@@ -3422,7 +3422,7 @@
       </p:sp>
       <p:sp>
         <p:nvSpPr>
-          <p:cNvPr id="73" name="Shape 71"/>
+          <p:cNvPr id="73" name="Oval 72"/>
           <p:cNvSpPr/>
           <p:nvPr/>
         </p:nvSpPr>
@@ -3447,7 +3447,7 @@
       </p:sp>
       <p:sp>
         <p:nvSpPr>
-          <p:cNvPr id="74" name="Shape 72"/>
+          <p:cNvPr id="74" name="Partial Circle 73"/>
           <p:cNvSpPr/>
           <p:nvPr/>
         </p:nvSpPr>
@@ -3475,7 +3475,7 @@
       </p:sp>
       <p:sp>
         <p:nvSpPr>
-          <p:cNvPr id="75" name="Shape 73"/>
+          <p:cNvPr id="75" name="Oval 74"/>
           <p:cNvSpPr/>
           <p:nvPr/>
         </p:nvSpPr>
@@ -3500,7 +3500,7 @@
       </p:sp>
       <p:sp>
         <p:nvSpPr>
-          <p:cNvPr id="76" name="Text 74"/>
+          <p:cNvPr id="76" name="TextBox 75"/>
           <p:cNvSpPr txBox="1"/>
           <p:nvPr/>
         </p:nvSpPr>
@@ -3531,7 +3531,7 @@
                 <a:ea typeface="Arial" pitchFamily="34" charset="-122"/>
                 <a:cs typeface="Arial" pitchFamily="34" charset="-120"/>
               </a:rPr>
-              <a:t>In/out $/1M: K3 </a:t>
+              <a:t>K3 </a:t>
             </a:r>
             <a:pPr indent="0" marL="0">
               <a:buNone/>
@@ -3563,11 +3563,28 @@
             </a:r>
             <a:endParaRPr lang="en-US" sz="900" dirty="0"/>
           </a:p>
-        </p:txBody>
-      </p:sp>
-      <p:sp>
-        <p:nvSpPr>
-          <p:cNvPr id="77" name="Shape 75"/>
+          <a:p>
+            <a:pPr indent="0" marL="0">
+              <a:buNone/>
+            </a:pPr>
+            <a:r>
+              <a:rPr lang="en-US" sz="900" dirty="0">
+                <a:solidFill>
+                  <a:srgbClr val="1F2A37"/>
+                </a:solidFill>
+                <a:latin typeface="Arial" pitchFamily="34" charset="0"/>
+                <a:ea typeface="Arial" pitchFamily="34" charset="-122"/>
+                <a:cs typeface="Arial" pitchFamily="34" charset="-120"/>
+              </a:rPr>
+              <a:t>List price per 1M tokens, input/output</a:t>
+            </a:r>
+            <a:endParaRPr lang="en-US" sz="900" dirty="0"/>
+          </a:p>
+        </p:txBody>
+      </p:sp>
+      <p:sp>
+        <p:nvSpPr>
+          <p:cNvPr id="77" name="Straight Connector 76"/>
           <p:cNvSpPr/>
           <p:nvPr/>
         </p:nvSpPr>
@@ -3590,7 +3607,7 @@
       </p:sp>
       <p:sp>
         <p:nvSpPr>
-          <p:cNvPr id="78" name="Shape 76"/>
+          <p:cNvPr id="78" name="Rectangle 77"/>
           <p:cNvSpPr/>
           <p:nvPr/>
         </p:nvSpPr>
@@ -3615,7 +3632,7 @@
       </p:sp>
       <p:sp>
         <p:nvSpPr>
-          <p:cNvPr id="79" name="Text 77"/>
+          <p:cNvPr id="79" name="TextBox 78"/>
           <p:cNvSpPr txBox="1"/>
           <p:nvPr/>
         </p:nvSpPr>
@@ -3671,7 +3688,7 @@
       </p:sp>
       <p:sp>
         <p:nvSpPr>
-          <p:cNvPr id="80" name="Text 78"/>
+          <p:cNvPr id="80" name="TextBox 79"/>
           <p:cNvSpPr txBox="1"/>
           <p:nvPr/>
         </p:nvSpPr>
@@ -3710,7 +3727,7 @@
       </p:sp>
       <p:sp>
         <p:nvSpPr>
-          <p:cNvPr id="81" name="Text 79"/>
+          <p:cNvPr id="81" name="TextBox 80"/>
           <p:cNvSpPr txBox="1"/>
           <p:nvPr/>
         </p:nvSpPr>
@@ -3749,7 +3766,7 @@
       </p:sp>
       <p:sp>
         <p:nvSpPr>
-          <p:cNvPr id="82" name="Shape 80"/>
+          <p:cNvPr id="82" name="Oval 81"/>
           <p:cNvSpPr/>
           <p:nvPr/>
         </p:nvSpPr>
@@ -3774,7 +3791,7 @@
       </p:sp>
       <p:sp>
         <p:nvSpPr>
-          <p:cNvPr id="83" name="Text 81"/>
+          <p:cNvPr id="83" name="TextBox 82"/>
           <p:cNvSpPr txBox="1"/>
           <p:nvPr/>
         </p:nvSpPr>
@@ -3813,7 +3830,7 @@
       </p:sp>
       <p:sp>
         <p:nvSpPr>
-          <p:cNvPr id="84" name="Shape 82"/>
+          <p:cNvPr id="84" name="Straight Connector 83"/>
           <p:cNvSpPr/>
           <p:nvPr/>
         </p:nvSpPr>
@@ -3836,7 +3853,7 @@
       </p:sp>
       <p:sp>
         <p:nvSpPr>
-          <p:cNvPr id="85" name="Text 83"/>
+          <p:cNvPr id="85" name="TextBox 84"/>
           <p:cNvSpPr txBox="1"/>
           <p:nvPr/>
         </p:nvSpPr>
@@ -3875,7 +3892,7 @@
       </p:sp>
       <p:sp>
         <p:nvSpPr>
-          <p:cNvPr id="86" name="Shape 84"/>
+          <p:cNvPr id="86" name="Straight Connector 85"/>
           <p:cNvSpPr/>
           <p:nvPr/>
         </p:nvSpPr>
@@ -3898,7 +3915,7 @@
       </p:sp>
       <p:sp>
         <p:nvSpPr>
-          <p:cNvPr id="87" name="Text 85"/>
+          <p:cNvPr id="87" name="TextBox 86"/>
           <p:cNvSpPr txBox="1"/>
           <p:nvPr/>
         </p:nvSpPr>
@@ -3954,7 +3971,7 @@
       </p:sp>
       <p:sp>
         <p:nvSpPr>
-          <p:cNvPr id="88" name="Text 86"/>
+          <p:cNvPr id="88" name="TextBox 87"/>
           <p:cNvSpPr txBox="1"/>
           <p:nvPr/>
         </p:nvSpPr>
@@ -4010,7 +4027,7 @@
       </p:sp>
       <p:sp>
         <p:nvSpPr>
-          <p:cNvPr id="89" name="Text 87"/>
+          <p:cNvPr id="89" name="TextBox 88"/>
           <p:cNvSpPr txBox="1"/>
           <p:nvPr/>
         </p:nvSpPr>
@@ -4066,7 +4083,7 @@
       </p:sp>
       <p:sp>
         <p:nvSpPr>
-          <p:cNvPr id="90" name="Text 88"/>
+          <p:cNvPr id="90" name="TextBox 89"/>
           <p:cNvSpPr txBox="1"/>
           <p:nvPr/>
         </p:nvSpPr>
@@ -4122,7 +4139,7 @@
       </p:sp>
       <p:sp>
         <p:nvSpPr>
-          <p:cNvPr id="91" name="Shape 89"/>
+          <p:cNvPr id="91" name="Straight Connector 90"/>
           <p:cNvSpPr/>
           <p:nvPr/>
         </p:nvSpPr>
@@ -4145,7 +4162,7 @@
       </p:sp>
       <p:sp>
         <p:nvSpPr>
-          <p:cNvPr id="92" name="Text 90"/>
+          <p:cNvPr id="92" name="TextBox 91"/>
           <p:cNvSpPr txBox="1"/>
           <p:nvPr/>
         </p:nvSpPr>
@@ -4184,7 +4201,7 @@
       </p:sp>
       <p:sp>
         <p:nvSpPr>
-          <p:cNvPr id="93" name="Text 91"/>
+          <p:cNvPr id="93" name="TextBox 92"/>
           <p:cNvSpPr txBox="1"/>
           <p:nvPr/>
         </p:nvSpPr>
@@ -4223,7 +4240,7 @@
       </p:sp>
       <p:sp>
         <p:nvSpPr>
-          <p:cNvPr id="94" name="Text 92"/>
+          <p:cNvPr id="94" name="TextBox 93"/>
           <p:cNvSpPr txBox="1"/>
           <p:nvPr/>
         </p:nvSpPr>
@@ -4262,7 +4279,7 @@
       </p:sp>
       <p:sp>
         <p:nvSpPr>
-          <p:cNvPr id="95" name="Text 93"/>
+          <p:cNvPr id="95" name="TextBox 94"/>
           <p:cNvSpPr txBox="1"/>
           <p:nvPr/>
         </p:nvSpPr>
@@ -4301,7 +4318,7 @@
       </p:sp>
       <p:sp>
         <p:nvSpPr>
-          <p:cNvPr id="96" name="Shape 94"/>
+          <p:cNvPr id="96" name="Straight Connector 95"/>
           <p:cNvSpPr/>
           <p:nvPr/>
         </p:nvSpPr>
@@ -4324,7 +4341,7 @@
       </p:sp>
       <p:sp>
         <p:nvSpPr>
-          <p:cNvPr id="97" name="Shape 95"/>
+          <p:cNvPr id="97" name="Rectangle 96"/>
           <p:cNvSpPr/>
           <p:nvPr/>
         </p:nvSpPr>
@@ -4349,7 +4366,7 @@
       </p:sp>
       <p:sp>
         <p:nvSpPr>
-          <p:cNvPr id="98" name="Text 96"/>
+          <p:cNvPr id="98" name="TextBox 97"/>
           <p:cNvSpPr txBox="1"/>
           <p:nvPr/>
         </p:nvSpPr>
@@ -4388,7 +4405,7 @@
       </p:sp>
       <p:sp>
         <p:nvSpPr>
-          <p:cNvPr id="99" name="Text 97"/>
+          <p:cNvPr id="99" name="TextBox 98"/>
           <p:cNvSpPr txBox="1"/>
           <p:nvPr/>
         </p:nvSpPr>
@@ -4427,7 +4444,7 @@
       </p:sp>
       <p:sp>
         <p:nvSpPr>
-          <p:cNvPr id="100" name="Text 98"/>
+          <p:cNvPr id="100" name="TextBox 99"/>
           <p:cNvSpPr txBox="1"/>
           <p:nvPr/>
         </p:nvSpPr>
@@ -4466,7 +4483,7 @@
       </p:sp>
       <p:sp>
         <p:nvSpPr>
-          <p:cNvPr id="101" name="Text 99"/>
+          <p:cNvPr id="101" name="TextBox 100"/>
           <p:cNvSpPr txBox="1"/>
           <p:nvPr/>
         </p:nvSpPr>
@@ -4505,7 +4522,7 @@
       </p:sp>
       <p:sp>
         <p:nvSpPr>
-          <p:cNvPr id="102" name="Shape 100"/>
+          <p:cNvPr id="102" name="Straight Connector 101"/>
           <p:cNvSpPr/>
           <p:nvPr/>
         </p:nvSpPr>
@@ -4528,7 +4545,7 @@
       </p:sp>
       <p:sp>
         <p:nvSpPr>
-          <p:cNvPr id="103" name="Shape 101"/>
+          <p:cNvPr id="103" name="Rectangle 102"/>
           <p:cNvSpPr/>
           <p:nvPr/>
         </p:nvSpPr>
@@ -4553,7 +4570,7 @@
       </p:sp>
       <p:sp>
         <p:nvSpPr>
-          <p:cNvPr id="104" name="Text 102"/>
+          <p:cNvPr id="104" name="TextBox 103"/>
           <p:cNvSpPr txBox="1"/>
           <p:nvPr/>
         </p:nvSpPr>
@@ -4592,7 +4609,7 @@
       </p:sp>
       <p:sp>
         <p:nvSpPr>
-          <p:cNvPr id="105" name="Text 103"/>
+          <p:cNvPr id="105" name="TextBox 104"/>
           <p:cNvSpPr txBox="1"/>
           <p:nvPr/>
         </p:nvSpPr>
@@ -4631,7 +4648,7 @@
       </p:sp>
       <p:sp>
         <p:nvSpPr>
-          <p:cNvPr id="106" name="Text 104"/>
+          <p:cNvPr id="106" name="TextBox 105"/>
           <p:cNvSpPr txBox="1"/>
           <p:nvPr/>
         </p:nvSpPr>
@@ -4670,7 +4687,7 @@
       </p:sp>
       <p:sp>
         <p:nvSpPr>
-          <p:cNvPr id="107" name="Text 105"/>
+          <p:cNvPr id="107" name="TextBox 106"/>
           <p:cNvSpPr txBox="1"/>
           <p:nvPr/>
         </p:nvSpPr>
@@ -4709,7 +4726,7 @@
       </p:sp>
       <p:sp>
         <p:nvSpPr>
-          <p:cNvPr id="108" name="Shape 106"/>
+          <p:cNvPr id="108" name="Straight Connector 107"/>
           <p:cNvSpPr/>
           <p:nvPr/>
         </p:nvSpPr>
@@ -4732,7 +4749,7 @@
       </p:sp>
       <p:sp>
         <p:nvSpPr>
-          <p:cNvPr id="109" name="Shape 107"/>
+          <p:cNvPr id="109" name="Rectangle 108"/>
           <p:cNvSpPr/>
           <p:nvPr/>
         </p:nvSpPr>
@@ -4757,7 +4774,7 @@
       </p:sp>
       <p:sp>
         <p:nvSpPr>
-          <p:cNvPr id="110" name="Text 108"/>
+          <p:cNvPr id="110" name="TextBox 109"/>
           <p:cNvSpPr txBox="1"/>
           <p:nvPr/>
         </p:nvSpPr>
@@ -4796,7 +4813,7 @@
       </p:sp>
       <p:sp>
         <p:nvSpPr>
-          <p:cNvPr id="111" name="Text 109"/>
+          <p:cNvPr id="111" name="TextBox 110"/>
           <p:cNvSpPr txBox="1"/>
           <p:nvPr/>
         </p:nvSpPr>
@@ -4835,7 +4852,7 @@
       </p:sp>
       <p:sp>
         <p:nvSpPr>
-          <p:cNvPr id="112" name="Text 110"/>
+          <p:cNvPr id="112" name="TextBox 111"/>
           <p:cNvSpPr txBox="1"/>
           <p:nvPr/>
         </p:nvSpPr>
@@ -4874,7 +4891,7 @@
       </p:sp>
       <p:sp>
         <p:nvSpPr>
-          <p:cNvPr id="113" name="Text 111"/>
+          <p:cNvPr id="113" name="TextBox 112"/>
           <p:cNvSpPr txBox="1"/>
           <p:nvPr/>
         </p:nvSpPr>
@@ -4913,7 +4930,7 @@
       </p:sp>
       <p:sp>
         <p:nvSpPr>
-          <p:cNvPr id="114" name="Shape 112"/>
+          <p:cNvPr id="114" name="Straight Connector 113"/>
           <p:cNvSpPr/>
           <p:nvPr/>
         </p:nvSpPr>
@@ -4936,7 +4953,7 @@
       </p:sp>
       <p:sp>
         <p:nvSpPr>
-          <p:cNvPr id="115" name="Text 113"/>
+          <p:cNvPr id="115" name="TextBox 114"/>
           <p:cNvSpPr txBox="1"/>
           <p:nvPr/>
         </p:nvSpPr>
@@ -4975,7 +4992,7 @@
       </p:sp>
       <p:sp>
         <p:nvSpPr>
-          <p:cNvPr id="116" name="Text 114"/>
+          <p:cNvPr id="116" name="TextBox 115"/>
           <p:cNvSpPr txBox="1"/>
           <p:nvPr/>
         </p:nvSpPr>
@@ -5014,7 +5031,7 @@
       </p:sp>
       <p:sp>
         <p:nvSpPr>
-          <p:cNvPr id="117" name="Text 115"/>
+          <p:cNvPr id="117" name="TextBox 116"/>
           <p:cNvSpPr txBox="1"/>
           <p:nvPr/>
         </p:nvSpPr>
@@ -5053,7 +5070,7 @@
       </p:sp>
       <p:sp>
         <p:nvSpPr>
-          <p:cNvPr id="118" name="Text 116"/>
+          <p:cNvPr id="118" name="TextBox 117"/>
           <p:cNvSpPr txBox="1"/>
           <p:nvPr/>
         </p:nvSpPr>
@@ -5092,7 +5109,7 @@
       </p:sp>
       <p:sp>
         <p:nvSpPr>
-          <p:cNvPr id="119" name="Shape 117"/>
+          <p:cNvPr id="119" name="Straight Connector 118"/>
           <p:cNvSpPr/>
           <p:nvPr/>
         </p:nvSpPr>
@@ -5115,7 +5132,7 @@
       </p:sp>
       <p:sp>
         <p:nvSpPr>
-          <p:cNvPr id="120" name="Text 118"/>
+          <p:cNvPr id="120" name="TextBox 119"/>
           <p:cNvSpPr txBox="1"/>
           <p:nvPr/>
         </p:nvSpPr>
@@ -5154,7 +5171,7 @@
       </p:sp>
       <p:sp>
         <p:nvSpPr>
-          <p:cNvPr id="121" name="Text 119"/>
+          <p:cNvPr id="121" name="TextBox 120"/>
           <p:cNvSpPr txBox="1"/>
           <p:nvPr/>
         </p:nvSpPr>
@@ -5193,7 +5210,7 @@
       </p:sp>
       <p:sp>
         <p:nvSpPr>
-          <p:cNvPr id="122" name="Text 120"/>
+          <p:cNvPr id="122" name="TextBox 121"/>
           <p:cNvSpPr txBox="1"/>
           <p:nvPr/>
         </p:nvSpPr>
@@ -5232,7 +5249,7 @@
       </p:sp>
       <p:sp>
         <p:nvSpPr>
-          <p:cNvPr id="123" name="Text 121"/>
+          <p:cNvPr id="123" name="TextBox 122"/>
           <p:cNvSpPr txBox="1"/>
           <p:nvPr/>
         </p:nvSpPr>
@@ -5271,7 +5288,7 @@
       </p:sp>
       <p:sp>
         <p:nvSpPr>
-          <p:cNvPr id="124" name="Shape 122"/>
+          <p:cNvPr id="124" name="Straight Connector 123"/>
           <p:cNvSpPr/>
           <p:nvPr/>
         </p:nvSpPr>
@@ -5294,7 +5311,7 @@
       </p:sp>
       <p:sp>
         <p:nvSpPr>
-          <p:cNvPr id="125" name="Shape 123"/>
+          <p:cNvPr id="125" name="Rectangle 124"/>
           <p:cNvSpPr/>
           <p:nvPr/>
         </p:nvSpPr>
@@ -5319,7 +5336,7 @@
       </p:sp>
       <p:sp>
         <p:nvSpPr>
-          <p:cNvPr id="126" name="Text 124"/>
+          <p:cNvPr id="126" name="TextBox 125"/>
           <p:cNvSpPr txBox="1"/>
           <p:nvPr/>
         </p:nvSpPr>
@@ -5372,7 +5389,7 @@
       </p:sp>
       <p:sp>
         <p:nvSpPr>
-          <p:cNvPr id="127" name="Text 125"/>
+          <p:cNvPr id="127" name="TextBox 126"/>
           <p:cNvSpPr txBox="1"/>
           <p:nvPr/>
         </p:nvSpPr>
@@ -5411,7 +5428,7 @@
       </p:sp>
       <p:sp>
         <p:nvSpPr>
-          <p:cNvPr id="128" name="Text 126"/>
+          <p:cNvPr id="128" name="TextBox 127"/>
           <p:cNvSpPr txBox="1"/>
           <p:nvPr/>
         </p:nvSpPr>
@@ -5450,7 +5467,7 @@
       </p:sp>
       <p:sp>
         <p:nvSpPr>
-          <p:cNvPr id="129" name="Text 127"/>
+          <p:cNvPr id="129" name="TextBox 128"/>
           <p:cNvSpPr txBox="1"/>
           <p:nvPr/>
         </p:nvSpPr>
@@ -5489,7 +5506,7 @@
       </p:sp>
       <p:sp>
         <p:nvSpPr>
-          <p:cNvPr id="130" name="Shape 128"/>
+          <p:cNvPr id="130" name="Straight Connector 129"/>
           <p:cNvSpPr/>
           <p:nvPr/>
         </p:nvSpPr>
@@ -5512,7 +5529,7 @@
       </p:sp>
       <p:sp>
         <p:nvSpPr>
-          <p:cNvPr id="131" name="Text 129"/>
+          <p:cNvPr id="131" name="TextBox 130"/>
           <p:cNvSpPr txBox="1"/>
           <p:nvPr/>
         </p:nvSpPr>
@@ -5551,22 +5568,20 @@
       </p:sp>
       <p:sp>
         <p:nvSpPr>
-          <p:cNvPr id="132" name="Shape 130"/>
+          <p:cNvPr id="132" name="Straight Connector 131"/>
           <p:cNvSpPr/>
           <p:nvPr/>
         </p:nvSpPr>
         <p:spPr>
           <a:xfrm>
             <a:off x="8229600" y="4663440"/>
-            <a:ext cx="3550615" cy="1463040"/>
-          </a:xfrm>
-          <a:prstGeom prst="rect">
-            <a:avLst/>
-          </a:prstGeom>
-          <a:solidFill>
-            <a:srgbClr val="041E42"/>
-          </a:solidFill>
-          <a:ln w="12700">
+            <a:ext cx="3550615" cy="0"/>
+          </a:xfrm>
+          <a:prstGeom prst="line">
+            <a:avLst/>
+          </a:prstGeom>
+          <a:noFill/>
+          <a:ln w="9525">
             <a:solidFill>
               <a:srgbClr val="041E42"/>
             </a:solidFill>
@@ -5576,32 +5591,133 @@
       </p:sp>
       <p:sp>
         <p:nvSpPr>
-          <p:cNvPr id="133" name="Text 131"/>
-          <p:cNvSpPr txBox="1"/>
-          <p:nvPr/>
-        </p:nvSpPr>
-        <p:spPr>
-          <a:xfrm>
-            <a:off x="8394192" y="4791456"/>
-            <a:ext cx="1828800" cy="182880"/>
-          </a:xfrm>
-          <a:prstGeom prst="rect">
-            <a:avLst/>
-          </a:prstGeom>
-          <a:noFill/>
-          <a:ln/>
-        </p:spPr>
-        <p:txBody>
-          <a:bodyPr wrap="square" lIns="0" tIns="0" rIns="0" bIns="0" rtlCol="0" anchor="t"/>
-          <a:lstStyle/>
-          <a:p>
-            <a:pPr indent="0" marL="0">
-              <a:buNone/>
-            </a:pPr>
-            <a:r>
-              <a:rPr lang="en-US" sz="1050" b="1" dirty="0">
-                <a:solidFill>
-                  <a:srgbClr val="FFFFFF"/>
+          <p:cNvPr id="133" name="TextBox 132"/>
+          <p:cNvSpPr txBox="1"/>
+          <p:nvPr/>
+        </p:nvSpPr>
+        <p:spPr>
+          <a:xfrm>
+            <a:off x="8229600" y="4663440"/>
+            <a:ext cx="1024128" cy="292608"/>
+          </a:xfrm>
+          <a:prstGeom prst="rect">
+            <a:avLst/>
+          </a:prstGeom>
+          <a:noFill/>
+          <a:ln/>
+        </p:spPr>
+        <p:txBody>
+          <a:bodyPr wrap="square" lIns="0" tIns="0" rIns="0" bIns="0" rtlCol="0" anchor="ctr"/>
+          <a:lstStyle/>
+          <a:p>
+            <a:pPr indent="0" marL="0">
+              <a:buNone/>
+            </a:pPr>
+            <a:r>
+              <a:rPr lang="en-US" sz="1000" b="1" dirty="0">
+                <a:solidFill>
+                  <a:srgbClr val="041E42"/>
+                </a:solidFill>
+                <a:latin typeface="Arial" pitchFamily="34" charset="0"/>
+                <a:ea typeface="Arial" pitchFamily="34" charset="-122"/>
+                <a:cs typeface="Arial" pitchFamily="34" charset="-120"/>
+              </a:rPr>
+              <a:t>Model</a:t>
+            </a:r>
+            <a:endParaRPr lang="en-US" sz="1000" dirty="0"/>
+          </a:p>
+        </p:txBody>
+      </p:sp>
+      <p:sp>
+        <p:nvSpPr>
+          <p:cNvPr id="134" name="TextBox 133"/>
+          <p:cNvSpPr txBox="1"/>
+          <p:nvPr/>
+        </p:nvSpPr>
+        <p:spPr>
+          <a:xfrm>
+            <a:off x="9253728" y="4663440"/>
+            <a:ext cx="2526487" cy="292608"/>
+          </a:xfrm>
+          <a:prstGeom prst="rect">
+            <a:avLst/>
+          </a:prstGeom>
+          <a:noFill/>
+          <a:ln/>
+        </p:spPr>
+        <p:txBody>
+          <a:bodyPr wrap="square" lIns="0" tIns="0" rIns="0" bIns="0" rtlCol="0" anchor="ctr"/>
+          <a:lstStyle/>
+          <a:p>
+            <a:pPr indent="0" marL="0">
+              <a:buNone/>
+            </a:pPr>
+            <a:r>
+              <a:rPr lang="en-US" sz="1000" b="1" dirty="0">
+                <a:solidFill>
+                  <a:srgbClr val="041E42"/>
+                </a:solidFill>
+                <a:latin typeface="Arial" pitchFamily="34" charset="0"/>
+                <a:ea typeface="Arial" pitchFamily="34" charset="-122"/>
+                <a:cs typeface="Arial" pitchFamily="34" charset="-120"/>
+              </a:rPr>
+              <a:t>Use for</a:t>
+            </a:r>
+            <a:endParaRPr lang="en-US" sz="1000" dirty="0"/>
+          </a:p>
+        </p:txBody>
+      </p:sp>
+      <p:sp>
+        <p:nvSpPr>
+          <p:cNvPr id="135" name="Straight Connector 134"/>
+          <p:cNvSpPr/>
+          <p:nvPr/>
+        </p:nvSpPr>
+        <p:spPr>
+          <a:xfrm>
+            <a:off x="8229600" y="4956048"/>
+            <a:ext cx="3550615" cy="0"/>
+          </a:xfrm>
+          <a:prstGeom prst="line">
+            <a:avLst/>
+          </a:prstGeom>
+          <a:noFill/>
+          <a:ln w="9525">
+            <a:solidFill>
+              <a:srgbClr val="C9D0D9"/>
+            </a:solidFill>
+            <a:prstDash val="solid"/>
+          </a:ln>
+        </p:spPr>
+      </p:sp>
+      <p:sp>
+        <p:nvSpPr>
+          <p:cNvPr id="136" name="TextBox 135"/>
+          <p:cNvSpPr txBox="1"/>
+          <p:nvPr/>
+        </p:nvSpPr>
+        <p:spPr>
+          <a:xfrm>
+            <a:off x="8229600" y="4956048"/>
+            <a:ext cx="1024128" cy="390144"/>
+          </a:xfrm>
+          <a:prstGeom prst="rect">
+            <a:avLst/>
+          </a:prstGeom>
+          <a:noFill/>
+          <a:ln/>
+        </p:spPr>
+        <p:txBody>
+          <a:bodyPr wrap="square" lIns="0" tIns="0" rIns="0" bIns="0" rtlCol="0" anchor="ctr"/>
+          <a:lstStyle/>
+          <a:p>
+            <a:pPr indent="0" marL="0">
+              <a:buNone/>
+            </a:pPr>
+            <a:r>
+              <a:rPr lang="en-US" sz="900" b="1" dirty="0">
+                <a:solidFill>
+                  <a:srgbClr val="1F2A37"/>
                 </a:solidFill>
                 <a:latin typeface="Arial" pitchFamily="34" charset="0"/>
                 <a:ea typeface="Arial" pitchFamily="34" charset="-122"/>
@@ -5609,68 +5725,29 @@
               </a:rPr>
               <a:t>Opus 5.5</a:t>
             </a:r>
-            <a:endParaRPr lang="en-US" sz="1050" dirty="0"/>
-          </a:p>
-        </p:txBody>
-      </p:sp>
-      <p:sp>
-        <p:nvSpPr>
-          <p:cNvPr id="134" name="Text 132"/>
-          <p:cNvSpPr txBox="1"/>
-          <p:nvPr/>
-        </p:nvSpPr>
-        <p:spPr>
-          <a:xfrm>
-            <a:off x="10335463" y="4809744"/>
-            <a:ext cx="1280160" cy="164592"/>
-          </a:xfrm>
-          <a:prstGeom prst="rect">
-            <a:avLst/>
-          </a:prstGeom>
-          <a:noFill/>
-          <a:ln/>
-        </p:spPr>
-        <p:txBody>
-          <a:bodyPr wrap="square" lIns="0" tIns="0" rIns="0" bIns="0" rtlCol="0" anchor="t"/>
-          <a:lstStyle/>
-          <a:p>
-            <a:pPr algn="r" indent="0" marL="0">
-              <a:buNone/>
-            </a:pPr>
-            <a:r>
-              <a:rPr lang="en-US" sz="750" b="1" spc="100" kern="0" dirty="0">
-                <a:solidFill>
-                  <a:srgbClr val="A9BBD3"/>
-                </a:solidFill>
-                <a:latin typeface="Arial" pitchFamily="34" charset="0"/>
-                <a:ea typeface="Arial" pitchFamily="34" charset="-122"/>
-                <a:cs typeface="Arial" pitchFamily="34" charset="-120"/>
-              </a:rPr>
-              <a:t>DEFAULT</a:t>
-            </a:r>
-            <a:endParaRPr lang="en-US" sz="750" dirty="0"/>
-          </a:p>
-        </p:txBody>
-      </p:sp>
-      <p:sp>
-        <p:nvSpPr>
-          <p:cNvPr id="135" name="Text 133"/>
-          <p:cNvSpPr txBox="1"/>
-          <p:nvPr/>
-        </p:nvSpPr>
-        <p:spPr>
-          <a:xfrm>
-            <a:off x="8394192" y="4992624"/>
-            <a:ext cx="3221431" cy="164592"/>
-          </a:xfrm>
-          <a:prstGeom prst="rect">
-            <a:avLst/>
-          </a:prstGeom>
-          <a:noFill/>
-          <a:ln/>
-        </p:spPr>
-        <p:txBody>
-          <a:bodyPr wrap="square" lIns="0" tIns="0" rIns="0" bIns="0" rtlCol="0" anchor="t"/>
+            <a:endParaRPr lang="en-US" sz="900" dirty="0"/>
+          </a:p>
+        </p:txBody>
+      </p:sp>
+      <p:sp>
+        <p:nvSpPr>
+          <p:cNvPr id="137" name="TextBox 136"/>
+          <p:cNvSpPr txBox="1"/>
+          <p:nvPr/>
+        </p:nvSpPr>
+        <p:spPr>
+          <a:xfrm>
+            <a:off x="9253728" y="4956048"/>
+            <a:ext cx="2526487" cy="390144"/>
+          </a:xfrm>
+          <a:prstGeom prst="rect">
+            <a:avLst/>
+          </a:prstGeom>
+          <a:noFill/>
+          <a:ln/>
+        </p:spPr>
+        <p:txBody>
+          <a:bodyPr wrap="square" lIns="0" tIns="0" rIns="0" bIns="0" rtlCol="0" anchor="ctr"/>
           <a:lstStyle/>
           <a:p>
             <a:pPr indent="0" marL="0">
@@ -5679,13 +5756,13 @@
             <a:r>
               <a:rPr lang="en-US" sz="900" dirty="0">
                 <a:solidFill>
-                  <a:srgbClr val="DCE4EE"/>
-                </a:solidFill>
-                <a:latin typeface="Arial" pitchFamily="34" charset="0"/>
-                <a:ea typeface="Arial" pitchFamily="34" charset="-122"/>
-                <a:cs typeface="Arial" pitchFamily="34" charset="-120"/>
-              </a:rPr>
-              <a:t>Coding, agents and analysis at c.60% below Astra's price</a:t>
+                  <a:srgbClr val="1F2A37"/>
+                </a:solidFill>
+                <a:latin typeface="Arial" pitchFamily="34" charset="0"/>
+                <a:ea typeface="Arial" pitchFamily="34" charset="-122"/>
+                <a:cs typeface="Arial" pitchFamily="34" charset="-120"/>
+              </a:rPr>
+              <a:t>Default for coding, agents and analyst work; c.60% below Astra at list price</a:t>
             </a:r>
             <a:endParaRPr lang="en-US" sz="900" dirty="0"/>
           </a:p>
@@ -5693,14 +5770,14 @@
       </p:sp>
       <p:sp>
         <p:nvSpPr>
-          <p:cNvPr id="136" name="Shape 134"/>
-          <p:cNvSpPr/>
-          <p:nvPr/>
-        </p:nvSpPr>
-        <p:spPr>
-          <a:xfrm>
-            <a:off x="8394192" y="5169408"/>
-            <a:ext cx="3221431" cy="0"/>
+          <p:cNvPr id="138" name="Straight Connector 137"/>
+          <p:cNvSpPr/>
+          <p:nvPr/>
+        </p:nvSpPr>
+        <p:spPr>
+          <a:xfrm>
+            <a:off x="8229600" y="5346192"/>
+            <a:ext cx="3550615" cy="0"/>
           </a:xfrm>
           <a:prstGeom prst="line">
             <a:avLst/>
@@ -5708,40 +5785,40 @@
           <a:noFill/>
           <a:ln w="6350">
             <a:solidFill>
-              <a:srgbClr val="2A4570"/>
-            </a:solidFill>
-            <a:prstDash val="solid"/>
-          </a:ln>
-        </p:spPr>
-      </p:sp>
-      <p:sp>
-        <p:nvSpPr>
-          <p:cNvPr id="137" name="Text 135"/>
-          <p:cNvSpPr txBox="1"/>
-          <p:nvPr/>
-        </p:nvSpPr>
-        <p:spPr>
-          <a:xfrm>
-            <a:off x="8394192" y="5242560"/>
-            <a:ext cx="1828800" cy="182880"/>
-          </a:xfrm>
-          <a:prstGeom prst="rect">
-            <a:avLst/>
-          </a:prstGeom>
-          <a:noFill/>
-          <a:ln/>
-        </p:spPr>
-        <p:txBody>
-          <a:bodyPr wrap="square" lIns="0" tIns="0" rIns="0" bIns="0" rtlCol="0" anchor="t"/>
-          <a:lstStyle/>
-          <a:p>
-            <a:pPr indent="0" marL="0">
-              <a:buNone/>
-            </a:pPr>
-            <a:r>
-              <a:rPr lang="en-US" sz="1050" b="1" dirty="0">
-                <a:solidFill>
-                  <a:srgbClr val="FFFFFF"/>
+              <a:srgbClr val="E3E7EC"/>
+            </a:solidFill>
+            <a:prstDash val="solid"/>
+          </a:ln>
+        </p:spPr>
+      </p:sp>
+      <p:sp>
+        <p:nvSpPr>
+          <p:cNvPr id="139" name="TextBox 138"/>
+          <p:cNvSpPr txBox="1"/>
+          <p:nvPr/>
+        </p:nvSpPr>
+        <p:spPr>
+          <a:xfrm>
+            <a:off x="8229600" y="5346192"/>
+            <a:ext cx="1024128" cy="390144"/>
+          </a:xfrm>
+          <a:prstGeom prst="rect">
+            <a:avLst/>
+          </a:prstGeom>
+          <a:noFill/>
+          <a:ln/>
+        </p:spPr>
+        <p:txBody>
+          <a:bodyPr wrap="square" lIns="0" tIns="0" rIns="0" bIns="0" rtlCol="0" anchor="ctr"/>
+          <a:lstStyle/>
+          <a:p>
+            <a:pPr indent="0" marL="0">
+              <a:buNone/>
+            </a:pPr>
+            <a:r>
+              <a:rPr lang="en-US" sz="900" b="1" dirty="0">
+                <a:solidFill>
+                  <a:srgbClr val="1F2A37"/>
                 </a:solidFill>
                 <a:latin typeface="Arial" pitchFamily="34" charset="0"/>
                 <a:ea typeface="Arial" pitchFamily="34" charset="-122"/>
@@ -5749,68 +5826,29 @@
               </a:rPr>
               <a:t>GPT-6 Astra</a:t>
             </a:r>
-            <a:endParaRPr lang="en-US" sz="1050" dirty="0"/>
-          </a:p>
-        </p:txBody>
-      </p:sp>
-      <p:sp>
-        <p:nvSpPr>
-          <p:cNvPr id="138" name="Text 136"/>
-          <p:cNvSpPr txBox="1"/>
-          <p:nvPr/>
-        </p:nvSpPr>
-        <p:spPr>
-          <a:xfrm>
-            <a:off x="10335463" y="5260848"/>
-            <a:ext cx="1280160" cy="164592"/>
-          </a:xfrm>
-          <a:prstGeom prst="rect">
-            <a:avLst/>
-          </a:prstGeom>
-          <a:noFill/>
-          <a:ln/>
-        </p:spPr>
-        <p:txBody>
-          <a:bodyPr wrap="square" lIns="0" tIns="0" rIns="0" bIns="0" rtlCol="0" anchor="t"/>
-          <a:lstStyle/>
-          <a:p>
-            <a:pPr algn="r" indent="0" marL="0">
-              <a:buNone/>
-            </a:pPr>
-            <a:r>
-              <a:rPr lang="en-US" sz="750" b="1" spc="100" kern="0" dirty="0">
-                <a:solidFill>
-                  <a:srgbClr val="A9BBD3"/>
-                </a:solidFill>
-                <a:latin typeface="Arial" pitchFamily="34" charset="0"/>
-                <a:ea typeface="Arial" pitchFamily="34" charset="-122"/>
-                <a:cs typeface="Arial" pitchFamily="34" charset="-120"/>
-              </a:rPr>
-              <a:t>SPECIALIST</a:t>
-            </a:r>
-            <a:endParaRPr lang="en-US" sz="750" dirty="0"/>
-          </a:p>
-        </p:txBody>
-      </p:sp>
-      <p:sp>
-        <p:nvSpPr>
-          <p:cNvPr id="139" name="Text 137"/>
-          <p:cNvSpPr txBox="1"/>
-          <p:nvPr/>
-        </p:nvSpPr>
-        <p:spPr>
-          <a:xfrm>
-            <a:off x="8394192" y="5443728"/>
-            <a:ext cx="3221431" cy="164592"/>
-          </a:xfrm>
-          <a:prstGeom prst="rect">
-            <a:avLst/>
-          </a:prstGeom>
-          <a:noFill/>
-          <a:ln/>
-        </p:spPr>
-        <p:txBody>
-          <a:bodyPr wrap="square" lIns="0" tIns="0" rIns="0" bIns="0" rtlCol="0" anchor="t"/>
+            <a:endParaRPr lang="en-US" sz="900" dirty="0"/>
+          </a:p>
+        </p:txBody>
+      </p:sp>
+      <p:sp>
+        <p:nvSpPr>
+          <p:cNvPr id="140" name="TextBox 139"/>
+          <p:cNvSpPr txBox="1"/>
+          <p:nvPr/>
+        </p:nvSpPr>
+        <p:spPr>
+          <a:xfrm>
+            <a:off x="9253728" y="5346192"/>
+            <a:ext cx="2526487" cy="390144"/>
+          </a:xfrm>
+          <a:prstGeom prst="rect">
+            <a:avLst/>
+          </a:prstGeom>
+          <a:noFill/>
+          <a:ln/>
+        </p:spPr>
+        <p:txBody>
+          <a:bodyPr wrap="square" lIns="0" tIns="0" rIns="0" bIns="0" rtlCol="0" anchor="ctr"/>
           <a:lstStyle/>
           <a:p>
             <a:pPr indent="0" marL="0">
@@ -5819,7 +5857,7 @@
             <a:r>
               <a:rPr lang="en-US" sz="900" dirty="0">
                 <a:solidFill>
-                  <a:srgbClr val="DCE4EE"/>
+                  <a:srgbClr val="1F2A37"/>
                 </a:solidFill>
                 <a:latin typeface="Arial" pitchFamily="34" charset="0"/>
                 <a:ea typeface="Arial" pitchFamily="34" charset="-122"/>
@@ -5833,14 +5871,14 @@
       </p:sp>
       <p:sp>
         <p:nvSpPr>
-          <p:cNvPr id="140" name="Shape 138"/>
-          <p:cNvSpPr/>
-          <p:nvPr/>
-        </p:nvSpPr>
-        <p:spPr>
-          <a:xfrm>
-            <a:off x="8394192" y="5620512"/>
-            <a:ext cx="3221431" cy="0"/>
+          <p:cNvPr id="141" name="Straight Connector 140"/>
+          <p:cNvSpPr/>
+          <p:nvPr/>
+        </p:nvSpPr>
+        <p:spPr>
+          <a:xfrm>
+            <a:off x="8229600" y="5736336"/>
+            <a:ext cx="3550615" cy="0"/>
           </a:xfrm>
           <a:prstGeom prst="line">
             <a:avLst/>
@@ -5848,40 +5886,40 @@
           <a:noFill/>
           <a:ln w="6350">
             <a:solidFill>
-              <a:srgbClr val="2A4570"/>
-            </a:solidFill>
-            <a:prstDash val="solid"/>
-          </a:ln>
-        </p:spPr>
-      </p:sp>
-      <p:sp>
-        <p:nvSpPr>
-          <p:cNvPr id="141" name="Text 139"/>
-          <p:cNvSpPr txBox="1"/>
-          <p:nvPr/>
-        </p:nvSpPr>
-        <p:spPr>
-          <a:xfrm>
-            <a:off x="8394192" y="5693664"/>
-            <a:ext cx="1828800" cy="182880"/>
-          </a:xfrm>
-          <a:prstGeom prst="rect">
-            <a:avLst/>
-          </a:prstGeom>
-          <a:noFill/>
-          <a:ln/>
-        </p:spPr>
-        <p:txBody>
-          <a:bodyPr wrap="square" lIns="0" tIns="0" rIns="0" bIns="0" rtlCol="0" anchor="t"/>
-          <a:lstStyle/>
-          <a:p>
-            <a:pPr indent="0" marL="0">
-              <a:buNone/>
-            </a:pPr>
-            <a:r>
-              <a:rPr lang="en-US" sz="1050" b="1" dirty="0">
-                <a:solidFill>
-                  <a:srgbClr val="FFFFFF"/>
+              <a:srgbClr val="E3E7EC"/>
+            </a:solidFill>
+            <a:prstDash val="solid"/>
+          </a:ln>
+        </p:spPr>
+      </p:sp>
+      <p:sp>
+        <p:nvSpPr>
+          <p:cNvPr id="142" name="TextBox 141"/>
+          <p:cNvSpPr txBox="1"/>
+          <p:nvPr/>
+        </p:nvSpPr>
+        <p:spPr>
+          <a:xfrm>
+            <a:off x="8229600" y="5736336"/>
+            <a:ext cx="1024128" cy="390144"/>
+          </a:xfrm>
+          <a:prstGeom prst="rect">
+            <a:avLst/>
+          </a:prstGeom>
+          <a:noFill/>
+          <a:ln/>
+        </p:spPr>
+        <p:txBody>
+          <a:bodyPr wrap="square" lIns="0" tIns="0" rIns="0" bIns="0" rtlCol="0" anchor="ctr"/>
+          <a:lstStyle/>
+          <a:p>
+            <a:pPr indent="0" marL="0">
+              <a:buNone/>
+            </a:pPr>
+            <a:r>
+              <a:rPr lang="en-US" sz="900" b="1" dirty="0">
+                <a:solidFill>
+                  <a:srgbClr val="1F2A37"/>
                 </a:solidFill>
                 <a:latin typeface="Arial" pitchFamily="34" charset="0"/>
                 <a:ea typeface="Arial" pitchFamily="34" charset="-122"/>
@@ -5889,68 +5927,29 @@
               </a:rPr>
               <a:t>Kimi K3</a:t>
             </a:r>
-            <a:endParaRPr lang="en-US" sz="1050" dirty="0"/>
-          </a:p>
-        </p:txBody>
-      </p:sp>
-      <p:sp>
-        <p:nvSpPr>
-          <p:cNvPr id="142" name="Text 140"/>
-          <p:cNvSpPr txBox="1"/>
-          <p:nvPr/>
-        </p:nvSpPr>
-        <p:spPr>
-          <a:xfrm>
-            <a:off x="10335463" y="5711952"/>
-            <a:ext cx="1280160" cy="164592"/>
-          </a:xfrm>
-          <a:prstGeom prst="rect">
-            <a:avLst/>
-          </a:prstGeom>
-          <a:noFill/>
-          <a:ln/>
-        </p:spPr>
-        <p:txBody>
-          <a:bodyPr wrap="square" lIns="0" tIns="0" rIns="0" bIns="0" rtlCol="0" anchor="t"/>
-          <a:lstStyle/>
-          <a:p>
-            <a:pPr algn="r" indent="0" marL="0">
-              <a:buNone/>
-            </a:pPr>
-            <a:r>
-              <a:rPr lang="en-US" sz="750" b="1" spc="100" kern="0" dirty="0">
-                <a:solidFill>
-                  <a:srgbClr val="A9BBD3"/>
-                </a:solidFill>
-                <a:latin typeface="Arial" pitchFamily="34" charset="0"/>
-                <a:ea typeface="Arial" pitchFamily="34" charset="-122"/>
-                <a:cs typeface="Arial" pitchFamily="34" charset="-120"/>
-              </a:rPr>
-              <a:t>SELF-HOSTED</a:t>
-            </a:r>
-            <a:endParaRPr lang="en-US" sz="750" dirty="0"/>
-          </a:p>
-        </p:txBody>
-      </p:sp>
-      <p:sp>
-        <p:nvSpPr>
-          <p:cNvPr id="143" name="Text 141"/>
-          <p:cNvSpPr txBox="1"/>
-          <p:nvPr/>
-        </p:nvSpPr>
-        <p:spPr>
-          <a:xfrm>
-            <a:off x="8394192" y="5894832"/>
-            <a:ext cx="3221431" cy="164592"/>
-          </a:xfrm>
-          <a:prstGeom prst="rect">
-            <a:avLst/>
-          </a:prstGeom>
-          <a:noFill/>
-          <a:ln/>
-        </p:spPr>
-        <p:txBody>
-          <a:bodyPr wrap="square" lIns="0" tIns="0" rIns="0" bIns="0" rtlCol="0" anchor="t"/>
+            <a:endParaRPr lang="en-US" sz="900" dirty="0"/>
+          </a:p>
+        </p:txBody>
+      </p:sp>
+      <p:sp>
+        <p:nvSpPr>
+          <p:cNvPr id="143" name="TextBox 142"/>
+          <p:cNvSpPr txBox="1"/>
+          <p:nvPr/>
+        </p:nvSpPr>
+        <p:spPr>
+          <a:xfrm>
+            <a:off x="9253728" y="5736336"/>
+            <a:ext cx="2526487" cy="390144"/>
+          </a:xfrm>
+          <a:prstGeom prst="rect">
+            <a:avLst/>
+          </a:prstGeom>
+          <a:noFill/>
+          <a:ln/>
+        </p:spPr>
+        <p:txBody>
+          <a:bodyPr wrap="square" lIns="0" tIns="0" rIns="0" bIns="0" rtlCol="0" anchor="ctr"/>
           <a:lstStyle/>
           <a:p>
             <a:pPr indent="0" marL="0">
@@ -5959,13 +5958,13 @@
             <a:r>
               <a:rPr lang="en-US" sz="900" dirty="0">
                 <a:solidFill>
-                  <a:srgbClr val="DCE4EE"/>
-                </a:solidFill>
-                <a:latin typeface="Arial" pitchFamily="34" charset="0"/>
-                <a:ea typeface="Arial" pitchFamily="34" charset="-122"/>
-                <a:cs typeface="Arial" pitchFamily="34" charset="-120"/>
-              </a:rPr>
-              <a:t>Regulated data and high-volume, low-cost workloads</a:t>
+                  <a:srgbClr val="1F2A37"/>
+                </a:solidFill>
+                <a:latin typeface="Arial" pitchFamily="34" charset="0"/>
+                <a:ea typeface="Arial" pitchFamily="34" charset="-122"/>
+                <a:cs typeface="Arial" pitchFamily="34" charset="-120"/>
+              </a:rPr>
+              <a:t>Regulated data (self-hosted) and high-volume, low-cost work</a:t>
             </a:r>
             <a:endParaRPr lang="en-US" sz="900" dirty="0"/>
           </a:p>
@@ -5973,7 +5972,30 @@
       </p:sp>
       <p:sp>
         <p:nvSpPr>
-          <p:cNvPr id="144" name="Text 142"/>
+          <p:cNvPr id="144" name="Straight Connector 143"/>
+          <p:cNvSpPr/>
+          <p:nvPr/>
+        </p:nvSpPr>
+        <p:spPr>
+          <a:xfrm>
+            <a:off x="8229600" y="6126480"/>
+            <a:ext cx="3550615" cy="0"/>
+          </a:xfrm>
+          <a:prstGeom prst="line">
+            <a:avLst/>
+          </a:prstGeom>
+          <a:noFill/>
+          <a:ln w="9525">
+            <a:solidFill>
+              <a:srgbClr val="041E42"/>
+            </a:solidFill>
+            <a:prstDash val="solid"/>
+          </a:ln>
+        </p:spPr>
+      </p:sp>
+      <p:sp>
+        <p:nvSpPr>
+          <p:cNvPr id="145" name="TextBox 144"/>
           <p:cNvSpPr txBox="1"/>
           <p:nvPr/>
         </p:nvSpPr>
@@ -6116,7 +6138,7 @@
       </p:sp>
       <p:sp>
         <p:nvSpPr>
-          <p:cNvPr id="145" name="Text 143"/>
+          <p:cNvPr id="146" name="TextBox 145"/>
           <p:cNvSpPr txBox="1"/>
           <p:nvPr/>
         </p:nvSpPr>
@@ -6204,7 +6226,7 @@
     </a:clrScheme>
     <a:fontScheme name="Office">
       <a:majorFont>
-        <a:latin typeface="Calibri Light" panose="020F0302020204030204"/>
+        <a:latin typeface="Arial"/>
         <a:ea typeface=""/>
         <a:cs typeface=""/>
         <a:font script="Jpan" typeface="游ゴシック Light"/>
@@ -6256,7 +6278,7 @@
         <a:font script="Tfng" typeface="Ebrima"/>
       </a:majorFont>
       <a:minorFont>
-        <a:latin typeface="Calibri" panose="020F0502020204030204"/>
+        <a:latin typeface="Arial"/>
         <a:ea typeface=""/>
         <a:cs typeface=""/>
         <a:font script="Jpan" typeface="游ゴシック"/>

--- a/ai-model-comparison/AI-Model-Comparison-Sep-2026.pptx
+++ b/ai-model-comparison/AI-Model-Comparison-Sep-2026.pptx
@@ -883,8 +883,8 @@
         </p:nvSpPr>
         <p:spPr>
           <a:xfrm>
-            <a:off x="530352" y="420624"/>
-            <a:ext cx="0" cy="749808"/>
+            <a:off x="530352" y="402336"/>
+            <a:ext cx="0" cy="731520"/>
           </a:xfrm>
           <a:prstGeom prst="line">
             <a:avLst/>
@@ -906,8 +906,8 @@
         </p:nvSpPr>
         <p:spPr>
           <a:xfrm>
-            <a:off x="795528" y="329184"/>
-            <a:ext cx="10332720" cy="566928"/>
+            <a:off x="795528" y="310896"/>
+            <a:ext cx="10515600" cy="530352"/>
           </a:xfrm>
           <a:prstGeom prst="rect">
             <a:avLst/>
@@ -923,17 +923,17 @@
               <a:buNone/>
             </a:pPr>
             <a:r>
-              <a:rPr lang="en-US" sz="3600" dirty="0">
-                <a:solidFill>
-                  <a:srgbClr val="FFFFFF"/>
-                </a:solidFill>
-                <a:latin typeface="Avenir Book" pitchFamily="34" charset="0"/>
-                <a:ea typeface="Avenir Book" pitchFamily="34" charset="-122"/>
-                <a:cs typeface="Avenir Book" pitchFamily="34" charset="-120"/>
+              <a:rPr lang="en-US" sz="3000" dirty="0">
+                <a:solidFill>
+                  <a:srgbClr val="FFFFFF"/>
+                </a:solidFill>
+                <a:latin typeface="Poppins" pitchFamily="34" charset="0"/>
+                <a:ea typeface="Poppins" pitchFamily="34" charset="-122"/>
+                <a:cs typeface="Poppins" pitchFamily="34" charset="-120"/>
               </a:rPr>
               <a:t>Analysis of the Top Three Frontier AI Models</a:t>
             </a:r>
-            <a:endParaRPr lang="en-US" sz="3600" dirty="0"/>
+            <a:endParaRPr lang="en-US" sz="3000" dirty="0"/>
           </a:p>
         </p:txBody>
       </p:sp>
@@ -945,8 +945,8 @@
         </p:nvSpPr>
         <p:spPr>
           <a:xfrm>
-            <a:off x="795528" y="868680"/>
-            <a:ext cx="10789920" cy="329184"/>
+            <a:off x="795528" y="850392"/>
+            <a:ext cx="11064240" cy="292608"/>
           </a:xfrm>
           <a:prstGeom prst="rect">
             <a:avLst/>
@@ -962,57 +962,102 @@
               <a:buNone/>
             </a:pPr>
             <a:r>
-              <a:rPr lang="en-US" sz="1600" i="1" dirty="0">
-                <a:solidFill>
-                  <a:srgbClr val="FFFFFF"/>
-                </a:solidFill>
-                <a:latin typeface="Avenir Light" pitchFamily="34" charset="0"/>
-                <a:ea typeface="Avenir Light" pitchFamily="34" charset="-122"/>
-                <a:cs typeface="Avenir Light" pitchFamily="34" charset="-120"/>
+              <a:rPr lang="en-US" sz="1350" i="1" dirty="0">
+                <a:solidFill>
+                  <a:srgbClr val="FFFFFF"/>
+                </a:solidFill>
+                <a:latin typeface="Poppins Light" pitchFamily="34" charset="0"/>
+                <a:ea typeface="Poppins Light" pitchFamily="34" charset="-122"/>
+                <a:cs typeface="Poppins Light" pitchFamily="34" charset="-120"/>
               </a:rPr>
               <a:t>Opus 5.5 leads on coding and analyst work, Astra on 3D tools and hard science, and Kimi K3 on cost and self-hosting</a:t>
             </a:r>
-            <a:endParaRPr lang="en-US" sz="1600" dirty="0"/>
+            <a:endParaRPr lang="en-US" sz="1350" dirty="0"/>
           </a:p>
         </p:txBody>
       </p:sp>
-      <p:sp>
-        <p:nvSpPr>
-          <p:cNvPr id="5" name="Shape 4"/>
-          <p:cNvSpPr/>
-          <p:nvPr/>
-        </p:nvSpPr>
-        <p:spPr>
-          <a:xfrm>
-            <a:off x="365760" y="1444752"/>
-            <a:ext cx="3611880" cy="3383280"/>
-          </a:xfrm>
-          <a:prstGeom prst="roundRect">
-            <a:avLst>
-              <a:gd name="adj" fmla="val 3784"/>
-            </a:avLst>
-          </a:prstGeom>
-          <a:solidFill>
-            <a:srgbClr val="001D3B"/>
-          </a:solidFill>
-          <a:ln w="15875">
-            <a:solidFill>
-              <a:srgbClr val="1C5EDD"/>
-            </a:solidFill>
-            <a:prstDash val="solid"/>
-          </a:ln>
-        </p:spPr>
-      </p:sp>
-      <p:sp>
-        <p:nvSpPr>
-          <p:cNvPr id="6" name="TextBox 5"/>
+      <p:pic>
+        <p:nvPicPr>
+          <p:cNvPr id="5" name="Image 0" descr="preencoded.png">    </p:cNvPr>
+          <p:cNvPicPr>
+            <a:picLocks noChangeAspect="1"/>
+          </p:cNvPicPr>
+          <p:nvPr/>
+        </p:nvPicPr>
+        <p:blipFill>
+          <a:blip r:embed="rId1"/>
+          <a:stretch>
+            <a:fillRect/>
+          </a:stretch>
+        </p:blipFill>
+        <p:spPr>
+          <a:xfrm>
+            <a:off x="320040" y="1673352"/>
+            <a:ext cx="3767328" cy="3264408"/>
+          </a:xfrm>
+          <a:prstGeom prst="rect">
+            <a:avLst/>
+          </a:prstGeom>
+        </p:spPr>
+      </p:pic>
+      <p:pic>
+        <p:nvPicPr>
+          <p:cNvPr id="6" name="Image 1" descr="preencoded.png">    </p:cNvPr>
+          <p:cNvPicPr>
+            <a:picLocks noChangeAspect="1"/>
+          </p:cNvPicPr>
+          <p:nvPr/>
+        </p:nvPicPr>
+        <p:blipFill>
+          <a:blip r:embed="rId2"/>
+          <a:stretch>
+            <a:fillRect/>
+          </a:stretch>
+        </p:blipFill>
+        <p:spPr>
+          <a:xfrm>
+            <a:off x="1805940" y="1353312"/>
+            <a:ext cx="731520" cy="731520"/>
+          </a:xfrm>
+          <a:prstGeom prst="rect">
+            <a:avLst/>
+          </a:prstGeom>
+        </p:spPr>
+      </p:pic>
+      <p:pic>
+        <p:nvPicPr>
+          <p:cNvPr id="7" name="Image 2" descr="preencoded.png">    </p:cNvPr>
+          <p:cNvPicPr>
+            <a:picLocks noChangeAspect="1"/>
+          </p:cNvPicPr>
+          <p:nvPr/>
+        </p:nvPicPr>
+        <p:blipFill>
+          <a:blip r:embed="rId3"/>
+          <a:stretch>
+            <a:fillRect/>
+          </a:stretch>
+        </p:blipFill>
+        <p:spPr>
+          <a:xfrm>
+            <a:off x="1988820" y="1536192"/>
+            <a:ext cx="365760" cy="365760"/>
+          </a:xfrm>
+          <a:prstGeom prst="rect">
+            <a:avLst/>
+          </a:prstGeom>
+        </p:spPr>
+      </p:pic>
+      <p:sp>
+        <p:nvSpPr>
+          <p:cNvPr id="8" name="TextBox 7"/>
           <p:cNvSpPr txBox="1"/>
           <p:nvPr/>
         </p:nvSpPr>
         <p:spPr>
           <a:xfrm>
-            <a:off x="640080" y="1627632"/>
-            <a:ext cx="3063240" cy="384048"/>
+            <a:off x="640080" y="2176272"/>
+            <a:ext cx="3063240" cy="347472"/>
           </a:xfrm>
           <a:prstGeom prst="rect">
             <a:avLst/>
@@ -1028,30 +1073,30 @@
               <a:buNone/>
             </a:pPr>
             <a:r>
-              <a:rPr lang="en-US" sz="2200" dirty="0">
-                <a:solidFill>
-                  <a:srgbClr val="FFFFFF"/>
-                </a:solidFill>
-                <a:latin typeface="Avenir Book" pitchFamily="34" charset="0"/>
-                <a:ea typeface="Avenir Book" pitchFamily="34" charset="-122"/>
-                <a:cs typeface="Avenir Book" pitchFamily="34" charset="-120"/>
+              <a:rPr lang="en-US" sz="1800" dirty="0">
+                <a:solidFill>
+                  <a:srgbClr val="FFFFFF"/>
+                </a:solidFill>
+                <a:latin typeface="Poppins Medium" pitchFamily="34" charset="0"/>
+                <a:ea typeface="Poppins Medium" pitchFamily="34" charset="-122"/>
+                <a:cs typeface="Poppins Medium" pitchFamily="34" charset="-120"/>
               </a:rPr>
               <a:t>Claude Opus 5.5</a:t>
             </a:r>
-            <a:endParaRPr lang="en-US" sz="2200" dirty="0"/>
+            <a:endParaRPr lang="en-US" sz="1800" dirty="0"/>
           </a:p>
         </p:txBody>
       </p:sp>
       <p:sp>
         <p:nvSpPr>
-          <p:cNvPr id="7" name="Straight Connector 6"/>
+          <p:cNvPr id="9" name="Straight Connector 8"/>
           <p:cNvSpPr/>
           <p:nvPr/>
         </p:nvSpPr>
         <p:spPr>
           <a:xfrm>
-            <a:off x="868680" y="2066544"/>
-            <a:ext cx="2606040" cy="0"/>
+            <a:off x="914400" y="2569464"/>
+            <a:ext cx="2514600" cy="0"/>
           </a:xfrm>
           <a:prstGeom prst="line">
             <a:avLst/>
@@ -1067,14 +1112,14 @@
       </p:sp>
       <p:sp>
         <p:nvSpPr>
-          <p:cNvPr id="8" name="TextBox 7"/>
+          <p:cNvPr id="10" name="TextBox 9"/>
           <p:cNvSpPr txBox="1"/>
           <p:nvPr/>
         </p:nvSpPr>
         <p:spPr>
           <a:xfrm>
-            <a:off x="640080" y="2139696"/>
-            <a:ext cx="3063240" cy="237744"/>
+            <a:off x="640080" y="2633472"/>
+            <a:ext cx="3063240" cy="219456"/>
           </a:xfrm>
           <a:prstGeom prst="rect">
             <a:avLst/>
@@ -1090,30 +1135,30 @@
               <a:buNone/>
             </a:pPr>
             <a:r>
-              <a:rPr lang="en-US" sz="1150" i="1" dirty="0">
+              <a:rPr lang="en-US" sz="1000" i="1" dirty="0">
                 <a:solidFill>
                   <a:srgbClr val="C9D3E0"/>
                 </a:solidFill>
-                <a:latin typeface="Avenir Light" pitchFamily="34" charset="0"/>
-                <a:ea typeface="Avenir Light" pitchFamily="34" charset="-122"/>
-                <a:cs typeface="Avenir Light" pitchFamily="34" charset="-120"/>
+                <a:latin typeface="Poppins Light" pitchFamily="34" charset="0"/>
+                <a:ea typeface="Poppins Light" pitchFamily="34" charset="-122"/>
+                <a:cs typeface="Poppins Light" pitchFamily="34" charset="-120"/>
               </a:rPr>
               <a:t>Anthropic  |  Released Sep 22, 2026</a:t>
             </a:r>
-            <a:endParaRPr lang="en-US" sz="1150" dirty="0"/>
+            <a:endParaRPr lang="en-US" sz="1000" dirty="0"/>
           </a:p>
         </p:txBody>
       </p:sp>
       <p:sp>
         <p:nvSpPr>
-          <p:cNvPr id="9" name="TextBox 8"/>
+          <p:cNvPr id="11" name="TextBox 10"/>
           <p:cNvSpPr txBox="1"/>
           <p:nvPr/>
         </p:nvSpPr>
         <p:spPr>
           <a:xfrm>
-            <a:off x="621792" y="2487168"/>
-            <a:ext cx="3154680" cy="2057400"/>
+            <a:off x="603504" y="2944368"/>
+            <a:ext cx="3191256" cy="1645920"/>
           </a:xfrm>
           <a:prstGeom prst="rect">
             <a:avLst/>
@@ -1125,9 +1170,9 @@
           <a:bodyPr wrap="square" lIns="0" tIns="0" rIns="0" bIns="0" rtlCol="0" anchor="t"/>
           <a:lstStyle/>
           <a:p>
-            <a:pPr marL="203200" indent="-203200">
+            <a:pPr marL="190500" indent="-190500">
               <a:spcAft>
-                <a:spcPts val="900"/>
+                <a:spcPts val="700"/>
               </a:spcAft>
               <a:buClr>
                 <a:srgbClr val="FFFFFF"/>
@@ -1136,44 +1181,44 @@
               <a:buChar char="•"/>
             </a:pPr>
             <a:r>
-              <a:rPr lang="en-US" sz="1300" dirty="0">
-                <a:solidFill>
-                  <a:srgbClr val="FFFFFF"/>
-                </a:solidFill>
-                <a:latin typeface="Avenir Book" pitchFamily="34" charset="0"/>
-                <a:ea typeface="Avenir Book" pitchFamily="34" charset="-122"/>
-                <a:cs typeface="Avenir Book" pitchFamily="34" charset="-120"/>
+              <a:rPr lang="en-US" sz="1150" dirty="0">
+                <a:solidFill>
+                  <a:srgbClr val="FFFFFF"/>
+                </a:solidFill>
+                <a:latin typeface="Poppins" pitchFamily="34" charset="0"/>
+                <a:ea typeface="Poppins" pitchFamily="34" charset="-122"/>
+                <a:cs typeface="Poppins" pitchFamily="34" charset="-120"/>
               </a:rPr>
               <a:t>Best for </a:t>
             </a:r>
             <a:r>
-              <a:rPr lang="en-US" sz="1300" dirty="0">
+              <a:rPr lang="en-US" sz="1150" dirty="0">
                 <a:solidFill>
                   <a:srgbClr val="5DAAFF"/>
                 </a:solidFill>
-                <a:latin typeface="Avenir Book" pitchFamily="34" charset="0"/>
-                <a:ea typeface="Avenir Book" pitchFamily="34" charset="-122"/>
-                <a:cs typeface="Avenir Book" pitchFamily="34" charset="-120"/>
+                <a:latin typeface="Poppins" pitchFamily="34" charset="0"/>
+                <a:ea typeface="Poppins" pitchFamily="34" charset="-122"/>
+                <a:cs typeface="Poppins" pitchFamily="34" charset="-120"/>
               </a:rPr>
               <a:t>coding, agent workflows and analyst work</a:t>
             </a:r>
             <a:r>
-              <a:rPr lang="en-US" sz="1300" dirty="0">
-                <a:solidFill>
-                  <a:srgbClr val="FFFFFF"/>
-                </a:solidFill>
-                <a:latin typeface="Avenir Book" pitchFamily="34" charset="0"/>
-                <a:ea typeface="Avenir Book" pitchFamily="34" charset="-122"/>
-                <a:cs typeface="Avenir Book" pitchFamily="34" charset="-120"/>
+              <a:rPr lang="en-US" sz="1150" dirty="0">
+                <a:solidFill>
+                  <a:srgbClr val="FFFFFF"/>
+                </a:solidFill>
+                <a:latin typeface="Poppins" pitchFamily="34" charset="0"/>
+                <a:ea typeface="Poppins" pitchFamily="34" charset="-122"/>
+                <a:cs typeface="Poppins" pitchFamily="34" charset="-120"/>
               </a:rPr>
               <a:t> like research and modeling</a:t>
             </a:r>
-            <a:endParaRPr lang="en-US" sz="1300" dirty="0"/>
-          </a:p>
-          <a:p>
-            <a:pPr marL="203200" indent="-203200">
+            <a:endParaRPr lang="en-US" sz="1150" dirty="0"/>
+          </a:p>
+          <a:p>
+            <a:pPr marL="190500" indent="-190500">
               <a:spcAft>
-                <a:spcPts val="900"/>
+                <a:spcPts val="700"/>
               </a:spcAft>
               <a:buClr>
                 <a:srgbClr val="FFFFFF"/>
@@ -1182,55 +1227,55 @@
               <a:buChar char="•"/>
             </a:pPr>
             <a:r>
-              <a:rPr lang="en-US" sz="1300" dirty="0">
-                <a:solidFill>
-                  <a:srgbClr val="FFFFFF"/>
-                </a:solidFill>
-                <a:latin typeface="Avenir Book" pitchFamily="34" charset="0"/>
-                <a:ea typeface="Avenir Book" pitchFamily="34" charset="-122"/>
-                <a:cs typeface="Avenir Book" pitchFamily="34" charset="-120"/>
+              <a:rPr lang="en-US" sz="1150" dirty="0">
+                <a:solidFill>
+                  <a:srgbClr val="FFFFFF"/>
+                </a:solidFill>
+                <a:latin typeface="Poppins" pitchFamily="34" charset="0"/>
+                <a:ea typeface="Poppins" pitchFamily="34" charset="-122"/>
+                <a:cs typeface="Poppins" pitchFamily="34" charset="-120"/>
               </a:rPr>
               <a:t>Scored </a:t>
             </a:r>
             <a:r>
-              <a:rPr lang="en-US" sz="1300" dirty="0">
+              <a:rPr lang="en-US" sz="1150" dirty="0">
                 <a:solidFill>
                   <a:srgbClr val="5DAAFF"/>
                 </a:solidFill>
-                <a:latin typeface="Avenir Book" pitchFamily="34" charset="0"/>
-                <a:ea typeface="Avenir Book" pitchFamily="34" charset="-122"/>
-                <a:cs typeface="Avenir Book" pitchFamily="34" charset="-120"/>
+                <a:latin typeface="Poppins" pitchFamily="34" charset="0"/>
+                <a:ea typeface="Poppins" pitchFamily="34" charset="-122"/>
+                <a:cs typeface="Poppins" pitchFamily="34" charset="-120"/>
               </a:rPr>
               <a:t>66.4% on Terminal-Bench 4.0</a:t>
             </a:r>
             <a:r>
-              <a:rPr lang="en-US" sz="1300" dirty="0">
-                <a:solidFill>
-                  <a:srgbClr val="FFFFFF"/>
-                </a:solidFill>
-                <a:latin typeface="Avenir Book" pitchFamily="34" charset="0"/>
-                <a:ea typeface="Avenir Book" pitchFamily="34" charset="-122"/>
-                <a:cs typeface="Avenir Book" pitchFamily="34" charset="-120"/>
+              <a:rPr lang="en-US" sz="1150" dirty="0">
+                <a:solidFill>
+                  <a:srgbClr val="FFFFFF"/>
+                </a:solidFill>
+                <a:latin typeface="Poppins" pitchFamily="34" charset="0"/>
+                <a:ea typeface="Poppins" pitchFamily="34" charset="-122"/>
+                <a:cs typeface="Poppins" pitchFamily="34" charset="-120"/>
               </a:rPr>
               <a:t> vs. 57.9% for Astra; one customer migrated </a:t>
             </a:r>
             <a:r>
-              <a:rPr lang="en-US" sz="1300" dirty="0">
+              <a:rPr lang="en-US" sz="1150" dirty="0">
                 <a:solidFill>
                   <a:srgbClr val="5DAAFF"/>
                 </a:solidFill>
-                <a:latin typeface="Avenir Book" pitchFamily="34" charset="0"/>
-                <a:ea typeface="Avenir Book" pitchFamily="34" charset="-122"/>
-                <a:cs typeface="Avenir Book" pitchFamily="34" charset="-120"/>
+                <a:latin typeface="Poppins" pitchFamily="34" charset="0"/>
+                <a:ea typeface="Poppins" pitchFamily="34" charset="-122"/>
+                <a:cs typeface="Poppins" pitchFamily="34" charset="-120"/>
               </a:rPr>
               <a:t>680K lines of code in a day</a:t>
             </a:r>
-            <a:endParaRPr lang="en-US" sz="1300" dirty="0"/>
-          </a:p>
-          <a:p>
-            <a:pPr marL="203200" indent="-203200">
+            <a:endParaRPr lang="en-US" sz="1150" dirty="0"/>
+          </a:p>
+          <a:p>
+            <a:pPr marL="190500" indent="-190500">
               <a:spcAft>
-                <a:spcPts val="900"/>
+                <a:spcPts val="700"/>
               </a:spcAft>
               <a:buClr>
                 <a:srgbClr val="FFFFFF"/>
@@ -1239,77 +1284,52 @@
               <a:buChar char="•"/>
             </a:pPr>
             <a:r>
-              <a:rPr lang="en-US" sz="1300" dirty="0">
-                <a:solidFill>
-                  <a:srgbClr val="FFFFFF"/>
-                </a:solidFill>
-                <a:latin typeface="Avenir Book" pitchFamily="34" charset="0"/>
-                <a:ea typeface="Avenir Book" pitchFamily="34" charset="-122"/>
-                <a:cs typeface="Avenir Book" pitchFamily="34" charset="-120"/>
+              <a:rPr lang="en-US" sz="1150" dirty="0">
+                <a:solidFill>
+                  <a:srgbClr val="FFFFFF"/>
+                </a:solidFill>
+                <a:latin typeface="Poppins" pitchFamily="34" charset="0"/>
+                <a:ea typeface="Poppins" pitchFamily="34" charset="-122"/>
+                <a:cs typeface="Poppins" pitchFamily="34" charset="-120"/>
               </a:rPr>
               <a:t>Costs </a:t>
             </a:r>
             <a:r>
-              <a:rPr lang="en-US" sz="1300" dirty="0">
+              <a:rPr lang="en-US" sz="1150" dirty="0">
                 <a:solidFill>
                   <a:srgbClr val="5DAAFF"/>
                 </a:solidFill>
-                <a:latin typeface="Avenir Book" pitchFamily="34" charset="0"/>
-                <a:ea typeface="Avenir Book" pitchFamily="34" charset="-122"/>
-                <a:cs typeface="Avenir Book" pitchFamily="34" charset="-120"/>
+                <a:latin typeface="Poppins" pitchFamily="34" charset="0"/>
+                <a:ea typeface="Poppins" pitchFamily="34" charset="-122"/>
+                <a:cs typeface="Poppins" pitchFamily="34" charset="-120"/>
               </a:rPr>
               <a:t>$4 / $20 per 1M tokens</a:t>
             </a:r>
             <a:r>
-              <a:rPr lang="en-US" sz="1300" dirty="0">
-                <a:solidFill>
-                  <a:srgbClr val="FFFFFF"/>
-                </a:solidFill>
-                <a:latin typeface="Avenir Book" pitchFamily="34" charset="0"/>
-                <a:ea typeface="Avenir Book" pitchFamily="34" charset="-122"/>
-                <a:cs typeface="Avenir Book" pitchFamily="34" charset="-120"/>
+              <a:rPr lang="en-US" sz="1150" dirty="0">
+                <a:solidFill>
+                  <a:srgbClr val="FFFFFF"/>
+                </a:solidFill>
+                <a:latin typeface="Poppins" pitchFamily="34" charset="0"/>
+                <a:ea typeface="Poppins" pitchFamily="34" charset="-122"/>
+                <a:cs typeface="Poppins" pitchFamily="34" charset="-120"/>
               </a:rPr>
               <a:t>, about 60% less than Astra</a:t>
             </a:r>
-            <a:endParaRPr lang="en-US" sz="1300" dirty="0"/>
+            <a:endParaRPr lang="en-US" sz="1150" dirty="0"/>
           </a:p>
         </p:txBody>
       </p:sp>
       <p:sp>
         <p:nvSpPr>
-          <p:cNvPr id="10" name="Rectangle 9"/>
-          <p:cNvSpPr/>
-          <p:nvPr/>
-        </p:nvSpPr>
-        <p:spPr>
-          <a:xfrm>
-            <a:off x="3319272" y="4645152"/>
-            <a:ext cx="566928" cy="365760"/>
-          </a:xfrm>
-          <a:prstGeom prst="rect">
-            <a:avLst/>
-          </a:prstGeom>
-          <a:solidFill>
-            <a:srgbClr val="001D3B"/>
-          </a:solidFill>
-          <a:ln w="12700">
-            <a:solidFill>
-              <a:srgbClr val="001D3B"/>
-            </a:solidFill>
-            <a:prstDash val="solid"/>
-          </a:ln>
-        </p:spPr>
-      </p:sp>
-      <p:sp>
-        <p:nvSpPr>
-          <p:cNvPr id="11" name="TextBox 10"/>
+          <p:cNvPr id="12" name="TextBox 11"/>
           <p:cNvSpPr txBox="1"/>
           <p:nvPr/>
         </p:nvSpPr>
         <p:spPr>
           <a:xfrm>
-            <a:off x="3319272" y="4590288"/>
-            <a:ext cx="566928" cy="438912"/>
+            <a:off x="3264408" y="4599432"/>
+            <a:ext cx="658368" cy="420624"/>
           </a:xfrm>
           <a:prstGeom prst="rect">
             <a:avLst/>
@@ -1325,57 +1345,102 @@
               <a:buNone/>
             </a:pPr>
             <a:r>
-              <a:rPr lang="en-US" sz="2800" dirty="0">
-                <a:solidFill>
-                  <a:srgbClr val="FFFFFF"/>
-                </a:solidFill>
-                <a:latin typeface="Avenir Book" pitchFamily="34" charset="0"/>
-                <a:ea typeface="Avenir Book" pitchFamily="34" charset="-122"/>
-                <a:cs typeface="Avenir Book" pitchFamily="34" charset="-120"/>
+              <a:rPr lang="en-US" sz="2400" dirty="0">
+                <a:solidFill>
+                  <a:srgbClr val="FFFFFF"/>
+                </a:solidFill>
+                <a:latin typeface="Poppins" pitchFamily="34" charset="0"/>
+                <a:ea typeface="Poppins" pitchFamily="34" charset="-122"/>
+                <a:cs typeface="Poppins" pitchFamily="34" charset="-120"/>
               </a:rPr>
               <a:t>01</a:t>
             </a:r>
-            <a:endParaRPr lang="en-US" sz="2800" dirty="0"/>
+            <a:endParaRPr lang="en-US" sz="2400" dirty="0"/>
           </a:p>
         </p:txBody>
       </p:sp>
-      <p:sp>
-        <p:nvSpPr>
-          <p:cNvPr id="12" name="Shape 11"/>
-          <p:cNvSpPr/>
-          <p:nvPr/>
-        </p:nvSpPr>
-        <p:spPr>
-          <a:xfrm>
-            <a:off x="4270248" y="1444752"/>
-            <a:ext cx="3611880" cy="3383280"/>
-          </a:xfrm>
-          <a:prstGeom prst="roundRect">
-            <a:avLst>
-              <a:gd name="adj" fmla="val 3784"/>
-            </a:avLst>
-          </a:prstGeom>
-          <a:solidFill>
-            <a:srgbClr val="001D3B"/>
-          </a:solidFill>
-          <a:ln w="15875">
-            <a:solidFill>
-              <a:srgbClr val="1C5EDD"/>
-            </a:solidFill>
-            <a:prstDash val="solid"/>
-          </a:ln>
-        </p:spPr>
-      </p:sp>
-      <p:sp>
-        <p:nvSpPr>
-          <p:cNvPr id="13" name="TextBox 12"/>
+      <p:pic>
+        <p:nvPicPr>
+          <p:cNvPr id="13" name="Image 3" descr="preencoded.png">    </p:cNvPr>
+          <p:cNvPicPr>
+            <a:picLocks noChangeAspect="1"/>
+          </p:cNvPicPr>
+          <p:nvPr/>
+        </p:nvPicPr>
+        <p:blipFill>
+          <a:blip r:embed="rId4"/>
+          <a:stretch>
+            <a:fillRect/>
+          </a:stretch>
+        </p:blipFill>
+        <p:spPr>
+          <a:xfrm>
+            <a:off x="4224528" y="1673352"/>
+            <a:ext cx="3767328" cy="3264408"/>
+          </a:xfrm>
+          <a:prstGeom prst="rect">
+            <a:avLst/>
+          </a:prstGeom>
+        </p:spPr>
+      </p:pic>
+      <p:pic>
+        <p:nvPicPr>
+          <p:cNvPr id="14" name="Image 4" descr="preencoded.png">    </p:cNvPr>
+          <p:cNvPicPr>
+            <a:picLocks noChangeAspect="1"/>
+          </p:cNvPicPr>
+          <p:nvPr/>
+        </p:nvPicPr>
+        <p:blipFill>
+          <a:blip r:embed="rId5"/>
+          <a:stretch>
+            <a:fillRect/>
+          </a:stretch>
+        </p:blipFill>
+        <p:spPr>
+          <a:xfrm>
+            <a:off x="5710428" y="1353312"/>
+            <a:ext cx="731520" cy="731520"/>
+          </a:xfrm>
+          <a:prstGeom prst="rect">
+            <a:avLst/>
+          </a:prstGeom>
+        </p:spPr>
+      </p:pic>
+      <p:pic>
+        <p:nvPicPr>
+          <p:cNvPr id="15" name="Image 5" descr="preencoded.png">    </p:cNvPr>
+          <p:cNvPicPr>
+            <a:picLocks noChangeAspect="1"/>
+          </p:cNvPicPr>
+          <p:nvPr/>
+        </p:nvPicPr>
+        <p:blipFill>
+          <a:blip r:embed="rId6"/>
+          <a:stretch>
+            <a:fillRect/>
+          </a:stretch>
+        </p:blipFill>
+        <p:spPr>
+          <a:xfrm>
+            <a:off x="5893308" y="1536192"/>
+            <a:ext cx="365760" cy="365760"/>
+          </a:xfrm>
+          <a:prstGeom prst="rect">
+            <a:avLst/>
+          </a:prstGeom>
+        </p:spPr>
+      </p:pic>
+      <p:sp>
+        <p:nvSpPr>
+          <p:cNvPr id="16" name="TextBox 15"/>
           <p:cNvSpPr txBox="1"/>
           <p:nvPr/>
         </p:nvSpPr>
         <p:spPr>
           <a:xfrm>
-            <a:off x="4544568" y="1627632"/>
-            <a:ext cx="3063240" cy="384048"/>
+            <a:off x="4544568" y="2176272"/>
+            <a:ext cx="3063240" cy="347472"/>
           </a:xfrm>
           <a:prstGeom prst="rect">
             <a:avLst/>
@@ -1391,30 +1456,30 @@
               <a:buNone/>
             </a:pPr>
             <a:r>
-              <a:rPr lang="en-US" sz="2200" dirty="0">
-                <a:solidFill>
-                  <a:srgbClr val="FFFFFF"/>
-                </a:solidFill>
-                <a:latin typeface="Avenir Book" pitchFamily="34" charset="0"/>
-                <a:ea typeface="Avenir Book" pitchFamily="34" charset="-122"/>
-                <a:cs typeface="Avenir Book" pitchFamily="34" charset="-120"/>
+              <a:rPr lang="en-US" sz="1800" dirty="0">
+                <a:solidFill>
+                  <a:srgbClr val="FFFFFF"/>
+                </a:solidFill>
+                <a:latin typeface="Poppins Medium" pitchFamily="34" charset="0"/>
+                <a:ea typeface="Poppins Medium" pitchFamily="34" charset="-122"/>
+                <a:cs typeface="Poppins Medium" pitchFamily="34" charset="-120"/>
               </a:rPr>
               <a:t>GPT-6 Astra</a:t>
             </a:r>
-            <a:endParaRPr lang="en-US" sz="2200" dirty="0"/>
+            <a:endParaRPr lang="en-US" sz="1800" dirty="0"/>
           </a:p>
         </p:txBody>
       </p:sp>
       <p:sp>
         <p:nvSpPr>
-          <p:cNvPr id="14" name="Straight Connector 13"/>
+          <p:cNvPr id="17" name="Straight Connector 16"/>
           <p:cNvSpPr/>
           <p:nvPr/>
         </p:nvSpPr>
         <p:spPr>
           <a:xfrm>
-            <a:off x="4773168" y="2066544"/>
-            <a:ext cx="2606040" cy="0"/>
+            <a:off x="4818888" y="2569464"/>
+            <a:ext cx="2514600" cy="0"/>
           </a:xfrm>
           <a:prstGeom prst="line">
             <a:avLst/>
@@ -1430,14 +1495,14 @@
       </p:sp>
       <p:sp>
         <p:nvSpPr>
-          <p:cNvPr id="15" name="TextBox 14"/>
+          <p:cNvPr id="18" name="TextBox 17"/>
           <p:cNvSpPr txBox="1"/>
           <p:nvPr/>
         </p:nvSpPr>
         <p:spPr>
           <a:xfrm>
-            <a:off x="4544568" y="2139696"/>
-            <a:ext cx="3063240" cy="237744"/>
+            <a:off x="4544568" y="2633472"/>
+            <a:ext cx="3063240" cy="219456"/>
           </a:xfrm>
           <a:prstGeom prst="rect">
             <a:avLst/>
@@ -1453,30 +1518,30 @@
               <a:buNone/>
             </a:pPr>
             <a:r>
-              <a:rPr lang="en-US" sz="1150" i="1" dirty="0">
+              <a:rPr lang="en-US" sz="1000" i="1" dirty="0">
                 <a:solidFill>
                   <a:srgbClr val="C9D3E0"/>
                 </a:solidFill>
-                <a:latin typeface="Avenir Light" pitchFamily="34" charset="0"/>
-                <a:ea typeface="Avenir Light" pitchFamily="34" charset="-122"/>
-                <a:cs typeface="Avenir Light" pitchFamily="34" charset="-120"/>
+                <a:latin typeface="Poppins Light" pitchFamily="34" charset="0"/>
+                <a:ea typeface="Poppins Light" pitchFamily="34" charset="-122"/>
+                <a:cs typeface="Poppins Light" pitchFamily="34" charset="-120"/>
               </a:rPr>
               <a:t>OpenAI  |  Released Sep 3, 2026</a:t>
             </a:r>
-            <a:endParaRPr lang="en-US" sz="1150" dirty="0"/>
+            <a:endParaRPr lang="en-US" sz="1000" dirty="0"/>
           </a:p>
         </p:txBody>
       </p:sp>
       <p:sp>
         <p:nvSpPr>
-          <p:cNvPr id="16" name="TextBox 15"/>
+          <p:cNvPr id="19" name="TextBox 18"/>
           <p:cNvSpPr txBox="1"/>
           <p:nvPr/>
         </p:nvSpPr>
         <p:spPr>
           <a:xfrm>
-            <a:off x="4526280" y="2487168"/>
-            <a:ext cx="3154680" cy="2057400"/>
+            <a:off x="4507992" y="2944368"/>
+            <a:ext cx="3191256" cy="1645920"/>
           </a:xfrm>
           <a:prstGeom prst="rect">
             <a:avLst/>
@@ -1488,9 +1553,9 @@
           <a:bodyPr wrap="square" lIns="0" tIns="0" rIns="0" bIns="0" rtlCol="0" anchor="t"/>
           <a:lstStyle/>
           <a:p>
-            <a:pPr marL="203200" indent="-203200">
+            <a:pPr marL="190500" indent="-190500">
               <a:spcAft>
-                <a:spcPts val="900"/>
+                <a:spcPts val="700"/>
               </a:spcAft>
               <a:buClr>
                 <a:srgbClr val="FFFFFF"/>
@@ -1499,66 +1564,66 @@
               <a:buChar char="•"/>
             </a:pPr>
             <a:r>
-              <a:rPr lang="en-US" sz="1300" dirty="0">
-                <a:solidFill>
-                  <a:srgbClr val="FFFFFF"/>
-                </a:solidFill>
-                <a:latin typeface="Avenir Book" pitchFamily="34" charset="0"/>
-                <a:ea typeface="Avenir Book" pitchFamily="34" charset="-122"/>
-                <a:cs typeface="Avenir Book" pitchFamily="34" charset="-120"/>
+              <a:rPr lang="en-US" sz="1150" dirty="0">
+                <a:solidFill>
+                  <a:srgbClr val="FFFFFF"/>
+                </a:solidFill>
+                <a:latin typeface="Poppins" pitchFamily="34" charset="0"/>
+                <a:ea typeface="Poppins" pitchFamily="34" charset="-122"/>
+                <a:cs typeface="Poppins" pitchFamily="34" charset="-120"/>
               </a:rPr>
               <a:t>Best for </a:t>
             </a:r>
             <a:r>
-              <a:rPr lang="en-US" sz="1300" dirty="0">
+              <a:rPr lang="en-US" sz="1150" dirty="0">
                 <a:solidFill>
                   <a:srgbClr val="5DAAFF"/>
                 </a:solidFill>
-                <a:latin typeface="Avenir Book" pitchFamily="34" charset="0"/>
-                <a:ea typeface="Avenir Book" pitchFamily="34" charset="-122"/>
-                <a:cs typeface="Avenir Book" pitchFamily="34" charset="-120"/>
+                <a:latin typeface="Poppins" pitchFamily="34" charset="0"/>
+                <a:ea typeface="Poppins" pitchFamily="34" charset="-122"/>
+                <a:cs typeface="Poppins" pitchFamily="34" charset="-120"/>
               </a:rPr>
               <a:t>operating desktop software</a:t>
             </a:r>
             <a:r>
-              <a:rPr lang="en-US" sz="1300" dirty="0">
-                <a:solidFill>
-                  <a:srgbClr val="FFFFFF"/>
-                </a:solidFill>
-                <a:latin typeface="Avenir Book" pitchFamily="34" charset="0"/>
-                <a:ea typeface="Avenir Book" pitchFamily="34" charset="-122"/>
-                <a:cs typeface="Avenir Book" pitchFamily="34" charset="-120"/>
+              <a:rPr lang="en-US" sz="1150" dirty="0">
+                <a:solidFill>
+                  <a:srgbClr val="FFFFFF"/>
+                </a:solidFill>
+                <a:latin typeface="Poppins" pitchFamily="34" charset="0"/>
+                <a:ea typeface="Poppins" pitchFamily="34" charset="-122"/>
+                <a:cs typeface="Poppins" pitchFamily="34" charset="-120"/>
               </a:rPr>
               <a:t>, 3D tools like </a:t>
             </a:r>
             <a:r>
-              <a:rPr lang="en-US" sz="1300" dirty="0">
+              <a:rPr lang="en-US" sz="1150" dirty="0">
                 <a:solidFill>
                   <a:srgbClr val="5DAAFF"/>
                 </a:solidFill>
-                <a:latin typeface="Avenir Book" pitchFamily="34" charset="0"/>
-                <a:ea typeface="Avenir Book" pitchFamily="34" charset="-122"/>
-                <a:cs typeface="Avenir Book" pitchFamily="34" charset="-120"/>
+                <a:latin typeface="Poppins" pitchFamily="34" charset="0"/>
+                <a:ea typeface="Poppins" pitchFamily="34" charset="-122"/>
+                <a:cs typeface="Poppins" pitchFamily="34" charset="-120"/>
               </a:rPr>
               <a:t>Blender and Unreal Engine 5</a:t>
             </a:r>
             <a:r>
-              <a:rPr lang="en-US" sz="1300" dirty="0">
-                <a:solidFill>
-                  <a:srgbClr val="FFFFFF"/>
-                </a:solidFill>
-                <a:latin typeface="Avenir Book" pitchFamily="34" charset="0"/>
-                <a:ea typeface="Avenir Book" pitchFamily="34" charset="-122"/>
-                <a:cs typeface="Avenir Book" pitchFamily="34" charset="-120"/>
+              <a:rPr lang="en-US" sz="1150" dirty="0">
+                <a:solidFill>
+                  <a:srgbClr val="FFFFFF"/>
+                </a:solidFill>
+                <a:latin typeface="Poppins" pitchFamily="34" charset="0"/>
+                <a:ea typeface="Poppins" pitchFamily="34" charset="-122"/>
+                <a:cs typeface="Poppins" pitchFamily="34" charset="-120"/>
               </a:rPr>
               <a:t>, and hard math and science</a:t>
             </a:r>
-            <a:endParaRPr lang="en-US" sz="1300" dirty="0"/>
-          </a:p>
-          <a:p>
-            <a:pPr marL="203200" indent="-203200">
+            <a:endParaRPr lang="en-US" sz="1150" dirty="0"/>
+          </a:p>
+          <a:p>
+            <a:pPr marL="190500" indent="-190500">
               <a:spcAft>
-                <a:spcPts val="900"/>
+                <a:spcPts val="700"/>
               </a:spcAft>
               <a:buClr>
                 <a:srgbClr val="FFFFFF"/>
@@ -1567,44 +1632,44 @@
               <a:buChar char="•"/>
             </a:pPr>
             <a:r>
-              <a:rPr lang="en-US" sz="1300" dirty="0">
-                <a:solidFill>
-                  <a:srgbClr val="FFFFFF"/>
-                </a:solidFill>
-                <a:latin typeface="Avenir Book" pitchFamily="34" charset="0"/>
-                <a:ea typeface="Avenir Book" pitchFamily="34" charset="-122"/>
-                <a:cs typeface="Avenir Book" pitchFamily="34" charset="-120"/>
+              <a:rPr lang="en-US" sz="1150" dirty="0">
+                <a:solidFill>
+                  <a:srgbClr val="FFFFFF"/>
+                </a:solidFill>
+                <a:latin typeface="Poppins" pitchFamily="34" charset="0"/>
+                <a:ea typeface="Poppins" pitchFamily="34" charset="-122"/>
+                <a:cs typeface="Poppins" pitchFamily="34" charset="-120"/>
               </a:rPr>
               <a:t>Scored </a:t>
             </a:r>
             <a:r>
-              <a:rPr lang="en-US" sz="1300" dirty="0">
+              <a:rPr lang="en-US" sz="1150" dirty="0">
                 <a:solidFill>
                   <a:srgbClr val="5DAAFF"/>
                 </a:solidFill>
-                <a:latin typeface="Avenir Book" pitchFamily="34" charset="0"/>
-                <a:ea typeface="Avenir Book" pitchFamily="34" charset="-122"/>
-                <a:cs typeface="Avenir Book" pitchFamily="34" charset="-120"/>
+                <a:latin typeface="Poppins" pitchFamily="34" charset="0"/>
+                <a:ea typeface="Poppins" pitchFamily="34" charset="-122"/>
+                <a:cs typeface="Poppins" pitchFamily="34" charset="-120"/>
               </a:rPr>
               <a:t>97.6% on FrontierMath Tier 4</a:t>
             </a:r>
             <a:r>
-              <a:rPr lang="en-US" sz="1300" dirty="0">
-                <a:solidFill>
-                  <a:srgbClr val="FFFFFF"/>
-                </a:solidFill>
-                <a:latin typeface="Avenir Book" pitchFamily="34" charset="0"/>
-                <a:ea typeface="Avenir Book" pitchFamily="34" charset="-122"/>
-                <a:cs typeface="Avenir Book" pitchFamily="34" charset="-120"/>
+              <a:rPr lang="en-US" sz="1150" dirty="0">
+                <a:solidFill>
+                  <a:srgbClr val="FFFFFF"/>
+                </a:solidFill>
+                <a:latin typeface="Poppins" pitchFamily="34" charset="0"/>
+                <a:ea typeface="Poppins" pitchFamily="34" charset="-122"/>
+                <a:cs typeface="Poppins" pitchFamily="34" charset="-120"/>
               </a:rPr>
               <a:t> and 72.6% on OSWorld 2.0</a:t>
             </a:r>
-            <a:endParaRPr lang="en-US" sz="1300" dirty="0"/>
-          </a:p>
-          <a:p>
-            <a:pPr marL="203200" indent="-203200">
+            <a:endParaRPr lang="en-US" sz="1150" dirty="0"/>
+          </a:p>
+          <a:p>
+            <a:pPr marL="190500" indent="-190500">
               <a:spcAft>
-                <a:spcPts val="900"/>
+                <a:spcPts val="700"/>
               </a:spcAft>
               <a:buClr>
                 <a:srgbClr val="FFFFFF"/>
@@ -1613,77 +1678,52 @@
               <a:buChar char="•"/>
             </a:pPr>
             <a:r>
-              <a:rPr lang="en-US" sz="1300" dirty="0">
-                <a:solidFill>
-                  <a:srgbClr val="FFFFFF"/>
-                </a:solidFill>
-                <a:latin typeface="Avenir Book" pitchFamily="34" charset="0"/>
-                <a:ea typeface="Avenir Book" pitchFamily="34" charset="-122"/>
-                <a:cs typeface="Avenir Book" pitchFamily="34" charset="-120"/>
+              <a:rPr lang="en-US" sz="1150" dirty="0">
+                <a:solidFill>
+                  <a:srgbClr val="FFFFFF"/>
+                </a:solidFill>
+                <a:latin typeface="Poppins" pitchFamily="34" charset="0"/>
+                <a:ea typeface="Poppins" pitchFamily="34" charset="-122"/>
+                <a:cs typeface="Poppins" pitchFamily="34" charset="-120"/>
               </a:rPr>
               <a:t>Most expensive at </a:t>
             </a:r>
             <a:r>
-              <a:rPr lang="en-US" sz="1300" dirty="0">
+              <a:rPr lang="en-US" sz="1150" dirty="0">
                 <a:solidFill>
                   <a:srgbClr val="5DAAFF"/>
                 </a:solidFill>
-                <a:latin typeface="Avenir Book" pitchFamily="34" charset="0"/>
-                <a:ea typeface="Avenir Book" pitchFamily="34" charset="-122"/>
-                <a:cs typeface="Avenir Book" pitchFamily="34" charset="-120"/>
+                <a:latin typeface="Poppins" pitchFamily="34" charset="0"/>
+                <a:ea typeface="Poppins" pitchFamily="34" charset="-122"/>
+                <a:cs typeface="Poppins" pitchFamily="34" charset="-120"/>
               </a:rPr>
               <a:t>$10 / $50 per 1M tokens</a:t>
             </a:r>
             <a:r>
-              <a:rPr lang="en-US" sz="1300" dirty="0">
-                <a:solidFill>
-                  <a:srgbClr val="FFFFFF"/>
-                </a:solidFill>
-                <a:latin typeface="Avenir Book" pitchFamily="34" charset="0"/>
-                <a:ea typeface="Avenir Book" pitchFamily="34" charset="-122"/>
-                <a:cs typeface="Avenir Book" pitchFamily="34" charset="-120"/>
+              <a:rPr lang="en-US" sz="1150" dirty="0">
+                <a:solidFill>
+                  <a:srgbClr val="FFFFFF"/>
+                </a:solidFill>
+                <a:latin typeface="Poppins" pitchFamily="34" charset="0"/>
+                <a:ea typeface="Poppins" pitchFamily="34" charset="-122"/>
+                <a:cs typeface="Poppins" pitchFamily="34" charset="-120"/>
               </a:rPr>
               <a:t>, with access still rolling out in stages</a:t>
             </a:r>
-            <a:endParaRPr lang="en-US" sz="1300" dirty="0"/>
+            <a:endParaRPr lang="en-US" sz="1150" dirty="0"/>
           </a:p>
         </p:txBody>
       </p:sp>
       <p:sp>
         <p:nvSpPr>
-          <p:cNvPr id="17" name="Rectangle 16"/>
-          <p:cNvSpPr/>
-          <p:nvPr/>
-        </p:nvSpPr>
-        <p:spPr>
-          <a:xfrm>
-            <a:off x="7223760" y="4645152"/>
-            <a:ext cx="566928" cy="365760"/>
-          </a:xfrm>
-          <a:prstGeom prst="rect">
-            <a:avLst/>
-          </a:prstGeom>
-          <a:solidFill>
-            <a:srgbClr val="001D3B"/>
-          </a:solidFill>
-          <a:ln w="12700">
-            <a:solidFill>
-              <a:srgbClr val="001D3B"/>
-            </a:solidFill>
-            <a:prstDash val="solid"/>
-          </a:ln>
-        </p:spPr>
-      </p:sp>
-      <p:sp>
-        <p:nvSpPr>
-          <p:cNvPr id="18" name="TextBox 17"/>
+          <p:cNvPr id="20" name="TextBox 19"/>
           <p:cNvSpPr txBox="1"/>
           <p:nvPr/>
         </p:nvSpPr>
         <p:spPr>
           <a:xfrm>
-            <a:off x="7223760" y="4590288"/>
-            <a:ext cx="566928" cy="438912"/>
+            <a:off x="7168896" y="4599432"/>
+            <a:ext cx="658368" cy="420624"/>
           </a:xfrm>
           <a:prstGeom prst="rect">
             <a:avLst/>
@@ -1699,57 +1739,102 @@
               <a:buNone/>
             </a:pPr>
             <a:r>
-              <a:rPr lang="en-US" sz="2800" dirty="0">
-                <a:solidFill>
-                  <a:srgbClr val="FFFFFF"/>
-                </a:solidFill>
-                <a:latin typeface="Avenir Book" pitchFamily="34" charset="0"/>
-                <a:ea typeface="Avenir Book" pitchFamily="34" charset="-122"/>
-                <a:cs typeface="Avenir Book" pitchFamily="34" charset="-120"/>
+              <a:rPr lang="en-US" sz="2400" dirty="0">
+                <a:solidFill>
+                  <a:srgbClr val="FFFFFF"/>
+                </a:solidFill>
+                <a:latin typeface="Poppins" pitchFamily="34" charset="0"/>
+                <a:ea typeface="Poppins" pitchFamily="34" charset="-122"/>
+                <a:cs typeface="Poppins" pitchFamily="34" charset="-120"/>
               </a:rPr>
               <a:t>02</a:t>
             </a:r>
-            <a:endParaRPr lang="en-US" sz="2800" dirty="0"/>
+            <a:endParaRPr lang="en-US" sz="2400" dirty="0"/>
           </a:p>
         </p:txBody>
       </p:sp>
-      <p:sp>
-        <p:nvSpPr>
-          <p:cNvPr id="19" name="Shape 18"/>
-          <p:cNvSpPr/>
-          <p:nvPr/>
-        </p:nvSpPr>
-        <p:spPr>
-          <a:xfrm>
-            <a:off x="8174736" y="1444752"/>
-            <a:ext cx="3611880" cy="3383280"/>
-          </a:xfrm>
-          <a:prstGeom prst="roundRect">
-            <a:avLst>
-              <a:gd name="adj" fmla="val 3784"/>
-            </a:avLst>
-          </a:prstGeom>
-          <a:solidFill>
-            <a:srgbClr val="001D3B"/>
-          </a:solidFill>
-          <a:ln w="15875">
-            <a:solidFill>
-              <a:srgbClr val="1C5EDD"/>
-            </a:solidFill>
-            <a:prstDash val="solid"/>
-          </a:ln>
-        </p:spPr>
-      </p:sp>
-      <p:sp>
-        <p:nvSpPr>
-          <p:cNvPr id="20" name="TextBox 19"/>
+      <p:pic>
+        <p:nvPicPr>
+          <p:cNvPr id="21" name="Image 6" descr="preencoded.png">    </p:cNvPr>
+          <p:cNvPicPr>
+            <a:picLocks noChangeAspect="1"/>
+          </p:cNvPicPr>
+          <p:nvPr/>
+        </p:nvPicPr>
+        <p:blipFill>
+          <a:blip r:embed="rId7"/>
+          <a:stretch>
+            <a:fillRect/>
+          </a:stretch>
+        </p:blipFill>
+        <p:spPr>
+          <a:xfrm>
+            <a:off x="8129016" y="1673352"/>
+            <a:ext cx="3767328" cy="3264408"/>
+          </a:xfrm>
+          <a:prstGeom prst="rect">
+            <a:avLst/>
+          </a:prstGeom>
+        </p:spPr>
+      </p:pic>
+      <p:pic>
+        <p:nvPicPr>
+          <p:cNvPr id="22" name="Image 7" descr="preencoded.png">    </p:cNvPr>
+          <p:cNvPicPr>
+            <a:picLocks noChangeAspect="1"/>
+          </p:cNvPicPr>
+          <p:nvPr/>
+        </p:nvPicPr>
+        <p:blipFill>
+          <a:blip r:embed="rId8"/>
+          <a:stretch>
+            <a:fillRect/>
+          </a:stretch>
+        </p:blipFill>
+        <p:spPr>
+          <a:xfrm>
+            <a:off x="9614916" y="1353312"/>
+            <a:ext cx="731520" cy="731520"/>
+          </a:xfrm>
+          <a:prstGeom prst="rect">
+            <a:avLst/>
+          </a:prstGeom>
+        </p:spPr>
+      </p:pic>
+      <p:pic>
+        <p:nvPicPr>
+          <p:cNvPr id="23" name="Image 8" descr="preencoded.png">    </p:cNvPr>
+          <p:cNvPicPr>
+            <a:picLocks noChangeAspect="1"/>
+          </p:cNvPicPr>
+          <p:nvPr/>
+        </p:nvPicPr>
+        <p:blipFill>
+          <a:blip r:embed="rId9"/>
+          <a:stretch>
+            <a:fillRect/>
+          </a:stretch>
+        </p:blipFill>
+        <p:spPr>
+          <a:xfrm>
+            <a:off x="9797796" y="1536192"/>
+            <a:ext cx="365760" cy="365760"/>
+          </a:xfrm>
+          <a:prstGeom prst="rect">
+            <a:avLst/>
+          </a:prstGeom>
+        </p:spPr>
+      </p:pic>
+      <p:sp>
+        <p:nvSpPr>
+          <p:cNvPr id="24" name="TextBox 23"/>
           <p:cNvSpPr txBox="1"/>
           <p:nvPr/>
         </p:nvSpPr>
         <p:spPr>
           <a:xfrm>
-            <a:off x="8449056" y="1627632"/>
-            <a:ext cx="3063240" cy="384048"/>
+            <a:off x="8449056" y="2176272"/>
+            <a:ext cx="3063240" cy="347472"/>
           </a:xfrm>
           <a:prstGeom prst="rect">
             <a:avLst/>
@@ -1765,30 +1850,30 @@
               <a:buNone/>
             </a:pPr>
             <a:r>
-              <a:rPr lang="en-US" sz="2200" dirty="0">
-                <a:solidFill>
-                  <a:srgbClr val="FFFFFF"/>
-                </a:solidFill>
-                <a:latin typeface="Avenir Book" pitchFamily="34" charset="0"/>
-                <a:ea typeface="Avenir Book" pitchFamily="34" charset="-122"/>
-                <a:cs typeface="Avenir Book" pitchFamily="34" charset="-120"/>
+              <a:rPr lang="en-US" sz="1800" dirty="0">
+                <a:solidFill>
+                  <a:srgbClr val="FFFFFF"/>
+                </a:solidFill>
+                <a:latin typeface="Poppins Medium" pitchFamily="34" charset="0"/>
+                <a:ea typeface="Poppins Medium" pitchFamily="34" charset="-122"/>
+                <a:cs typeface="Poppins Medium" pitchFamily="34" charset="-120"/>
               </a:rPr>
               <a:t>Kimi K3</a:t>
             </a:r>
-            <a:endParaRPr lang="en-US" sz="2200" dirty="0"/>
+            <a:endParaRPr lang="en-US" sz="1800" dirty="0"/>
           </a:p>
         </p:txBody>
       </p:sp>
       <p:sp>
         <p:nvSpPr>
-          <p:cNvPr id="21" name="Straight Connector 20"/>
+          <p:cNvPr id="25" name="Straight Connector 24"/>
           <p:cNvSpPr/>
           <p:nvPr/>
         </p:nvSpPr>
         <p:spPr>
           <a:xfrm>
-            <a:off x="8677656" y="2066544"/>
-            <a:ext cx="2606040" cy="0"/>
+            <a:off x="8723376" y="2569464"/>
+            <a:ext cx="2514600" cy="0"/>
           </a:xfrm>
           <a:prstGeom prst="line">
             <a:avLst/>
@@ -1804,14 +1889,14 @@
       </p:sp>
       <p:sp>
         <p:nvSpPr>
-          <p:cNvPr id="22" name="TextBox 21"/>
+          <p:cNvPr id="26" name="TextBox 25"/>
           <p:cNvSpPr txBox="1"/>
           <p:nvPr/>
         </p:nvSpPr>
         <p:spPr>
           <a:xfrm>
-            <a:off x="8449056" y="2139696"/>
-            <a:ext cx="3063240" cy="237744"/>
+            <a:off x="8449056" y="2633472"/>
+            <a:ext cx="3063240" cy="219456"/>
           </a:xfrm>
           <a:prstGeom prst="rect">
             <a:avLst/>
@@ -1827,30 +1912,30 @@
               <a:buNone/>
             </a:pPr>
             <a:r>
-              <a:rPr lang="en-US" sz="1150" i="1" dirty="0">
+              <a:rPr lang="en-US" sz="1000" i="1" dirty="0">
                 <a:solidFill>
                   <a:srgbClr val="C9D3E0"/>
                 </a:solidFill>
-                <a:latin typeface="Avenir Light" pitchFamily="34" charset="0"/>
-                <a:ea typeface="Avenir Light" pitchFamily="34" charset="-122"/>
-                <a:cs typeface="Avenir Light" pitchFamily="34" charset="-120"/>
+                <a:latin typeface="Poppins Light" pitchFamily="34" charset="0"/>
+                <a:ea typeface="Poppins Light" pitchFamily="34" charset="-122"/>
+                <a:cs typeface="Poppins Light" pitchFamily="34" charset="-120"/>
               </a:rPr>
               <a:t>Moonshot AI  |  Released Jul 16, 2026</a:t>
             </a:r>
-            <a:endParaRPr lang="en-US" sz="1150" dirty="0"/>
+            <a:endParaRPr lang="en-US" sz="1000" dirty="0"/>
           </a:p>
         </p:txBody>
       </p:sp>
       <p:sp>
         <p:nvSpPr>
-          <p:cNvPr id="23" name="TextBox 22"/>
+          <p:cNvPr id="27" name="TextBox 26"/>
           <p:cNvSpPr txBox="1"/>
           <p:nvPr/>
         </p:nvSpPr>
         <p:spPr>
           <a:xfrm>
-            <a:off x="8430768" y="2487168"/>
-            <a:ext cx="3154680" cy="2057400"/>
+            <a:off x="8412480" y="2944368"/>
+            <a:ext cx="3191256" cy="1645920"/>
           </a:xfrm>
           <a:prstGeom prst="rect">
             <a:avLst/>
@@ -1862,9 +1947,9 @@
           <a:bodyPr wrap="square" lIns="0" tIns="0" rIns="0" bIns="0" rtlCol="0" anchor="t"/>
           <a:lstStyle/>
           <a:p>
-            <a:pPr marL="203200" indent="-203200">
+            <a:pPr marL="190500" indent="-190500">
               <a:spcAft>
-                <a:spcPts val="900"/>
+                <a:spcPts val="700"/>
               </a:spcAft>
               <a:buClr>
                 <a:srgbClr val="FFFFFF"/>
@@ -1873,55 +1958,55 @@
               <a:buChar char="•"/>
             </a:pPr>
             <a:r>
-              <a:rPr lang="en-US" sz="1300" dirty="0">
-                <a:solidFill>
-                  <a:srgbClr val="FFFFFF"/>
-                </a:solidFill>
-                <a:latin typeface="Avenir Book" pitchFamily="34" charset="0"/>
-                <a:ea typeface="Avenir Book" pitchFamily="34" charset="-122"/>
-                <a:cs typeface="Avenir Book" pitchFamily="34" charset="-120"/>
+              <a:rPr lang="en-US" sz="1150" dirty="0">
+                <a:solidFill>
+                  <a:srgbClr val="FFFFFF"/>
+                </a:solidFill>
+                <a:latin typeface="Poppins" pitchFamily="34" charset="0"/>
+                <a:ea typeface="Poppins" pitchFamily="34" charset="-122"/>
+                <a:cs typeface="Poppins" pitchFamily="34" charset="-120"/>
               </a:rPr>
               <a:t>Best for </a:t>
             </a:r>
             <a:r>
-              <a:rPr lang="en-US" sz="1300" dirty="0">
+              <a:rPr lang="en-US" sz="1150" dirty="0">
                 <a:solidFill>
                   <a:srgbClr val="5DAAFF"/>
                 </a:solidFill>
-                <a:latin typeface="Avenir Book" pitchFamily="34" charset="0"/>
-                <a:ea typeface="Avenir Book" pitchFamily="34" charset="-122"/>
-                <a:cs typeface="Avenir Book" pitchFamily="34" charset="-120"/>
+                <a:latin typeface="Poppins" pitchFamily="34" charset="0"/>
+                <a:ea typeface="Poppins" pitchFamily="34" charset="-122"/>
+                <a:cs typeface="Poppins" pitchFamily="34" charset="-120"/>
               </a:rPr>
               <a:t>high-volume, low-cost work</a:t>
             </a:r>
             <a:r>
-              <a:rPr lang="en-US" sz="1300" dirty="0">
-                <a:solidFill>
-                  <a:srgbClr val="FFFFFF"/>
-                </a:solidFill>
-                <a:latin typeface="Avenir Book" pitchFamily="34" charset="0"/>
-                <a:ea typeface="Avenir Book" pitchFamily="34" charset="-122"/>
-                <a:cs typeface="Avenir Book" pitchFamily="34" charset="-120"/>
+              <a:rPr lang="en-US" sz="1150" dirty="0">
+                <a:solidFill>
+                  <a:srgbClr val="FFFFFF"/>
+                </a:solidFill>
+                <a:latin typeface="Poppins" pitchFamily="34" charset="0"/>
+                <a:ea typeface="Poppins" pitchFamily="34" charset="-122"/>
+                <a:cs typeface="Poppins" pitchFamily="34" charset="-120"/>
               </a:rPr>
               <a:t> and anything that has to be </a:t>
             </a:r>
             <a:r>
-              <a:rPr lang="en-US" sz="1300" dirty="0">
+              <a:rPr lang="en-US" sz="1150" dirty="0">
                 <a:solidFill>
                   <a:srgbClr val="5DAAFF"/>
                 </a:solidFill>
-                <a:latin typeface="Avenir Book" pitchFamily="34" charset="0"/>
-                <a:ea typeface="Avenir Book" pitchFamily="34" charset="-122"/>
-                <a:cs typeface="Avenir Book" pitchFamily="34" charset="-120"/>
+                <a:latin typeface="Poppins" pitchFamily="34" charset="0"/>
+                <a:ea typeface="Poppins" pitchFamily="34" charset="-122"/>
+                <a:cs typeface="Poppins" pitchFamily="34" charset="-120"/>
               </a:rPr>
               <a:t>self-hosted</a:t>
             </a:r>
-            <a:endParaRPr lang="en-US" sz="1300" dirty="0"/>
-          </a:p>
-          <a:p>
-            <a:pPr marL="203200" indent="-203200">
+            <a:endParaRPr lang="en-US" sz="1150" dirty="0"/>
+          </a:p>
+          <a:p>
+            <a:pPr marL="190500" indent="-190500">
               <a:spcAft>
-                <a:spcPts val="900"/>
+                <a:spcPts val="700"/>
               </a:spcAft>
               <a:buClr>
                 <a:srgbClr val="FFFFFF"/>
@@ -1930,44 +2015,44 @@
               <a:buChar char="•"/>
             </a:pPr>
             <a:r>
-              <a:rPr lang="en-US" sz="1300" dirty="0">
-                <a:solidFill>
-                  <a:srgbClr val="FFFFFF"/>
-                </a:solidFill>
-                <a:latin typeface="Avenir Book" pitchFamily="34" charset="0"/>
-                <a:ea typeface="Avenir Book" pitchFamily="34" charset="-122"/>
-                <a:cs typeface="Avenir Book" pitchFamily="34" charset="-120"/>
+              <a:rPr lang="en-US" sz="1150" dirty="0">
+                <a:solidFill>
+                  <a:srgbClr val="FFFFFF"/>
+                </a:solidFill>
+                <a:latin typeface="Poppins" pitchFamily="34" charset="0"/>
+                <a:ea typeface="Poppins" pitchFamily="34" charset="-122"/>
+                <a:cs typeface="Poppins" pitchFamily="34" charset="-120"/>
               </a:rPr>
               <a:t>The </a:t>
             </a:r>
             <a:r>
-              <a:rPr lang="en-US" sz="1300" dirty="0">
+              <a:rPr lang="en-US" sz="1150" dirty="0">
                 <a:solidFill>
                   <a:srgbClr val="5DAAFF"/>
                 </a:solidFill>
-                <a:latin typeface="Avenir Book" pitchFamily="34" charset="0"/>
-                <a:ea typeface="Avenir Book" pitchFamily="34" charset="-122"/>
-                <a:cs typeface="Avenir Book" pitchFamily="34" charset="-120"/>
+                <a:latin typeface="Poppins" pitchFamily="34" charset="0"/>
+                <a:ea typeface="Poppins" pitchFamily="34" charset="-122"/>
+                <a:cs typeface="Poppins" pitchFamily="34" charset="-120"/>
               </a:rPr>
               <a:t>only open-weight model</a:t>
             </a:r>
             <a:r>
-              <a:rPr lang="en-US" sz="1300" dirty="0">
-                <a:solidFill>
-                  <a:srgbClr val="FFFFFF"/>
-                </a:solidFill>
-                <a:latin typeface="Avenir Book" pitchFamily="34" charset="0"/>
-                <a:ea typeface="Avenir Book" pitchFamily="34" charset="-122"/>
-                <a:cs typeface="Avenir Book" pitchFamily="34" charset="-120"/>
+              <a:rPr lang="en-US" sz="1150" dirty="0">
+                <a:solidFill>
+                  <a:srgbClr val="FFFFFF"/>
+                </a:solidFill>
+                <a:latin typeface="Poppins" pitchFamily="34" charset="0"/>
+                <a:ea typeface="Poppins" pitchFamily="34" charset="-122"/>
+                <a:cs typeface="Poppins" pitchFamily="34" charset="-120"/>
               </a:rPr>
               <a:t> of the three, with 2.8T parameters</a:t>
             </a:r>
-            <a:endParaRPr lang="en-US" sz="1300" dirty="0"/>
-          </a:p>
-          <a:p>
-            <a:pPr marL="203200" indent="-203200">
+            <a:endParaRPr lang="en-US" sz="1150" dirty="0"/>
+          </a:p>
+          <a:p>
+            <a:pPr marL="190500" indent="-190500">
               <a:spcAft>
-                <a:spcPts val="900"/>
+                <a:spcPts val="700"/>
               </a:spcAft>
               <a:buClr>
                 <a:srgbClr val="FFFFFF"/>
@@ -1976,77 +2061,52 @@
               <a:buChar char="•"/>
             </a:pPr>
             <a:r>
-              <a:rPr lang="en-US" sz="1300" dirty="0">
-                <a:solidFill>
-                  <a:srgbClr val="FFFFFF"/>
-                </a:solidFill>
-                <a:latin typeface="Avenir Book" pitchFamily="34" charset="0"/>
-                <a:ea typeface="Avenir Book" pitchFamily="34" charset="-122"/>
-                <a:cs typeface="Avenir Book" pitchFamily="34" charset="-120"/>
+              <a:rPr lang="en-US" sz="1150" dirty="0">
+                <a:solidFill>
+                  <a:srgbClr val="FFFFFF"/>
+                </a:solidFill>
+                <a:latin typeface="Poppins" pitchFamily="34" charset="0"/>
+                <a:ea typeface="Poppins" pitchFamily="34" charset="-122"/>
+                <a:cs typeface="Poppins" pitchFamily="34" charset="-120"/>
               </a:rPr>
               <a:t>Cheapest at </a:t>
             </a:r>
             <a:r>
-              <a:rPr lang="en-US" sz="1300" dirty="0">
+              <a:rPr lang="en-US" sz="1150" dirty="0">
                 <a:solidFill>
                   <a:srgbClr val="5DAAFF"/>
                 </a:solidFill>
-                <a:latin typeface="Avenir Book" pitchFamily="34" charset="0"/>
-                <a:ea typeface="Avenir Book" pitchFamily="34" charset="-122"/>
-                <a:cs typeface="Avenir Book" pitchFamily="34" charset="-120"/>
+                <a:latin typeface="Poppins" pitchFamily="34" charset="0"/>
+                <a:ea typeface="Poppins" pitchFamily="34" charset="-122"/>
+                <a:cs typeface="Poppins" pitchFamily="34" charset="-120"/>
               </a:rPr>
               <a:t>$3 / $15 per 1M tokens</a:t>
             </a:r>
             <a:r>
-              <a:rPr lang="en-US" sz="1300" dirty="0">
-                <a:solidFill>
-                  <a:srgbClr val="FFFFFF"/>
-                </a:solidFill>
-                <a:latin typeface="Avenir Book" pitchFamily="34" charset="0"/>
-                <a:ea typeface="Avenir Book" pitchFamily="34" charset="-122"/>
-                <a:cs typeface="Avenir Book" pitchFamily="34" charset="-120"/>
+              <a:rPr lang="en-US" sz="1150" dirty="0">
+                <a:solidFill>
+                  <a:srgbClr val="FFFFFF"/>
+                </a:solidFill>
+                <a:latin typeface="Poppins" pitchFamily="34" charset="0"/>
+                <a:ea typeface="Poppins" pitchFamily="34" charset="-122"/>
+                <a:cs typeface="Poppins" pitchFamily="34" charset="-120"/>
               </a:rPr>
               <a:t>, but scores 44 vs. 58 for Opus on the Artificial Analysis index</a:t>
             </a:r>
-            <a:endParaRPr lang="en-US" sz="1300" dirty="0"/>
+            <a:endParaRPr lang="en-US" sz="1150" dirty="0"/>
           </a:p>
         </p:txBody>
       </p:sp>
       <p:sp>
         <p:nvSpPr>
-          <p:cNvPr id="24" name="Rectangle 23"/>
-          <p:cNvSpPr/>
-          <p:nvPr/>
-        </p:nvSpPr>
-        <p:spPr>
-          <a:xfrm>
-            <a:off x="11128248" y="4645152"/>
-            <a:ext cx="566928" cy="365760"/>
-          </a:xfrm>
-          <a:prstGeom prst="rect">
-            <a:avLst/>
-          </a:prstGeom>
-          <a:solidFill>
-            <a:srgbClr val="001D3B"/>
-          </a:solidFill>
-          <a:ln w="12700">
-            <a:solidFill>
-              <a:srgbClr val="001D3B"/>
-            </a:solidFill>
-            <a:prstDash val="solid"/>
-          </a:ln>
-        </p:spPr>
-      </p:sp>
-      <p:sp>
-        <p:nvSpPr>
-          <p:cNvPr id="25" name="TextBox 24"/>
+          <p:cNvPr id="28" name="TextBox 27"/>
           <p:cNvSpPr txBox="1"/>
           <p:nvPr/>
         </p:nvSpPr>
         <p:spPr>
           <a:xfrm>
-            <a:off x="11128248" y="4590288"/>
-            <a:ext cx="566928" cy="438912"/>
+            <a:off x="11073384" y="4599432"/>
+            <a:ext cx="658368" cy="420624"/>
           </a:xfrm>
           <a:prstGeom prst="rect">
             <a:avLst/>
@@ -2062,109 +2122,54 @@
               <a:buNone/>
             </a:pPr>
             <a:r>
-              <a:rPr lang="en-US" sz="2800" dirty="0">
-                <a:solidFill>
-                  <a:srgbClr val="FFFFFF"/>
-                </a:solidFill>
-                <a:latin typeface="Avenir Book" pitchFamily="34" charset="0"/>
-                <a:ea typeface="Avenir Book" pitchFamily="34" charset="-122"/>
-                <a:cs typeface="Avenir Book" pitchFamily="34" charset="-120"/>
+              <a:rPr lang="en-US" sz="2400" dirty="0">
+                <a:solidFill>
+                  <a:srgbClr val="FFFFFF"/>
+                </a:solidFill>
+                <a:latin typeface="Poppins" pitchFamily="34" charset="0"/>
+                <a:ea typeface="Poppins" pitchFamily="34" charset="-122"/>
+                <a:cs typeface="Poppins" pitchFamily="34" charset="-120"/>
               </a:rPr>
               <a:t>03</a:t>
             </a:r>
-            <a:endParaRPr lang="en-US" sz="2800" dirty="0"/>
+            <a:endParaRPr lang="en-US" sz="2400" dirty="0"/>
           </a:p>
         </p:txBody>
       </p:sp>
-      <p:sp>
-        <p:nvSpPr>
-          <p:cNvPr id="26" name="Shape 25"/>
-          <p:cNvSpPr/>
-          <p:nvPr/>
-        </p:nvSpPr>
-        <p:spPr>
-          <a:xfrm>
-            <a:off x="320040" y="5010912"/>
-            <a:ext cx="11548872" cy="1078992"/>
-          </a:xfrm>
-          <a:prstGeom prst="roundRect">
-            <a:avLst>
-              <a:gd name="adj" fmla="val 13559"/>
-            </a:avLst>
-          </a:prstGeom>
-          <a:solidFill>
-            <a:srgbClr val="001D3B"/>
-          </a:solidFill>
-          <a:ln w="12700">
-            <a:solidFill>
-              <a:srgbClr val="5B7495"/>
-            </a:solidFill>
-            <a:prstDash val="solid"/>
-          </a:ln>
-        </p:spPr>
-      </p:sp>
-      <p:sp>
-        <p:nvSpPr>
-          <p:cNvPr id="27" name="Shape 26"/>
-          <p:cNvSpPr/>
-          <p:nvPr/>
-        </p:nvSpPr>
-        <p:spPr>
-          <a:xfrm>
-            <a:off x="365760" y="5047488"/>
-            <a:ext cx="11457432" cy="1005840"/>
-          </a:xfrm>
-          <a:prstGeom prst="roundRect">
-            <a:avLst>
-              <a:gd name="adj" fmla="val 12727"/>
-            </a:avLst>
-          </a:prstGeom>
-          <a:solidFill>
-            <a:srgbClr val="001D3B"/>
-          </a:solidFill>
-          <a:ln w="12700">
-            <a:solidFill>
-              <a:srgbClr val="5DAAFF"/>
-            </a:solidFill>
-            <a:prstDash val="solid"/>
-          </a:ln>
-        </p:spPr>
-      </p:sp>
-      <p:sp>
-        <p:nvSpPr>
-          <p:cNvPr id="28" name="Rectangle 27"/>
-          <p:cNvSpPr/>
-          <p:nvPr/>
-        </p:nvSpPr>
-        <p:spPr>
-          <a:xfrm>
-            <a:off x="1234440" y="4864608"/>
-            <a:ext cx="2148840" cy="310896"/>
-          </a:xfrm>
-          <a:prstGeom prst="rect">
-            <a:avLst/>
-          </a:prstGeom>
-          <a:solidFill>
-            <a:srgbClr val="001D3B"/>
-          </a:solidFill>
-          <a:ln w="12700">
-            <a:solidFill>
-              <a:srgbClr val="001D3B"/>
-            </a:solidFill>
-            <a:prstDash val="solid"/>
-          </a:ln>
-        </p:spPr>
-      </p:sp>
-      <p:sp>
-        <p:nvSpPr>
-          <p:cNvPr id="29" name="TextBox 28"/>
+      <p:pic>
+        <p:nvPicPr>
+          <p:cNvPr id="29" name="Image 9" descr="preencoded.png">    </p:cNvPr>
+          <p:cNvPicPr>
+            <a:picLocks noChangeAspect="1"/>
+          </p:cNvPicPr>
+          <p:nvPr/>
+        </p:nvPicPr>
+        <p:blipFill>
+          <a:blip r:embed="rId10"/>
+          <a:stretch>
+            <a:fillRect/>
+          </a:stretch>
+        </p:blipFill>
+        <p:spPr>
+          <a:xfrm>
+            <a:off x="320040" y="5184648"/>
+            <a:ext cx="11612880" cy="1069848"/>
+          </a:xfrm>
+          <a:prstGeom prst="rect">
+            <a:avLst/>
+          </a:prstGeom>
+        </p:spPr>
+      </p:pic>
+      <p:sp>
+        <p:nvSpPr>
+          <p:cNvPr id="30" name="TextBox 29"/>
           <p:cNvSpPr txBox="1"/>
           <p:nvPr/>
         </p:nvSpPr>
         <p:spPr>
           <a:xfrm>
-            <a:off x="1234440" y="4846320"/>
-            <a:ext cx="2148840" cy="347472"/>
+            <a:off x="822960" y="5047488"/>
+            <a:ext cx="2331720" cy="365760"/>
           </a:xfrm>
           <a:prstGeom prst="rect">
             <a:avLst/>
@@ -2180,30 +2185,30 @@
               <a:buNone/>
             </a:pPr>
             <a:r>
-              <a:rPr lang="en-US" sz="1800" dirty="0">
-                <a:solidFill>
-                  <a:srgbClr val="FFFFFF"/>
-                </a:solidFill>
-                <a:latin typeface="Avenir Book" pitchFamily="34" charset="0"/>
-                <a:ea typeface="Avenir Book" pitchFamily="34" charset="-122"/>
-                <a:cs typeface="Avenir Book" pitchFamily="34" charset="-120"/>
+              <a:rPr lang="en-US" sz="1600" dirty="0">
+                <a:solidFill>
+                  <a:srgbClr val="FFFFFF"/>
+                </a:solidFill>
+                <a:latin typeface="Poppins" pitchFamily="34" charset="0"/>
+                <a:ea typeface="Poppins" pitchFamily="34" charset="-122"/>
+                <a:cs typeface="Poppins" pitchFamily="34" charset="-120"/>
               </a:rPr>
               <a:t>Key Takeaways</a:t>
             </a:r>
-            <a:endParaRPr lang="en-US" sz="1800" dirty="0"/>
+            <a:endParaRPr lang="en-US" sz="1600" dirty="0"/>
           </a:p>
         </p:txBody>
       </p:sp>
       <p:sp>
         <p:nvSpPr>
-          <p:cNvPr id="30" name="TextBox 29"/>
+          <p:cNvPr id="31" name="TextBox 30"/>
           <p:cNvSpPr txBox="1"/>
           <p:nvPr/>
         </p:nvSpPr>
         <p:spPr>
           <a:xfrm>
-            <a:off x="640080" y="5230368"/>
-            <a:ext cx="10908792" cy="731520"/>
+            <a:off x="640080" y="5413248"/>
+            <a:ext cx="10908792" cy="658368"/>
           </a:xfrm>
           <a:prstGeom prst="rect">
             <a:avLst/>
@@ -2215,9 +2220,9 @@
           <a:bodyPr wrap="square" lIns="0" tIns="0" rIns="0" bIns="0" rtlCol="0" anchor="ctr"/>
           <a:lstStyle/>
           <a:p>
-            <a:pPr marL="203200" indent="-203200">
+            <a:pPr marL="190500" indent="-190500">
               <a:spcAft>
-                <a:spcPts val="600"/>
+                <a:spcPts val="500"/>
               </a:spcAft>
               <a:buClr>
                 <a:srgbClr val="FFFFFF"/>
@@ -2226,44 +2231,44 @@
               <a:buChar char="•"/>
             </a:pPr>
             <a:r>
-              <a:rPr lang="en-US" sz="1400" dirty="0">
+              <a:rPr lang="en-US" sz="1200" dirty="0">
                 <a:solidFill>
                   <a:srgbClr val="5DAAFF"/>
                 </a:solidFill>
-                <a:latin typeface="Avenir Book" pitchFamily="34" charset="0"/>
-                <a:ea typeface="Avenir Book" pitchFamily="34" charset="-122"/>
-                <a:cs typeface="Avenir Book" pitchFamily="34" charset="-120"/>
+                <a:latin typeface="Poppins" pitchFamily="34" charset="0"/>
+                <a:ea typeface="Poppins" pitchFamily="34" charset="-122"/>
+                <a:cs typeface="Poppins" pitchFamily="34" charset="-120"/>
               </a:rPr>
               <a:t>Opus 5.5</a:t>
             </a:r>
             <a:r>
-              <a:rPr lang="en-US" sz="1400" dirty="0">
-                <a:solidFill>
-                  <a:srgbClr val="FFFFFF"/>
-                </a:solidFill>
-                <a:latin typeface="Avenir Book" pitchFamily="34" charset="0"/>
-                <a:ea typeface="Avenir Book" pitchFamily="34" charset="-122"/>
-                <a:cs typeface="Avenir Book" pitchFamily="34" charset="-120"/>
+              <a:rPr lang="en-US" sz="1200" dirty="0">
+                <a:solidFill>
+                  <a:srgbClr val="FFFFFF"/>
+                </a:solidFill>
+                <a:latin typeface="Poppins" pitchFamily="34" charset="0"/>
+                <a:ea typeface="Poppins" pitchFamily="34" charset="-122"/>
+                <a:cs typeface="Poppins" pitchFamily="34" charset="-120"/>
               </a:rPr>
               <a:t> should be the default for most work, given its lead on coding and knowledge-work benchmarks and its </a:t>
             </a:r>
             <a:r>
-              <a:rPr lang="en-US" sz="1400" dirty="0">
+              <a:rPr lang="en-US" sz="1200" dirty="0">
                 <a:solidFill>
                   <a:srgbClr val="5DAAFF"/>
                 </a:solidFill>
-                <a:latin typeface="Avenir Book" pitchFamily="34" charset="0"/>
-                <a:ea typeface="Avenir Book" pitchFamily="34" charset="-122"/>
-                <a:cs typeface="Avenir Book" pitchFamily="34" charset="-120"/>
+                <a:latin typeface="Poppins" pitchFamily="34" charset="0"/>
+                <a:ea typeface="Poppins" pitchFamily="34" charset="-122"/>
+                <a:cs typeface="Poppins" pitchFamily="34" charset="-120"/>
               </a:rPr>
               <a:t>lower price than Astra</a:t>
             </a:r>
-            <a:endParaRPr lang="en-US" sz="1400" dirty="0"/>
-          </a:p>
-          <a:p>
-            <a:pPr marL="203200" indent="-203200">
+            <a:endParaRPr lang="en-US" sz="1200" dirty="0"/>
+          </a:p>
+          <a:p>
+            <a:pPr marL="190500" indent="-190500">
               <a:spcAft>
-                <a:spcPts val="600"/>
+                <a:spcPts val="500"/>
               </a:spcAft>
               <a:buClr>
                 <a:srgbClr val="FFFFFF"/>
@@ -2272,63 +2277,63 @@
               <a:buChar char="•"/>
             </a:pPr>
             <a:r>
-              <a:rPr lang="en-US" sz="1400" dirty="0">
+              <a:rPr lang="en-US" sz="1200" dirty="0">
                 <a:solidFill>
                   <a:srgbClr val="5DAAFF"/>
                 </a:solidFill>
-                <a:latin typeface="Avenir Book" pitchFamily="34" charset="0"/>
-                <a:ea typeface="Avenir Book" pitchFamily="34" charset="-122"/>
-                <a:cs typeface="Avenir Book" pitchFamily="34" charset="-120"/>
+                <a:latin typeface="Poppins" pitchFamily="34" charset="0"/>
+                <a:ea typeface="Poppins" pitchFamily="34" charset="-122"/>
+                <a:cs typeface="Poppins" pitchFamily="34" charset="-120"/>
               </a:rPr>
               <a:t>Astra</a:t>
             </a:r>
             <a:r>
-              <a:rPr lang="en-US" sz="1400" dirty="0">
-                <a:solidFill>
-                  <a:srgbClr val="FFFFFF"/>
-                </a:solidFill>
-                <a:latin typeface="Avenir Book" pitchFamily="34" charset="0"/>
-                <a:ea typeface="Avenir Book" pitchFamily="34" charset="-122"/>
-                <a:cs typeface="Avenir Book" pitchFamily="34" charset="-120"/>
+              <a:rPr lang="en-US" sz="1200" dirty="0">
+                <a:solidFill>
+                  <a:srgbClr val="FFFFFF"/>
+                </a:solidFill>
+                <a:latin typeface="Poppins" pitchFamily="34" charset="0"/>
+                <a:ea typeface="Poppins" pitchFamily="34" charset="-122"/>
+                <a:cs typeface="Poppins" pitchFamily="34" charset="-120"/>
               </a:rPr>
               <a:t> is worth the premium for specialist work, while </a:t>
             </a:r>
             <a:r>
-              <a:rPr lang="en-US" sz="1400" dirty="0">
+              <a:rPr lang="en-US" sz="1200" dirty="0">
                 <a:solidFill>
                   <a:srgbClr val="5DAAFF"/>
                 </a:solidFill>
-                <a:latin typeface="Avenir Book" pitchFamily="34" charset="0"/>
-                <a:ea typeface="Avenir Book" pitchFamily="34" charset="-122"/>
-                <a:cs typeface="Avenir Book" pitchFamily="34" charset="-120"/>
+                <a:latin typeface="Poppins" pitchFamily="34" charset="0"/>
+                <a:ea typeface="Poppins" pitchFamily="34" charset="-122"/>
+                <a:cs typeface="Poppins" pitchFamily="34" charset="-120"/>
               </a:rPr>
               <a:t>Kimi K3</a:t>
             </a:r>
             <a:r>
-              <a:rPr lang="en-US" sz="1400" dirty="0">
-                <a:solidFill>
-                  <a:srgbClr val="FFFFFF"/>
-                </a:solidFill>
-                <a:latin typeface="Avenir Book" pitchFamily="34" charset="0"/>
-                <a:ea typeface="Avenir Book" pitchFamily="34" charset="-122"/>
-                <a:cs typeface="Avenir Book" pitchFamily="34" charset="-120"/>
+              <a:rPr lang="en-US" sz="1200" dirty="0">
+                <a:solidFill>
+                  <a:srgbClr val="FFFFFF"/>
+                </a:solidFill>
+                <a:latin typeface="Poppins" pitchFamily="34" charset="0"/>
+                <a:ea typeface="Poppins" pitchFamily="34" charset="-122"/>
+                <a:cs typeface="Poppins" pitchFamily="34" charset="-120"/>
               </a:rPr>
               <a:t> fits teams that need to keep data in-house or cut costs</a:t>
             </a:r>
-            <a:endParaRPr lang="en-US" sz="1400" dirty="0"/>
+            <a:endParaRPr lang="en-US" sz="1200" dirty="0"/>
           </a:p>
         </p:txBody>
       </p:sp>
       <p:sp>
         <p:nvSpPr>
-          <p:cNvPr id="31" name="TextBox 30"/>
+          <p:cNvPr id="32" name="TextBox 31"/>
           <p:cNvSpPr txBox="1"/>
           <p:nvPr/>
         </p:nvSpPr>
         <p:spPr>
           <a:xfrm>
-            <a:off x="365760" y="6400800"/>
-            <a:ext cx="11430000" cy="228600"/>
+            <a:off x="365760" y="6428232"/>
+            <a:ext cx="11430000" cy="201168"/>
           </a:xfrm>
           <a:prstGeom prst="rect">
             <a:avLst/>
@@ -2344,17 +2349,17 @@
               <a:buNone/>
             </a:pPr>
             <a:r>
-              <a:rPr lang="en-US" sz="1000" dirty="0">
+              <a:rPr lang="en-US" sz="850" dirty="0">
                 <a:solidFill>
                   <a:srgbClr val="7F8FA6"/>
                 </a:solidFill>
-                <a:latin typeface="Avenir Book" pitchFamily="34" charset="0"/>
-                <a:ea typeface="Avenir Book" pitchFamily="34" charset="-122"/>
-                <a:cs typeface="Avenir Book" pitchFamily="34" charset="-120"/>
+                <a:latin typeface="Poppins" pitchFamily="34" charset="0"/>
+                <a:ea typeface="Poppins" pitchFamily="34" charset="-122"/>
+                <a:cs typeface="Poppins" pitchFamily="34" charset="-120"/>
               </a:rPr>
               <a:t>Sources: Anthropic, OpenAI, Moonshot AI, Artificial Analysis (Sep 2026). Opus vs. Astra benchmarks as reported by Anthropic.</a:t>
             </a:r>
-            <a:endParaRPr lang="en-US" sz="1000" dirty="0"/>
+            <a:endParaRPr lang="en-US" sz="850" dirty="0"/>
           </a:p>
         </p:txBody>
       </p:sp>
@@ -2409,7 +2414,7 @@
     </a:clrScheme>
     <a:fontScheme name="Office">
       <a:majorFont>
-        <a:latin typeface="Avenir Book"/>
+        <a:latin typeface="Poppins"/>
         <a:ea typeface=""/>
         <a:cs typeface=""/>
         <a:font script="Jpan" typeface="游ゴシック Light"/>
@@ -2461,7 +2466,7 @@
         <a:font script="Tfng" typeface="Ebrima"/>
       </a:majorFont>
       <a:minorFont>
-        <a:latin typeface="Avenir Book"/>
+        <a:latin typeface="Poppins"/>
         <a:ea typeface=""/>
         <a:cs typeface=""/>
         <a:font script="Jpan" typeface="游ゴシック"/>

--- a/ai-model-comparison/AI-Model-Comparison-Sep-2026.pptx
+++ b/ai-model-comparison/AI-Model-Comparison-Sep-2026.pptx
@@ -856,9 +856,16 @@
   <p:cSld name="Slide 1">
     <p:bg>
       <p:bgPr>
-        <a:solidFill>
-          <a:srgbClr val="001D3B"/>
-        </a:solidFill>
+        <a:blipFill dpi="0" rotWithShape="1">
+          <a:blip r:embed="rId1">
+            <a:lum/>
+          </a:blip>
+          <a:srcRect/>
+          <a:stretch>
+            <a:fillRect/>
+          </a:stretch>
+        </a:blipFill>
+        <a:effectLst/>
       </p:bgPr>
     </p:bg>
     <p:spTree>
@@ -877,132 +884,116 @@
       </p:grpSpPr>
       <p:sp>
         <p:nvSpPr>
-          <p:cNvPr id="2" name="Straight Connector 1"/>
+          <p:cNvPr id="2" name="TextBox 1"/>
+          <p:cNvSpPr txBox="1"/>
+          <p:nvPr/>
+        </p:nvSpPr>
+        <p:spPr>
+          <a:xfrm>
+            <a:off x="411480" y="329184"/>
+            <a:ext cx="10972800" cy="530352"/>
+          </a:xfrm>
+          <a:prstGeom prst="rect">
+            <a:avLst/>
+          </a:prstGeom>
+          <a:noFill/>
+          <a:ln/>
+        </p:spPr>
+        <p:txBody>
+          <a:bodyPr wrap="square" lIns="0" tIns="0" rIns="0" bIns="0" rtlCol="0" anchor="t"/>
+          <a:lstStyle/>
+          <a:p>
+            <a:pPr indent="0" marL="0">
+              <a:buNone/>
+            </a:pPr>
+            <a:r>
+              <a:rPr lang="en-US" sz="3000" dirty="0">
+                <a:solidFill>
+                  <a:srgbClr val="FFFFFF"/>
+                </a:solidFill>
+                <a:latin typeface="Poppins" pitchFamily="34" charset="0"/>
+                <a:ea typeface="Poppins" pitchFamily="34" charset="-122"/>
+                <a:cs typeface="Poppins" pitchFamily="34" charset="-120"/>
+              </a:rPr>
+              <a:t>Analysis of the Top Three Frontier AI Models</a:t>
+            </a:r>
+            <a:endParaRPr lang="en-US" sz="3000" dirty="0"/>
+          </a:p>
+        </p:txBody>
+      </p:sp>
+      <p:sp>
+        <p:nvSpPr>
+          <p:cNvPr id="3" name="TextBox 2"/>
+          <p:cNvSpPr txBox="1"/>
+          <p:nvPr/>
+        </p:nvSpPr>
+        <p:spPr>
+          <a:xfrm>
+            <a:off x="411480" y="868680"/>
+            <a:ext cx="11338560" cy="292608"/>
+          </a:xfrm>
+          <a:prstGeom prst="rect">
+            <a:avLst/>
+          </a:prstGeom>
+          <a:noFill/>
+          <a:ln/>
+        </p:spPr>
+        <p:txBody>
+          <a:bodyPr wrap="square" lIns="0" tIns="0" rIns="0" bIns="0" rtlCol="0" anchor="t"/>
+          <a:lstStyle/>
+          <a:p>
+            <a:pPr indent="0" marL="0">
+              <a:buNone/>
+            </a:pPr>
+            <a:r>
+              <a:rPr lang="en-US" sz="1350" i="1" dirty="0">
+                <a:solidFill>
+                  <a:srgbClr val="AEB6DA"/>
+                </a:solidFill>
+                <a:latin typeface="Poppins Light" pitchFamily="34" charset="0"/>
+                <a:ea typeface="Poppins Light" pitchFamily="34" charset="-122"/>
+                <a:cs typeface="Poppins Light" pitchFamily="34" charset="-120"/>
+              </a:rPr>
+              <a:t>Opus 5.5 leads on coding and analyst work, Astra on 3D tools and hard science, and Kimi K3 on cost and self-hosting</a:t>
+            </a:r>
+            <a:endParaRPr lang="en-US" sz="1350" dirty="0"/>
+          </a:p>
+        </p:txBody>
+      </p:sp>
+      <p:sp>
+        <p:nvSpPr>
+          <p:cNvPr id="4" name="Shape 3"/>
           <p:cNvSpPr/>
           <p:nvPr/>
         </p:nvSpPr>
         <p:spPr>
           <a:xfrm>
-            <a:off x="530352" y="402336"/>
-            <a:ext cx="0" cy="731520"/>
-          </a:xfrm>
-          <a:prstGeom prst="line">
-            <a:avLst/>
-          </a:prstGeom>
-          <a:noFill/>
-          <a:ln w="12700">
+            <a:off x="365760" y="1481328"/>
+            <a:ext cx="3611880" cy="3291840"/>
+          </a:xfrm>
+          <a:prstGeom prst="roundRect">
+            <a:avLst>
+              <a:gd name="adj" fmla="val 5000"/>
+            </a:avLst>
+          </a:prstGeom>
+          <a:solidFill>
+            <a:srgbClr val="FFFFFF">
+              <a:alpha val="6000"/>
+            </a:srgbClr>
+          </a:solidFill>
+          <a:ln w="6350">
             <a:solidFill>
-              <a:srgbClr val="FFFFFF"/>
+              <a:srgbClr val="FFFFFF">
+                <a:alpha val="10000"/>
+              </a:srgbClr>
             </a:solidFill>
             <a:prstDash val="solid"/>
           </a:ln>
         </p:spPr>
       </p:sp>
-      <p:sp>
-        <p:nvSpPr>
-          <p:cNvPr id="3" name="TextBox 2"/>
-          <p:cNvSpPr txBox="1"/>
-          <p:nvPr/>
-        </p:nvSpPr>
-        <p:spPr>
-          <a:xfrm>
-            <a:off x="795528" y="310896"/>
-            <a:ext cx="10515600" cy="530352"/>
-          </a:xfrm>
-          <a:prstGeom prst="rect">
-            <a:avLst/>
-          </a:prstGeom>
-          <a:noFill/>
-          <a:ln/>
-        </p:spPr>
-        <p:txBody>
-          <a:bodyPr wrap="square" lIns="0" tIns="0" rIns="0" bIns="0" rtlCol="0" anchor="t"/>
-          <a:lstStyle/>
-          <a:p>
-            <a:pPr indent="0" marL="0">
-              <a:buNone/>
-            </a:pPr>
-            <a:r>
-              <a:rPr lang="en-US" sz="3000" dirty="0">
-                <a:solidFill>
-                  <a:srgbClr val="FFFFFF"/>
-                </a:solidFill>
-                <a:latin typeface="Poppins" pitchFamily="34" charset="0"/>
-                <a:ea typeface="Poppins" pitchFamily="34" charset="-122"/>
-                <a:cs typeface="Poppins" pitchFamily="34" charset="-120"/>
-              </a:rPr>
-              <a:t>Analysis of the Top Three Frontier AI Models</a:t>
-            </a:r>
-            <a:endParaRPr lang="en-US" sz="3000" dirty="0"/>
-          </a:p>
-        </p:txBody>
-      </p:sp>
-      <p:sp>
-        <p:nvSpPr>
-          <p:cNvPr id="4" name="TextBox 3"/>
-          <p:cNvSpPr txBox="1"/>
-          <p:nvPr/>
-        </p:nvSpPr>
-        <p:spPr>
-          <a:xfrm>
-            <a:off x="795528" y="850392"/>
-            <a:ext cx="11064240" cy="292608"/>
-          </a:xfrm>
-          <a:prstGeom prst="rect">
-            <a:avLst/>
-          </a:prstGeom>
-          <a:noFill/>
-          <a:ln/>
-        </p:spPr>
-        <p:txBody>
-          <a:bodyPr wrap="square" lIns="0" tIns="0" rIns="0" bIns="0" rtlCol="0" anchor="t"/>
-          <a:lstStyle/>
-          <a:p>
-            <a:pPr indent="0" marL="0">
-              <a:buNone/>
-            </a:pPr>
-            <a:r>
-              <a:rPr lang="en-US" sz="1350" i="1" dirty="0">
-                <a:solidFill>
-                  <a:srgbClr val="FFFFFF"/>
-                </a:solidFill>
-                <a:latin typeface="Poppins Light" pitchFamily="34" charset="0"/>
-                <a:ea typeface="Poppins Light" pitchFamily="34" charset="-122"/>
-                <a:cs typeface="Poppins Light" pitchFamily="34" charset="-120"/>
-              </a:rPr>
-              <a:t>Opus 5.5 leads on coding and analyst work, Astra on 3D tools and hard science, and Kimi K3 on cost and self-hosting</a:t>
-            </a:r>
-            <a:endParaRPr lang="en-US" sz="1350" dirty="0"/>
-          </a:p>
-        </p:txBody>
-      </p:sp>
       <p:pic>
         <p:nvPicPr>
           <p:cNvPr id="5" name="Image 0" descr="preencoded.png">    </p:cNvPr>
-          <p:cNvPicPr>
-            <a:picLocks noChangeAspect="1"/>
-          </p:cNvPicPr>
-          <p:nvPr/>
-        </p:nvPicPr>
-        <p:blipFill>
-          <a:blip r:embed="rId1"/>
-          <a:stretch>
-            <a:fillRect/>
-          </a:stretch>
-        </p:blipFill>
-        <p:spPr>
-          <a:xfrm>
-            <a:off x="320040" y="1673352"/>
-            <a:ext cx="3767328" cy="3264408"/>
-          </a:xfrm>
-          <a:prstGeom prst="rect">
-            <a:avLst/>
-          </a:prstGeom>
-        </p:spPr>
-      </p:pic>
-      <p:pic>
-        <p:nvPicPr>
-          <p:cNvPr id="6" name="Image 1" descr="preencoded.png">    </p:cNvPr>
           <p:cNvPicPr>
             <a:picLocks noChangeAspect="1"/>
           </p:cNvPicPr>
@@ -1016,17 +1007,44 @@
         </p:blipFill>
         <p:spPr>
           <a:xfrm>
-            <a:off x="1805940" y="1353312"/>
-            <a:ext cx="731520" cy="731520"/>
+            <a:off x="329184" y="1444752"/>
+            <a:ext cx="3685032" cy="3364992"/>
           </a:xfrm>
           <a:prstGeom prst="rect">
             <a:avLst/>
           </a:prstGeom>
         </p:spPr>
       </p:pic>
+      <p:sp>
+        <p:nvSpPr>
+          <p:cNvPr id="6" name="Shape 5"/>
+          <p:cNvSpPr/>
+          <p:nvPr/>
+        </p:nvSpPr>
+        <p:spPr>
+          <a:xfrm>
+            <a:off x="640080" y="1755648"/>
+            <a:ext cx="566928" cy="566928"/>
+          </a:xfrm>
+          <a:prstGeom prst="roundRect">
+            <a:avLst>
+              <a:gd name="adj" fmla="val 20968"/>
+            </a:avLst>
+          </a:prstGeom>
+          <a:solidFill>
+            <a:srgbClr val="FFFFFF"/>
+          </a:solidFill>
+          <a:ln w="9525">
+            <a:solidFill>
+              <a:srgbClr val="FFFFFF"/>
+            </a:solidFill>
+            <a:prstDash val="solid"/>
+          </a:ln>
+        </p:spPr>
+      </p:sp>
       <p:pic>
         <p:nvPicPr>
-          <p:cNvPr id="7" name="Image 2" descr="preencoded.png">    </p:cNvPr>
+          <p:cNvPr id="7" name="Image 1" descr="preencoded.png">    </p:cNvPr>
           <p:cNvPicPr>
             <a:picLocks noChangeAspect="1"/>
           </p:cNvPicPr>
@@ -1040,8 +1058,8 @@
         </p:blipFill>
         <p:spPr>
           <a:xfrm>
-            <a:off x="1988820" y="1536192"/>
-            <a:ext cx="365760" cy="365760"/>
+            <a:off x="731520" y="1847088"/>
+            <a:ext cx="384048" cy="384048"/>
           </a:xfrm>
           <a:prstGeom prst="rect">
             <a:avLst/>
@@ -1056,8 +1074,8 @@
         </p:nvSpPr>
         <p:spPr>
           <a:xfrm>
-            <a:off x="640080" y="2176272"/>
-            <a:ext cx="3063240" cy="347472"/>
+            <a:off x="1371600" y="1755648"/>
+            <a:ext cx="2423160" cy="329184"/>
           </a:xfrm>
           <a:prstGeom prst="rect">
             <a:avLst/>
@@ -1069,11 +1087,11 @@
           <a:bodyPr wrap="square" lIns="0" tIns="0" rIns="0" bIns="0" rtlCol="0" anchor="t"/>
           <a:lstStyle/>
           <a:p>
-            <a:pPr algn="ctr" indent="0" marL="0">
+            <a:pPr indent="0" marL="0">
               <a:buNone/>
             </a:pPr>
             <a:r>
-              <a:rPr lang="en-US" sz="1800" dirty="0">
+              <a:rPr lang="en-US" sz="1700" dirty="0">
                 <a:solidFill>
                   <a:srgbClr val="FFFFFF"/>
                 </a:solidFill>
@@ -1083,20 +1101,59 @@
               </a:rPr>
               <a:t>Claude Opus 5.5</a:t>
             </a:r>
-            <a:endParaRPr lang="en-US" sz="1800" dirty="0"/>
+            <a:endParaRPr lang="en-US" sz="1700" dirty="0"/>
           </a:p>
         </p:txBody>
       </p:sp>
       <p:sp>
         <p:nvSpPr>
-          <p:cNvPr id="9" name="Straight Connector 8"/>
+          <p:cNvPr id="9" name="TextBox 8"/>
+          <p:cNvSpPr txBox="1"/>
+          <p:nvPr/>
+        </p:nvSpPr>
+        <p:spPr>
+          <a:xfrm>
+            <a:off x="1371600" y="2084832"/>
+            <a:ext cx="2423160" cy="219456"/>
+          </a:xfrm>
+          <a:prstGeom prst="rect">
+            <a:avLst/>
+          </a:prstGeom>
+          <a:noFill/>
+          <a:ln/>
+        </p:spPr>
+        <p:txBody>
+          <a:bodyPr wrap="square" lIns="0" tIns="0" rIns="0" bIns="0" rtlCol="0" anchor="t"/>
+          <a:lstStyle/>
+          <a:p>
+            <a:pPr indent="0" marL="0">
+              <a:buNone/>
+            </a:pPr>
+            <a:r>
+              <a:rPr lang="en-US" sz="1000" i="1" dirty="0">
+                <a:solidFill>
+                  <a:srgbClr val="AEB6DA"/>
+                </a:solidFill>
+                <a:latin typeface="Poppins Light" pitchFamily="34" charset="0"/>
+                <a:ea typeface="Poppins Light" pitchFamily="34" charset="-122"/>
+                <a:cs typeface="Poppins Light" pitchFamily="34" charset="-120"/>
+              </a:rPr>
+              <a:t>Anthropic  |  Released Sep 22, 2026</a:t>
+            </a:r>
+            <a:endParaRPr lang="en-US" sz="1000" dirty="0"/>
+          </a:p>
+        </p:txBody>
+      </p:sp>
+      <p:sp>
+        <p:nvSpPr>
+          <p:cNvPr id="10" name="Straight Connector 9"/>
           <p:cNvSpPr/>
           <p:nvPr/>
         </p:nvSpPr>
         <p:spPr>
           <a:xfrm>
-            <a:off x="914400" y="2569464"/>
-            <a:ext cx="2514600" cy="0"/>
+            <a:off x="640080" y="2505456"/>
+            <a:ext cx="3063240" cy="0"/>
           </a:xfrm>
           <a:prstGeom prst="line">
             <a:avLst/>
@@ -1104,7 +1161,7 @@
           <a:noFill/>
           <a:ln w="9525">
             <a:solidFill>
-              <a:srgbClr val="8A9BB5"/>
+              <a:srgbClr val="34407E"/>
             </a:solidFill>
             <a:prstDash val="solid"/>
           </a:ln>
@@ -1112,14 +1169,14 @@
       </p:sp>
       <p:sp>
         <p:nvSpPr>
-          <p:cNvPr id="10" name="TextBox 9"/>
+          <p:cNvPr id="11" name="TextBox 10"/>
           <p:cNvSpPr txBox="1"/>
           <p:nvPr/>
         </p:nvSpPr>
         <p:spPr>
           <a:xfrm>
-            <a:off x="640080" y="2633472"/>
-            <a:ext cx="3063240" cy="219456"/>
+            <a:off x="621792" y="2670048"/>
+            <a:ext cx="3154680" cy="1920240"/>
           </a:xfrm>
           <a:prstGeom prst="rect">
             <a:avLst/>
@@ -1131,48 +1188,9 @@
           <a:bodyPr wrap="square" lIns="0" tIns="0" rIns="0" bIns="0" rtlCol="0" anchor="t"/>
           <a:lstStyle/>
           <a:p>
-            <a:pPr algn="ctr" indent="0" marL="0">
-              <a:buNone/>
-            </a:pPr>
-            <a:r>
-              <a:rPr lang="en-US" sz="1000" i="1" dirty="0">
-                <a:solidFill>
-                  <a:srgbClr val="C9D3E0"/>
-                </a:solidFill>
-                <a:latin typeface="Poppins Light" pitchFamily="34" charset="0"/>
-                <a:ea typeface="Poppins Light" pitchFamily="34" charset="-122"/>
-                <a:cs typeface="Poppins Light" pitchFamily="34" charset="-120"/>
-              </a:rPr>
-              <a:t>Anthropic  |  Released Sep 22, 2026</a:t>
-            </a:r>
-            <a:endParaRPr lang="en-US" sz="1000" dirty="0"/>
-          </a:p>
-        </p:txBody>
-      </p:sp>
-      <p:sp>
-        <p:nvSpPr>
-          <p:cNvPr id="11" name="TextBox 10"/>
-          <p:cNvSpPr txBox="1"/>
-          <p:nvPr/>
-        </p:nvSpPr>
-        <p:spPr>
-          <a:xfrm>
-            <a:off x="603504" y="2944368"/>
-            <a:ext cx="3191256" cy="1645920"/>
-          </a:xfrm>
-          <a:prstGeom prst="rect">
-            <a:avLst/>
-          </a:prstGeom>
-          <a:noFill/>
-          <a:ln/>
-        </p:spPr>
-        <p:txBody>
-          <a:bodyPr wrap="square" lIns="0" tIns="0" rIns="0" bIns="0" rtlCol="0" anchor="t"/>
-          <a:lstStyle/>
-          <a:p>
             <a:pPr marL="190500" indent="-190500">
               <a:spcAft>
-                <a:spcPts val="700"/>
+                <a:spcPts val="900"/>
               </a:spcAft>
               <a:buClr>
                 <a:srgbClr val="FFFFFF"/>
@@ -1181,7 +1199,7 @@
               <a:buChar char="•"/>
             </a:pPr>
             <a:r>
-              <a:rPr lang="en-US" sz="1150" dirty="0">
+              <a:rPr lang="en-US" sz="1200" dirty="0">
                 <a:solidFill>
                   <a:srgbClr val="FFFFFF"/>
                 </a:solidFill>
@@ -1192,9 +1210,9 @@
               <a:t>Best for </a:t>
             </a:r>
             <a:r>
-              <a:rPr lang="en-US" sz="1150" dirty="0">
-                <a:solidFill>
-                  <a:srgbClr val="5DAAFF"/>
+              <a:rPr lang="en-US" sz="1200" dirty="0">
+                <a:solidFill>
+                  <a:srgbClr val="6FD6FF"/>
                 </a:solidFill>
                 <a:latin typeface="Poppins" pitchFamily="34" charset="0"/>
                 <a:ea typeface="Poppins" pitchFamily="34" charset="-122"/>
@@ -1203,7 +1221,7 @@
               <a:t>coding, agent workflows and analyst work</a:t>
             </a:r>
             <a:r>
-              <a:rPr lang="en-US" sz="1150" dirty="0">
+              <a:rPr lang="en-US" sz="1200" dirty="0">
                 <a:solidFill>
                   <a:srgbClr val="FFFFFF"/>
                 </a:solidFill>
@@ -1213,12 +1231,12 @@
               </a:rPr>
               <a:t> like research and modeling</a:t>
             </a:r>
-            <a:endParaRPr lang="en-US" sz="1150" dirty="0"/>
+            <a:endParaRPr lang="en-US" sz="1200" dirty="0"/>
           </a:p>
           <a:p>
             <a:pPr marL="190500" indent="-190500">
               <a:spcAft>
-                <a:spcPts val="700"/>
+                <a:spcPts val="900"/>
               </a:spcAft>
               <a:buClr>
                 <a:srgbClr val="FFFFFF"/>
@@ -1227,7 +1245,7 @@
               <a:buChar char="•"/>
             </a:pPr>
             <a:r>
-              <a:rPr lang="en-US" sz="1150" dirty="0">
+              <a:rPr lang="en-US" sz="1200" dirty="0">
                 <a:solidFill>
                   <a:srgbClr val="FFFFFF"/>
                 </a:solidFill>
@@ -1238,9 +1256,9 @@
               <a:t>Scored </a:t>
             </a:r>
             <a:r>
-              <a:rPr lang="en-US" sz="1150" dirty="0">
-                <a:solidFill>
-                  <a:srgbClr val="5DAAFF"/>
+              <a:rPr lang="en-US" sz="1200" dirty="0">
+                <a:solidFill>
+                  <a:srgbClr val="6FD6FF"/>
                 </a:solidFill>
                 <a:latin typeface="Poppins" pitchFamily="34" charset="0"/>
                 <a:ea typeface="Poppins" pitchFamily="34" charset="-122"/>
@@ -1249,7 +1267,7 @@
               <a:t>66.4% on Terminal-Bench 4.0</a:t>
             </a:r>
             <a:r>
-              <a:rPr lang="en-US" sz="1150" dirty="0">
+              <a:rPr lang="en-US" sz="1200" dirty="0">
                 <a:solidFill>
                   <a:srgbClr val="FFFFFF"/>
                 </a:solidFill>
@@ -1260,9 +1278,9 @@
               <a:t> vs. 57.9% for Astra; one customer migrated </a:t>
             </a:r>
             <a:r>
-              <a:rPr lang="en-US" sz="1150" dirty="0">
-                <a:solidFill>
-                  <a:srgbClr val="5DAAFF"/>
+              <a:rPr lang="en-US" sz="1200" dirty="0">
+                <a:solidFill>
+                  <a:srgbClr val="6FD6FF"/>
                 </a:solidFill>
                 <a:latin typeface="Poppins" pitchFamily="34" charset="0"/>
                 <a:ea typeface="Poppins" pitchFamily="34" charset="-122"/>
@@ -1270,12 +1288,12 @@
               </a:rPr>
               <a:t>680K lines of code in a day</a:t>
             </a:r>
-            <a:endParaRPr lang="en-US" sz="1150" dirty="0"/>
+            <a:endParaRPr lang="en-US" sz="1200" dirty="0"/>
           </a:p>
           <a:p>
             <a:pPr marL="190500" indent="-190500">
               <a:spcAft>
-                <a:spcPts val="700"/>
+                <a:spcPts val="900"/>
               </a:spcAft>
               <a:buClr>
                 <a:srgbClr val="FFFFFF"/>
@@ -1284,7 +1302,7 @@
               <a:buChar char="•"/>
             </a:pPr>
             <a:r>
-              <a:rPr lang="en-US" sz="1150" dirty="0">
+              <a:rPr lang="en-US" sz="1200" dirty="0">
                 <a:solidFill>
                   <a:srgbClr val="FFFFFF"/>
                 </a:solidFill>
@@ -1295,9 +1313,9 @@
               <a:t>Costs </a:t>
             </a:r>
             <a:r>
-              <a:rPr lang="en-US" sz="1150" dirty="0">
-                <a:solidFill>
-                  <a:srgbClr val="5DAAFF"/>
+              <a:rPr lang="en-US" sz="1200" dirty="0">
+                <a:solidFill>
+                  <a:srgbClr val="6FD6FF"/>
                 </a:solidFill>
                 <a:latin typeface="Poppins" pitchFamily="34" charset="0"/>
                 <a:ea typeface="Poppins" pitchFamily="34" charset="-122"/>
@@ -1306,7 +1324,7 @@
               <a:t>$4 / $20 per 1M tokens</a:t>
             </a:r>
             <a:r>
-              <a:rPr lang="en-US" sz="1150" dirty="0">
+              <a:rPr lang="en-US" sz="1200" dirty="0">
                 <a:solidFill>
                   <a:srgbClr val="FFFFFF"/>
                 </a:solidFill>
@@ -1316,52 +1334,44 @@
               </a:rPr>
               <a:t>, about 60% less than Astra</a:t>
             </a:r>
-            <a:endParaRPr lang="en-US" sz="1150" dirty="0"/>
+            <a:endParaRPr lang="en-US" sz="1200" dirty="0"/>
           </a:p>
         </p:txBody>
       </p:sp>
       <p:sp>
         <p:nvSpPr>
-          <p:cNvPr id="12" name="TextBox 11"/>
-          <p:cNvSpPr txBox="1"/>
-          <p:nvPr/>
-        </p:nvSpPr>
-        <p:spPr>
-          <a:xfrm>
-            <a:off x="3264408" y="4599432"/>
-            <a:ext cx="658368" cy="420624"/>
-          </a:xfrm>
-          <a:prstGeom prst="rect">
-            <a:avLst/>
-          </a:prstGeom>
-          <a:noFill/>
-          <a:ln/>
-        </p:spPr>
-        <p:txBody>
-          <a:bodyPr wrap="square" lIns="0" tIns="0" rIns="0" bIns="0" rtlCol="0" anchor="t"/>
-          <a:lstStyle/>
-          <a:p>
-            <a:pPr algn="ctr" indent="0" marL="0">
-              <a:buNone/>
-            </a:pPr>
-            <a:r>
-              <a:rPr lang="en-US" sz="2400" dirty="0">
-                <a:solidFill>
-                  <a:srgbClr val="FFFFFF"/>
-                </a:solidFill>
-                <a:latin typeface="Poppins" pitchFamily="34" charset="0"/>
-                <a:ea typeface="Poppins" pitchFamily="34" charset="-122"/>
-                <a:cs typeface="Poppins" pitchFamily="34" charset="-120"/>
-              </a:rPr>
-              <a:t>01</a:t>
-            </a:r>
-            <a:endParaRPr lang="en-US" sz="2400" dirty="0"/>
-          </a:p>
-        </p:txBody>
+          <p:cNvPr id="12" name="Shape 11"/>
+          <p:cNvSpPr/>
+          <p:nvPr/>
+        </p:nvSpPr>
+        <p:spPr>
+          <a:xfrm>
+            <a:off x="4270248" y="1481328"/>
+            <a:ext cx="3611880" cy="3291840"/>
+          </a:xfrm>
+          <a:prstGeom prst="roundRect">
+            <a:avLst>
+              <a:gd name="adj" fmla="val 5000"/>
+            </a:avLst>
+          </a:prstGeom>
+          <a:solidFill>
+            <a:srgbClr val="FFFFFF">
+              <a:alpha val="6000"/>
+            </a:srgbClr>
+          </a:solidFill>
+          <a:ln w="6350">
+            <a:solidFill>
+              <a:srgbClr val="FFFFFF">
+                <a:alpha val="10000"/>
+              </a:srgbClr>
+            </a:solidFill>
+            <a:prstDash val="solid"/>
+          </a:ln>
+        </p:spPr>
       </p:sp>
       <p:pic>
         <p:nvPicPr>
-          <p:cNvPr id="13" name="Image 3" descr="preencoded.png">    </p:cNvPr>
+          <p:cNvPr id="13" name="Image 2" descr="preencoded.png">    </p:cNvPr>
           <p:cNvPicPr>
             <a:picLocks noChangeAspect="1"/>
           </p:cNvPicPr>
@@ -1375,17 +1385,44 @@
         </p:blipFill>
         <p:spPr>
           <a:xfrm>
-            <a:off x="4224528" y="1673352"/>
-            <a:ext cx="3767328" cy="3264408"/>
+            <a:off x="4233672" y="1444752"/>
+            <a:ext cx="3685032" cy="3364992"/>
           </a:xfrm>
           <a:prstGeom prst="rect">
             <a:avLst/>
           </a:prstGeom>
         </p:spPr>
       </p:pic>
+      <p:sp>
+        <p:nvSpPr>
+          <p:cNvPr id="14" name="Shape 13"/>
+          <p:cNvSpPr/>
+          <p:nvPr/>
+        </p:nvSpPr>
+        <p:spPr>
+          <a:xfrm>
+            <a:off x="4544568" y="1755648"/>
+            <a:ext cx="566928" cy="566928"/>
+          </a:xfrm>
+          <a:prstGeom prst="roundRect">
+            <a:avLst>
+              <a:gd name="adj" fmla="val 20968"/>
+            </a:avLst>
+          </a:prstGeom>
+          <a:solidFill>
+            <a:srgbClr val="FFFFFF"/>
+          </a:solidFill>
+          <a:ln w="9525">
+            <a:solidFill>
+              <a:srgbClr val="FFFFFF"/>
+            </a:solidFill>
+            <a:prstDash val="solid"/>
+          </a:ln>
+        </p:spPr>
+      </p:sp>
       <p:pic>
         <p:nvPicPr>
-          <p:cNvPr id="14" name="Image 4" descr="preencoded.png">    </p:cNvPr>
+          <p:cNvPr id="15" name="Image 3" descr="preencoded.png">    </p:cNvPr>
           <p:cNvPicPr>
             <a:picLocks noChangeAspect="1"/>
           </p:cNvPicPr>
@@ -1399,17 +1436,331 @@
         </p:blipFill>
         <p:spPr>
           <a:xfrm>
-            <a:off x="5710428" y="1353312"/>
-            <a:ext cx="731520" cy="731520"/>
+            <a:off x="4636008" y="1847088"/>
+            <a:ext cx="384048" cy="384048"/>
           </a:xfrm>
           <a:prstGeom prst="rect">
             <a:avLst/>
           </a:prstGeom>
         </p:spPr>
       </p:pic>
+      <p:sp>
+        <p:nvSpPr>
+          <p:cNvPr id="16" name="TextBox 15"/>
+          <p:cNvSpPr txBox="1"/>
+          <p:nvPr/>
+        </p:nvSpPr>
+        <p:spPr>
+          <a:xfrm>
+            <a:off x="5276088" y="1755648"/>
+            <a:ext cx="2423160" cy="329184"/>
+          </a:xfrm>
+          <a:prstGeom prst="rect">
+            <a:avLst/>
+          </a:prstGeom>
+          <a:noFill/>
+          <a:ln/>
+        </p:spPr>
+        <p:txBody>
+          <a:bodyPr wrap="square" lIns="0" tIns="0" rIns="0" bIns="0" rtlCol="0" anchor="t"/>
+          <a:lstStyle/>
+          <a:p>
+            <a:pPr indent="0" marL="0">
+              <a:buNone/>
+            </a:pPr>
+            <a:r>
+              <a:rPr lang="en-US" sz="1700" dirty="0">
+                <a:solidFill>
+                  <a:srgbClr val="FFFFFF"/>
+                </a:solidFill>
+                <a:latin typeface="Poppins Medium" pitchFamily="34" charset="0"/>
+                <a:ea typeface="Poppins Medium" pitchFamily="34" charset="-122"/>
+                <a:cs typeface="Poppins Medium" pitchFamily="34" charset="-120"/>
+              </a:rPr>
+              <a:t>GPT-6 Astra</a:t>
+            </a:r>
+            <a:endParaRPr lang="en-US" sz="1700" dirty="0"/>
+          </a:p>
+        </p:txBody>
+      </p:sp>
+      <p:sp>
+        <p:nvSpPr>
+          <p:cNvPr id="17" name="TextBox 16"/>
+          <p:cNvSpPr txBox="1"/>
+          <p:nvPr/>
+        </p:nvSpPr>
+        <p:spPr>
+          <a:xfrm>
+            <a:off x="5276088" y="2084832"/>
+            <a:ext cx="2423160" cy="219456"/>
+          </a:xfrm>
+          <a:prstGeom prst="rect">
+            <a:avLst/>
+          </a:prstGeom>
+          <a:noFill/>
+          <a:ln/>
+        </p:spPr>
+        <p:txBody>
+          <a:bodyPr wrap="square" lIns="0" tIns="0" rIns="0" bIns="0" rtlCol="0" anchor="t"/>
+          <a:lstStyle/>
+          <a:p>
+            <a:pPr indent="0" marL="0">
+              <a:buNone/>
+            </a:pPr>
+            <a:r>
+              <a:rPr lang="en-US" sz="1000" i="1" dirty="0">
+                <a:solidFill>
+                  <a:srgbClr val="AEB6DA"/>
+                </a:solidFill>
+                <a:latin typeface="Poppins Light" pitchFamily="34" charset="0"/>
+                <a:ea typeface="Poppins Light" pitchFamily="34" charset="-122"/>
+                <a:cs typeface="Poppins Light" pitchFamily="34" charset="-120"/>
+              </a:rPr>
+              <a:t>OpenAI  |  Released Sep 3, 2026</a:t>
+            </a:r>
+            <a:endParaRPr lang="en-US" sz="1000" dirty="0"/>
+          </a:p>
+        </p:txBody>
+      </p:sp>
+      <p:sp>
+        <p:nvSpPr>
+          <p:cNvPr id="18" name="Straight Connector 17"/>
+          <p:cNvSpPr/>
+          <p:nvPr/>
+        </p:nvSpPr>
+        <p:spPr>
+          <a:xfrm>
+            <a:off x="4544568" y="2505456"/>
+            <a:ext cx="3063240" cy="0"/>
+          </a:xfrm>
+          <a:prstGeom prst="line">
+            <a:avLst/>
+          </a:prstGeom>
+          <a:noFill/>
+          <a:ln w="9525">
+            <a:solidFill>
+              <a:srgbClr val="34407E"/>
+            </a:solidFill>
+            <a:prstDash val="solid"/>
+          </a:ln>
+        </p:spPr>
+      </p:sp>
+      <p:sp>
+        <p:nvSpPr>
+          <p:cNvPr id="19" name="TextBox 18"/>
+          <p:cNvSpPr txBox="1"/>
+          <p:nvPr/>
+        </p:nvSpPr>
+        <p:spPr>
+          <a:xfrm>
+            <a:off x="4526280" y="2670048"/>
+            <a:ext cx="3154680" cy="1920240"/>
+          </a:xfrm>
+          <a:prstGeom prst="rect">
+            <a:avLst/>
+          </a:prstGeom>
+          <a:noFill/>
+          <a:ln/>
+        </p:spPr>
+        <p:txBody>
+          <a:bodyPr wrap="square" lIns="0" tIns="0" rIns="0" bIns="0" rtlCol="0" anchor="t"/>
+          <a:lstStyle/>
+          <a:p>
+            <a:pPr marL="190500" indent="-190500">
+              <a:spcAft>
+                <a:spcPts val="900"/>
+              </a:spcAft>
+              <a:buClr>
+                <a:srgbClr val="FFFFFF"/>
+              </a:buClr>
+              <a:buSzPct val="100000"/>
+              <a:buChar char="•"/>
+            </a:pPr>
+            <a:r>
+              <a:rPr lang="en-US" sz="1200" dirty="0">
+                <a:solidFill>
+                  <a:srgbClr val="FFFFFF"/>
+                </a:solidFill>
+                <a:latin typeface="Poppins" pitchFamily="34" charset="0"/>
+                <a:ea typeface="Poppins" pitchFamily="34" charset="-122"/>
+                <a:cs typeface="Poppins" pitchFamily="34" charset="-120"/>
+              </a:rPr>
+              <a:t>Best for </a:t>
+            </a:r>
+            <a:r>
+              <a:rPr lang="en-US" sz="1200" dirty="0">
+                <a:solidFill>
+                  <a:srgbClr val="6FD6FF"/>
+                </a:solidFill>
+                <a:latin typeface="Poppins" pitchFamily="34" charset="0"/>
+                <a:ea typeface="Poppins" pitchFamily="34" charset="-122"/>
+                <a:cs typeface="Poppins" pitchFamily="34" charset="-120"/>
+              </a:rPr>
+              <a:t>operating desktop software</a:t>
+            </a:r>
+            <a:r>
+              <a:rPr lang="en-US" sz="1200" dirty="0">
+                <a:solidFill>
+                  <a:srgbClr val="FFFFFF"/>
+                </a:solidFill>
+                <a:latin typeface="Poppins" pitchFamily="34" charset="0"/>
+                <a:ea typeface="Poppins" pitchFamily="34" charset="-122"/>
+                <a:cs typeface="Poppins" pitchFamily="34" charset="-120"/>
+              </a:rPr>
+              <a:t>, </a:t>
+            </a:r>
+            <a:r>
+              <a:rPr lang="en-US" sz="1200" dirty="0">
+                <a:solidFill>
+                  <a:srgbClr val="6FD6FF"/>
+                </a:solidFill>
+                <a:latin typeface="Poppins" pitchFamily="34" charset="0"/>
+                <a:ea typeface="Poppins" pitchFamily="34" charset="-122"/>
+                <a:cs typeface="Poppins" pitchFamily="34" charset="-120"/>
+              </a:rPr>
+              <a:t>3D tools like Blender and UE5</a:t>
+            </a:r>
+            <a:r>
+              <a:rPr lang="en-US" sz="1200" dirty="0">
+                <a:solidFill>
+                  <a:srgbClr val="FFFFFF"/>
+                </a:solidFill>
+                <a:latin typeface="Poppins" pitchFamily="34" charset="0"/>
+                <a:ea typeface="Poppins" pitchFamily="34" charset="-122"/>
+                <a:cs typeface="Poppins" pitchFamily="34" charset="-120"/>
+              </a:rPr>
+              <a:t>, and hard math and science</a:t>
+            </a:r>
+            <a:endParaRPr lang="en-US" sz="1200" dirty="0"/>
+          </a:p>
+          <a:p>
+            <a:pPr marL="190500" indent="-190500">
+              <a:spcAft>
+                <a:spcPts val="900"/>
+              </a:spcAft>
+              <a:buClr>
+                <a:srgbClr val="FFFFFF"/>
+              </a:buClr>
+              <a:buSzPct val="100000"/>
+              <a:buChar char="•"/>
+            </a:pPr>
+            <a:r>
+              <a:rPr lang="en-US" sz="1200" dirty="0">
+                <a:solidFill>
+                  <a:srgbClr val="FFFFFF"/>
+                </a:solidFill>
+                <a:latin typeface="Poppins" pitchFamily="34" charset="0"/>
+                <a:ea typeface="Poppins" pitchFamily="34" charset="-122"/>
+                <a:cs typeface="Poppins" pitchFamily="34" charset="-120"/>
+              </a:rPr>
+              <a:t>Scored </a:t>
+            </a:r>
+            <a:r>
+              <a:rPr lang="en-US" sz="1200" dirty="0">
+                <a:solidFill>
+                  <a:srgbClr val="6FD6FF"/>
+                </a:solidFill>
+                <a:latin typeface="Poppins" pitchFamily="34" charset="0"/>
+                <a:ea typeface="Poppins" pitchFamily="34" charset="-122"/>
+                <a:cs typeface="Poppins" pitchFamily="34" charset="-120"/>
+              </a:rPr>
+              <a:t>97.6% on FrontierMath Tier 4</a:t>
+            </a:r>
+            <a:r>
+              <a:rPr lang="en-US" sz="1200" dirty="0">
+                <a:solidFill>
+                  <a:srgbClr val="FFFFFF"/>
+                </a:solidFill>
+                <a:latin typeface="Poppins" pitchFamily="34" charset="0"/>
+                <a:ea typeface="Poppins" pitchFamily="34" charset="-122"/>
+                <a:cs typeface="Poppins" pitchFamily="34" charset="-120"/>
+              </a:rPr>
+              <a:t> and 72.6% on OSWorld 2.0</a:t>
+            </a:r>
+            <a:endParaRPr lang="en-US" sz="1200" dirty="0"/>
+          </a:p>
+          <a:p>
+            <a:pPr marL="190500" indent="-190500">
+              <a:spcAft>
+                <a:spcPts val="900"/>
+              </a:spcAft>
+              <a:buClr>
+                <a:srgbClr val="FFFFFF"/>
+              </a:buClr>
+              <a:buSzPct val="100000"/>
+              <a:buChar char="•"/>
+            </a:pPr>
+            <a:r>
+              <a:rPr lang="en-US" sz="1200" dirty="0">
+                <a:solidFill>
+                  <a:srgbClr val="FFFFFF"/>
+                </a:solidFill>
+                <a:latin typeface="Poppins" pitchFamily="34" charset="0"/>
+                <a:ea typeface="Poppins" pitchFamily="34" charset="-122"/>
+                <a:cs typeface="Poppins" pitchFamily="34" charset="-120"/>
+              </a:rPr>
+              <a:t>Most expensive at </a:t>
+            </a:r>
+            <a:r>
+              <a:rPr lang="en-US" sz="1200" dirty="0">
+                <a:solidFill>
+                  <a:srgbClr val="6FD6FF"/>
+                </a:solidFill>
+                <a:latin typeface="Poppins" pitchFamily="34" charset="0"/>
+                <a:ea typeface="Poppins" pitchFamily="34" charset="-122"/>
+                <a:cs typeface="Poppins" pitchFamily="34" charset="-120"/>
+              </a:rPr>
+              <a:t>$10 / $50 per 1M tokens</a:t>
+            </a:r>
+            <a:r>
+              <a:rPr lang="en-US" sz="1200" dirty="0">
+                <a:solidFill>
+                  <a:srgbClr val="FFFFFF"/>
+                </a:solidFill>
+                <a:latin typeface="Poppins" pitchFamily="34" charset="0"/>
+                <a:ea typeface="Poppins" pitchFamily="34" charset="-122"/>
+                <a:cs typeface="Poppins" pitchFamily="34" charset="-120"/>
+              </a:rPr>
+              <a:t>, with access still rolling out in stages</a:t>
+            </a:r>
+            <a:endParaRPr lang="en-US" sz="1200" dirty="0"/>
+          </a:p>
+        </p:txBody>
+      </p:sp>
+      <p:sp>
+        <p:nvSpPr>
+          <p:cNvPr id="20" name="Shape 19"/>
+          <p:cNvSpPr/>
+          <p:nvPr/>
+        </p:nvSpPr>
+        <p:spPr>
+          <a:xfrm>
+            <a:off x="8174736" y="1481328"/>
+            <a:ext cx="3611880" cy="3291840"/>
+          </a:xfrm>
+          <a:prstGeom prst="roundRect">
+            <a:avLst>
+              <a:gd name="adj" fmla="val 5000"/>
+            </a:avLst>
+          </a:prstGeom>
+          <a:solidFill>
+            <a:srgbClr val="FFFFFF">
+              <a:alpha val="6000"/>
+            </a:srgbClr>
+          </a:solidFill>
+          <a:ln w="6350">
+            <a:solidFill>
+              <a:srgbClr val="FFFFFF">
+                <a:alpha val="10000"/>
+              </a:srgbClr>
+            </a:solidFill>
+            <a:prstDash val="solid"/>
+          </a:ln>
+        </p:spPr>
+      </p:sp>
       <p:pic>
         <p:nvPicPr>
-          <p:cNvPr id="15" name="Image 5" descr="preencoded.png">    </p:cNvPr>
+          <p:cNvPr id="21" name="Image 4" descr="preencoded.png">    </p:cNvPr>
           <p:cNvPicPr>
             <a:picLocks noChangeAspect="1"/>
           </p:cNvPicPr>
@@ -1423,8 +1774,8 @@
         </p:blipFill>
         <p:spPr>
           <a:xfrm>
-            <a:off x="5893308" y="1536192"/>
-            <a:ext cx="365760" cy="365760"/>
+            <a:off x="8138160" y="1444752"/>
+            <a:ext cx="3685032" cy="3364992"/>
           </a:xfrm>
           <a:prstGeom prst="rect">
             <a:avLst/>
@@ -1433,14 +1784,65 @@
       </p:pic>
       <p:sp>
         <p:nvSpPr>
-          <p:cNvPr id="16" name="TextBox 15"/>
+          <p:cNvPr id="22" name="Shape 21"/>
+          <p:cNvSpPr/>
+          <p:nvPr/>
+        </p:nvSpPr>
+        <p:spPr>
+          <a:xfrm>
+            <a:off x="8449056" y="1755648"/>
+            <a:ext cx="566928" cy="566928"/>
+          </a:xfrm>
+          <a:prstGeom prst="roundRect">
+            <a:avLst>
+              <a:gd name="adj" fmla="val 20968"/>
+            </a:avLst>
+          </a:prstGeom>
+          <a:solidFill>
+            <a:srgbClr val="000000"/>
+          </a:solidFill>
+          <a:ln w="9525">
+            <a:solidFill>
+              <a:srgbClr val="4A558F"/>
+            </a:solidFill>
+            <a:prstDash val="solid"/>
+          </a:ln>
+        </p:spPr>
+      </p:sp>
+      <p:pic>
+        <p:nvPicPr>
+          <p:cNvPr id="23" name="Image 5" descr="preencoded.png">    </p:cNvPr>
+          <p:cNvPicPr>
+            <a:picLocks noChangeAspect="1"/>
+          </p:cNvPicPr>
+          <p:nvPr/>
+        </p:nvPicPr>
+        <p:blipFill>
+          <a:blip r:embed="rId7"/>
+          <a:stretch>
+            <a:fillRect/>
+          </a:stretch>
+        </p:blipFill>
+        <p:spPr>
+          <a:xfrm>
+            <a:off x="8540496" y="1847088"/>
+            <a:ext cx="384048" cy="384048"/>
+          </a:xfrm>
+          <a:prstGeom prst="rect">
+            <a:avLst/>
+          </a:prstGeom>
+        </p:spPr>
+      </p:pic>
+      <p:sp>
+        <p:nvSpPr>
+          <p:cNvPr id="24" name="TextBox 23"/>
           <p:cNvSpPr txBox="1"/>
           <p:nvPr/>
         </p:nvSpPr>
         <p:spPr>
           <a:xfrm>
-            <a:off x="4544568" y="2176272"/>
-            <a:ext cx="3063240" cy="347472"/>
+            <a:off x="9180576" y="1755648"/>
+            <a:ext cx="2423160" cy="329184"/>
           </a:xfrm>
           <a:prstGeom prst="rect">
             <a:avLst/>
@@ -1452,11 +1854,11 @@
           <a:bodyPr wrap="square" lIns="0" tIns="0" rIns="0" bIns="0" rtlCol="0" anchor="t"/>
           <a:lstStyle/>
           <a:p>
-            <a:pPr algn="ctr" indent="0" marL="0">
+            <a:pPr indent="0" marL="0">
               <a:buNone/>
             </a:pPr>
             <a:r>
-              <a:rPr lang="en-US" sz="1800" dirty="0">
+              <a:rPr lang="en-US" sz="1700" dirty="0">
                 <a:solidFill>
                   <a:srgbClr val="FFFFFF"/>
                 </a:solidFill>
@@ -1464,22 +1866,61 @@
                 <a:ea typeface="Poppins Medium" pitchFamily="34" charset="-122"/>
                 <a:cs typeface="Poppins Medium" pitchFamily="34" charset="-120"/>
               </a:rPr>
-              <a:t>GPT-6 Astra</a:t>
-            </a:r>
-            <a:endParaRPr lang="en-US" sz="1800" dirty="0"/>
+              <a:t>Kimi K3</a:t>
+            </a:r>
+            <a:endParaRPr lang="en-US" sz="1700" dirty="0"/>
           </a:p>
         </p:txBody>
       </p:sp>
       <p:sp>
         <p:nvSpPr>
-          <p:cNvPr id="17" name="Straight Connector 16"/>
+          <p:cNvPr id="25" name="TextBox 24"/>
+          <p:cNvSpPr txBox="1"/>
+          <p:nvPr/>
+        </p:nvSpPr>
+        <p:spPr>
+          <a:xfrm>
+            <a:off x="9180576" y="2084832"/>
+            <a:ext cx="2423160" cy="219456"/>
+          </a:xfrm>
+          <a:prstGeom prst="rect">
+            <a:avLst/>
+          </a:prstGeom>
+          <a:noFill/>
+          <a:ln/>
+        </p:spPr>
+        <p:txBody>
+          <a:bodyPr wrap="square" lIns="0" tIns="0" rIns="0" bIns="0" rtlCol="0" anchor="t"/>
+          <a:lstStyle/>
+          <a:p>
+            <a:pPr indent="0" marL="0">
+              <a:buNone/>
+            </a:pPr>
+            <a:r>
+              <a:rPr lang="en-US" sz="1000" i="1" dirty="0">
+                <a:solidFill>
+                  <a:srgbClr val="AEB6DA"/>
+                </a:solidFill>
+                <a:latin typeface="Poppins Light" pitchFamily="34" charset="0"/>
+                <a:ea typeface="Poppins Light" pitchFamily="34" charset="-122"/>
+                <a:cs typeface="Poppins Light" pitchFamily="34" charset="-120"/>
+              </a:rPr>
+              <a:t>Moonshot AI  |  Released Jul 16, 2026</a:t>
+            </a:r>
+            <a:endParaRPr lang="en-US" sz="1000" dirty="0"/>
+          </a:p>
+        </p:txBody>
+      </p:sp>
+      <p:sp>
+        <p:nvSpPr>
+          <p:cNvPr id="26" name="Straight Connector 25"/>
           <p:cNvSpPr/>
           <p:nvPr/>
         </p:nvSpPr>
         <p:spPr>
           <a:xfrm>
-            <a:off x="4818888" y="2569464"/>
-            <a:ext cx="2514600" cy="0"/>
+            <a:off x="8449056" y="2505456"/>
+            <a:ext cx="3063240" cy="0"/>
           </a:xfrm>
           <a:prstGeom prst="line">
             <a:avLst/>
@@ -1487,7 +1928,7 @@
           <a:noFill/>
           <a:ln w="9525">
             <a:solidFill>
-              <a:srgbClr val="8A9BB5"/>
+              <a:srgbClr val="34407E"/>
             </a:solidFill>
             <a:prstDash val="solid"/>
           </a:ln>
@@ -1495,14 +1936,14 @@
       </p:sp>
       <p:sp>
         <p:nvSpPr>
-          <p:cNvPr id="18" name="TextBox 17"/>
+          <p:cNvPr id="27" name="TextBox 26"/>
           <p:cNvSpPr txBox="1"/>
           <p:nvPr/>
         </p:nvSpPr>
         <p:spPr>
           <a:xfrm>
-            <a:off x="4544568" y="2633472"/>
-            <a:ext cx="3063240" cy="219456"/>
+            <a:off x="8430768" y="2670048"/>
+            <a:ext cx="3154680" cy="1920240"/>
           </a:xfrm>
           <a:prstGeom prst="rect">
             <a:avLst/>
@@ -1514,48 +1955,9 @@
           <a:bodyPr wrap="square" lIns="0" tIns="0" rIns="0" bIns="0" rtlCol="0" anchor="t"/>
           <a:lstStyle/>
           <a:p>
-            <a:pPr algn="ctr" indent="0" marL="0">
-              <a:buNone/>
-            </a:pPr>
-            <a:r>
-              <a:rPr lang="en-US" sz="1000" i="1" dirty="0">
-                <a:solidFill>
-                  <a:srgbClr val="C9D3E0"/>
-                </a:solidFill>
-                <a:latin typeface="Poppins Light" pitchFamily="34" charset="0"/>
-                <a:ea typeface="Poppins Light" pitchFamily="34" charset="-122"/>
-                <a:cs typeface="Poppins Light" pitchFamily="34" charset="-120"/>
-              </a:rPr>
-              <a:t>OpenAI  |  Released Sep 3, 2026</a:t>
-            </a:r>
-            <a:endParaRPr lang="en-US" sz="1000" dirty="0"/>
-          </a:p>
-        </p:txBody>
-      </p:sp>
-      <p:sp>
-        <p:nvSpPr>
-          <p:cNvPr id="19" name="TextBox 18"/>
-          <p:cNvSpPr txBox="1"/>
-          <p:nvPr/>
-        </p:nvSpPr>
-        <p:spPr>
-          <a:xfrm>
-            <a:off x="4507992" y="2944368"/>
-            <a:ext cx="3191256" cy="1645920"/>
-          </a:xfrm>
-          <a:prstGeom prst="rect">
-            <a:avLst/>
-          </a:prstGeom>
-          <a:noFill/>
-          <a:ln/>
-        </p:spPr>
-        <p:txBody>
-          <a:bodyPr wrap="square" lIns="0" tIns="0" rIns="0" bIns="0" rtlCol="0" anchor="t"/>
-          <a:lstStyle/>
-          <a:p>
             <a:pPr marL="190500" indent="-190500">
               <a:spcAft>
-                <a:spcPts val="700"/>
+                <a:spcPts val="900"/>
               </a:spcAft>
               <a:buClr>
                 <a:srgbClr val="FFFFFF"/>
@@ -1564,7 +1966,7 @@
               <a:buChar char="•"/>
             </a:pPr>
             <a:r>
-              <a:rPr lang="en-US" sz="1150" dirty="0">
+              <a:rPr lang="en-US" sz="1200" dirty="0">
                 <a:solidFill>
                   <a:srgbClr val="FFFFFF"/>
                 </a:solidFill>
@@ -1575,18 +1977,18 @@
               <a:t>Best for </a:t>
             </a:r>
             <a:r>
-              <a:rPr lang="en-US" sz="1150" dirty="0">
-                <a:solidFill>
-                  <a:srgbClr val="5DAAFF"/>
-                </a:solidFill>
-                <a:latin typeface="Poppins" pitchFamily="34" charset="0"/>
-                <a:ea typeface="Poppins" pitchFamily="34" charset="-122"/>
-                <a:cs typeface="Poppins" pitchFamily="34" charset="-120"/>
-              </a:rPr>
-              <a:t>operating desktop software</a:t>
-            </a:r>
-            <a:r>
-              <a:rPr lang="en-US" sz="1150" dirty="0">
+              <a:rPr lang="en-US" sz="1200" dirty="0">
+                <a:solidFill>
+                  <a:srgbClr val="6FD6FF"/>
+                </a:solidFill>
+                <a:latin typeface="Poppins" pitchFamily="34" charset="0"/>
+                <a:ea typeface="Poppins" pitchFamily="34" charset="-122"/>
+                <a:cs typeface="Poppins" pitchFamily="34" charset="-120"/>
+              </a:rPr>
+              <a:t>high-volume, low-cost work</a:t>
+            </a:r>
+            <a:r>
+              <a:rPr lang="en-US" sz="1200" dirty="0">
                 <a:solidFill>
                   <a:srgbClr val="FFFFFF"/>
                 </a:solidFill>
@@ -1594,36 +1996,25 @@
                 <a:ea typeface="Poppins" pitchFamily="34" charset="-122"/>
                 <a:cs typeface="Poppins" pitchFamily="34" charset="-120"/>
               </a:rPr>
-              <a:t>, 3D tools like </a:t>
-            </a:r>
-            <a:r>
-              <a:rPr lang="en-US" sz="1150" dirty="0">
-                <a:solidFill>
-                  <a:srgbClr val="5DAAFF"/>
-                </a:solidFill>
-                <a:latin typeface="Poppins" pitchFamily="34" charset="0"/>
-                <a:ea typeface="Poppins" pitchFamily="34" charset="-122"/>
-                <a:cs typeface="Poppins" pitchFamily="34" charset="-120"/>
-              </a:rPr>
-              <a:t>Blender and Unreal Engine 5</a:t>
-            </a:r>
-            <a:r>
-              <a:rPr lang="en-US" sz="1150" dirty="0">
-                <a:solidFill>
-                  <a:srgbClr val="FFFFFF"/>
-                </a:solidFill>
-                <a:latin typeface="Poppins" pitchFamily="34" charset="0"/>
-                <a:ea typeface="Poppins" pitchFamily="34" charset="-122"/>
-                <a:cs typeface="Poppins" pitchFamily="34" charset="-120"/>
-              </a:rPr>
-              <a:t>, and hard math and science</a:t>
-            </a:r>
-            <a:endParaRPr lang="en-US" sz="1150" dirty="0"/>
+              <a:t> and anything that must be </a:t>
+            </a:r>
+            <a:r>
+              <a:rPr lang="en-US" sz="1200" dirty="0">
+                <a:solidFill>
+                  <a:srgbClr val="6FD6FF"/>
+                </a:solidFill>
+                <a:latin typeface="Poppins" pitchFamily="34" charset="0"/>
+                <a:ea typeface="Poppins" pitchFamily="34" charset="-122"/>
+                <a:cs typeface="Poppins" pitchFamily="34" charset="-120"/>
+              </a:rPr>
+              <a:t>self-hosted</a:t>
+            </a:r>
+            <a:endParaRPr lang="en-US" sz="1200" dirty="0"/>
           </a:p>
           <a:p>
             <a:pPr marL="190500" indent="-190500">
               <a:spcAft>
-                <a:spcPts val="700"/>
+                <a:spcPts val="900"/>
               </a:spcAft>
               <a:buClr>
                 <a:srgbClr val="FFFFFF"/>
@@ -1632,7 +2023,7 @@
               <a:buChar char="•"/>
             </a:pPr>
             <a:r>
-              <a:rPr lang="en-US" sz="1150" dirty="0">
+              <a:rPr lang="en-US" sz="1200" dirty="0">
                 <a:solidFill>
                   <a:srgbClr val="FFFFFF"/>
                 </a:solidFill>
@@ -1640,21 +2031,21 @@
                 <a:ea typeface="Poppins" pitchFamily="34" charset="-122"/>
                 <a:cs typeface="Poppins" pitchFamily="34" charset="-120"/>
               </a:rPr>
-              <a:t>Scored </a:t>
-            </a:r>
-            <a:r>
-              <a:rPr lang="en-US" sz="1150" dirty="0">
-                <a:solidFill>
-                  <a:srgbClr val="5DAAFF"/>
-                </a:solidFill>
-                <a:latin typeface="Poppins" pitchFamily="34" charset="0"/>
-                <a:ea typeface="Poppins" pitchFamily="34" charset="-122"/>
-                <a:cs typeface="Poppins" pitchFamily="34" charset="-120"/>
-              </a:rPr>
-              <a:t>97.6% on FrontierMath Tier 4</a:t>
-            </a:r>
-            <a:r>
-              <a:rPr lang="en-US" sz="1150" dirty="0">
+              <a:t>The </a:t>
+            </a:r>
+            <a:r>
+              <a:rPr lang="en-US" sz="1200" dirty="0">
+                <a:solidFill>
+                  <a:srgbClr val="6FD6FF"/>
+                </a:solidFill>
+                <a:latin typeface="Poppins" pitchFamily="34" charset="0"/>
+                <a:ea typeface="Poppins" pitchFamily="34" charset="-122"/>
+                <a:cs typeface="Poppins" pitchFamily="34" charset="-120"/>
+              </a:rPr>
+              <a:t>only open-weight model</a:t>
+            </a:r>
+            <a:r>
+              <a:rPr lang="en-US" sz="1200" dirty="0">
                 <a:solidFill>
                   <a:srgbClr val="FFFFFF"/>
                 </a:solidFill>
@@ -1662,14 +2053,14 @@
                 <a:ea typeface="Poppins" pitchFamily="34" charset="-122"/>
                 <a:cs typeface="Poppins" pitchFamily="34" charset="-120"/>
               </a:rPr>
-              <a:t> and 72.6% on OSWorld 2.0</a:t>
-            </a:r>
-            <a:endParaRPr lang="en-US" sz="1150" dirty="0"/>
+              <a:t> of the three, with 2.8T parameters</a:t>
+            </a:r>
+            <a:endParaRPr lang="en-US" sz="1200" dirty="0"/>
           </a:p>
           <a:p>
             <a:pPr marL="190500" indent="-190500">
               <a:spcAft>
-                <a:spcPts val="700"/>
+                <a:spcPts val="900"/>
               </a:spcAft>
               <a:buClr>
                 <a:srgbClr val="FFFFFF"/>
@@ -1678,7 +2069,7 @@
               <a:buChar char="•"/>
             </a:pPr>
             <a:r>
-              <a:rPr lang="en-US" sz="1150" dirty="0">
+              <a:rPr lang="en-US" sz="1200" dirty="0">
                 <a:solidFill>
                   <a:srgbClr val="FFFFFF"/>
                 </a:solidFill>
@@ -1686,21 +2077,21 @@
                 <a:ea typeface="Poppins" pitchFamily="34" charset="-122"/>
                 <a:cs typeface="Poppins" pitchFamily="34" charset="-120"/>
               </a:rPr>
-              <a:t>Most expensive at </a:t>
-            </a:r>
-            <a:r>
-              <a:rPr lang="en-US" sz="1150" dirty="0">
-                <a:solidFill>
-                  <a:srgbClr val="5DAAFF"/>
-                </a:solidFill>
-                <a:latin typeface="Poppins" pitchFamily="34" charset="0"/>
-                <a:ea typeface="Poppins" pitchFamily="34" charset="-122"/>
-                <a:cs typeface="Poppins" pitchFamily="34" charset="-120"/>
-              </a:rPr>
-              <a:t>$10 / $50 per 1M tokens</a:t>
-            </a:r>
-            <a:r>
-              <a:rPr lang="en-US" sz="1150" dirty="0">
+              <a:t>Cheapest at </a:t>
+            </a:r>
+            <a:r>
+              <a:rPr lang="en-US" sz="1200" dirty="0">
+                <a:solidFill>
+                  <a:srgbClr val="6FD6FF"/>
+                </a:solidFill>
+                <a:latin typeface="Poppins" pitchFamily="34" charset="0"/>
+                <a:ea typeface="Poppins" pitchFamily="34" charset="-122"/>
+                <a:cs typeface="Poppins" pitchFamily="34" charset="-120"/>
+              </a:rPr>
+              <a:t>$3 / $15 per 1M tokens</a:t>
+            </a:r>
+            <a:r>
+              <a:rPr lang="en-US" sz="1200" dirty="0">
                 <a:solidFill>
                   <a:srgbClr val="FFFFFF"/>
                 </a:solidFill>
@@ -1708,78 +2099,46 @@
                 <a:ea typeface="Poppins" pitchFamily="34" charset="-122"/>
                 <a:cs typeface="Poppins" pitchFamily="34" charset="-120"/>
               </a:rPr>
-              <a:t>, with access still rolling out in stages</a:t>
-            </a:r>
-            <a:endParaRPr lang="en-US" sz="1150" dirty="0"/>
+              <a:t>, but scores 44 vs. 58 for Opus on the Artificial Analysis index</a:t>
+            </a:r>
+            <a:endParaRPr lang="en-US" sz="1200" dirty="0"/>
           </a:p>
         </p:txBody>
       </p:sp>
       <p:sp>
         <p:nvSpPr>
-          <p:cNvPr id="20" name="TextBox 19"/>
-          <p:cNvSpPr txBox="1"/>
-          <p:nvPr/>
-        </p:nvSpPr>
-        <p:spPr>
-          <a:xfrm>
-            <a:off x="7168896" y="4599432"/>
-            <a:ext cx="658368" cy="420624"/>
-          </a:xfrm>
-          <a:prstGeom prst="rect">
-            <a:avLst/>
-          </a:prstGeom>
-          <a:noFill/>
-          <a:ln/>
-        </p:spPr>
-        <p:txBody>
-          <a:bodyPr wrap="square" lIns="0" tIns="0" rIns="0" bIns="0" rtlCol="0" anchor="t"/>
-          <a:lstStyle/>
-          <a:p>
-            <a:pPr algn="ctr" indent="0" marL="0">
-              <a:buNone/>
-            </a:pPr>
-            <a:r>
-              <a:rPr lang="en-US" sz="2400" dirty="0">
-                <a:solidFill>
-                  <a:srgbClr val="FFFFFF"/>
-                </a:solidFill>
-                <a:latin typeface="Poppins" pitchFamily="34" charset="0"/>
-                <a:ea typeface="Poppins" pitchFamily="34" charset="-122"/>
-                <a:cs typeface="Poppins" pitchFamily="34" charset="-120"/>
-              </a:rPr>
-              <a:t>02</a:t>
-            </a:r>
-            <a:endParaRPr lang="en-US" sz="2400" dirty="0"/>
-          </a:p>
-        </p:txBody>
+          <p:cNvPr id="28" name="Shape 27"/>
+          <p:cNvSpPr/>
+          <p:nvPr/>
+        </p:nvSpPr>
+        <p:spPr>
+          <a:xfrm>
+            <a:off x="365760" y="5029200"/>
+            <a:ext cx="11457432" cy="1207008"/>
+          </a:xfrm>
+          <a:prstGeom prst="roundRect">
+            <a:avLst>
+              <a:gd name="adj" fmla="val 13636"/>
+            </a:avLst>
+          </a:prstGeom>
+          <a:solidFill>
+            <a:srgbClr val="FFFFFF">
+              <a:alpha val="6000"/>
+            </a:srgbClr>
+          </a:solidFill>
+          <a:ln w="6350">
+            <a:solidFill>
+              <a:srgbClr val="FFFFFF">
+                <a:alpha val="10000"/>
+              </a:srgbClr>
+            </a:solidFill>
+            <a:prstDash val="solid"/>
+          </a:ln>
+        </p:spPr>
       </p:sp>
       <p:pic>
         <p:nvPicPr>
-          <p:cNvPr id="21" name="Image 6" descr="preencoded.png">    </p:cNvPr>
-          <p:cNvPicPr>
-            <a:picLocks noChangeAspect="1"/>
-          </p:cNvPicPr>
-          <p:nvPr/>
-        </p:nvPicPr>
-        <p:blipFill>
-          <a:blip r:embed="rId7"/>
-          <a:stretch>
-            <a:fillRect/>
-          </a:stretch>
-        </p:blipFill>
-        <p:spPr>
-          <a:xfrm>
-            <a:off x="8129016" y="1673352"/>
-            <a:ext cx="3767328" cy="3264408"/>
-          </a:xfrm>
-          <a:prstGeom prst="rect">
-            <a:avLst/>
-          </a:prstGeom>
-        </p:spPr>
-      </p:pic>
-      <p:pic>
-        <p:nvPicPr>
-          <p:cNvPr id="22" name="Image 7" descr="preencoded.png">    </p:cNvPr>
+          <p:cNvPr id="29" name="Image 6" descr="preencoded.png">    </p:cNvPr>
           <p:cNvPicPr>
             <a:picLocks noChangeAspect="1"/>
           </p:cNvPicPr>
@@ -1793,48 +2152,24 @@
         </p:blipFill>
         <p:spPr>
           <a:xfrm>
-            <a:off x="9614916" y="1353312"/>
-            <a:ext cx="731520" cy="731520"/>
+            <a:off x="329184" y="4992624"/>
+            <a:ext cx="11530584" cy="1280160"/>
           </a:xfrm>
           <a:prstGeom prst="rect">
             <a:avLst/>
           </a:prstGeom>
         </p:spPr>
       </p:pic>
-      <p:pic>
-        <p:nvPicPr>
-          <p:cNvPr id="23" name="Image 8" descr="preencoded.png">    </p:cNvPr>
-          <p:cNvPicPr>
-            <a:picLocks noChangeAspect="1"/>
-          </p:cNvPicPr>
-          <p:nvPr/>
-        </p:nvPicPr>
-        <p:blipFill>
-          <a:blip r:embed="rId9"/>
-          <a:stretch>
-            <a:fillRect/>
-          </a:stretch>
-        </p:blipFill>
-        <p:spPr>
-          <a:xfrm>
-            <a:off x="9797796" y="1536192"/>
-            <a:ext cx="365760" cy="365760"/>
-          </a:xfrm>
-          <a:prstGeom prst="rect">
-            <a:avLst/>
-          </a:prstGeom>
-        </p:spPr>
-      </p:pic>
-      <p:sp>
-        <p:nvSpPr>
-          <p:cNvPr id="24" name="TextBox 23"/>
+      <p:sp>
+        <p:nvSpPr>
+          <p:cNvPr id="30" name="TextBox 29"/>
           <p:cNvSpPr txBox="1"/>
           <p:nvPr/>
         </p:nvSpPr>
         <p:spPr>
           <a:xfrm>
-            <a:off x="8449056" y="2176272"/>
-            <a:ext cx="3063240" cy="347472"/>
+            <a:off x="640080" y="5212080"/>
+            <a:ext cx="3657600" cy="274320"/>
           </a:xfrm>
           <a:prstGeom prst="rect">
             <a:avLst/>
@@ -1846,57 +2181,34 @@
           <a:bodyPr wrap="square" lIns="0" tIns="0" rIns="0" bIns="0" rtlCol="0" anchor="t"/>
           <a:lstStyle/>
           <a:p>
-            <a:pPr algn="ctr" indent="0" marL="0">
+            <a:pPr indent="0" marL="0">
               <a:buNone/>
             </a:pPr>
             <a:r>
-              <a:rPr lang="en-US" sz="1800" dirty="0">
-                <a:solidFill>
-                  <a:srgbClr val="FFFFFF"/>
+              <a:rPr lang="en-US" sz="1300" dirty="0">
+                <a:solidFill>
+                  <a:srgbClr val="6FD6FF"/>
                 </a:solidFill>
                 <a:latin typeface="Poppins Medium" pitchFamily="34" charset="0"/>
                 <a:ea typeface="Poppins Medium" pitchFamily="34" charset="-122"/>
                 <a:cs typeface="Poppins Medium" pitchFamily="34" charset="-120"/>
               </a:rPr>
-              <a:t>Kimi K3</a:t>
-            </a:r>
-            <a:endParaRPr lang="en-US" sz="1800" dirty="0"/>
+              <a:t>Key Takeaways</a:t>
+            </a:r>
+            <a:endParaRPr lang="en-US" sz="1300" dirty="0"/>
           </a:p>
         </p:txBody>
       </p:sp>
       <p:sp>
         <p:nvSpPr>
-          <p:cNvPr id="25" name="Straight Connector 24"/>
-          <p:cNvSpPr/>
-          <p:nvPr/>
-        </p:nvSpPr>
-        <p:spPr>
-          <a:xfrm>
-            <a:off x="8723376" y="2569464"/>
-            <a:ext cx="2514600" cy="0"/>
-          </a:xfrm>
-          <a:prstGeom prst="line">
-            <a:avLst/>
-          </a:prstGeom>
-          <a:noFill/>
-          <a:ln w="9525">
-            <a:solidFill>
-              <a:srgbClr val="8A9BB5"/>
-            </a:solidFill>
-            <a:prstDash val="solid"/>
-          </a:ln>
-        </p:spPr>
-      </p:sp>
-      <p:sp>
-        <p:nvSpPr>
-          <p:cNvPr id="26" name="TextBox 25"/>
+          <p:cNvPr id="31" name="TextBox 30"/>
           <p:cNvSpPr txBox="1"/>
           <p:nvPr/>
         </p:nvSpPr>
         <p:spPr>
           <a:xfrm>
-            <a:off x="8449056" y="2633472"/>
-            <a:ext cx="3063240" cy="219456"/>
+            <a:off x="640080" y="5532120"/>
+            <a:ext cx="10908792" cy="566928"/>
           </a:xfrm>
           <a:prstGeom prst="rect">
             <a:avLst/>
@@ -1906,318 +2218,6 @@
         </p:spPr>
         <p:txBody>
           <a:bodyPr wrap="square" lIns="0" tIns="0" rIns="0" bIns="0" rtlCol="0" anchor="t"/>
-          <a:lstStyle/>
-          <a:p>
-            <a:pPr algn="ctr" indent="0" marL="0">
-              <a:buNone/>
-            </a:pPr>
-            <a:r>
-              <a:rPr lang="en-US" sz="1000" i="1" dirty="0">
-                <a:solidFill>
-                  <a:srgbClr val="C9D3E0"/>
-                </a:solidFill>
-                <a:latin typeface="Poppins Light" pitchFamily="34" charset="0"/>
-                <a:ea typeface="Poppins Light" pitchFamily="34" charset="-122"/>
-                <a:cs typeface="Poppins Light" pitchFamily="34" charset="-120"/>
-              </a:rPr>
-              <a:t>Moonshot AI  |  Released Jul 16, 2026</a:t>
-            </a:r>
-            <a:endParaRPr lang="en-US" sz="1000" dirty="0"/>
-          </a:p>
-        </p:txBody>
-      </p:sp>
-      <p:sp>
-        <p:nvSpPr>
-          <p:cNvPr id="27" name="TextBox 26"/>
-          <p:cNvSpPr txBox="1"/>
-          <p:nvPr/>
-        </p:nvSpPr>
-        <p:spPr>
-          <a:xfrm>
-            <a:off x="8412480" y="2944368"/>
-            <a:ext cx="3191256" cy="1645920"/>
-          </a:xfrm>
-          <a:prstGeom prst="rect">
-            <a:avLst/>
-          </a:prstGeom>
-          <a:noFill/>
-          <a:ln/>
-        </p:spPr>
-        <p:txBody>
-          <a:bodyPr wrap="square" lIns="0" tIns="0" rIns="0" bIns="0" rtlCol="0" anchor="t"/>
-          <a:lstStyle/>
-          <a:p>
-            <a:pPr marL="190500" indent="-190500">
-              <a:spcAft>
-                <a:spcPts val="700"/>
-              </a:spcAft>
-              <a:buClr>
-                <a:srgbClr val="FFFFFF"/>
-              </a:buClr>
-              <a:buSzPct val="100000"/>
-              <a:buChar char="•"/>
-            </a:pPr>
-            <a:r>
-              <a:rPr lang="en-US" sz="1150" dirty="0">
-                <a:solidFill>
-                  <a:srgbClr val="FFFFFF"/>
-                </a:solidFill>
-                <a:latin typeface="Poppins" pitchFamily="34" charset="0"/>
-                <a:ea typeface="Poppins" pitchFamily="34" charset="-122"/>
-                <a:cs typeface="Poppins" pitchFamily="34" charset="-120"/>
-              </a:rPr>
-              <a:t>Best for </a:t>
-            </a:r>
-            <a:r>
-              <a:rPr lang="en-US" sz="1150" dirty="0">
-                <a:solidFill>
-                  <a:srgbClr val="5DAAFF"/>
-                </a:solidFill>
-                <a:latin typeface="Poppins" pitchFamily="34" charset="0"/>
-                <a:ea typeface="Poppins" pitchFamily="34" charset="-122"/>
-                <a:cs typeface="Poppins" pitchFamily="34" charset="-120"/>
-              </a:rPr>
-              <a:t>high-volume, low-cost work</a:t>
-            </a:r>
-            <a:r>
-              <a:rPr lang="en-US" sz="1150" dirty="0">
-                <a:solidFill>
-                  <a:srgbClr val="FFFFFF"/>
-                </a:solidFill>
-                <a:latin typeface="Poppins" pitchFamily="34" charset="0"/>
-                <a:ea typeface="Poppins" pitchFamily="34" charset="-122"/>
-                <a:cs typeface="Poppins" pitchFamily="34" charset="-120"/>
-              </a:rPr>
-              <a:t> and anything that has to be </a:t>
-            </a:r>
-            <a:r>
-              <a:rPr lang="en-US" sz="1150" dirty="0">
-                <a:solidFill>
-                  <a:srgbClr val="5DAAFF"/>
-                </a:solidFill>
-                <a:latin typeface="Poppins" pitchFamily="34" charset="0"/>
-                <a:ea typeface="Poppins" pitchFamily="34" charset="-122"/>
-                <a:cs typeface="Poppins" pitchFamily="34" charset="-120"/>
-              </a:rPr>
-              <a:t>self-hosted</a:t>
-            </a:r>
-            <a:endParaRPr lang="en-US" sz="1150" dirty="0"/>
-          </a:p>
-          <a:p>
-            <a:pPr marL="190500" indent="-190500">
-              <a:spcAft>
-                <a:spcPts val="700"/>
-              </a:spcAft>
-              <a:buClr>
-                <a:srgbClr val="FFFFFF"/>
-              </a:buClr>
-              <a:buSzPct val="100000"/>
-              <a:buChar char="•"/>
-            </a:pPr>
-            <a:r>
-              <a:rPr lang="en-US" sz="1150" dirty="0">
-                <a:solidFill>
-                  <a:srgbClr val="FFFFFF"/>
-                </a:solidFill>
-                <a:latin typeface="Poppins" pitchFamily="34" charset="0"/>
-                <a:ea typeface="Poppins" pitchFamily="34" charset="-122"/>
-                <a:cs typeface="Poppins" pitchFamily="34" charset="-120"/>
-              </a:rPr>
-              <a:t>The </a:t>
-            </a:r>
-            <a:r>
-              <a:rPr lang="en-US" sz="1150" dirty="0">
-                <a:solidFill>
-                  <a:srgbClr val="5DAAFF"/>
-                </a:solidFill>
-                <a:latin typeface="Poppins" pitchFamily="34" charset="0"/>
-                <a:ea typeface="Poppins" pitchFamily="34" charset="-122"/>
-                <a:cs typeface="Poppins" pitchFamily="34" charset="-120"/>
-              </a:rPr>
-              <a:t>only open-weight model</a:t>
-            </a:r>
-            <a:r>
-              <a:rPr lang="en-US" sz="1150" dirty="0">
-                <a:solidFill>
-                  <a:srgbClr val="FFFFFF"/>
-                </a:solidFill>
-                <a:latin typeface="Poppins" pitchFamily="34" charset="0"/>
-                <a:ea typeface="Poppins" pitchFamily="34" charset="-122"/>
-                <a:cs typeface="Poppins" pitchFamily="34" charset="-120"/>
-              </a:rPr>
-              <a:t> of the three, with 2.8T parameters</a:t>
-            </a:r>
-            <a:endParaRPr lang="en-US" sz="1150" dirty="0"/>
-          </a:p>
-          <a:p>
-            <a:pPr marL="190500" indent="-190500">
-              <a:spcAft>
-                <a:spcPts val="700"/>
-              </a:spcAft>
-              <a:buClr>
-                <a:srgbClr val="FFFFFF"/>
-              </a:buClr>
-              <a:buSzPct val="100000"/>
-              <a:buChar char="•"/>
-            </a:pPr>
-            <a:r>
-              <a:rPr lang="en-US" sz="1150" dirty="0">
-                <a:solidFill>
-                  <a:srgbClr val="FFFFFF"/>
-                </a:solidFill>
-                <a:latin typeface="Poppins" pitchFamily="34" charset="0"/>
-                <a:ea typeface="Poppins" pitchFamily="34" charset="-122"/>
-                <a:cs typeface="Poppins" pitchFamily="34" charset="-120"/>
-              </a:rPr>
-              <a:t>Cheapest at </a:t>
-            </a:r>
-            <a:r>
-              <a:rPr lang="en-US" sz="1150" dirty="0">
-                <a:solidFill>
-                  <a:srgbClr val="5DAAFF"/>
-                </a:solidFill>
-                <a:latin typeface="Poppins" pitchFamily="34" charset="0"/>
-                <a:ea typeface="Poppins" pitchFamily="34" charset="-122"/>
-                <a:cs typeface="Poppins" pitchFamily="34" charset="-120"/>
-              </a:rPr>
-              <a:t>$3 / $15 per 1M tokens</a:t>
-            </a:r>
-            <a:r>
-              <a:rPr lang="en-US" sz="1150" dirty="0">
-                <a:solidFill>
-                  <a:srgbClr val="FFFFFF"/>
-                </a:solidFill>
-                <a:latin typeface="Poppins" pitchFamily="34" charset="0"/>
-                <a:ea typeface="Poppins" pitchFamily="34" charset="-122"/>
-                <a:cs typeface="Poppins" pitchFamily="34" charset="-120"/>
-              </a:rPr>
-              <a:t>, but scores 44 vs. 58 for Opus on the Artificial Analysis index</a:t>
-            </a:r>
-            <a:endParaRPr lang="en-US" sz="1150" dirty="0"/>
-          </a:p>
-        </p:txBody>
-      </p:sp>
-      <p:sp>
-        <p:nvSpPr>
-          <p:cNvPr id="28" name="TextBox 27"/>
-          <p:cNvSpPr txBox="1"/>
-          <p:nvPr/>
-        </p:nvSpPr>
-        <p:spPr>
-          <a:xfrm>
-            <a:off x="11073384" y="4599432"/>
-            <a:ext cx="658368" cy="420624"/>
-          </a:xfrm>
-          <a:prstGeom prst="rect">
-            <a:avLst/>
-          </a:prstGeom>
-          <a:noFill/>
-          <a:ln/>
-        </p:spPr>
-        <p:txBody>
-          <a:bodyPr wrap="square" lIns="0" tIns="0" rIns="0" bIns="0" rtlCol="0" anchor="t"/>
-          <a:lstStyle/>
-          <a:p>
-            <a:pPr algn="ctr" indent="0" marL="0">
-              <a:buNone/>
-            </a:pPr>
-            <a:r>
-              <a:rPr lang="en-US" sz="2400" dirty="0">
-                <a:solidFill>
-                  <a:srgbClr val="FFFFFF"/>
-                </a:solidFill>
-                <a:latin typeface="Poppins" pitchFamily="34" charset="0"/>
-                <a:ea typeface="Poppins" pitchFamily="34" charset="-122"/>
-                <a:cs typeface="Poppins" pitchFamily="34" charset="-120"/>
-              </a:rPr>
-              <a:t>03</a:t>
-            </a:r>
-            <a:endParaRPr lang="en-US" sz="2400" dirty="0"/>
-          </a:p>
-        </p:txBody>
-      </p:sp>
-      <p:pic>
-        <p:nvPicPr>
-          <p:cNvPr id="29" name="Image 9" descr="preencoded.png">    </p:cNvPr>
-          <p:cNvPicPr>
-            <a:picLocks noChangeAspect="1"/>
-          </p:cNvPicPr>
-          <p:nvPr/>
-        </p:nvPicPr>
-        <p:blipFill>
-          <a:blip r:embed="rId10"/>
-          <a:stretch>
-            <a:fillRect/>
-          </a:stretch>
-        </p:blipFill>
-        <p:spPr>
-          <a:xfrm>
-            <a:off x="320040" y="5184648"/>
-            <a:ext cx="11612880" cy="1069848"/>
-          </a:xfrm>
-          <a:prstGeom prst="rect">
-            <a:avLst/>
-          </a:prstGeom>
-        </p:spPr>
-      </p:pic>
-      <p:sp>
-        <p:nvSpPr>
-          <p:cNvPr id="30" name="TextBox 29"/>
-          <p:cNvSpPr txBox="1"/>
-          <p:nvPr/>
-        </p:nvSpPr>
-        <p:spPr>
-          <a:xfrm>
-            <a:off x="822960" y="5047488"/>
-            <a:ext cx="2331720" cy="365760"/>
-          </a:xfrm>
-          <a:prstGeom prst="rect">
-            <a:avLst/>
-          </a:prstGeom>
-          <a:noFill/>
-          <a:ln/>
-        </p:spPr>
-        <p:txBody>
-          <a:bodyPr wrap="square" lIns="0" tIns="0" rIns="0" bIns="0" rtlCol="0" anchor="ctr"/>
-          <a:lstStyle/>
-          <a:p>
-            <a:pPr algn="ctr" indent="0" marL="0">
-              <a:buNone/>
-            </a:pPr>
-            <a:r>
-              <a:rPr lang="en-US" sz="1600" dirty="0">
-                <a:solidFill>
-                  <a:srgbClr val="FFFFFF"/>
-                </a:solidFill>
-                <a:latin typeface="Poppins" pitchFamily="34" charset="0"/>
-                <a:ea typeface="Poppins" pitchFamily="34" charset="-122"/>
-                <a:cs typeface="Poppins" pitchFamily="34" charset="-120"/>
-              </a:rPr>
-              <a:t>Key Takeaways</a:t>
-            </a:r>
-            <a:endParaRPr lang="en-US" sz="1600" dirty="0"/>
-          </a:p>
-        </p:txBody>
-      </p:sp>
-      <p:sp>
-        <p:nvSpPr>
-          <p:cNvPr id="31" name="TextBox 30"/>
-          <p:cNvSpPr txBox="1"/>
-          <p:nvPr/>
-        </p:nvSpPr>
-        <p:spPr>
-          <a:xfrm>
-            <a:off x="640080" y="5413248"/>
-            <a:ext cx="10908792" cy="658368"/>
-          </a:xfrm>
-          <a:prstGeom prst="rect">
-            <a:avLst/>
-          </a:prstGeom>
-          <a:noFill/>
-          <a:ln/>
-        </p:spPr>
-        <p:txBody>
-          <a:bodyPr wrap="square" lIns="0" tIns="0" rIns="0" bIns="0" rtlCol="0" anchor="ctr"/>
           <a:lstStyle/>
           <a:p>
             <a:pPr marL="190500" indent="-190500">
@@ -2231,9 +2231,9 @@
               <a:buChar char="•"/>
             </a:pPr>
             <a:r>
-              <a:rPr lang="en-US" sz="1200" dirty="0">
-                <a:solidFill>
-                  <a:srgbClr val="5DAAFF"/>
+              <a:rPr lang="en-US" sz="1250" dirty="0">
+                <a:solidFill>
+                  <a:srgbClr val="6FD6FF"/>
                 </a:solidFill>
                 <a:latin typeface="Poppins" pitchFamily="34" charset="0"/>
                 <a:ea typeface="Poppins" pitchFamily="34" charset="-122"/>
@@ -2242,7 +2242,7 @@
               <a:t>Opus 5.5</a:t>
             </a:r>
             <a:r>
-              <a:rPr lang="en-US" sz="1200" dirty="0">
+              <a:rPr lang="en-US" sz="1250" dirty="0">
                 <a:solidFill>
                   <a:srgbClr val="FFFFFF"/>
                 </a:solidFill>
@@ -2253,9 +2253,9 @@
               <a:t> should be the default for most work, given its lead on coding and knowledge-work benchmarks and its </a:t>
             </a:r>
             <a:r>
-              <a:rPr lang="en-US" sz="1200" dirty="0">
-                <a:solidFill>
-                  <a:srgbClr val="5DAAFF"/>
+              <a:rPr lang="en-US" sz="1250" dirty="0">
+                <a:solidFill>
+                  <a:srgbClr val="6FD6FF"/>
                 </a:solidFill>
                 <a:latin typeface="Poppins" pitchFamily="34" charset="0"/>
                 <a:ea typeface="Poppins" pitchFamily="34" charset="-122"/>
@@ -2263,7 +2263,7 @@
               </a:rPr>
               <a:t>lower price than Astra</a:t>
             </a:r>
-            <a:endParaRPr lang="en-US" sz="1200" dirty="0"/>
+            <a:endParaRPr lang="en-US" sz="1250" dirty="0"/>
           </a:p>
           <a:p>
             <a:pPr marL="190500" indent="-190500">
@@ -2277,9 +2277,9 @@
               <a:buChar char="•"/>
             </a:pPr>
             <a:r>
-              <a:rPr lang="en-US" sz="1200" dirty="0">
-                <a:solidFill>
-                  <a:srgbClr val="5DAAFF"/>
+              <a:rPr lang="en-US" sz="1250" dirty="0">
+                <a:solidFill>
+                  <a:srgbClr val="6FD6FF"/>
                 </a:solidFill>
                 <a:latin typeface="Poppins" pitchFamily="34" charset="0"/>
                 <a:ea typeface="Poppins" pitchFamily="34" charset="-122"/>
@@ -2288,7 +2288,7 @@
               <a:t>Astra</a:t>
             </a:r>
             <a:r>
-              <a:rPr lang="en-US" sz="1200" dirty="0">
+              <a:rPr lang="en-US" sz="1250" dirty="0">
                 <a:solidFill>
                   <a:srgbClr val="FFFFFF"/>
                 </a:solidFill>
@@ -2299,9 +2299,9 @@
               <a:t> is worth the premium for specialist work, while </a:t>
             </a:r>
             <a:r>
-              <a:rPr lang="en-US" sz="1200" dirty="0">
-                <a:solidFill>
-                  <a:srgbClr val="5DAAFF"/>
+              <a:rPr lang="en-US" sz="1250" dirty="0">
+                <a:solidFill>
+                  <a:srgbClr val="6FD6FF"/>
                 </a:solidFill>
                 <a:latin typeface="Poppins" pitchFamily="34" charset="0"/>
                 <a:ea typeface="Poppins" pitchFamily="34" charset="-122"/>
@@ -2310,7 +2310,7 @@
               <a:t>Kimi K3</a:t>
             </a:r>
             <a:r>
-              <a:rPr lang="en-US" sz="1200" dirty="0">
+              <a:rPr lang="en-US" sz="1250" dirty="0">
                 <a:solidFill>
                   <a:srgbClr val="FFFFFF"/>
                 </a:solidFill>
@@ -2320,7 +2320,7 @@
               </a:rPr>
               <a:t> fits teams that need to keep data in-house or cut costs</a:t>
             </a:r>
-            <a:endParaRPr lang="en-US" sz="1200" dirty="0"/>
+            <a:endParaRPr lang="en-US" sz="1250" dirty="0"/>
           </a:p>
         </p:txBody>
       </p:sp>
@@ -2351,7 +2351,7 @@
             <a:r>
               <a:rPr lang="en-US" sz="850" dirty="0">
                 <a:solidFill>
-                  <a:srgbClr val="7F8FA6"/>
+                  <a:srgbClr val="8C95BD"/>
                 </a:solidFill>
                 <a:latin typeface="Poppins" pitchFamily="34" charset="0"/>
                 <a:ea typeface="Poppins" pitchFamily="34" charset="-122"/>

--- a/ai-model-comparison/AI-Model-Comparison-Sep-2026.pptx
+++ b/ai-model-comparison/AI-Model-Comparison-Sep-2026.pptx
@@ -2113,12 +2113,12 @@
         </p:nvSpPr>
         <p:spPr>
           <a:xfrm>
-            <a:off x="365760" y="5029200"/>
-            <a:ext cx="11457432" cy="1207008"/>
+            <a:off x="365760" y="5138928"/>
+            <a:ext cx="11457432" cy="1261872"/>
           </a:xfrm>
           <a:prstGeom prst="roundRect">
             <a:avLst>
-              <a:gd name="adj" fmla="val 13636"/>
+              <a:gd name="adj" fmla="val 13043"/>
             </a:avLst>
           </a:prstGeom>
           <a:solidFill>
@@ -2152,8 +2152,8 @@
         </p:blipFill>
         <p:spPr>
           <a:xfrm>
-            <a:off x="329184" y="4992624"/>
-            <a:ext cx="11530584" cy="1280160"/>
+            <a:off x="329184" y="5102352"/>
+            <a:ext cx="11530584" cy="1335024"/>
           </a:xfrm>
           <a:prstGeom prst="rect">
             <a:avLst/>
@@ -2168,7 +2168,7 @@
         </p:nvSpPr>
         <p:spPr>
           <a:xfrm>
-            <a:off x="640080" y="5212080"/>
+            <a:off x="640080" y="5321808"/>
             <a:ext cx="3657600" cy="274320"/>
           </a:xfrm>
           <a:prstGeom prst="rect">
@@ -2207,8 +2207,8 @@
         </p:nvSpPr>
         <p:spPr>
           <a:xfrm>
-            <a:off x="640080" y="5532120"/>
-            <a:ext cx="10908792" cy="566928"/>
+            <a:off x="640080" y="5641848"/>
+            <a:ext cx="10908792" cy="621792"/>
           </a:xfrm>
           <a:prstGeom prst="rect">
             <a:avLst/>
@@ -2321,45 +2321,6 @@
               <a:t> fits teams that need to keep data in-house or cut costs</a:t>
             </a:r>
             <a:endParaRPr lang="en-US" sz="1250" dirty="0"/>
-          </a:p>
-        </p:txBody>
-      </p:sp>
-      <p:sp>
-        <p:nvSpPr>
-          <p:cNvPr id="32" name="TextBox 31"/>
-          <p:cNvSpPr txBox="1"/>
-          <p:nvPr/>
-        </p:nvSpPr>
-        <p:spPr>
-          <a:xfrm>
-            <a:off x="365760" y="6428232"/>
-            <a:ext cx="11430000" cy="201168"/>
-          </a:xfrm>
-          <a:prstGeom prst="rect">
-            <a:avLst/>
-          </a:prstGeom>
-          <a:noFill/>
-          <a:ln/>
-        </p:spPr>
-        <p:txBody>
-          <a:bodyPr wrap="square" lIns="0" tIns="0" rIns="0" bIns="0" rtlCol="0" anchor="t"/>
-          <a:lstStyle/>
-          <a:p>
-            <a:pPr indent="0" marL="0">
-              <a:buNone/>
-            </a:pPr>
-            <a:r>
-              <a:rPr lang="en-US" sz="850" dirty="0">
-                <a:solidFill>
-                  <a:srgbClr val="8C95BD"/>
-                </a:solidFill>
-                <a:latin typeface="Poppins" pitchFamily="34" charset="0"/>
-                <a:ea typeface="Poppins" pitchFamily="34" charset="-122"/>
-                <a:cs typeface="Poppins" pitchFamily="34" charset="-120"/>
-              </a:rPr>
-              <a:t>Sources: Anthropic, OpenAI, Moonshot AI, Artificial Analysis (Sep 2026). Opus vs. Astra benchmarks as reported by Anthropic.</a:t>
-            </a:r>
-            <a:endParaRPr lang="en-US" sz="850" dirty="0"/>
           </a:p>
         </p:txBody>
       </p:sp>
